--- a/Тема 2/ДВ_3_ИИ_Практика_2-1.pptx
+++ b/Тема 2/ДВ_3_ИИ_Практика_2-1.pptx
@@ -5,31 +5,34 @@
     <p:sldMasterId id="2147483648" r:id="rId1"/>
   </p:sldMasterIdLst>
   <p:notesMasterIdLst>
-    <p:notesMasterId r:id="rId24"/>
+    <p:notesMasterId r:id="rId27"/>
   </p:notesMasterIdLst>
   <p:sldIdLst>
     <p:sldId id="256" r:id="rId2"/>
     <p:sldId id="257" r:id="rId3"/>
     <p:sldId id="258" r:id="rId4"/>
     <p:sldId id="268" r:id="rId5"/>
-    <p:sldId id="279" r:id="rId6"/>
-    <p:sldId id="270" r:id="rId7"/>
-    <p:sldId id="285" r:id="rId8"/>
-    <p:sldId id="286" r:id="rId9"/>
-    <p:sldId id="287" r:id="rId10"/>
-    <p:sldId id="274" r:id="rId11"/>
-    <p:sldId id="303" r:id="rId12"/>
-    <p:sldId id="288" r:id="rId13"/>
-    <p:sldId id="304" r:id="rId14"/>
-    <p:sldId id="289" r:id="rId15"/>
-    <p:sldId id="290" r:id="rId16"/>
-    <p:sldId id="291" r:id="rId17"/>
-    <p:sldId id="305" r:id="rId18"/>
-    <p:sldId id="307" r:id="rId19"/>
-    <p:sldId id="308" r:id="rId20"/>
-    <p:sldId id="309" r:id="rId21"/>
-    <p:sldId id="306" r:id="rId22"/>
-    <p:sldId id="266" r:id="rId23"/>
+    <p:sldId id="310" r:id="rId6"/>
+    <p:sldId id="311" r:id="rId7"/>
+    <p:sldId id="312" r:id="rId8"/>
+    <p:sldId id="279" r:id="rId9"/>
+    <p:sldId id="270" r:id="rId10"/>
+    <p:sldId id="285" r:id="rId11"/>
+    <p:sldId id="286" r:id="rId12"/>
+    <p:sldId id="287" r:id="rId13"/>
+    <p:sldId id="274" r:id="rId14"/>
+    <p:sldId id="303" r:id="rId15"/>
+    <p:sldId id="288" r:id="rId16"/>
+    <p:sldId id="304" r:id="rId17"/>
+    <p:sldId id="289" r:id="rId18"/>
+    <p:sldId id="290" r:id="rId19"/>
+    <p:sldId id="291" r:id="rId20"/>
+    <p:sldId id="305" r:id="rId21"/>
+    <p:sldId id="307" r:id="rId22"/>
+    <p:sldId id="308" r:id="rId23"/>
+    <p:sldId id="309" r:id="rId24"/>
+    <p:sldId id="306" r:id="rId25"/>
+    <p:sldId id="266" r:id="rId26"/>
   </p:sldIdLst>
   <p:sldSz cx="12192000" cy="6858000"/>
   <p:notesSz cx="6858000" cy="9144000"/>
@@ -651,7 +654,7 @@
     </p:spTree>
     <p:extLst>
       <p:ext uri="{BB962C8B-B14F-4D97-AF65-F5344CB8AC3E}">
-        <p14:creationId xmlns:p14="http://schemas.microsoft.com/office/powerpoint/2010/main" val="2119647598"/>
+        <p14:creationId xmlns:p14="http://schemas.microsoft.com/office/powerpoint/2010/main" val="1881391569"/>
       </p:ext>
     </p:extLst>
   </p:cSld>
@@ -743,7 +746,7 @@
     </p:spTree>
     <p:extLst>
       <p:ext uri="{BB962C8B-B14F-4D97-AF65-F5344CB8AC3E}">
-        <p14:creationId xmlns:p14="http://schemas.microsoft.com/office/powerpoint/2010/main" val="82786479"/>
+        <p14:creationId xmlns:p14="http://schemas.microsoft.com/office/powerpoint/2010/main" val="1083870422"/>
       </p:ext>
     </p:extLst>
   </p:cSld>
@@ -835,7 +838,7 @@
     </p:spTree>
     <p:extLst>
       <p:ext uri="{BB962C8B-B14F-4D97-AF65-F5344CB8AC3E}">
-        <p14:creationId xmlns:p14="http://schemas.microsoft.com/office/powerpoint/2010/main" val="2561693879"/>
+        <p14:creationId xmlns:p14="http://schemas.microsoft.com/office/powerpoint/2010/main" val="2237943848"/>
       </p:ext>
     </p:extLst>
   </p:cSld>
@@ -927,7 +930,7 @@
     </p:spTree>
     <p:extLst>
       <p:ext uri="{BB962C8B-B14F-4D97-AF65-F5344CB8AC3E}">
-        <p14:creationId xmlns:p14="http://schemas.microsoft.com/office/powerpoint/2010/main" val="152753181"/>
+        <p14:creationId xmlns:p14="http://schemas.microsoft.com/office/powerpoint/2010/main" val="2119647598"/>
       </p:ext>
     </p:extLst>
   </p:cSld>
@@ -1019,7 +1022,7 @@
     </p:spTree>
     <p:extLst>
       <p:ext uri="{BB962C8B-B14F-4D97-AF65-F5344CB8AC3E}">
-        <p14:creationId xmlns:p14="http://schemas.microsoft.com/office/powerpoint/2010/main" val="1993044843"/>
+        <p14:creationId xmlns:p14="http://schemas.microsoft.com/office/powerpoint/2010/main" val="82786479"/>
       </p:ext>
     </p:extLst>
   </p:cSld>
@@ -1111,7 +1114,7 @@
     </p:spTree>
     <p:extLst>
       <p:ext uri="{BB962C8B-B14F-4D97-AF65-F5344CB8AC3E}">
-        <p14:creationId xmlns:p14="http://schemas.microsoft.com/office/powerpoint/2010/main" val="4250647210"/>
+        <p14:creationId xmlns:p14="http://schemas.microsoft.com/office/powerpoint/2010/main" val="2561693879"/>
       </p:ext>
     </p:extLst>
   </p:cSld>
@@ -1203,7 +1206,7 @@
     </p:spTree>
     <p:extLst>
       <p:ext uri="{BB962C8B-B14F-4D97-AF65-F5344CB8AC3E}">
-        <p14:creationId xmlns:p14="http://schemas.microsoft.com/office/powerpoint/2010/main" val="3094371997"/>
+        <p14:creationId xmlns:p14="http://schemas.microsoft.com/office/powerpoint/2010/main" val="152753181"/>
       </p:ext>
     </p:extLst>
   </p:cSld>
@@ -1295,7 +1298,7 @@
     </p:spTree>
     <p:extLst>
       <p:ext uri="{BB962C8B-B14F-4D97-AF65-F5344CB8AC3E}">
-        <p14:creationId xmlns:p14="http://schemas.microsoft.com/office/powerpoint/2010/main" val="2924661237"/>
+        <p14:creationId xmlns:p14="http://schemas.microsoft.com/office/powerpoint/2010/main" val="1993044843"/>
       </p:ext>
     </p:extLst>
   </p:cSld>
@@ -1387,7 +1390,7 @@
     </p:spTree>
     <p:extLst>
       <p:ext uri="{BB962C8B-B14F-4D97-AF65-F5344CB8AC3E}">
-        <p14:creationId xmlns:p14="http://schemas.microsoft.com/office/powerpoint/2010/main" val="3055692753"/>
+        <p14:creationId xmlns:p14="http://schemas.microsoft.com/office/powerpoint/2010/main" val="4250647210"/>
       </p:ext>
     </p:extLst>
   </p:cSld>
@@ -1479,7 +1482,7 @@
     </p:spTree>
     <p:extLst>
       <p:ext uri="{BB962C8B-B14F-4D97-AF65-F5344CB8AC3E}">
-        <p14:creationId xmlns:p14="http://schemas.microsoft.com/office/powerpoint/2010/main" val="1904689911"/>
+        <p14:creationId xmlns:p14="http://schemas.microsoft.com/office/powerpoint/2010/main" val="3094371997"/>
       </p:ext>
     </p:extLst>
   </p:cSld>
@@ -1663,7 +1666,7 @@
     </p:spTree>
     <p:extLst>
       <p:ext uri="{BB962C8B-B14F-4D97-AF65-F5344CB8AC3E}">
-        <p14:creationId xmlns:p14="http://schemas.microsoft.com/office/powerpoint/2010/main" val="2168178936"/>
+        <p14:creationId xmlns:p14="http://schemas.microsoft.com/office/powerpoint/2010/main" val="2924661237"/>
       </p:ext>
     </p:extLst>
   </p:cSld>
@@ -1755,7 +1758,7 @@
     </p:spTree>
     <p:extLst>
       <p:ext uri="{BB962C8B-B14F-4D97-AF65-F5344CB8AC3E}">
-        <p14:creationId xmlns:p14="http://schemas.microsoft.com/office/powerpoint/2010/main" val="1371657856"/>
+        <p14:creationId xmlns:p14="http://schemas.microsoft.com/office/powerpoint/2010/main" val="3055692753"/>
       </p:ext>
     </p:extLst>
   </p:cSld>
@@ -1809,7 +1812,14 @@
           <a:bodyPr/>
           <a:lstStyle/>
           <a:p>
-            <a:endParaRPr lang="ru-RU" dirty="0"/>
+            <a:endParaRPr lang="ru-RU" sz="1200" b="0" i="0" kern="1200" dirty="0">
+              <a:solidFill>
+                <a:schemeClr val="tx1"/>
+              </a:solidFill>
+              <a:latin typeface="+mn-lt"/>
+              <a:ea typeface="+mn-ea"/>
+              <a:cs typeface="+mn-cs"/>
+            </a:endParaRPr>
           </a:p>
         </p:txBody>
       </p:sp>
@@ -1830,7 +1840,276 @@
           <a:p>
             <a:fld id="{67A570D4-9143-4E91-8959-8D963457B763}" type="slidenum">
               <a:rPr lang="ru-RU" smtClean="0"/>
+              <a:pPr/>
               <a:t>22</a:t>
+            </a:fld>
+            <a:endParaRPr lang="ru-RU"/>
+          </a:p>
+        </p:txBody>
+      </p:sp>
+    </p:spTree>
+    <p:extLst>
+      <p:ext uri="{BB962C8B-B14F-4D97-AF65-F5344CB8AC3E}">
+        <p14:creationId xmlns:p14="http://schemas.microsoft.com/office/powerpoint/2010/main" val="1904689911"/>
+      </p:ext>
+    </p:extLst>
+  </p:cSld>
+  <p:clrMapOvr>
+    <a:masterClrMapping/>
+  </p:clrMapOvr>
+</p:notes>
+</file>
+
+<file path=ppt/notesSlides/notesSlide23.xml><?xml version="1.0" encoding="utf-8"?>
+<p:notes xmlns:a="http://schemas.openxmlformats.org/drawingml/2006/main" xmlns:r="http://schemas.openxmlformats.org/officeDocument/2006/relationships" xmlns:p="http://schemas.openxmlformats.org/presentationml/2006/main">
+  <p:cSld>
+    <p:spTree>
+      <p:nvGrpSpPr>
+        <p:cNvPr id="1" name=""/>
+        <p:cNvGrpSpPr/>
+        <p:nvPr/>
+      </p:nvGrpSpPr>
+      <p:grpSpPr>
+        <a:xfrm>
+          <a:off x="0" y="0"/>
+          <a:ext cx="0" cy="0"/>
+          <a:chOff x="0" y="0"/>
+          <a:chExt cx="0" cy="0"/>
+        </a:xfrm>
+      </p:grpSpPr>
+      <p:sp>
+        <p:nvSpPr>
+          <p:cNvPr id="2" name="Образ слайда 1"/>
+          <p:cNvSpPr>
+            <a:spLocks noGrp="1" noRot="1" noChangeAspect="1"/>
+          </p:cNvSpPr>
+          <p:nvPr>
+            <p:ph type="sldImg"/>
+          </p:nvPr>
+        </p:nvSpPr>
+        <p:spPr/>
+      </p:sp>
+      <p:sp>
+        <p:nvSpPr>
+          <p:cNvPr id="3" name="Заметки 2"/>
+          <p:cNvSpPr>
+            <a:spLocks noGrp="1"/>
+          </p:cNvSpPr>
+          <p:nvPr>
+            <p:ph type="body" idx="1"/>
+          </p:nvPr>
+        </p:nvSpPr>
+        <p:spPr/>
+        <p:txBody>
+          <a:bodyPr/>
+          <a:lstStyle/>
+          <a:p>
+            <a:endParaRPr lang="ru-RU" sz="1200" b="0" i="0" kern="1200" dirty="0">
+              <a:solidFill>
+                <a:schemeClr val="tx1"/>
+              </a:solidFill>
+              <a:latin typeface="+mn-lt"/>
+              <a:ea typeface="+mn-ea"/>
+              <a:cs typeface="+mn-cs"/>
+            </a:endParaRPr>
+          </a:p>
+        </p:txBody>
+      </p:sp>
+      <p:sp>
+        <p:nvSpPr>
+          <p:cNvPr id="4" name="Номер слайда 3"/>
+          <p:cNvSpPr>
+            <a:spLocks noGrp="1"/>
+          </p:cNvSpPr>
+          <p:nvPr>
+            <p:ph type="sldNum" sz="quarter" idx="10"/>
+          </p:nvPr>
+        </p:nvSpPr>
+        <p:spPr/>
+        <p:txBody>
+          <a:bodyPr/>
+          <a:lstStyle/>
+          <a:p>
+            <a:fld id="{67A570D4-9143-4E91-8959-8D963457B763}" type="slidenum">
+              <a:rPr lang="ru-RU" smtClean="0"/>
+              <a:pPr/>
+              <a:t>23</a:t>
+            </a:fld>
+            <a:endParaRPr lang="ru-RU"/>
+          </a:p>
+        </p:txBody>
+      </p:sp>
+    </p:spTree>
+    <p:extLst>
+      <p:ext uri="{BB962C8B-B14F-4D97-AF65-F5344CB8AC3E}">
+        <p14:creationId xmlns:p14="http://schemas.microsoft.com/office/powerpoint/2010/main" val="2168178936"/>
+      </p:ext>
+    </p:extLst>
+  </p:cSld>
+  <p:clrMapOvr>
+    <a:masterClrMapping/>
+  </p:clrMapOvr>
+</p:notes>
+</file>
+
+<file path=ppt/notesSlides/notesSlide24.xml><?xml version="1.0" encoding="utf-8"?>
+<p:notes xmlns:a="http://schemas.openxmlformats.org/drawingml/2006/main" xmlns:r="http://schemas.openxmlformats.org/officeDocument/2006/relationships" xmlns:p="http://schemas.openxmlformats.org/presentationml/2006/main">
+  <p:cSld>
+    <p:spTree>
+      <p:nvGrpSpPr>
+        <p:cNvPr id="1" name=""/>
+        <p:cNvGrpSpPr/>
+        <p:nvPr/>
+      </p:nvGrpSpPr>
+      <p:grpSpPr>
+        <a:xfrm>
+          <a:off x="0" y="0"/>
+          <a:ext cx="0" cy="0"/>
+          <a:chOff x="0" y="0"/>
+          <a:chExt cx="0" cy="0"/>
+        </a:xfrm>
+      </p:grpSpPr>
+      <p:sp>
+        <p:nvSpPr>
+          <p:cNvPr id="2" name="Образ слайда 1"/>
+          <p:cNvSpPr>
+            <a:spLocks noGrp="1" noRot="1" noChangeAspect="1"/>
+          </p:cNvSpPr>
+          <p:nvPr>
+            <p:ph type="sldImg"/>
+          </p:nvPr>
+        </p:nvSpPr>
+        <p:spPr/>
+      </p:sp>
+      <p:sp>
+        <p:nvSpPr>
+          <p:cNvPr id="3" name="Заметки 2"/>
+          <p:cNvSpPr>
+            <a:spLocks noGrp="1"/>
+          </p:cNvSpPr>
+          <p:nvPr>
+            <p:ph type="body" idx="1"/>
+          </p:nvPr>
+        </p:nvSpPr>
+        <p:spPr/>
+        <p:txBody>
+          <a:bodyPr/>
+          <a:lstStyle/>
+          <a:p>
+            <a:endParaRPr lang="ru-RU" sz="1200" b="0" i="0" kern="1200" dirty="0">
+              <a:solidFill>
+                <a:schemeClr val="tx1"/>
+              </a:solidFill>
+              <a:latin typeface="+mn-lt"/>
+              <a:ea typeface="+mn-ea"/>
+              <a:cs typeface="+mn-cs"/>
+            </a:endParaRPr>
+          </a:p>
+        </p:txBody>
+      </p:sp>
+      <p:sp>
+        <p:nvSpPr>
+          <p:cNvPr id="4" name="Номер слайда 3"/>
+          <p:cNvSpPr>
+            <a:spLocks noGrp="1"/>
+          </p:cNvSpPr>
+          <p:nvPr>
+            <p:ph type="sldNum" sz="quarter" idx="10"/>
+          </p:nvPr>
+        </p:nvSpPr>
+        <p:spPr/>
+        <p:txBody>
+          <a:bodyPr/>
+          <a:lstStyle/>
+          <a:p>
+            <a:fld id="{67A570D4-9143-4E91-8959-8D963457B763}" type="slidenum">
+              <a:rPr lang="ru-RU" smtClean="0"/>
+              <a:pPr/>
+              <a:t>24</a:t>
+            </a:fld>
+            <a:endParaRPr lang="ru-RU"/>
+          </a:p>
+        </p:txBody>
+      </p:sp>
+    </p:spTree>
+    <p:extLst>
+      <p:ext uri="{BB962C8B-B14F-4D97-AF65-F5344CB8AC3E}">
+        <p14:creationId xmlns:p14="http://schemas.microsoft.com/office/powerpoint/2010/main" val="1371657856"/>
+      </p:ext>
+    </p:extLst>
+  </p:cSld>
+  <p:clrMapOvr>
+    <a:masterClrMapping/>
+  </p:clrMapOvr>
+</p:notes>
+</file>
+
+<file path=ppt/notesSlides/notesSlide25.xml><?xml version="1.0" encoding="utf-8"?>
+<p:notes xmlns:a="http://schemas.openxmlformats.org/drawingml/2006/main" xmlns:r="http://schemas.openxmlformats.org/officeDocument/2006/relationships" xmlns:p="http://schemas.openxmlformats.org/presentationml/2006/main">
+  <p:cSld>
+    <p:spTree>
+      <p:nvGrpSpPr>
+        <p:cNvPr id="1" name=""/>
+        <p:cNvGrpSpPr/>
+        <p:nvPr/>
+      </p:nvGrpSpPr>
+      <p:grpSpPr>
+        <a:xfrm>
+          <a:off x="0" y="0"/>
+          <a:ext cx="0" cy="0"/>
+          <a:chOff x="0" y="0"/>
+          <a:chExt cx="0" cy="0"/>
+        </a:xfrm>
+      </p:grpSpPr>
+      <p:sp>
+        <p:nvSpPr>
+          <p:cNvPr id="2" name="Образ слайда 1"/>
+          <p:cNvSpPr>
+            <a:spLocks noGrp="1" noRot="1" noChangeAspect="1"/>
+          </p:cNvSpPr>
+          <p:nvPr>
+            <p:ph type="sldImg"/>
+          </p:nvPr>
+        </p:nvSpPr>
+        <p:spPr/>
+      </p:sp>
+      <p:sp>
+        <p:nvSpPr>
+          <p:cNvPr id="3" name="Заметки 2"/>
+          <p:cNvSpPr>
+            <a:spLocks noGrp="1"/>
+          </p:cNvSpPr>
+          <p:nvPr>
+            <p:ph type="body" idx="1"/>
+          </p:nvPr>
+        </p:nvSpPr>
+        <p:spPr/>
+        <p:txBody>
+          <a:bodyPr/>
+          <a:lstStyle/>
+          <a:p>
+            <a:endParaRPr lang="ru-RU" dirty="0"/>
+          </a:p>
+        </p:txBody>
+      </p:sp>
+      <p:sp>
+        <p:nvSpPr>
+          <p:cNvPr id="4" name="Номер слайда 3"/>
+          <p:cNvSpPr>
+            <a:spLocks noGrp="1"/>
+          </p:cNvSpPr>
+          <p:nvPr>
+            <p:ph type="sldNum" sz="quarter" idx="10"/>
+          </p:nvPr>
+        </p:nvSpPr>
+        <p:spPr/>
+        <p:txBody>
+          <a:bodyPr/>
+          <a:lstStyle/>
+          <a:p>
+            <a:fld id="{67A570D4-9143-4E91-8959-8D963457B763}" type="slidenum">
+              <a:rPr lang="ru-RU" smtClean="0"/>
+              <a:t>25</a:t>
             </a:fld>
             <a:endParaRPr lang="ru-RU"/>
           </a:p>
@@ -2115,7 +2394,7 @@
     </p:spTree>
     <p:extLst>
       <p:ext uri="{BB962C8B-B14F-4D97-AF65-F5344CB8AC3E}">
-        <p14:creationId xmlns:p14="http://schemas.microsoft.com/office/powerpoint/2010/main" val="726034630"/>
+        <p14:creationId xmlns:p14="http://schemas.microsoft.com/office/powerpoint/2010/main" val="4047239916"/>
       </p:ext>
     </p:extLst>
   </p:cSld>
@@ -2207,7 +2486,7 @@
     </p:spTree>
     <p:extLst>
       <p:ext uri="{BB962C8B-B14F-4D97-AF65-F5344CB8AC3E}">
-        <p14:creationId xmlns:p14="http://schemas.microsoft.com/office/powerpoint/2010/main" val="1049424078"/>
+        <p14:creationId xmlns:p14="http://schemas.microsoft.com/office/powerpoint/2010/main" val="1722646038"/>
       </p:ext>
     </p:extLst>
   </p:cSld>
@@ -2299,7 +2578,7 @@
     </p:spTree>
     <p:extLst>
       <p:ext uri="{BB962C8B-B14F-4D97-AF65-F5344CB8AC3E}">
-        <p14:creationId xmlns:p14="http://schemas.microsoft.com/office/powerpoint/2010/main" val="1881391569"/>
+        <p14:creationId xmlns:p14="http://schemas.microsoft.com/office/powerpoint/2010/main" val="2603998272"/>
       </p:ext>
     </p:extLst>
   </p:cSld>
@@ -2391,7 +2670,7 @@
     </p:spTree>
     <p:extLst>
       <p:ext uri="{BB962C8B-B14F-4D97-AF65-F5344CB8AC3E}">
-        <p14:creationId xmlns:p14="http://schemas.microsoft.com/office/powerpoint/2010/main" val="1083870422"/>
+        <p14:creationId xmlns:p14="http://schemas.microsoft.com/office/powerpoint/2010/main" val="726034630"/>
       </p:ext>
     </p:extLst>
   </p:cSld>
@@ -2483,7 +2762,7 @@
     </p:spTree>
     <p:extLst>
       <p:ext uri="{BB962C8B-B14F-4D97-AF65-F5344CB8AC3E}">
-        <p14:creationId xmlns:p14="http://schemas.microsoft.com/office/powerpoint/2010/main" val="2237943848"/>
+        <p14:creationId xmlns:p14="http://schemas.microsoft.com/office/powerpoint/2010/main" val="1049424078"/>
       </p:ext>
     </p:extLst>
   </p:cSld>
@@ -5580,6 +5859,2435 @@
               </a:rPr>
               <a:pPr/>
               <a:t>10</a:t>
+            </a:fld>
+            <a:endParaRPr lang="ru-RU" dirty="0">
+              <a:latin typeface="PT Sans" panose="020B0503020203020204" pitchFamily="34" charset="0"/>
+            </a:endParaRPr>
+          </a:p>
+        </p:txBody>
+      </p:sp>
+      <p:grpSp>
+        <p:nvGrpSpPr>
+          <p:cNvPr id="9" name="Группа 8">
+            <a:extLst>
+              <a:ext uri="{FF2B5EF4-FFF2-40B4-BE49-F238E27FC236}">
+                <a16:creationId xmlns:a16="http://schemas.microsoft.com/office/drawing/2014/main" id="{D7342440-FCEE-2E4F-950F-6FE7857B3EB5}"/>
+              </a:ext>
+            </a:extLst>
+          </p:cNvPr>
+          <p:cNvGrpSpPr/>
+          <p:nvPr/>
+        </p:nvGrpSpPr>
+        <p:grpSpPr>
+          <a:xfrm>
+            <a:off x="0" y="-4966"/>
+            <a:ext cx="12192000" cy="1035565"/>
+            <a:chOff x="0" y="1924"/>
+            <a:chExt cx="9144000" cy="832664"/>
+          </a:xfrm>
+        </p:grpSpPr>
+        <p:sp>
+          <p:nvSpPr>
+            <p:cNvPr id="10" name="Google Shape;133;p5">
+              <a:extLst>
+                <a:ext uri="{FF2B5EF4-FFF2-40B4-BE49-F238E27FC236}">
+                  <a16:creationId xmlns:a16="http://schemas.microsoft.com/office/drawing/2014/main" id="{E1FF157E-1AAE-A345-AC22-C4FE991023F3}"/>
+                </a:ext>
+              </a:extLst>
+            </p:cNvPr>
+            <p:cNvSpPr/>
+            <p:nvPr/>
+          </p:nvSpPr>
+          <p:spPr>
+            <a:xfrm>
+              <a:off x="0" y="1924"/>
+              <a:ext cx="9144000" cy="832664"/>
+            </a:xfrm>
+            <a:prstGeom prst="rect">
+              <a:avLst/>
+            </a:prstGeom>
+            <a:gradFill>
+              <a:gsLst>
+                <a:gs pos="0">
+                  <a:srgbClr val="003061"/>
+                </a:gs>
+                <a:gs pos="50000">
+                  <a:srgbClr val="00468D"/>
+                </a:gs>
+                <a:gs pos="100000">
+                  <a:srgbClr val="0054AA"/>
+                </a:gs>
+              </a:gsLst>
+              <a:lin ang="5400000" scaled="0"/>
+            </a:gradFill>
+            <a:ln>
+              <a:noFill/>
+            </a:ln>
+          </p:spPr>
+          <p:txBody>
+            <a:bodyPr spcFirstLastPara="1" wrap="square" lIns="91425" tIns="45700" rIns="91425" bIns="45700" anchor="ctr" anchorCtr="0">
+              <a:noAutofit/>
+            </a:bodyPr>
+            <a:lstStyle/>
+            <a:p>
+              <a:pPr marL="0" marR="0" lvl="0" indent="0" algn="ctr" rtl="0">
+                <a:spcBef>
+                  <a:spcPts val="0"/>
+                </a:spcBef>
+                <a:spcAft>
+                  <a:spcPts val="0"/>
+                </a:spcAft>
+                <a:buNone/>
+              </a:pPr>
+              <a:endParaRPr sz="1800" dirty="0">
+                <a:solidFill>
+                  <a:schemeClr val="lt1"/>
+                </a:solidFill>
+                <a:latin typeface="PT Sans" panose="020B0503020203020204" pitchFamily="34" charset="0"/>
+                <a:ea typeface="Calibri"/>
+                <a:cs typeface="Calibri"/>
+                <a:sym typeface="Calibri"/>
+              </a:endParaRPr>
+            </a:p>
+          </p:txBody>
+        </p:sp>
+        <p:pic>
+          <p:nvPicPr>
+            <p:cNvPr id="11" name="Google Shape;134;p5" descr="C:\Users\MSShafigullin\Desktop\2020\Презентация КФУ\kfu_logo_circle_rus.png">
+              <a:extLst>
+                <a:ext uri="{FF2B5EF4-FFF2-40B4-BE49-F238E27FC236}">
+                  <a16:creationId xmlns:a16="http://schemas.microsoft.com/office/drawing/2014/main" id="{25CDED6D-DB62-6B41-9BFC-DFBDD55047A7}"/>
+                </a:ext>
+              </a:extLst>
+            </p:cNvPr>
+            <p:cNvPicPr preferRelativeResize="0"/>
+            <p:nvPr/>
+          </p:nvPicPr>
+          <p:blipFill rotWithShape="1">
+            <a:blip r:embed="rId3">
+              <a:alphaModFix/>
+            </a:blip>
+            <a:srcRect/>
+            <a:stretch/>
+          </p:blipFill>
+          <p:spPr>
+            <a:xfrm>
+              <a:off x="137267" y="148256"/>
+              <a:ext cx="553050" cy="540000"/>
+            </a:xfrm>
+            <a:prstGeom prst="rect">
+              <a:avLst/>
+            </a:prstGeom>
+            <a:noFill/>
+            <a:ln>
+              <a:noFill/>
+            </a:ln>
+          </p:spPr>
+        </p:pic>
+        <p:sp>
+          <p:nvSpPr>
+            <p:cNvPr id="12" name="Google Shape;135;p5">
+              <a:extLst>
+                <a:ext uri="{FF2B5EF4-FFF2-40B4-BE49-F238E27FC236}">
+                  <a16:creationId xmlns:a16="http://schemas.microsoft.com/office/drawing/2014/main" id="{B90A0E07-9A35-E74D-859C-8109875E2889}"/>
+                </a:ext>
+              </a:extLst>
+            </p:cNvPr>
+            <p:cNvSpPr txBox="1"/>
+            <p:nvPr/>
+          </p:nvSpPr>
+          <p:spPr>
+            <a:xfrm>
+              <a:off x="835887" y="240719"/>
+              <a:ext cx="7344900" cy="321682"/>
+            </a:xfrm>
+            <a:prstGeom prst="rect">
+              <a:avLst/>
+            </a:prstGeom>
+            <a:noFill/>
+            <a:ln>
+              <a:noFill/>
+            </a:ln>
+          </p:spPr>
+          <p:txBody>
+            <a:bodyPr spcFirstLastPara="1" wrap="square" lIns="91425" tIns="45700" rIns="91425" bIns="45700" anchor="t" anchorCtr="0">
+              <a:spAutoFit/>
+            </a:bodyPr>
+            <a:lstStyle/>
+            <a:p>
+              <a:pPr lvl="0"/>
+              <a:r>
+                <a:rPr lang="ru-RU" sz="2000" dirty="0">
+                  <a:solidFill>
+                    <a:schemeClr val="lt1"/>
+                  </a:solidFill>
+                  <a:latin typeface="PT Sans" panose="020B0503020203020204" pitchFamily="34" charset="0"/>
+                  <a:ea typeface="PT Sans"/>
+                  <a:cs typeface="PT Sans"/>
+                  <a:sym typeface="PT Sans"/>
+                </a:rPr>
+                <a:t>Разбиение на </a:t>
+              </a:r>
+              <a:r>
+                <a:rPr lang="en-US" sz="2000" dirty="0">
+                  <a:solidFill>
+                    <a:schemeClr val="lt1"/>
+                  </a:solidFill>
+                  <a:latin typeface="PT Sans" panose="020B0503020203020204" pitchFamily="34" charset="0"/>
+                  <a:ea typeface="PT Sans"/>
+                  <a:cs typeface="PT Sans"/>
+                  <a:sym typeface="PT Sans"/>
+                </a:rPr>
+                <a:t>train / test</a:t>
+              </a:r>
+            </a:p>
+          </p:txBody>
+        </p:sp>
+        <p:pic>
+          <p:nvPicPr>
+            <p:cNvPr id="14" name="Google Shape;136;p5" descr="C:\Users\MSShafigullin\Desktop\Проекты\Презентация по ДК\qs.jpg">
+              <a:extLst>
+                <a:ext uri="{FF2B5EF4-FFF2-40B4-BE49-F238E27FC236}">
+                  <a16:creationId xmlns:a16="http://schemas.microsoft.com/office/drawing/2014/main" id="{9F8DFA2B-AC78-464C-BC1D-62929B6D8A97}"/>
+                </a:ext>
+              </a:extLst>
+            </p:cNvPr>
+            <p:cNvPicPr preferRelativeResize="0"/>
+            <p:nvPr/>
+          </p:nvPicPr>
+          <p:blipFill rotWithShape="1">
+            <a:blip r:embed="rId4">
+              <a:alphaModFix/>
+            </a:blip>
+            <a:srcRect/>
+            <a:stretch/>
+          </p:blipFill>
+          <p:spPr>
+            <a:xfrm>
+              <a:off x="7878094" y="367563"/>
+              <a:ext cx="353386" cy="353386"/>
+            </a:xfrm>
+            <a:prstGeom prst="rect">
+              <a:avLst/>
+            </a:prstGeom>
+            <a:noFill/>
+            <a:ln>
+              <a:noFill/>
+            </a:ln>
+          </p:spPr>
+        </p:pic>
+        <p:pic>
+          <p:nvPicPr>
+            <p:cNvPr id="15" name="Google Shape;137;p5" descr="C:\Users\MSShafigullin\Desktop\2020\Презентация КФУ\THE.png">
+              <a:extLst>
+                <a:ext uri="{FF2B5EF4-FFF2-40B4-BE49-F238E27FC236}">
+                  <a16:creationId xmlns:a16="http://schemas.microsoft.com/office/drawing/2014/main" id="{835D2624-2EF8-2144-9816-A09872F47777}"/>
+                </a:ext>
+              </a:extLst>
+            </p:cNvPr>
+            <p:cNvPicPr preferRelativeResize="0"/>
+            <p:nvPr/>
+          </p:nvPicPr>
+          <p:blipFill rotWithShape="1">
+            <a:blip r:embed="rId5">
+              <a:alphaModFix/>
+            </a:blip>
+            <a:srcRect/>
+            <a:stretch/>
+          </p:blipFill>
+          <p:spPr>
+            <a:xfrm>
+              <a:off x="7928787" y="114719"/>
+              <a:ext cx="252000" cy="252000"/>
+            </a:xfrm>
+            <a:prstGeom prst="rect">
+              <a:avLst/>
+            </a:prstGeom>
+            <a:noFill/>
+            <a:ln>
+              <a:noFill/>
+            </a:ln>
+          </p:spPr>
+        </p:pic>
+        <p:sp>
+          <p:nvSpPr>
+            <p:cNvPr id="16" name="Google Shape;138;p5">
+              <a:extLst>
+                <a:ext uri="{FF2B5EF4-FFF2-40B4-BE49-F238E27FC236}">
+                  <a16:creationId xmlns:a16="http://schemas.microsoft.com/office/drawing/2014/main" id="{841F1A31-5CCC-E941-956A-F47E7E67D768}"/>
+                </a:ext>
+              </a:extLst>
+            </p:cNvPr>
+            <p:cNvSpPr txBox="1"/>
+            <p:nvPr/>
+          </p:nvSpPr>
+          <p:spPr>
+            <a:xfrm>
+              <a:off x="8279432" y="374979"/>
+              <a:ext cx="659482" cy="272188"/>
+            </a:xfrm>
+            <a:prstGeom prst="rect">
+              <a:avLst/>
+            </a:prstGeom>
+            <a:noFill/>
+            <a:ln>
+              <a:noFill/>
+            </a:ln>
+          </p:spPr>
+          <p:txBody>
+            <a:bodyPr spcFirstLastPara="1" wrap="square" lIns="91425" tIns="45700" rIns="91425" bIns="45700" anchor="t" anchorCtr="0">
+              <a:spAutoFit/>
+            </a:bodyPr>
+            <a:lstStyle/>
+            <a:p>
+              <a:pPr marL="0" marR="0" lvl="0" indent="0" algn="l" rtl="0">
+                <a:lnSpc>
+                  <a:spcPct val="100000"/>
+                </a:lnSpc>
+                <a:spcBef>
+                  <a:spcPts val="0"/>
+                </a:spcBef>
+                <a:spcAft>
+                  <a:spcPts val="0"/>
+                </a:spcAft>
+                <a:buClr>
+                  <a:schemeClr val="lt1"/>
+                </a:buClr>
+                <a:buSzPts val="800"/>
+                <a:buFont typeface="PT Sans"/>
+                <a:buNone/>
+              </a:pPr>
+              <a:r>
+                <a:rPr lang="ru-RU" sz="800" b="0">
+                  <a:solidFill>
+                    <a:schemeClr val="lt1"/>
+                  </a:solidFill>
+                  <a:latin typeface="PT Sans" panose="020B0503020203020204" pitchFamily="34" charset="0"/>
+                  <a:ea typeface="PT Sans"/>
+                  <a:cs typeface="PT Sans"/>
+                  <a:sym typeface="PT Sans"/>
+                </a:rPr>
+                <a:t>370</a:t>
+              </a:r>
+              <a:endParaRPr>
+                <a:latin typeface="PT Sans" panose="020B0503020203020204" pitchFamily="34" charset="0"/>
+              </a:endParaRPr>
+            </a:p>
+            <a:p>
+              <a:pPr marL="0" marR="0" lvl="0" indent="0" algn="l" rtl="0">
+                <a:lnSpc>
+                  <a:spcPct val="100000"/>
+                </a:lnSpc>
+                <a:spcBef>
+                  <a:spcPts val="0"/>
+                </a:spcBef>
+                <a:spcAft>
+                  <a:spcPts val="0"/>
+                </a:spcAft>
+                <a:buClr>
+                  <a:schemeClr val="lt1"/>
+                </a:buClr>
+                <a:buSzPts val="800"/>
+                <a:buFont typeface="PT Sans"/>
+                <a:buNone/>
+              </a:pPr>
+              <a:r>
+                <a:rPr lang="ru-RU" sz="800" b="0" u="none" strike="noStrike" cap="none">
+                  <a:solidFill>
+                    <a:schemeClr val="lt1"/>
+                  </a:solidFill>
+                  <a:latin typeface="PT Sans" panose="020B0503020203020204" pitchFamily="34" charset="0"/>
+                  <a:ea typeface="PT Sans"/>
+                  <a:cs typeface="PT Sans"/>
+                  <a:sym typeface="PT Sans"/>
+                </a:rPr>
+                <a:t>13</a:t>
+              </a:r>
+              <a:endParaRPr sz="800" b="0" u="none" strike="noStrike" cap="none">
+                <a:solidFill>
+                  <a:schemeClr val="lt1"/>
+                </a:solidFill>
+                <a:latin typeface="PT Sans" panose="020B0503020203020204" pitchFamily="34" charset="0"/>
+                <a:ea typeface="PT Sans"/>
+                <a:cs typeface="PT Sans"/>
+                <a:sym typeface="PT Sans"/>
+              </a:endParaRPr>
+            </a:p>
+          </p:txBody>
+        </p:sp>
+        <p:sp>
+          <p:nvSpPr>
+            <p:cNvPr id="17" name="Google Shape;139;p5">
+              <a:extLst>
+                <a:ext uri="{FF2B5EF4-FFF2-40B4-BE49-F238E27FC236}">
+                  <a16:creationId xmlns:a16="http://schemas.microsoft.com/office/drawing/2014/main" id="{A28DBFF6-9F47-6244-B20A-895959377BC2}"/>
+                </a:ext>
+              </a:extLst>
+            </p:cNvPr>
+            <p:cNvSpPr txBox="1"/>
+            <p:nvPr/>
+          </p:nvSpPr>
+          <p:spPr>
+            <a:xfrm>
+              <a:off x="8279432" y="71442"/>
+              <a:ext cx="659482" cy="272188"/>
+            </a:xfrm>
+            <a:prstGeom prst="rect">
+              <a:avLst/>
+            </a:prstGeom>
+            <a:noFill/>
+            <a:ln>
+              <a:noFill/>
+            </a:ln>
+          </p:spPr>
+          <p:txBody>
+            <a:bodyPr spcFirstLastPara="1" wrap="square" lIns="91425" tIns="45700" rIns="91425" bIns="45700" anchor="t" anchorCtr="0">
+              <a:spAutoFit/>
+            </a:bodyPr>
+            <a:lstStyle/>
+            <a:p>
+              <a:pPr marL="0" marR="0" lvl="0" indent="0" algn="l" rtl="0">
+                <a:lnSpc>
+                  <a:spcPct val="100000"/>
+                </a:lnSpc>
+                <a:spcBef>
+                  <a:spcPts val="0"/>
+                </a:spcBef>
+                <a:spcAft>
+                  <a:spcPts val="0"/>
+                </a:spcAft>
+                <a:buClr>
+                  <a:schemeClr val="lt1"/>
+                </a:buClr>
+                <a:buSzPts val="800"/>
+                <a:buFont typeface="PT Sans"/>
+                <a:buNone/>
+              </a:pPr>
+              <a:r>
+                <a:rPr lang="ru-RU" sz="800" b="0">
+                  <a:solidFill>
+                    <a:schemeClr val="lt1"/>
+                  </a:solidFill>
+                  <a:latin typeface="PT Sans" panose="020B0503020203020204" pitchFamily="34" charset="0"/>
+                  <a:ea typeface="PT Sans"/>
+                  <a:cs typeface="PT Sans"/>
+                  <a:sym typeface="PT Sans"/>
+                </a:rPr>
+                <a:t>601-800</a:t>
+              </a:r>
+              <a:endParaRPr>
+                <a:latin typeface="PT Sans" panose="020B0503020203020204" pitchFamily="34" charset="0"/>
+              </a:endParaRPr>
+            </a:p>
+            <a:p>
+              <a:pPr marL="0" marR="0" lvl="0" indent="0" algn="l" rtl="0">
+                <a:lnSpc>
+                  <a:spcPct val="100000"/>
+                </a:lnSpc>
+                <a:spcBef>
+                  <a:spcPts val="0"/>
+                </a:spcBef>
+                <a:spcAft>
+                  <a:spcPts val="0"/>
+                </a:spcAft>
+                <a:buClr>
+                  <a:schemeClr val="lt1"/>
+                </a:buClr>
+                <a:buSzPts val="800"/>
+                <a:buFont typeface="PT Sans"/>
+                <a:buNone/>
+              </a:pPr>
+              <a:r>
+                <a:rPr lang="ru-RU" sz="800" b="0" u="none" strike="noStrike" cap="none">
+                  <a:solidFill>
+                    <a:schemeClr val="lt1"/>
+                  </a:solidFill>
+                  <a:latin typeface="PT Sans" panose="020B0503020203020204" pitchFamily="34" charset="0"/>
+                  <a:ea typeface="PT Sans"/>
+                  <a:cs typeface="PT Sans"/>
+                  <a:sym typeface="PT Sans"/>
+                </a:rPr>
+                <a:t>9</a:t>
+              </a:r>
+              <a:endParaRPr sz="800" b="0" u="none" strike="noStrike" cap="none">
+                <a:solidFill>
+                  <a:schemeClr val="lt1"/>
+                </a:solidFill>
+                <a:latin typeface="PT Sans" panose="020B0503020203020204" pitchFamily="34" charset="0"/>
+                <a:ea typeface="PT Sans"/>
+                <a:cs typeface="PT Sans"/>
+                <a:sym typeface="PT Sans"/>
+              </a:endParaRPr>
+            </a:p>
+          </p:txBody>
+        </p:sp>
+      </p:grpSp>
+      <p:sp>
+        <p:nvSpPr>
+          <p:cNvPr id="19" name="Объект 2">
+            <a:extLst>
+              <a:ext uri="{FF2B5EF4-FFF2-40B4-BE49-F238E27FC236}">
+                <a16:creationId xmlns:a16="http://schemas.microsoft.com/office/drawing/2014/main" id="{30C61546-9215-4D0C-81CB-5EE3A5637E25}"/>
+              </a:ext>
+            </a:extLst>
+          </p:cNvPr>
+          <p:cNvSpPr>
+            <a:spLocks noGrp="1"/>
+          </p:cNvSpPr>
+          <p:nvPr>
+            <p:ph idx="1"/>
+          </p:nvPr>
+        </p:nvSpPr>
+        <p:spPr>
+          <a:xfrm>
+            <a:off x="183023" y="1223234"/>
+            <a:ext cx="11423283" cy="5677647"/>
+          </a:xfrm>
+        </p:spPr>
+        <p:txBody>
+          <a:bodyPr>
+            <a:normAutofit/>
+          </a:bodyPr>
+          <a:lstStyle/>
+          <a:p>
+            <a:pPr marL="0" indent="0" algn="just">
+              <a:buNone/>
+            </a:pPr>
+            <a:r>
+              <a:rPr lang="en-US" sz="2000" i="1" dirty="0" err="1">
+                <a:latin typeface="Cambria Math" panose="02040503050406030204" pitchFamily="18" charset="0"/>
+                <a:ea typeface="Cambria Math" panose="02040503050406030204" pitchFamily="18" charset="0"/>
+              </a:rPr>
+              <a:t>set.seed</a:t>
+            </a:r>
+            <a:r>
+              <a:rPr lang="en-US" sz="2000" i="1" dirty="0">
+                <a:latin typeface="Cambria Math" panose="02040503050406030204" pitchFamily="18" charset="0"/>
+                <a:ea typeface="Cambria Math" panose="02040503050406030204" pitchFamily="18" charset="0"/>
+              </a:rPr>
+              <a:t>(123)</a:t>
+            </a:r>
+          </a:p>
+          <a:p>
+            <a:pPr marL="0" indent="0" algn="just">
+              <a:buNone/>
+            </a:pPr>
+            <a:r>
+              <a:rPr lang="en-US" sz="2000" i="1" dirty="0">
+                <a:latin typeface="Cambria Math" panose="02040503050406030204" pitchFamily="18" charset="0"/>
+                <a:ea typeface="Cambria Math" panose="02040503050406030204" pitchFamily="18" charset="0"/>
+              </a:rPr>
+              <a:t>n &lt;- </a:t>
+            </a:r>
+            <a:r>
+              <a:rPr lang="en-US" sz="2000" i="1" dirty="0" err="1">
+                <a:latin typeface="Cambria Math" panose="02040503050406030204" pitchFamily="18" charset="0"/>
+                <a:ea typeface="Cambria Math" panose="02040503050406030204" pitchFamily="18" charset="0"/>
+              </a:rPr>
+              <a:t>nrow</a:t>
+            </a:r>
+            <a:r>
+              <a:rPr lang="en-US" sz="2000" i="1" dirty="0">
+                <a:latin typeface="Cambria Math" panose="02040503050406030204" pitchFamily="18" charset="0"/>
+                <a:ea typeface="Cambria Math" panose="02040503050406030204" pitchFamily="18" charset="0"/>
+              </a:rPr>
+              <a:t>(</a:t>
+            </a:r>
+            <a:r>
+              <a:rPr lang="en-US" sz="2000" i="1" dirty="0" err="1">
+                <a:latin typeface="Cambria Math" panose="02040503050406030204" pitchFamily="18" charset="0"/>
+                <a:ea typeface="Cambria Math" panose="02040503050406030204" pitchFamily="18" charset="0"/>
+              </a:rPr>
+              <a:t>pid_clean</a:t>
+            </a:r>
+            <a:r>
+              <a:rPr lang="en-US" sz="2000" i="1" dirty="0">
+                <a:latin typeface="Cambria Math" panose="02040503050406030204" pitchFamily="18" charset="0"/>
+                <a:ea typeface="Cambria Math" panose="02040503050406030204" pitchFamily="18" charset="0"/>
+              </a:rPr>
+              <a:t>)</a:t>
+            </a:r>
+          </a:p>
+          <a:p>
+            <a:pPr marL="0" indent="0" algn="just">
+              <a:buNone/>
+            </a:pPr>
+            <a:r>
+              <a:rPr lang="en-US" sz="2000" i="1" dirty="0" err="1">
+                <a:latin typeface="Cambria Math" panose="02040503050406030204" pitchFamily="18" charset="0"/>
+                <a:ea typeface="Cambria Math" panose="02040503050406030204" pitchFamily="18" charset="0"/>
+              </a:rPr>
+              <a:t>train_idx</a:t>
+            </a:r>
+            <a:r>
+              <a:rPr lang="en-US" sz="2000" i="1" dirty="0">
+                <a:latin typeface="Cambria Math" panose="02040503050406030204" pitchFamily="18" charset="0"/>
+                <a:ea typeface="Cambria Math" panose="02040503050406030204" pitchFamily="18" charset="0"/>
+              </a:rPr>
+              <a:t> &lt;- sample(</a:t>
+            </a:r>
+            <a:r>
+              <a:rPr lang="en-US" sz="2000" i="1" dirty="0" err="1">
+                <a:latin typeface="Cambria Math" panose="02040503050406030204" pitchFamily="18" charset="0"/>
+                <a:ea typeface="Cambria Math" panose="02040503050406030204" pitchFamily="18" charset="0"/>
+              </a:rPr>
+              <a:t>seq_len</a:t>
+            </a:r>
+            <a:r>
+              <a:rPr lang="en-US" sz="2000" i="1" dirty="0">
+                <a:latin typeface="Cambria Math" panose="02040503050406030204" pitchFamily="18" charset="0"/>
+                <a:ea typeface="Cambria Math" panose="02040503050406030204" pitchFamily="18" charset="0"/>
+              </a:rPr>
+              <a:t>(n), size = floor(0.7 * n))</a:t>
+            </a:r>
+          </a:p>
+          <a:p>
+            <a:pPr marL="0" indent="0" algn="just">
+              <a:buNone/>
+            </a:pPr>
+            <a:endParaRPr lang="en-US" sz="2000" i="1" dirty="0">
+              <a:latin typeface="Cambria Math" panose="02040503050406030204" pitchFamily="18" charset="0"/>
+              <a:ea typeface="Cambria Math" panose="02040503050406030204" pitchFamily="18" charset="0"/>
+            </a:endParaRPr>
+          </a:p>
+          <a:p>
+            <a:pPr marL="0" indent="0" algn="just">
+              <a:buNone/>
+            </a:pPr>
+            <a:r>
+              <a:rPr lang="en-US" sz="2000" i="1" dirty="0">
+                <a:latin typeface="Cambria Math" panose="02040503050406030204" pitchFamily="18" charset="0"/>
+                <a:ea typeface="Cambria Math" panose="02040503050406030204" pitchFamily="18" charset="0"/>
+              </a:rPr>
+              <a:t>train &lt;- </a:t>
+            </a:r>
+            <a:r>
+              <a:rPr lang="en-US" sz="2000" i="1" dirty="0" err="1">
+                <a:latin typeface="Cambria Math" panose="02040503050406030204" pitchFamily="18" charset="0"/>
+                <a:ea typeface="Cambria Math" panose="02040503050406030204" pitchFamily="18" charset="0"/>
+              </a:rPr>
+              <a:t>pid_clean</a:t>
+            </a:r>
+            <a:r>
+              <a:rPr lang="en-US" sz="2000" i="1" dirty="0">
+                <a:latin typeface="Cambria Math" panose="02040503050406030204" pitchFamily="18" charset="0"/>
+                <a:ea typeface="Cambria Math" panose="02040503050406030204" pitchFamily="18" charset="0"/>
+              </a:rPr>
+              <a:t>[</a:t>
+            </a:r>
+            <a:r>
+              <a:rPr lang="en-US" sz="2000" i="1" dirty="0" err="1">
+                <a:latin typeface="Cambria Math" panose="02040503050406030204" pitchFamily="18" charset="0"/>
+                <a:ea typeface="Cambria Math" panose="02040503050406030204" pitchFamily="18" charset="0"/>
+              </a:rPr>
+              <a:t>train_idx</a:t>
+            </a:r>
+            <a:r>
+              <a:rPr lang="en-US" sz="2000" i="1" dirty="0">
+                <a:latin typeface="Cambria Math" panose="02040503050406030204" pitchFamily="18" charset="0"/>
+                <a:ea typeface="Cambria Math" panose="02040503050406030204" pitchFamily="18" charset="0"/>
+              </a:rPr>
+              <a:t>, ]</a:t>
+            </a:r>
+          </a:p>
+          <a:p>
+            <a:pPr marL="0" indent="0" algn="just">
+              <a:buNone/>
+            </a:pPr>
+            <a:r>
+              <a:rPr lang="en-US" sz="2000" i="1" dirty="0">
+                <a:latin typeface="Cambria Math" panose="02040503050406030204" pitchFamily="18" charset="0"/>
+                <a:ea typeface="Cambria Math" panose="02040503050406030204" pitchFamily="18" charset="0"/>
+              </a:rPr>
+              <a:t>test  &lt;- </a:t>
+            </a:r>
+            <a:r>
+              <a:rPr lang="en-US" sz="2000" i="1" dirty="0" err="1">
+                <a:latin typeface="Cambria Math" panose="02040503050406030204" pitchFamily="18" charset="0"/>
+                <a:ea typeface="Cambria Math" panose="02040503050406030204" pitchFamily="18" charset="0"/>
+              </a:rPr>
+              <a:t>pid_clean</a:t>
+            </a:r>
+            <a:r>
+              <a:rPr lang="en-US" sz="2000" i="1" dirty="0">
+                <a:latin typeface="Cambria Math" panose="02040503050406030204" pitchFamily="18" charset="0"/>
+                <a:ea typeface="Cambria Math" panose="02040503050406030204" pitchFamily="18" charset="0"/>
+              </a:rPr>
+              <a:t>[-</a:t>
+            </a:r>
+            <a:r>
+              <a:rPr lang="en-US" sz="2000" i="1" dirty="0" err="1">
+                <a:latin typeface="Cambria Math" panose="02040503050406030204" pitchFamily="18" charset="0"/>
+                <a:ea typeface="Cambria Math" panose="02040503050406030204" pitchFamily="18" charset="0"/>
+              </a:rPr>
+              <a:t>train_idx</a:t>
+            </a:r>
+            <a:r>
+              <a:rPr lang="en-US" sz="2000" i="1" dirty="0">
+                <a:latin typeface="Cambria Math" panose="02040503050406030204" pitchFamily="18" charset="0"/>
+                <a:ea typeface="Cambria Math" panose="02040503050406030204" pitchFamily="18" charset="0"/>
+              </a:rPr>
+              <a:t>, ]</a:t>
+            </a:r>
+          </a:p>
+          <a:p>
+            <a:pPr marL="0" indent="0" algn="just">
+              <a:buNone/>
+            </a:pPr>
+            <a:endParaRPr lang="en-US" sz="2000" i="1" dirty="0">
+              <a:latin typeface="Cambria Math" panose="02040503050406030204" pitchFamily="18" charset="0"/>
+              <a:ea typeface="Cambria Math" panose="02040503050406030204" pitchFamily="18" charset="0"/>
+            </a:endParaRPr>
+          </a:p>
+          <a:p>
+            <a:pPr marL="0" indent="0" algn="just">
+              <a:buNone/>
+            </a:pPr>
+            <a:r>
+              <a:rPr lang="en-US" sz="2000" i="1" dirty="0">
+                <a:latin typeface="Cambria Math" panose="02040503050406030204" pitchFamily="18" charset="0"/>
+                <a:ea typeface="Cambria Math" panose="02040503050406030204" pitchFamily="18" charset="0"/>
+              </a:rPr>
+              <a:t>table(</a:t>
+            </a:r>
+            <a:r>
+              <a:rPr lang="en-US" sz="2000" i="1" dirty="0" err="1">
+                <a:latin typeface="Cambria Math" panose="02040503050406030204" pitchFamily="18" charset="0"/>
+                <a:ea typeface="Cambria Math" panose="02040503050406030204" pitchFamily="18" charset="0"/>
+              </a:rPr>
+              <a:t>train$diabetes</a:t>
+            </a:r>
+            <a:r>
+              <a:rPr lang="en-US" sz="2000" i="1" dirty="0">
+                <a:latin typeface="Cambria Math" panose="02040503050406030204" pitchFamily="18" charset="0"/>
+                <a:ea typeface="Cambria Math" panose="02040503050406030204" pitchFamily="18" charset="0"/>
+              </a:rPr>
+              <a:t>)</a:t>
+            </a:r>
+          </a:p>
+          <a:p>
+            <a:pPr marL="0" indent="0" algn="just">
+              <a:buNone/>
+            </a:pPr>
+            <a:r>
+              <a:rPr lang="en-US" sz="2000" i="1" dirty="0">
+                <a:latin typeface="Cambria Math" panose="02040503050406030204" pitchFamily="18" charset="0"/>
+                <a:ea typeface="Cambria Math" panose="02040503050406030204" pitchFamily="18" charset="0"/>
+              </a:rPr>
+              <a:t>table(</a:t>
+            </a:r>
+            <a:r>
+              <a:rPr lang="en-US" sz="2000" i="1" dirty="0" err="1">
+                <a:latin typeface="Cambria Math" panose="02040503050406030204" pitchFamily="18" charset="0"/>
+                <a:ea typeface="Cambria Math" panose="02040503050406030204" pitchFamily="18" charset="0"/>
+              </a:rPr>
+              <a:t>test$diabetes</a:t>
+            </a:r>
+            <a:r>
+              <a:rPr lang="en-US" sz="2000" i="1" dirty="0">
+                <a:latin typeface="Cambria Math" panose="02040503050406030204" pitchFamily="18" charset="0"/>
+                <a:ea typeface="Cambria Math" panose="02040503050406030204" pitchFamily="18" charset="0"/>
+              </a:rPr>
+              <a:t>)</a:t>
+            </a:r>
+          </a:p>
+        </p:txBody>
+      </p:sp>
+    </p:spTree>
+    <p:extLst>
+      <p:ext uri="{BB962C8B-B14F-4D97-AF65-F5344CB8AC3E}">
+        <p14:creationId xmlns:p14="http://schemas.microsoft.com/office/powerpoint/2010/main" val="1136017155"/>
+      </p:ext>
+    </p:extLst>
+  </p:cSld>
+  <p:clrMapOvr>
+    <a:masterClrMapping/>
+  </p:clrMapOvr>
+</p:sld>
+</file>
+
+<file path=ppt/slides/slide11.xml><?xml version="1.0" encoding="utf-8"?>
+<p:sld xmlns:a="http://schemas.openxmlformats.org/drawingml/2006/main" xmlns:r="http://schemas.openxmlformats.org/officeDocument/2006/relationships" xmlns:p="http://schemas.openxmlformats.org/presentationml/2006/main">
+  <p:cSld>
+    <p:spTree>
+      <p:nvGrpSpPr>
+        <p:cNvPr id="1" name=""/>
+        <p:cNvGrpSpPr/>
+        <p:nvPr/>
+      </p:nvGrpSpPr>
+      <p:grpSpPr>
+        <a:xfrm>
+          <a:off x="0" y="0"/>
+          <a:ext cx="0" cy="0"/>
+          <a:chOff x="0" y="0"/>
+          <a:chExt cx="0" cy="0"/>
+        </a:xfrm>
+      </p:grpSpPr>
+      <p:sp>
+        <p:nvSpPr>
+          <p:cNvPr id="13" name="Номер слайда 12"/>
+          <p:cNvSpPr>
+            <a:spLocks noGrp="1"/>
+          </p:cNvSpPr>
+          <p:nvPr>
+            <p:ph type="sldNum" sz="quarter" idx="12"/>
+          </p:nvPr>
+        </p:nvSpPr>
+        <p:spPr>
+          <a:xfrm>
+            <a:off x="9274478" y="6356350"/>
+            <a:ext cx="2743200" cy="365125"/>
+          </a:xfrm>
+        </p:spPr>
+        <p:txBody>
+          <a:bodyPr/>
+          <a:lstStyle/>
+          <a:p>
+            <a:fld id="{B19B0651-EE4F-4900-A07F-96A6BFA9D0F0}" type="slidenum">
+              <a:rPr lang="ru-RU" smtClean="0">
+                <a:latin typeface="PT Sans" panose="020B0503020203020204" pitchFamily="34" charset="0"/>
+              </a:rPr>
+              <a:pPr/>
+              <a:t>11</a:t>
+            </a:fld>
+            <a:endParaRPr lang="ru-RU" dirty="0">
+              <a:latin typeface="PT Sans" panose="020B0503020203020204" pitchFamily="34" charset="0"/>
+            </a:endParaRPr>
+          </a:p>
+        </p:txBody>
+      </p:sp>
+      <p:grpSp>
+        <p:nvGrpSpPr>
+          <p:cNvPr id="9" name="Группа 8">
+            <a:extLst>
+              <a:ext uri="{FF2B5EF4-FFF2-40B4-BE49-F238E27FC236}">
+                <a16:creationId xmlns:a16="http://schemas.microsoft.com/office/drawing/2014/main" id="{D7342440-FCEE-2E4F-950F-6FE7857B3EB5}"/>
+              </a:ext>
+            </a:extLst>
+          </p:cNvPr>
+          <p:cNvGrpSpPr/>
+          <p:nvPr/>
+        </p:nvGrpSpPr>
+        <p:grpSpPr>
+          <a:xfrm>
+            <a:off x="0" y="-4966"/>
+            <a:ext cx="12192000" cy="1035565"/>
+            <a:chOff x="0" y="1924"/>
+            <a:chExt cx="9144000" cy="832664"/>
+          </a:xfrm>
+        </p:grpSpPr>
+        <p:sp>
+          <p:nvSpPr>
+            <p:cNvPr id="10" name="Google Shape;133;p5">
+              <a:extLst>
+                <a:ext uri="{FF2B5EF4-FFF2-40B4-BE49-F238E27FC236}">
+                  <a16:creationId xmlns:a16="http://schemas.microsoft.com/office/drawing/2014/main" id="{E1FF157E-1AAE-A345-AC22-C4FE991023F3}"/>
+                </a:ext>
+              </a:extLst>
+            </p:cNvPr>
+            <p:cNvSpPr/>
+            <p:nvPr/>
+          </p:nvSpPr>
+          <p:spPr>
+            <a:xfrm>
+              <a:off x="0" y="1924"/>
+              <a:ext cx="9144000" cy="832664"/>
+            </a:xfrm>
+            <a:prstGeom prst="rect">
+              <a:avLst/>
+            </a:prstGeom>
+            <a:gradFill>
+              <a:gsLst>
+                <a:gs pos="0">
+                  <a:srgbClr val="003061"/>
+                </a:gs>
+                <a:gs pos="50000">
+                  <a:srgbClr val="00468D"/>
+                </a:gs>
+                <a:gs pos="100000">
+                  <a:srgbClr val="0054AA"/>
+                </a:gs>
+              </a:gsLst>
+              <a:lin ang="5400000" scaled="0"/>
+            </a:gradFill>
+            <a:ln>
+              <a:noFill/>
+            </a:ln>
+          </p:spPr>
+          <p:txBody>
+            <a:bodyPr spcFirstLastPara="1" wrap="square" lIns="91425" tIns="45700" rIns="91425" bIns="45700" anchor="ctr" anchorCtr="0">
+              <a:noAutofit/>
+            </a:bodyPr>
+            <a:lstStyle/>
+            <a:p>
+              <a:pPr marL="0" marR="0" lvl="0" indent="0" algn="ctr" rtl="0">
+                <a:spcBef>
+                  <a:spcPts val="0"/>
+                </a:spcBef>
+                <a:spcAft>
+                  <a:spcPts val="0"/>
+                </a:spcAft>
+                <a:buNone/>
+              </a:pPr>
+              <a:endParaRPr sz="1800" dirty="0">
+                <a:solidFill>
+                  <a:schemeClr val="lt1"/>
+                </a:solidFill>
+                <a:latin typeface="PT Sans" panose="020B0503020203020204" pitchFamily="34" charset="0"/>
+                <a:ea typeface="Calibri"/>
+                <a:cs typeface="Calibri"/>
+                <a:sym typeface="Calibri"/>
+              </a:endParaRPr>
+            </a:p>
+          </p:txBody>
+        </p:sp>
+        <p:pic>
+          <p:nvPicPr>
+            <p:cNvPr id="11" name="Google Shape;134;p5" descr="C:\Users\MSShafigullin\Desktop\2020\Презентация КФУ\kfu_logo_circle_rus.png">
+              <a:extLst>
+                <a:ext uri="{FF2B5EF4-FFF2-40B4-BE49-F238E27FC236}">
+                  <a16:creationId xmlns:a16="http://schemas.microsoft.com/office/drawing/2014/main" id="{25CDED6D-DB62-6B41-9BFC-DFBDD55047A7}"/>
+                </a:ext>
+              </a:extLst>
+            </p:cNvPr>
+            <p:cNvPicPr preferRelativeResize="0"/>
+            <p:nvPr/>
+          </p:nvPicPr>
+          <p:blipFill rotWithShape="1">
+            <a:blip r:embed="rId3">
+              <a:alphaModFix/>
+            </a:blip>
+            <a:srcRect/>
+            <a:stretch/>
+          </p:blipFill>
+          <p:spPr>
+            <a:xfrm>
+              <a:off x="137267" y="148256"/>
+              <a:ext cx="553050" cy="540000"/>
+            </a:xfrm>
+            <a:prstGeom prst="rect">
+              <a:avLst/>
+            </a:prstGeom>
+            <a:noFill/>
+            <a:ln>
+              <a:noFill/>
+            </a:ln>
+          </p:spPr>
+        </p:pic>
+        <p:sp>
+          <p:nvSpPr>
+            <p:cNvPr id="12" name="Google Shape;135;p5">
+              <a:extLst>
+                <a:ext uri="{FF2B5EF4-FFF2-40B4-BE49-F238E27FC236}">
+                  <a16:creationId xmlns:a16="http://schemas.microsoft.com/office/drawing/2014/main" id="{B90A0E07-9A35-E74D-859C-8109875E2889}"/>
+                </a:ext>
+              </a:extLst>
+            </p:cNvPr>
+            <p:cNvSpPr txBox="1"/>
+            <p:nvPr/>
+          </p:nvSpPr>
+          <p:spPr>
+            <a:xfrm>
+              <a:off x="835887" y="240719"/>
+              <a:ext cx="7344900" cy="321682"/>
+            </a:xfrm>
+            <a:prstGeom prst="rect">
+              <a:avLst/>
+            </a:prstGeom>
+            <a:noFill/>
+            <a:ln>
+              <a:noFill/>
+            </a:ln>
+          </p:spPr>
+          <p:txBody>
+            <a:bodyPr spcFirstLastPara="1" wrap="square" lIns="91425" tIns="45700" rIns="91425" bIns="45700" anchor="t" anchorCtr="0">
+              <a:spAutoFit/>
+            </a:bodyPr>
+            <a:lstStyle/>
+            <a:p>
+              <a:pPr lvl="0"/>
+              <a:r>
+                <a:rPr lang="ru-RU" sz="2000" dirty="0">
+                  <a:solidFill>
+                    <a:schemeClr val="lt1"/>
+                  </a:solidFill>
+                  <a:latin typeface="PT Sans" panose="020B0503020203020204" pitchFamily="34" charset="0"/>
+                  <a:ea typeface="PT Sans"/>
+                  <a:cs typeface="PT Sans"/>
+                  <a:sym typeface="PT Sans"/>
+                </a:rPr>
+                <a:t>Базовый </a:t>
+              </a:r>
+              <a:r>
+                <a:rPr lang="en-US" sz="2000" dirty="0">
+                  <a:solidFill>
+                    <a:schemeClr val="lt1"/>
+                  </a:solidFill>
+                  <a:latin typeface="PT Sans" panose="020B0503020203020204" pitchFamily="34" charset="0"/>
+                  <a:ea typeface="PT Sans"/>
+                  <a:cs typeface="PT Sans"/>
+                  <a:sym typeface="PT Sans"/>
+                </a:rPr>
+                <a:t>Random Forest</a:t>
+              </a:r>
+              <a:endParaRPr lang="ru-RU" sz="2000" dirty="0">
+                <a:solidFill>
+                  <a:schemeClr val="lt1"/>
+                </a:solidFill>
+                <a:latin typeface="PT Sans" panose="020B0503020203020204" pitchFamily="34" charset="0"/>
+                <a:ea typeface="PT Sans"/>
+                <a:cs typeface="PT Sans"/>
+                <a:sym typeface="PT Sans"/>
+              </a:endParaRPr>
+            </a:p>
+          </p:txBody>
+        </p:sp>
+        <p:pic>
+          <p:nvPicPr>
+            <p:cNvPr id="14" name="Google Shape;136;p5" descr="C:\Users\MSShafigullin\Desktop\Проекты\Презентация по ДК\qs.jpg">
+              <a:extLst>
+                <a:ext uri="{FF2B5EF4-FFF2-40B4-BE49-F238E27FC236}">
+                  <a16:creationId xmlns:a16="http://schemas.microsoft.com/office/drawing/2014/main" id="{9F8DFA2B-AC78-464C-BC1D-62929B6D8A97}"/>
+                </a:ext>
+              </a:extLst>
+            </p:cNvPr>
+            <p:cNvPicPr preferRelativeResize="0"/>
+            <p:nvPr/>
+          </p:nvPicPr>
+          <p:blipFill rotWithShape="1">
+            <a:blip r:embed="rId4">
+              <a:alphaModFix/>
+            </a:blip>
+            <a:srcRect/>
+            <a:stretch/>
+          </p:blipFill>
+          <p:spPr>
+            <a:xfrm>
+              <a:off x="7878094" y="367563"/>
+              <a:ext cx="353386" cy="353386"/>
+            </a:xfrm>
+            <a:prstGeom prst="rect">
+              <a:avLst/>
+            </a:prstGeom>
+            <a:noFill/>
+            <a:ln>
+              <a:noFill/>
+            </a:ln>
+          </p:spPr>
+        </p:pic>
+        <p:pic>
+          <p:nvPicPr>
+            <p:cNvPr id="15" name="Google Shape;137;p5" descr="C:\Users\MSShafigullin\Desktop\2020\Презентация КФУ\THE.png">
+              <a:extLst>
+                <a:ext uri="{FF2B5EF4-FFF2-40B4-BE49-F238E27FC236}">
+                  <a16:creationId xmlns:a16="http://schemas.microsoft.com/office/drawing/2014/main" id="{835D2624-2EF8-2144-9816-A09872F47777}"/>
+                </a:ext>
+              </a:extLst>
+            </p:cNvPr>
+            <p:cNvPicPr preferRelativeResize="0"/>
+            <p:nvPr/>
+          </p:nvPicPr>
+          <p:blipFill rotWithShape="1">
+            <a:blip r:embed="rId5">
+              <a:alphaModFix/>
+            </a:blip>
+            <a:srcRect/>
+            <a:stretch/>
+          </p:blipFill>
+          <p:spPr>
+            <a:xfrm>
+              <a:off x="7928787" y="114719"/>
+              <a:ext cx="252000" cy="252000"/>
+            </a:xfrm>
+            <a:prstGeom prst="rect">
+              <a:avLst/>
+            </a:prstGeom>
+            <a:noFill/>
+            <a:ln>
+              <a:noFill/>
+            </a:ln>
+          </p:spPr>
+        </p:pic>
+        <p:sp>
+          <p:nvSpPr>
+            <p:cNvPr id="16" name="Google Shape;138;p5">
+              <a:extLst>
+                <a:ext uri="{FF2B5EF4-FFF2-40B4-BE49-F238E27FC236}">
+                  <a16:creationId xmlns:a16="http://schemas.microsoft.com/office/drawing/2014/main" id="{841F1A31-5CCC-E941-956A-F47E7E67D768}"/>
+                </a:ext>
+              </a:extLst>
+            </p:cNvPr>
+            <p:cNvSpPr txBox="1"/>
+            <p:nvPr/>
+          </p:nvSpPr>
+          <p:spPr>
+            <a:xfrm>
+              <a:off x="8279432" y="374979"/>
+              <a:ext cx="659482" cy="272188"/>
+            </a:xfrm>
+            <a:prstGeom prst="rect">
+              <a:avLst/>
+            </a:prstGeom>
+            <a:noFill/>
+            <a:ln>
+              <a:noFill/>
+            </a:ln>
+          </p:spPr>
+          <p:txBody>
+            <a:bodyPr spcFirstLastPara="1" wrap="square" lIns="91425" tIns="45700" rIns="91425" bIns="45700" anchor="t" anchorCtr="0">
+              <a:spAutoFit/>
+            </a:bodyPr>
+            <a:lstStyle/>
+            <a:p>
+              <a:pPr marL="0" marR="0" lvl="0" indent="0" algn="l" rtl="0">
+                <a:lnSpc>
+                  <a:spcPct val="100000"/>
+                </a:lnSpc>
+                <a:spcBef>
+                  <a:spcPts val="0"/>
+                </a:spcBef>
+                <a:spcAft>
+                  <a:spcPts val="0"/>
+                </a:spcAft>
+                <a:buClr>
+                  <a:schemeClr val="lt1"/>
+                </a:buClr>
+                <a:buSzPts val="800"/>
+                <a:buFont typeface="PT Sans"/>
+                <a:buNone/>
+              </a:pPr>
+              <a:r>
+                <a:rPr lang="ru-RU" sz="800" b="0">
+                  <a:solidFill>
+                    <a:schemeClr val="lt1"/>
+                  </a:solidFill>
+                  <a:latin typeface="PT Sans" panose="020B0503020203020204" pitchFamily="34" charset="0"/>
+                  <a:ea typeface="PT Sans"/>
+                  <a:cs typeface="PT Sans"/>
+                  <a:sym typeface="PT Sans"/>
+                </a:rPr>
+                <a:t>370</a:t>
+              </a:r>
+              <a:endParaRPr>
+                <a:latin typeface="PT Sans" panose="020B0503020203020204" pitchFamily="34" charset="0"/>
+              </a:endParaRPr>
+            </a:p>
+            <a:p>
+              <a:pPr marL="0" marR="0" lvl="0" indent="0" algn="l" rtl="0">
+                <a:lnSpc>
+                  <a:spcPct val="100000"/>
+                </a:lnSpc>
+                <a:spcBef>
+                  <a:spcPts val="0"/>
+                </a:spcBef>
+                <a:spcAft>
+                  <a:spcPts val="0"/>
+                </a:spcAft>
+                <a:buClr>
+                  <a:schemeClr val="lt1"/>
+                </a:buClr>
+                <a:buSzPts val="800"/>
+                <a:buFont typeface="PT Sans"/>
+                <a:buNone/>
+              </a:pPr>
+              <a:r>
+                <a:rPr lang="ru-RU" sz="800" b="0" u="none" strike="noStrike" cap="none">
+                  <a:solidFill>
+                    <a:schemeClr val="lt1"/>
+                  </a:solidFill>
+                  <a:latin typeface="PT Sans" panose="020B0503020203020204" pitchFamily="34" charset="0"/>
+                  <a:ea typeface="PT Sans"/>
+                  <a:cs typeface="PT Sans"/>
+                  <a:sym typeface="PT Sans"/>
+                </a:rPr>
+                <a:t>13</a:t>
+              </a:r>
+              <a:endParaRPr sz="800" b="0" u="none" strike="noStrike" cap="none">
+                <a:solidFill>
+                  <a:schemeClr val="lt1"/>
+                </a:solidFill>
+                <a:latin typeface="PT Sans" panose="020B0503020203020204" pitchFamily="34" charset="0"/>
+                <a:ea typeface="PT Sans"/>
+                <a:cs typeface="PT Sans"/>
+                <a:sym typeface="PT Sans"/>
+              </a:endParaRPr>
+            </a:p>
+          </p:txBody>
+        </p:sp>
+        <p:sp>
+          <p:nvSpPr>
+            <p:cNvPr id="17" name="Google Shape;139;p5">
+              <a:extLst>
+                <a:ext uri="{FF2B5EF4-FFF2-40B4-BE49-F238E27FC236}">
+                  <a16:creationId xmlns:a16="http://schemas.microsoft.com/office/drawing/2014/main" id="{A28DBFF6-9F47-6244-B20A-895959377BC2}"/>
+                </a:ext>
+              </a:extLst>
+            </p:cNvPr>
+            <p:cNvSpPr txBox="1"/>
+            <p:nvPr/>
+          </p:nvSpPr>
+          <p:spPr>
+            <a:xfrm>
+              <a:off x="8279432" y="71442"/>
+              <a:ext cx="659482" cy="272188"/>
+            </a:xfrm>
+            <a:prstGeom prst="rect">
+              <a:avLst/>
+            </a:prstGeom>
+            <a:noFill/>
+            <a:ln>
+              <a:noFill/>
+            </a:ln>
+          </p:spPr>
+          <p:txBody>
+            <a:bodyPr spcFirstLastPara="1" wrap="square" lIns="91425" tIns="45700" rIns="91425" bIns="45700" anchor="t" anchorCtr="0">
+              <a:spAutoFit/>
+            </a:bodyPr>
+            <a:lstStyle/>
+            <a:p>
+              <a:pPr marL="0" marR="0" lvl="0" indent="0" algn="l" rtl="0">
+                <a:lnSpc>
+                  <a:spcPct val="100000"/>
+                </a:lnSpc>
+                <a:spcBef>
+                  <a:spcPts val="0"/>
+                </a:spcBef>
+                <a:spcAft>
+                  <a:spcPts val="0"/>
+                </a:spcAft>
+                <a:buClr>
+                  <a:schemeClr val="lt1"/>
+                </a:buClr>
+                <a:buSzPts val="800"/>
+                <a:buFont typeface="PT Sans"/>
+                <a:buNone/>
+              </a:pPr>
+              <a:r>
+                <a:rPr lang="ru-RU" sz="800" b="0">
+                  <a:solidFill>
+                    <a:schemeClr val="lt1"/>
+                  </a:solidFill>
+                  <a:latin typeface="PT Sans" panose="020B0503020203020204" pitchFamily="34" charset="0"/>
+                  <a:ea typeface="PT Sans"/>
+                  <a:cs typeface="PT Sans"/>
+                  <a:sym typeface="PT Sans"/>
+                </a:rPr>
+                <a:t>601-800</a:t>
+              </a:r>
+              <a:endParaRPr>
+                <a:latin typeface="PT Sans" panose="020B0503020203020204" pitchFamily="34" charset="0"/>
+              </a:endParaRPr>
+            </a:p>
+            <a:p>
+              <a:pPr marL="0" marR="0" lvl="0" indent="0" algn="l" rtl="0">
+                <a:lnSpc>
+                  <a:spcPct val="100000"/>
+                </a:lnSpc>
+                <a:spcBef>
+                  <a:spcPts val="0"/>
+                </a:spcBef>
+                <a:spcAft>
+                  <a:spcPts val="0"/>
+                </a:spcAft>
+                <a:buClr>
+                  <a:schemeClr val="lt1"/>
+                </a:buClr>
+                <a:buSzPts val="800"/>
+                <a:buFont typeface="PT Sans"/>
+                <a:buNone/>
+              </a:pPr>
+              <a:r>
+                <a:rPr lang="ru-RU" sz="800" b="0" u="none" strike="noStrike" cap="none">
+                  <a:solidFill>
+                    <a:schemeClr val="lt1"/>
+                  </a:solidFill>
+                  <a:latin typeface="PT Sans" panose="020B0503020203020204" pitchFamily="34" charset="0"/>
+                  <a:ea typeface="PT Sans"/>
+                  <a:cs typeface="PT Sans"/>
+                  <a:sym typeface="PT Sans"/>
+                </a:rPr>
+                <a:t>9</a:t>
+              </a:r>
+              <a:endParaRPr sz="800" b="0" u="none" strike="noStrike" cap="none">
+                <a:solidFill>
+                  <a:schemeClr val="lt1"/>
+                </a:solidFill>
+                <a:latin typeface="PT Sans" panose="020B0503020203020204" pitchFamily="34" charset="0"/>
+                <a:ea typeface="PT Sans"/>
+                <a:cs typeface="PT Sans"/>
+                <a:sym typeface="PT Sans"/>
+              </a:endParaRPr>
+            </a:p>
+          </p:txBody>
+        </p:sp>
+      </p:grpSp>
+      <p:sp>
+        <p:nvSpPr>
+          <p:cNvPr id="19" name="Объект 2">
+            <a:extLst>
+              <a:ext uri="{FF2B5EF4-FFF2-40B4-BE49-F238E27FC236}">
+                <a16:creationId xmlns:a16="http://schemas.microsoft.com/office/drawing/2014/main" id="{30C61546-9215-4D0C-81CB-5EE3A5637E25}"/>
+              </a:ext>
+            </a:extLst>
+          </p:cNvPr>
+          <p:cNvSpPr>
+            <a:spLocks noGrp="1"/>
+          </p:cNvSpPr>
+          <p:nvPr>
+            <p:ph idx="1"/>
+          </p:nvPr>
+        </p:nvSpPr>
+        <p:spPr>
+          <a:xfrm>
+            <a:off x="183023" y="1223234"/>
+            <a:ext cx="11423283" cy="5677647"/>
+          </a:xfrm>
+        </p:spPr>
+        <p:txBody>
+          <a:bodyPr>
+            <a:normAutofit/>
+          </a:bodyPr>
+          <a:lstStyle/>
+          <a:p>
+            <a:pPr marL="0" indent="0" algn="l">
+              <a:buNone/>
+            </a:pPr>
+            <a:r>
+              <a:rPr lang="en-US" i="1" dirty="0">
+                <a:effectLst/>
+                <a:latin typeface="Cambria Math" panose="02040503050406030204" pitchFamily="18" charset="0"/>
+                <a:ea typeface="Cambria Math" panose="02040503050406030204" pitchFamily="18" charset="0"/>
+              </a:rPr>
+              <a:t>library(</a:t>
+            </a:r>
+            <a:r>
+              <a:rPr lang="en-US" i="1" dirty="0" err="1">
+                <a:effectLst/>
+                <a:latin typeface="Cambria Math" panose="02040503050406030204" pitchFamily="18" charset="0"/>
+                <a:ea typeface="Cambria Math" panose="02040503050406030204" pitchFamily="18" charset="0"/>
+              </a:rPr>
+              <a:t>randomForest</a:t>
+            </a:r>
+            <a:r>
+              <a:rPr lang="en-US" i="1" dirty="0">
+                <a:effectLst/>
+                <a:latin typeface="Cambria Math" panose="02040503050406030204" pitchFamily="18" charset="0"/>
+                <a:ea typeface="Cambria Math" panose="02040503050406030204" pitchFamily="18" charset="0"/>
+              </a:rPr>
+              <a:t>)</a:t>
+            </a:r>
+          </a:p>
+          <a:p>
+            <a:pPr marL="0" indent="0" algn="l">
+              <a:buNone/>
+            </a:pPr>
+            <a:endParaRPr lang="en-US" i="1" dirty="0">
+              <a:effectLst/>
+              <a:latin typeface="Cambria Math" panose="02040503050406030204" pitchFamily="18" charset="0"/>
+              <a:ea typeface="Cambria Math" panose="02040503050406030204" pitchFamily="18" charset="0"/>
+            </a:endParaRPr>
+          </a:p>
+          <a:p>
+            <a:pPr marL="0" indent="0" algn="l">
+              <a:buNone/>
+            </a:pPr>
+            <a:r>
+              <a:rPr lang="en-US" i="1" dirty="0" err="1">
+                <a:effectLst/>
+                <a:latin typeface="Cambria Math" panose="02040503050406030204" pitchFamily="18" charset="0"/>
+                <a:ea typeface="Cambria Math" panose="02040503050406030204" pitchFamily="18" charset="0"/>
+              </a:rPr>
+              <a:t>rf_full</a:t>
+            </a:r>
+            <a:r>
+              <a:rPr lang="en-US" i="1" dirty="0">
+                <a:effectLst/>
+                <a:latin typeface="Cambria Math" panose="02040503050406030204" pitchFamily="18" charset="0"/>
+                <a:ea typeface="Cambria Math" panose="02040503050406030204" pitchFamily="18" charset="0"/>
+              </a:rPr>
+              <a:t> &lt;- </a:t>
+            </a:r>
+            <a:r>
+              <a:rPr lang="en-US" i="1" dirty="0" err="1">
+                <a:effectLst/>
+                <a:latin typeface="Cambria Math" panose="02040503050406030204" pitchFamily="18" charset="0"/>
+                <a:ea typeface="Cambria Math" panose="02040503050406030204" pitchFamily="18" charset="0"/>
+              </a:rPr>
+              <a:t>randomForest</a:t>
+            </a:r>
+            <a:r>
+              <a:rPr lang="en-US" i="1" dirty="0">
+                <a:effectLst/>
+                <a:latin typeface="Cambria Math" panose="02040503050406030204" pitchFamily="18" charset="0"/>
+                <a:ea typeface="Cambria Math" panose="02040503050406030204" pitchFamily="18" charset="0"/>
+              </a:rPr>
+              <a:t>(</a:t>
+            </a:r>
+          </a:p>
+          <a:p>
+            <a:pPr marL="0" indent="0" algn="l">
+              <a:buNone/>
+            </a:pPr>
+            <a:r>
+              <a:rPr lang="en-US" i="1" dirty="0">
+                <a:effectLst/>
+                <a:latin typeface="Cambria Math" panose="02040503050406030204" pitchFamily="18" charset="0"/>
+                <a:ea typeface="Cambria Math" panose="02040503050406030204" pitchFamily="18" charset="0"/>
+              </a:rPr>
+              <a:t>  factor(diabetes) ~ .,</a:t>
+            </a:r>
+          </a:p>
+          <a:p>
+            <a:pPr marL="0" indent="0" algn="l">
+              <a:buNone/>
+            </a:pPr>
+            <a:r>
+              <a:rPr lang="en-US" i="1" dirty="0">
+                <a:effectLst/>
+                <a:latin typeface="Cambria Math" panose="02040503050406030204" pitchFamily="18" charset="0"/>
+                <a:ea typeface="Cambria Math" panose="02040503050406030204" pitchFamily="18" charset="0"/>
+              </a:rPr>
+              <a:t>  data  = train,</a:t>
+            </a:r>
+          </a:p>
+          <a:p>
+            <a:pPr marL="0" indent="0" algn="l">
+              <a:buNone/>
+            </a:pPr>
+            <a:r>
+              <a:rPr lang="en-US" i="1" dirty="0">
+                <a:effectLst/>
+                <a:latin typeface="Cambria Math" panose="02040503050406030204" pitchFamily="18" charset="0"/>
+                <a:ea typeface="Cambria Math" panose="02040503050406030204" pitchFamily="18" charset="0"/>
+              </a:rPr>
+              <a:t>  </a:t>
+            </a:r>
+            <a:r>
+              <a:rPr lang="en-US" i="1" dirty="0" err="1">
+                <a:effectLst/>
+                <a:latin typeface="Cambria Math" panose="02040503050406030204" pitchFamily="18" charset="0"/>
+                <a:ea typeface="Cambria Math" panose="02040503050406030204" pitchFamily="18" charset="0"/>
+              </a:rPr>
+              <a:t>ntree</a:t>
+            </a:r>
+            <a:r>
+              <a:rPr lang="en-US" i="1" dirty="0">
+                <a:effectLst/>
+                <a:latin typeface="Cambria Math" panose="02040503050406030204" pitchFamily="18" charset="0"/>
+                <a:ea typeface="Cambria Math" panose="02040503050406030204" pitchFamily="18" charset="0"/>
+              </a:rPr>
+              <a:t> = 500,</a:t>
+            </a:r>
+          </a:p>
+          <a:p>
+            <a:pPr marL="0" indent="0" algn="l">
+              <a:buNone/>
+            </a:pPr>
+            <a:r>
+              <a:rPr lang="en-US" i="1" dirty="0">
+                <a:effectLst/>
+                <a:latin typeface="Cambria Math" panose="02040503050406030204" pitchFamily="18" charset="0"/>
+                <a:ea typeface="Cambria Math" panose="02040503050406030204" pitchFamily="18" charset="0"/>
+              </a:rPr>
+              <a:t>  </a:t>
+            </a:r>
+            <a:r>
+              <a:rPr lang="en-US" i="1" dirty="0" err="1">
+                <a:effectLst/>
+                <a:latin typeface="Cambria Math" panose="02040503050406030204" pitchFamily="18" charset="0"/>
+                <a:ea typeface="Cambria Math" panose="02040503050406030204" pitchFamily="18" charset="0"/>
+              </a:rPr>
+              <a:t>mtry</a:t>
+            </a:r>
+            <a:r>
+              <a:rPr lang="en-US" i="1" dirty="0">
+                <a:effectLst/>
+                <a:latin typeface="Cambria Math" panose="02040503050406030204" pitchFamily="18" charset="0"/>
+                <a:ea typeface="Cambria Math" panose="02040503050406030204" pitchFamily="18" charset="0"/>
+              </a:rPr>
+              <a:t>  = floor(sqrt(</a:t>
+            </a:r>
+            <a:r>
+              <a:rPr lang="en-US" i="1" dirty="0" err="1">
+                <a:effectLst/>
+                <a:latin typeface="Cambria Math" panose="02040503050406030204" pitchFamily="18" charset="0"/>
+                <a:ea typeface="Cambria Math" panose="02040503050406030204" pitchFamily="18" charset="0"/>
+              </a:rPr>
+              <a:t>ncol</a:t>
+            </a:r>
+            <a:r>
+              <a:rPr lang="en-US" i="1" dirty="0">
+                <a:effectLst/>
+                <a:latin typeface="Cambria Math" panose="02040503050406030204" pitchFamily="18" charset="0"/>
+                <a:ea typeface="Cambria Math" panose="02040503050406030204" pitchFamily="18" charset="0"/>
+              </a:rPr>
+              <a:t>(train) - 1)),</a:t>
+            </a:r>
+          </a:p>
+          <a:p>
+            <a:pPr marL="0" indent="0" algn="l">
+              <a:buNone/>
+            </a:pPr>
+            <a:r>
+              <a:rPr lang="en-US" i="1" dirty="0">
+                <a:effectLst/>
+                <a:latin typeface="Cambria Math" panose="02040503050406030204" pitchFamily="18" charset="0"/>
+                <a:ea typeface="Cambria Math" panose="02040503050406030204" pitchFamily="18" charset="0"/>
+              </a:rPr>
+              <a:t>  importance = TRUE</a:t>
+            </a:r>
+          </a:p>
+          <a:p>
+            <a:pPr marL="0" indent="0" algn="l">
+              <a:buNone/>
+            </a:pPr>
+            <a:r>
+              <a:rPr lang="en-US" i="1" dirty="0">
+                <a:effectLst/>
+                <a:latin typeface="Cambria Math" panose="02040503050406030204" pitchFamily="18" charset="0"/>
+                <a:ea typeface="Cambria Math" panose="02040503050406030204" pitchFamily="18" charset="0"/>
+              </a:rPr>
+              <a:t>)</a:t>
+            </a:r>
+          </a:p>
+          <a:p>
+            <a:pPr marL="0" indent="0" algn="l">
+              <a:buNone/>
+            </a:pPr>
+            <a:endParaRPr lang="en-US" i="1" dirty="0">
+              <a:effectLst/>
+              <a:latin typeface="Cambria Math" panose="02040503050406030204" pitchFamily="18" charset="0"/>
+              <a:ea typeface="Cambria Math" panose="02040503050406030204" pitchFamily="18" charset="0"/>
+            </a:endParaRPr>
+          </a:p>
+          <a:p>
+            <a:pPr marL="0" indent="0" algn="l">
+              <a:buNone/>
+            </a:pPr>
+            <a:r>
+              <a:rPr lang="en-US" i="1" dirty="0" err="1">
+                <a:effectLst/>
+                <a:latin typeface="Cambria Math" panose="02040503050406030204" pitchFamily="18" charset="0"/>
+                <a:ea typeface="Cambria Math" panose="02040503050406030204" pitchFamily="18" charset="0"/>
+              </a:rPr>
+              <a:t>rf_full</a:t>
+            </a:r>
+            <a:endParaRPr lang="en-US" i="1" dirty="0">
+              <a:effectLst/>
+              <a:latin typeface="Cambria Math" panose="02040503050406030204" pitchFamily="18" charset="0"/>
+              <a:ea typeface="Cambria Math" panose="02040503050406030204" pitchFamily="18" charset="0"/>
+            </a:endParaRPr>
+          </a:p>
+        </p:txBody>
+      </p:sp>
+    </p:spTree>
+    <p:extLst>
+      <p:ext uri="{BB962C8B-B14F-4D97-AF65-F5344CB8AC3E}">
+        <p14:creationId xmlns:p14="http://schemas.microsoft.com/office/powerpoint/2010/main" val="3747039563"/>
+      </p:ext>
+    </p:extLst>
+  </p:cSld>
+  <p:clrMapOvr>
+    <a:masterClrMapping/>
+  </p:clrMapOvr>
+</p:sld>
+</file>
+
+<file path=ppt/slides/slide12.xml><?xml version="1.0" encoding="utf-8"?>
+<p:sld xmlns:a="http://schemas.openxmlformats.org/drawingml/2006/main" xmlns:r="http://schemas.openxmlformats.org/officeDocument/2006/relationships" xmlns:p="http://schemas.openxmlformats.org/presentationml/2006/main">
+  <p:cSld>
+    <p:spTree>
+      <p:nvGrpSpPr>
+        <p:cNvPr id="1" name=""/>
+        <p:cNvGrpSpPr/>
+        <p:nvPr/>
+      </p:nvGrpSpPr>
+      <p:grpSpPr>
+        <a:xfrm>
+          <a:off x="0" y="0"/>
+          <a:ext cx="0" cy="0"/>
+          <a:chOff x="0" y="0"/>
+          <a:chExt cx="0" cy="0"/>
+        </a:xfrm>
+      </p:grpSpPr>
+      <p:sp>
+        <p:nvSpPr>
+          <p:cNvPr id="13" name="Номер слайда 12"/>
+          <p:cNvSpPr>
+            <a:spLocks noGrp="1"/>
+          </p:cNvSpPr>
+          <p:nvPr>
+            <p:ph type="sldNum" sz="quarter" idx="12"/>
+          </p:nvPr>
+        </p:nvSpPr>
+        <p:spPr>
+          <a:xfrm>
+            <a:off x="9274478" y="6356350"/>
+            <a:ext cx="2743200" cy="365125"/>
+          </a:xfrm>
+        </p:spPr>
+        <p:txBody>
+          <a:bodyPr/>
+          <a:lstStyle/>
+          <a:p>
+            <a:fld id="{B19B0651-EE4F-4900-A07F-96A6BFA9D0F0}" type="slidenum">
+              <a:rPr lang="ru-RU" smtClean="0">
+                <a:latin typeface="PT Sans" panose="020B0503020203020204" pitchFamily="34" charset="0"/>
+              </a:rPr>
+              <a:pPr/>
+              <a:t>12</a:t>
+            </a:fld>
+            <a:endParaRPr lang="ru-RU" dirty="0">
+              <a:latin typeface="PT Sans" panose="020B0503020203020204" pitchFamily="34" charset="0"/>
+            </a:endParaRPr>
+          </a:p>
+        </p:txBody>
+      </p:sp>
+      <p:grpSp>
+        <p:nvGrpSpPr>
+          <p:cNvPr id="9" name="Группа 8">
+            <a:extLst>
+              <a:ext uri="{FF2B5EF4-FFF2-40B4-BE49-F238E27FC236}">
+                <a16:creationId xmlns:a16="http://schemas.microsoft.com/office/drawing/2014/main" id="{D7342440-FCEE-2E4F-950F-6FE7857B3EB5}"/>
+              </a:ext>
+            </a:extLst>
+          </p:cNvPr>
+          <p:cNvGrpSpPr/>
+          <p:nvPr/>
+        </p:nvGrpSpPr>
+        <p:grpSpPr>
+          <a:xfrm>
+            <a:off x="0" y="-4966"/>
+            <a:ext cx="12192000" cy="1035565"/>
+            <a:chOff x="0" y="1924"/>
+            <a:chExt cx="9144000" cy="832664"/>
+          </a:xfrm>
+        </p:grpSpPr>
+        <p:sp>
+          <p:nvSpPr>
+            <p:cNvPr id="10" name="Google Shape;133;p5">
+              <a:extLst>
+                <a:ext uri="{FF2B5EF4-FFF2-40B4-BE49-F238E27FC236}">
+                  <a16:creationId xmlns:a16="http://schemas.microsoft.com/office/drawing/2014/main" id="{E1FF157E-1AAE-A345-AC22-C4FE991023F3}"/>
+                </a:ext>
+              </a:extLst>
+            </p:cNvPr>
+            <p:cNvSpPr/>
+            <p:nvPr/>
+          </p:nvSpPr>
+          <p:spPr>
+            <a:xfrm>
+              <a:off x="0" y="1924"/>
+              <a:ext cx="9144000" cy="832664"/>
+            </a:xfrm>
+            <a:prstGeom prst="rect">
+              <a:avLst/>
+            </a:prstGeom>
+            <a:gradFill>
+              <a:gsLst>
+                <a:gs pos="0">
+                  <a:srgbClr val="003061"/>
+                </a:gs>
+                <a:gs pos="50000">
+                  <a:srgbClr val="00468D"/>
+                </a:gs>
+                <a:gs pos="100000">
+                  <a:srgbClr val="0054AA"/>
+                </a:gs>
+              </a:gsLst>
+              <a:lin ang="5400000" scaled="0"/>
+            </a:gradFill>
+            <a:ln>
+              <a:noFill/>
+            </a:ln>
+          </p:spPr>
+          <p:txBody>
+            <a:bodyPr spcFirstLastPara="1" wrap="square" lIns="91425" tIns="45700" rIns="91425" bIns="45700" anchor="ctr" anchorCtr="0">
+              <a:noAutofit/>
+            </a:bodyPr>
+            <a:lstStyle/>
+            <a:p>
+              <a:pPr marL="0" marR="0" lvl="0" indent="0" algn="ctr" rtl="0">
+                <a:spcBef>
+                  <a:spcPts val="0"/>
+                </a:spcBef>
+                <a:spcAft>
+                  <a:spcPts val="0"/>
+                </a:spcAft>
+                <a:buNone/>
+              </a:pPr>
+              <a:endParaRPr sz="1800" dirty="0">
+                <a:solidFill>
+                  <a:schemeClr val="lt1"/>
+                </a:solidFill>
+                <a:latin typeface="PT Sans" panose="020B0503020203020204" pitchFamily="34" charset="0"/>
+                <a:ea typeface="Calibri"/>
+                <a:cs typeface="Calibri"/>
+                <a:sym typeface="Calibri"/>
+              </a:endParaRPr>
+            </a:p>
+          </p:txBody>
+        </p:sp>
+        <p:pic>
+          <p:nvPicPr>
+            <p:cNvPr id="11" name="Google Shape;134;p5" descr="C:\Users\MSShafigullin\Desktop\2020\Презентация КФУ\kfu_logo_circle_rus.png">
+              <a:extLst>
+                <a:ext uri="{FF2B5EF4-FFF2-40B4-BE49-F238E27FC236}">
+                  <a16:creationId xmlns:a16="http://schemas.microsoft.com/office/drawing/2014/main" id="{25CDED6D-DB62-6B41-9BFC-DFBDD55047A7}"/>
+                </a:ext>
+              </a:extLst>
+            </p:cNvPr>
+            <p:cNvPicPr preferRelativeResize="0"/>
+            <p:nvPr/>
+          </p:nvPicPr>
+          <p:blipFill rotWithShape="1">
+            <a:blip r:embed="rId3">
+              <a:alphaModFix/>
+            </a:blip>
+            <a:srcRect/>
+            <a:stretch/>
+          </p:blipFill>
+          <p:spPr>
+            <a:xfrm>
+              <a:off x="137267" y="148256"/>
+              <a:ext cx="553050" cy="540000"/>
+            </a:xfrm>
+            <a:prstGeom prst="rect">
+              <a:avLst/>
+            </a:prstGeom>
+            <a:noFill/>
+            <a:ln>
+              <a:noFill/>
+            </a:ln>
+          </p:spPr>
+        </p:pic>
+        <p:sp>
+          <p:nvSpPr>
+            <p:cNvPr id="12" name="Google Shape;135;p5">
+              <a:extLst>
+                <a:ext uri="{FF2B5EF4-FFF2-40B4-BE49-F238E27FC236}">
+                  <a16:creationId xmlns:a16="http://schemas.microsoft.com/office/drawing/2014/main" id="{B90A0E07-9A35-E74D-859C-8109875E2889}"/>
+                </a:ext>
+              </a:extLst>
+            </p:cNvPr>
+            <p:cNvSpPr txBox="1"/>
+            <p:nvPr/>
+          </p:nvSpPr>
+          <p:spPr>
+            <a:xfrm>
+              <a:off x="835887" y="240719"/>
+              <a:ext cx="7344900" cy="321682"/>
+            </a:xfrm>
+            <a:prstGeom prst="rect">
+              <a:avLst/>
+            </a:prstGeom>
+            <a:noFill/>
+            <a:ln>
+              <a:noFill/>
+            </a:ln>
+          </p:spPr>
+          <p:txBody>
+            <a:bodyPr spcFirstLastPara="1" wrap="square" lIns="91425" tIns="45700" rIns="91425" bIns="45700" anchor="t" anchorCtr="0">
+              <a:spAutoFit/>
+            </a:bodyPr>
+            <a:lstStyle/>
+            <a:p>
+              <a:pPr lvl="0"/>
+              <a:r>
+                <a:rPr lang="ru-RU" sz="2000" dirty="0">
+                  <a:solidFill>
+                    <a:schemeClr val="lt1"/>
+                  </a:solidFill>
+                  <a:latin typeface="PT Sans" panose="020B0503020203020204" pitchFamily="34" charset="0"/>
+                  <a:ea typeface="PT Sans"/>
+                  <a:cs typeface="PT Sans"/>
+                  <a:sym typeface="PT Sans"/>
+                </a:rPr>
+                <a:t>Качество модели на тесте</a:t>
+              </a:r>
+            </a:p>
+          </p:txBody>
+        </p:sp>
+        <p:pic>
+          <p:nvPicPr>
+            <p:cNvPr id="14" name="Google Shape;136;p5" descr="C:\Users\MSShafigullin\Desktop\Проекты\Презентация по ДК\qs.jpg">
+              <a:extLst>
+                <a:ext uri="{FF2B5EF4-FFF2-40B4-BE49-F238E27FC236}">
+                  <a16:creationId xmlns:a16="http://schemas.microsoft.com/office/drawing/2014/main" id="{9F8DFA2B-AC78-464C-BC1D-62929B6D8A97}"/>
+                </a:ext>
+              </a:extLst>
+            </p:cNvPr>
+            <p:cNvPicPr preferRelativeResize="0"/>
+            <p:nvPr/>
+          </p:nvPicPr>
+          <p:blipFill rotWithShape="1">
+            <a:blip r:embed="rId4">
+              <a:alphaModFix/>
+            </a:blip>
+            <a:srcRect/>
+            <a:stretch/>
+          </p:blipFill>
+          <p:spPr>
+            <a:xfrm>
+              <a:off x="7878094" y="367563"/>
+              <a:ext cx="353386" cy="353386"/>
+            </a:xfrm>
+            <a:prstGeom prst="rect">
+              <a:avLst/>
+            </a:prstGeom>
+            <a:noFill/>
+            <a:ln>
+              <a:noFill/>
+            </a:ln>
+          </p:spPr>
+        </p:pic>
+        <p:pic>
+          <p:nvPicPr>
+            <p:cNvPr id="15" name="Google Shape;137;p5" descr="C:\Users\MSShafigullin\Desktop\2020\Презентация КФУ\THE.png">
+              <a:extLst>
+                <a:ext uri="{FF2B5EF4-FFF2-40B4-BE49-F238E27FC236}">
+                  <a16:creationId xmlns:a16="http://schemas.microsoft.com/office/drawing/2014/main" id="{835D2624-2EF8-2144-9816-A09872F47777}"/>
+                </a:ext>
+              </a:extLst>
+            </p:cNvPr>
+            <p:cNvPicPr preferRelativeResize="0"/>
+            <p:nvPr/>
+          </p:nvPicPr>
+          <p:blipFill rotWithShape="1">
+            <a:blip r:embed="rId5">
+              <a:alphaModFix/>
+            </a:blip>
+            <a:srcRect/>
+            <a:stretch/>
+          </p:blipFill>
+          <p:spPr>
+            <a:xfrm>
+              <a:off x="7928787" y="114719"/>
+              <a:ext cx="252000" cy="252000"/>
+            </a:xfrm>
+            <a:prstGeom prst="rect">
+              <a:avLst/>
+            </a:prstGeom>
+            <a:noFill/>
+            <a:ln>
+              <a:noFill/>
+            </a:ln>
+          </p:spPr>
+        </p:pic>
+        <p:sp>
+          <p:nvSpPr>
+            <p:cNvPr id="16" name="Google Shape;138;p5">
+              <a:extLst>
+                <a:ext uri="{FF2B5EF4-FFF2-40B4-BE49-F238E27FC236}">
+                  <a16:creationId xmlns:a16="http://schemas.microsoft.com/office/drawing/2014/main" id="{841F1A31-5CCC-E941-956A-F47E7E67D768}"/>
+                </a:ext>
+              </a:extLst>
+            </p:cNvPr>
+            <p:cNvSpPr txBox="1"/>
+            <p:nvPr/>
+          </p:nvSpPr>
+          <p:spPr>
+            <a:xfrm>
+              <a:off x="8279432" y="374979"/>
+              <a:ext cx="659482" cy="272188"/>
+            </a:xfrm>
+            <a:prstGeom prst="rect">
+              <a:avLst/>
+            </a:prstGeom>
+            <a:noFill/>
+            <a:ln>
+              <a:noFill/>
+            </a:ln>
+          </p:spPr>
+          <p:txBody>
+            <a:bodyPr spcFirstLastPara="1" wrap="square" lIns="91425" tIns="45700" rIns="91425" bIns="45700" anchor="t" anchorCtr="0">
+              <a:spAutoFit/>
+            </a:bodyPr>
+            <a:lstStyle/>
+            <a:p>
+              <a:pPr marL="0" marR="0" lvl="0" indent="0" algn="l" rtl="0">
+                <a:lnSpc>
+                  <a:spcPct val="100000"/>
+                </a:lnSpc>
+                <a:spcBef>
+                  <a:spcPts val="0"/>
+                </a:spcBef>
+                <a:spcAft>
+                  <a:spcPts val="0"/>
+                </a:spcAft>
+                <a:buClr>
+                  <a:schemeClr val="lt1"/>
+                </a:buClr>
+                <a:buSzPts val="800"/>
+                <a:buFont typeface="PT Sans"/>
+                <a:buNone/>
+              </a:pPr>
+              <a:r>
+                <a:rPr lang="ru-RU" sz="800" b="0">
+                  <a:solidFill>
+                    <a:schemeClr val="lt1"/>
+                  </a:solidFill>
+                  <a:latin typeface="PT Sans" panose="020B0503020203020204" pitchFamily="34" charset="0"/>
+                  <a:ea typeface="PT Sans"/>
+                  <a:cs typeface="PT Sans"/>
+                  <a:sym typeface="PT Sans"/>
+                </a:rPr>
+                <a:t>370</a:t>
+              </a:r>
+              <a:endParaRPr>
+                <a:latin typeface="PT Sans" panose="020B0503020203020204" pitchFamily="34" charset="0"/>
+              </a:endParaRPr>
+            </a:p>
+            <a:p>
+              <a:pPr marL="0" marR="0" lvl="0" indent="0" algn="l" rtl="0">
+                <a:lnSpc>
+                  <a:spcPct val="100000"/>
+                </a:lnSpc>
+                <a:spcBef>
+                  <a:spcPts val="0"/>
+                </a:spcBef>
+                <a:spcAft>
+                  <a:spcPts val="0"/>
+                </a:spcAft>
+                <a:buClr>
+                  <a:schemeClr val="lt1"/>
+                </a:buClr>
+                <a:buSzPts val="800"/>
+                <a:buFont typeface="PT Sans"/>
+                <a:buNone/>
+              </a:pPr>
+              <a:r>
+                <a:rPr lang="ru-RU" sz="800" b="0" u="none" strike="noStrike" cap="none">
+                  <a:solidFill>
+                    <a:schemeClr val="lt1"/>
+                  </a:solidFill>
+                  <a:latin typeface="PT Sans" panose="020B0503020203020204" pitchFamily="34" charset="0"/>
+                  <a:ea typeface="PT Sans"/>
+                  <a:cs typeface="PT Sans"/>
+                  <a:sym typeface="PT Sans"/>
+                </a:rPr>
+                <a:t>13</a:t>
+              </a:r>
+              <a:endParaRPr sz="800" b="0" u="none" strike="noStrike" cap="none">
+                <a:solidFill>
+                  <a:schemeClr val="lt1"/>
+                </a:solidFill>
+                <a:latin typeface="PT Sans" panose="020B0503020203020204" pitchFamily="34" charset="0"/>
+                <a:ea typeface="PT Sans"/>
+                <a:cs typeface="PT Sans"/>
+                <a:sym typeface="PT Sans"/>
+              </a:endParaRPr>
+            </a:p>
+          </p:txBody>
+        </p:sp>
+        <p:sp>
+          <p:nvSpPr>
+            <p:cNvPr id="17" name="Google Shape;139;p5">
+              <a:extLst>
+                <a:ext uri="{FF2B5EF4-FFF2-40B4-BE49-F238E27FC236}">
+                  <a16:creationId xmlns:a16="http://schemas.microsoft.com/office/drawing/2014/main" id="{A28DBFF6-9F47-6244-B20A-895959377BC2}"/>
+                </a:ext>
+              </a:extLst>
+            </p:cNvPr>
+            <p:cNvSpPr txBox="1"/>
+            <p:nvPr/>
+          </p:nvSpPr>
+          <p:spPr>
+            <a:xfrm>
+              <a:off x="8279432" y="71442"/>
+              <a:ext cx="659482" cy="272188"/>
+            </a:xfrm>
+            <a:prstGeom prst="rect">
+              <a:avLst/>
+            </a:prstGeom>
+            <a:noFill/>
+            <a:ln>
+              <a:noFill/>
+            </a:ln>
+          </p:spPr>
+          <p:txBody>
+            <a:bodyPr spcFirstLastPara="1" wrap="square" lIns="91425" tIns="45700" rIns="91425" bIns="45700" anchor="t" anchorCtr="0">
+              <a:spAutoFit/>
+            </a:bodyPr>
+            <a:lstStyle/>
+            <a:p>
+              <a:pPr marL="0" marR="0" lvl="0" indent="0" algn="l" rtl="0">
+                <a:lnSpc>
+                  <a:spcPct val="100000"/>
+                </a:lnSpc>
+                <a:spcBef>
+                  <a:spcPts val="0"/>
+                </a:spcBef>
+                <a:spcAft>
+                  <a:spcPts val="0"/>
+                </a:spcAft>
+                <a:buClr>
+                  <a:schemeClr val="lt1"/>
+                </a:buClr>
+                <a:buSzPts val="800"/>
+                <a:buFont typeface="PT Sans"/>
+                <a:buNone/>
+              </a:pPr>
+              <a:r>
+                <a:rPr lang="ru-RU" sz="800" b="0">
+                  <a:solidFill>
+                    <a:schemeClr val="lt1"/>
+                  </a:solidFill>
+                  <a:latin typeface="PT Sans" panose="020B0503020203020204" pitchFamily="34" charset="0"/>
+                  <a:ea typeface="PT Sans"/>
+                  <a:cs typeface="PT Sans"/>
+                  <a:sym typeface="PT Sans"/>
+                </a:rPr>
+                <a:t>601-800</a:t>
+              </a:r>
+              <a:endParaRPr>
+                <a:latin typeface="PT Sans" panose="020B0503020203020204" pitchFamily="34" charset="0"/>
+              </a:endParaRPr>
+            </a:p>
+            <a:p>
+              <a:pPr marL="0" marR="0" lvl="0" indent="0" algn="l" rtl="0">
+                <a:lnSpc>
+                  <a:spcPct val="100000"/>
+                </a:lnSpc>
+                <a:spcBef>
+                  <a:spcPts val="0"/>
+                </a:spcBef>
+                <a:spcAft>
+                  <a:spcPts val="0"/>
+                </a:spcAft>
+                <a:buClr>
+                  <a:schemeClr val="lt1"/>
+                </a:buClr>
+                <a:buSzPts val="800"/>
+                <a:buFont typeface="PT Sans"/>
+                <a:buNone/>
+              </a:pPr>
+              <a:r>
+                <a:rPr lang="ru-RU" sz="800" b="0" u="none" strike="noStrike" cap="none">
+                  <a:solidFill>
+                    <a:schemeClr val="lt1"/>
+                  </a:solidFill>
+                  <a:latin typeface="PT Sans" panose="020B0503020203020204" pitchFamily="34" charset="0"/>
+                  <a:ea typeface="PT Sans"/>
+                  <a:cs typeface="PT Sans"/>
+                  <a:sym typeface="PT Sans"/>
+                </a:rPr>
+                <a:t>9</a:t>
+              </a:r>
+              <a:endParaRPr sz="800" b="0" u="none" strike="noStrike" cap="none">
+                <a:solidFill>
+                  <a:schemeClr val="lt1"/>
+                </a:solidFill>
+                <a:latin typeface="PT Sans" panose="020B0503020203020204" pitchFamily="34" charset="0"/>
+                <a:ea typeface="PT Sans"/>
+                <a:cs typeface="PT Sans"/>
+                <a:sym typeface="PT Sans"/>
+              </a:endParaRPr>
+            </a:p>
+          </p:txBody>
+        </p:sp>
+      </p:grpSp>
+      <p:sp>
+        <p:nvSpPr>
+          <p:cNvPr id="19" name="Объект 2">
+            <a:extLst>
+              <a:ext uri="{FF2B5EF4-FFF2-40B4-BE49-F238E27FC236}">
+                <a16:creationId xmlns:a16="http://schemas.microsoft.com/office/drawing/2014/main" id="{30C61546-9215-4D0C-81CB-5EE3A5637E25}"/>
+              </a:ext>
+            </a:extLst>
+          </p:cNvPr>
+          <p:cNvSpPr>
+            <a:spLocks noGrp="1"/>
+          </p:cNvSpPr>
+          <p:nvPr>
+            <p:ph idx="1"/>
+          </p:nvPr>
+        </p:nvSpPr>
+        <p:spPr>
+          <a:xfrm>
+            <a:off x="183023" y="1223234"/>
+            <a:ext cx="11423283" cy="5677647"/>
+          </a:xfrm>
+        </p:spPr>
+        <p:txBody>
+          <a:bodyPr numCol="1">
+            <a:normAutofit/>
+          </a:bodyPr>
+          <a:lstStyle/>
+          <a:p>
+            <a:pPr marL="0" indent="0" algn="just">
+              <a:buNone/>
+            </a:pPr>
+            <a:r>
+              <a:rPr lang="en-US" sz="2000" i="1" dirty="0">
+                <a:latin typeface="Cambria Math" panose="02040503050406030204" pitchFamily="18" charset="0"/>
+                <a:ea typeface="Cambria Math" panose="02040503050406030204" pitchFamily="18" charset="0"/>
+              </a:rPr>
+              <a:t>library(</a:t>
+            </a:r>
+            <a:r>
+              <a:rPr lang="en-US" sz="2000" i="1" dirty="0" err="1">
+                <a:latin typeface="Cambria Math" panose="02040503050406030204" pitchFamily="18" charset="0"/>
+                <a:ea typeface="Cambria Math" panose="02040503050406030204" pitchFamily="18" charset="0"/>
+              </a:rPr>
+              <a:t>pROC</a:t>
+            </a:r>
+            <a:r>
+              <a:rPr lang="en-US" sz="2000" i="1" dirty="0">
+                <a:latin typeface="Cambria Math" panose="02040503050406030204" pitchFamily="18" charset="0"/>
+                <a:ea typeface="Cambria Math" panose="02040503050406030204" pitchFamily="18" charset="0"/>
+              </a:rPr>
+              <a:t>)</a:t>
+            </a:r>
+          </a:p>
+          <a:p>
+            <a:pPr marL="0" indent="0" algn="just">
+              <a:buNone/>
+            </a:pPr>
+            <a:endParaRPr lang="en-US" sz="2000" i="1" dirty="0">
+              <a:latin typeface="Cambria Math" panose="02040503050406030204" pitchFamily="18" charset="0"/>
+              <a:ea typeface="Cambria Math" panose="02040503050406030204" pitchFamily="18" charset="0"/>
+            </a:endParaRPr>
+          </a:p>
+          <a:p>
+            <a:pPr marL="0" indent="0" algn="just">
+              <a:buNone/>
+            </a:pPr>
+            <a:r>
+              <a:rPr lang="en-US" sz="2000" i="1" dirty="0" err="1">
+                <a:latin typeface="Cambria Math" panose="02040503050406030204" pitchFamily="18" charset="0"/>
+                <a:ea typeface="Cambria Math" panose="02040503050406030204" pitchFamily="18" charset="0"/>
+              </a:rPr>
+              <a:t>test_prob</a:t>
+            </a:r>
+            <a:r>
+              <a:rPr lang="en-US" sz="2000" i="1" dirty="0">
+                <a:latin typeface="Cambria Math" panose="02040503050406030204" pitchFamily="18" charset="0"/>
+                <a:ea typeface="Cambria Math" panose="02040503050406030204" pitchFamily="18" charset="0"/>
+              </a:rPr>
+              <a:t> &lt;- predict(</a:t>
+            </a:r>
+            <a:r>
+              <a:rPr lang="en-US" sz="2000" i="1" dirty="0" err="1">
+                <a:latin typeface="Cambria Math" panose="02040503050406030204" pitchFamily="18" charset="0"/>
+                <a:ea typeface="Cambria Math" panose="02040503050406030204" pitchFamily="18" charset="0"/>
+              </a:rPr>
+              <a:t>rf_full</a:t>
+            </a:r>
+            <a:r>
+              <a:rPr lang="en-US" sz="2000" i="1" dirty="0">
+                <a:latin typeface="Cambria Math" panose="02040503050406030204" pitchFamily="18" charset="0"/>
+                <a:ea typeface="Cambria Math" panose="02040503050406030204" pitchFamily="18" charset="0"/>
+              </a:rPr>
+              <a:t>, </a:t>
+            </a:r>
+            <a:r>
+              <a:rPr lang="en-US" sz="2000" i="1" dirty="0" err="1">
+                <a:latin typeface="Cambria Math" panose="02040503050406030204" pitchFamily="18" charset="0"/>
+                <a:ea typeface="Cambria Math" panose="02040503050406030204" pitchFamily="18" charset="0"/>
+              </a:rPr>
+              <a:t>newdata</a:t>
+            </a:r>
+            <a:r>
+              <a:rPr lang="en-US" sz="2000" i="1" dirty="0">
+                <a:latin typeface="Cambria Math" panose="02040503050406030204" pitchFamily="18" charset="0"/>
+                <a:ea typeface="Cambria Math" panose="02040503050406030204" pitchFamily="18" charset="0"/>
+              </a:rPr>
+              <a:t> = test, type = "prob")[, "1"]</a:t>
+            </a:r>
+          </a:p>
+          <a:p>
+            <a:pPr marL="0" indent="0" algn="just">
+              <a:buNone/>
+            </a:pPr>
+            <a:r>
+              <a:rPr lang="en-US" sz="2000" i="1" dirty="0" err="1">
+                <a:latin typeface="Cambria Math" panose="02040503050406030204" pitchFamily="18" charset="0"/>
+                <a:ea typeface="Cambria Math" panose="02040503050406030204" pitchFamily="18" charset="0"/>
+              </a:rPr>
+              <a:t>test_pred</a:t>
+            </a:r>
+            <a:r>
+              <a:rPr lang="en-US" sz="2000" i="1" dirty="0">
+                <a:latin typeface="Cambria Math" panose="02040503050406030204" pitchFamily="18" charset="0"/>
+                <a:ea typeface="Cambria Math" panose="02040503050406030204" pitchFamily="18" charset="0"/>
+              </a:rPr>
+              <a:t> &lt;- </a:t>
+            </a:r>
+            <a:r>
+              <a:rPr lang="en-US" sz="2000" i="1" dirty="0" err="1">
+                <a:latin typeface="Cambria Math" panose="02040503050406030204" pitchFamily="18" charset="0"/>
+                <a:ea typeface="Cambria Math" panose="02040503050406030204" pitchFamily="18" charset="0"/>
+              </a:rPr>
+              <a:t>ifelse</a:t>
+            </a:r>
+            <a:r>
+              <a:rPr lang="en-US" sz="2000" i="1" dirty="0">
+                <a:latin typeface="Cambria Math" panose="02040503050406030204" pitchFamily="18" charset="0"/>
+                <a:ea typeface="Cambria Math" panose="02040503050406030204" pitchFamily="18" charset="0"/>
+              </a:rPr>
+              <a:t>(</a:t>
+            </a:r>
+            <a:r>
+              <a:rPr lang="en-US" sz="2000" i="1" dirty="0" err="1">
+                <a:latin typeface="Cambria Math" panose="02040503050406030204" pitchFamily="18" charset="0"/>
+                <a:ea typeface="Cambria Math" panose="02040503050406030204" pitchFamily="18" charset="0"/>
+              </a:rPr>
+              <a:t>test_prob</a:t>
+            </a:r>
+            <a:r>
+              <a:rPr lang="en-US" sz="2000" i="1" dirty="0">
+                <a:latin typeface="Cambria Math" panose="02040503050406030204" pitchFamily="18" charset="0"/>
+                <a:ea typeface="Cambria Math" panose="02040503050406030204" pitchFamily="18" charset="0"/>
+              </a:rPr>
+              <a:t> &gt; 0.5, 1, 0)</a:t>
+            </a:r>
+          </a:p>
+          <a:p>
+            <a:pPr marL="0" indent="0" algn="just">
+              <a:buNone/>
+            </a:pPr>
+            <a:endParaRPr lang="en-US" sz="2000" i="1" dirty="0">
+              <a:latin typeface="Cambria Math" panose="02040503050406030204" pitchFamily="18" charset="0"/>
+              <a:ea typeface="Cambria Math" panose="02040503050406030204" pitchFamily="18" charset="0"/>
+            </a:endParaRPr>
+          </a:p>
+          <a:p>
+            <a:pPr marL="0" indent="0" algn="just">
+              <a:buNone/>
+            </a:pPr>
+            <a:r>
+              <a:rPr lang="en-US" sz="2000" i="1" dirty="0">
+                <a:latin typeface="Cambria Math" panose="02040503050406030204" pitchFamily="18" charset="0"/>
+                <a:ea typeface="Cambria Math" panose="02040503050406030204" pitchFamily="18" charset="0"/>
+              </a:rPr>
+              <a:t>cm &lt;- table(pred = </a:t>
+            </a:r>
+            <a:r>
+              <a:rPr lang="en-US" sz="2000" i="1" dirty="0" err="1">
+                <a:latin typeface="Cambria Math" panose="02040503050406030204" pitchFamily="18" charset="0"/>
+                <a:ea typeface="Cambria Math" panose="02040503050406030204" pitchFamily="18" charset="0"/>
+              </a:rPr>
+              <a:t>test_pred</a:t>
+            </a:r>
+            <a:r>
+              <a:rPr lang="en-US" sz="2000" i="1" dirty="0">
+                <a:latin typeface="Cambria Math" panose="02040503050406030204" pitchFamily="18" charset="0"/>
+                <a:ea typeface="Cambria Math" panose="02040503050406030204" pitchFamily="18" charset="0"/>
+              </a:rPr>
+              <a:t>, true = </a:t>
+            </a:r>
+            <a:r>
+              <a:rPr lang="en-US" sz="2000" i="1" dirty="0" err="1">
+                <a:latin typeface="Cambria Math" panose="02040503050406030204" pitchFamily="18" charset="0"/>
+                <a:ea typeface="Cambria Math" panose="02040503050406030204" pitchFamily="18" charset="0"/>
+              </a:rPr>
+              <a:t>test$diabetes</a:t>
+            </a:r>
+            <a:r>
+              <a:rPr lang="en-US" sz="2000" i="1" dirty="0">
+                <a:latin typeface="Cambria Math" panose="02040503050406030204" pitchFamily="18" charset="0"/>
+                <a:ea typeface="Cambria Math" panose="02040503050406030204" pitchFamily="18" charset="0"/>
+              </a:rPr>
+              <a:t>)</a:t>
+            </a:r>
+          </a:p>
+          <a:p>
+            <a:pPr marL="0" indent="0" algn="just">
+              <a:buNone/>
+            </a:pPr>
+            <a:endParaRPr lang="en-US" sz="2000" i="1" dirty="0">
+              <a:latin typeface="Cambria Math" panose="02040503050406030204" pitchFamily="18" charset="0"/>
+              <a:ea typeface="Cambria Math" panose="02040503050406030204" pitchFamily="18" charset="0"/>
+            </a:endParaRPr>
+          </a:p>
+          <a:p>
+            <a:pPr marL="0" indent="0" algn="just">
+              <a:buNone/>
+            </a:pPr>
+            <a:r>
+              <a:rPr lang="en-US" sz="2000" i="1" dirty="0">
+                <a:latin typeface="Cambria Math" panose="02040503050406030204" pitchFamily="18" charset="0"/>
+                <a:ea typeface="Cambria Math" panose="02040503050406030204" pitchFamily="18" charset="0"/>
+              </a:rPr>
+              <a:t>accuracy &lt;- sum(</a:t>
+            </a:r>
+            <a:r>
+              <a:rPr lang="en-US" sz="2000" i="1" dirty="0" err="1">
+                <a:latin typeface="Cambria Math" panose="02040503050406030204" pitchFamily="18" charset="0"/>
+                <a:ea typeface="Cambria Math" panose="02040503050406030204" pitchFamily="18" charset="0"/>
+              </a:rPr>
+              <a:t>diag</a:t>
+            </a:r>
+            <a:r>
+              <a:rPr lang="en-US" sz="2000" i="1" dirty="0">
+                <a:latin typeface="Cambria Math" panose="02040503050406030204" pitchFamily="18" charset="0"/>
+                <a:ea typeface="Cambria Math" panose="02040503050406030204" pitchFamily="18" charset="0"/>
+              </a:rPr>
+              <a:t>(cm)) / sum(cm)</a:t>
+            </a:r>
+          </a:p>
+          <a:p>
+            <a:pPr marL="0" indent="0" algn="just">
+              <a:buNone/>
+            </a:pPr>
+            <a:endParaRPr lang="en-US" sz="2000" i="1" dirty="0">
+              <a:latin typeface="Cambria Math" panose="02040503050406030204" pitchFamily="18" charset="0"/>
+              <a:ea typeface="Cambria Math" panose="02040503050406030204" pitchFamily="18" charset="0"/>
+            </a:endParaRPr>
+          </a:p>
+          <a:p>
+            <a:pPr marL="0" indent="0" algn="just">
+              <a:buNone/>
+            </a:pPr>
+            <a:r>
+              <a:rPr lang="en-US" sz="2000" i="1" dirty="0" err="1">
+                <a:latin typeface="Cambria Math" panose="02040503050406030204" pitchFamily="18" charset="0"/>
+                <a:ea typeface="Cambria Math" panose="02040503050406030204" pitchFamily="18" charset="0"/>
+              </a:rPr>
+              <a:t>roc_obj</a:t>
+            </a:r>
+            <a:r>
+              <a:rPr lang="en-US" sz="2000" i="1" dirty="0">
+                <a:latin typeface="Cambria Math" panose="02040503050406030204" pitchFamily="18" charset="0"/>
+                <a:ea typeface="Cambria Math" panose="02040503050406030204" pitchFamily="18" charset="0"/>
+              </a:rPr>
+              <a:t> &lt;- roc(</a:t>
+            </a:r>
+            <a:r>
+              <a:rPr lang="en-US" sz="2000" i="1" dirty="0" err="1">
+                <a:latin typeface="Cambria Math" panose="02040503050406030204" pitchFamily="18" charset="0"/>
+                <a:ea typeface="Cambria Math" panose="02040503050406030204" pitchFamily="18" charset="0"/>
+              </a:rPr>
+              <a:t>test$diabetes</a:t>
+            </a:r>
+            <a:r>
+              <a:rPr lang="en-US" sz="2000" i="1" dirty="0">
+                <a:latin typeface="Cambria Math" panose="02040503050406030204" pitchFamily="18" charset="0"/>
+                <a:ea typeface="Cambria Math" panose="02040503050406030204" pitchFamily="18" charset="0"/>
+              </a:rPr>
+              <a:t>, </a:t>
+            </a:r>
+            <a:r>
+              <a:rPr lang="en-US" sz="2000" i="1" dirty="0" err="1">
+                <a:latin typeface="Cambria Math" panose="02040503050406030204" pitchFamily="18" charset="0"/>
+                <a:ea typeface="Cambria Math" panose="02040503050406030204" pitchFamily="18" charset="0"/>
+              </a:rPr>
+              <a:t>test_prob</a:t>
+            </a:r>
+            <a:r>
+              <a:rPr lang="en-US" sz="2000" i="1" dirty="0">
+                <a:latin typeface="Cambria Math" panose="02040503050406030204" pitchFamily="18" charset="0"/>
+                <a:ea typeface="Cambria Math" panose="02040503050406030204" pitchFamily="18" charset="0"/>
+              </a:rPr>
+              <a:t>)</a:t>
+            </a:r>
+          </a:p>
+          <a:p>
+            <a:pPr marL="0" indent="0" algn="just">
+              <a:buNone/>
+            </a:pPr>
+            <a:r>
+              <a:rPr lang="en-US" sz="2000" i="1" dirty="0" err="1">
+                <a:latin typeface="Cambria Math" panose="02040503050406030204" pitchFamily="18" charset="0"/>
+                <a:ea typeface="Cambria Math" panose="02040503050406030204" pitchFamily="18" charset="0"/>
+              </a:rPr>
+              <a:t>auc_val</a:t>
+            </a:r>
+            <a:r>
+              <a:rPr lang="en-US" sz="2000" i="1" dirty="0">
+                <a:latin typeface="Cambria Math" panose="02040503050406030204" pitchFamily="18" charset="0"/>
+                <a:ea typeface="Cambria Math" panose="02040503050406030204" pitchFamily="18" charset="0"/>
+              </a:rPr>
+              <a:t> &lt;- </a:t>
+            </a:r>
+            <a:r>
+              <a:rPr lang="en-US" sz="2000" i="1" dirty="0" err="1">
+                <a:latin typeface="Cambria Math" panose="02040503050406030204" pitchFamily="18" charset="0"/>
+                <a:ea typeface="Cambria Math" panose="02040503050406030204" pitchFamily="18" charset="0"/>
+              </a:rPr>
+              <a:t>auc</a:t>
+            </a:r>
+            <a:r>
+              <a:rPr lang="en-US" sz="2000" i="1" dirty="0">
+                <a:latin typeface="Cambria Math" panose="02040503050406030204" pitchFamily="18" charset="0"/>
+                <a:ea typeface="Cambria Math" panose="02040503050406030204" pitchFamily="18" charset="0"/>
+              </a:rPr>
+              <a:t>(</a:t>
+            </a:r>
+            <a:r>
+              <a:rPr lang="en-US" sz="2000" i="1" dirty="0" err="1">
+                <a:latin typeface="Cambria Math" panose="02040503050406030204" pitchFamily="18" charset="0"/>
+                <a:ea typeface="Cambria Math" panose="02040503050406030204" pitchFamily="18" charset="0"/>
+              </a:rPr>
+              <a:t>roc_obj</a:t>
+            </a:r>
+            <a:r>
+              <a:rPr lang="en-US" sz="2000" i="1" dirty="0">
+                <a:latin typeface="Cambria Math" panose="02040503050406030204" pitchFamily="18" charset="0"/>
+                <a:ea typeface="Cambria Math" panose="02040503050406030204" pitchFamily="18" charset="0"/>
+              </a:rPr>
+              <a:t>)</a:t>
+            </a:r>
+          </a:p>
+        </p:txBody>
+      </p:sp>
+    </p:spTree>
+    <p:extLst>
+      <p:ext uri="{BB962C8B-B14F-4D97-AF65-F5344CB8AC3E}">
+        <p14:creationId xmlns:p14="http://schemas.microsoft.com/office/powerpoint/2010/main" val="1517142456"/>
+      </p:ext>
+    </p:extLst>
+  </p:cSld>
+  <p:clrMapOvr>
+    <a:masterClrMapping/>
+  </p:clrMapOvr>
+</p:sld>
+</file>
+
+<file path=ppt/slides/slide13.xml><?xml version="1.0" encoding="utf-8"?>
+<p:sld xmlns:a="http://schemas.openxmlformats.org/drawingml/2006/main" xmlns:r="http://schemas.openxmlformats.org/officeDocument/2006/relationships" xmlns:p="http://schemas.openxmlformats.org/presentationml/2006/main">
+  <p:cSld>
+    <p:spTree>
+      <p:nvGrpSpPr>
+        <p:cNvPr id="1" name=""/>
+        <p:cNvGrpSpPr/>
+        <p:nvPr/>
+      </p:nvGrpSpPr>
+      <p:grpSpPr>
+        <a:xfrm>
+          <a:off x="0" y="0"/>
+          <a:ext cx="0" cy="0"/>
+          <a:chOff x="0" y="0"/>
+          <a:chExt cx="0" cy="0"/>
+        </a:xfrm>
+      </p:grpSpPr>
+      <p:sp>
+        <p:nvSpPr>
+          <p:cNvPr id="13" name="Номер слайда 12"/>
+          <p:cNvSpPr>
+            <a:spLocks noGrp="1"/>
+          </p:cNvSpPr>
+          <p:nvPr>
+            <p:ph type="sldNum" sz="quarter" idx="12"/>
+          </p:nvPr>
+        </p:nvSpPr>
+        <p:spPr>
+          <a:xfrm>
+            <a:off x="9274478" y="6356350"/>
+            <a:ext cx="2743200" cy="365125"/>
+          </a:xfrm>
+        </p:spPr>
+        <p:txBody>
+          <a:bodyPr/>
+          <a:lstStyle/>
+          <a:p>
+            <a:fld id="{B19B0651-EE4F-4900-A07F-96A6BFA9D0F0}" type="slidenum">
+              <a:rPr lang="ru-RU" smtClean="0">
+                <a:latin typeface="PT Sans" panose="020B0503020203020204" pitchFamily="34" charset="0"/>
+              </a:rPr>
+              <a:pPr/>
+              <a:t>13</a:t>
             </a:fld>
             <a:endParaRPr lang="ru-RU" dirty="0">
               <a:latin typeface="PT Sans" panose="020B0503020203020204" pitchFamily="34" charset="0"/>
@@ -6196,7 +8904,7 @@
 </p:sld>
 </file>
 
-<file path=ppt/slides/slide11.xml><?xml version="1.0" encoding="utf-8"?>
+<file path=ppt/slides/slide14.xml><?xml version="1.0" encoding="utf-8"?>
 <p:sld xmlns:a="http://schemas.openxmlformats.org/drawingml/2006/main" xmlns:r="http://schemas.openxmlformats.org/officeDocument/2006/relationships" xmlns:p="http://schemas.openxmlformats.org/presentationml/2006/main">
   <p:cSld>
     <p:spTree>
@@ -6238,7 +8946,7 @@
                 <a:latin typeface="PT Sans" panose="020B0503020203020204" pitchFamily="34" charset="0"/>
               </a:rPr>
               <a:pPr/>
-              <a:t>11</a:t>
+              <a:t>14</a:t>
             </a:fld>
             <a:endParaRPr lang="ru-RU" dirty="0">
               <a:latin typeface="PT Sans" panose="020B0503020203020204" pitchFamily="34" charset="0"/>
@@ -6855,7 +9563,7 @@
 </p:sld>
 </file>
 
-<file path=ppt/slides/slide12.xml><?xml version="1.0" encoding="utf-8"?>
+<file path=ppt/slides/slide15.xml><?xml version="1.0" encoding="utf-8"?>
 <p:sld xmlns:a="http://schemas.openxmlformats.org/drawingml/2006/main" xmlns:r="http://schemas.openxmlformats.org/officeDocument/2006/relationships" xmlns:p="http://schemas.openxmlformats.org/presentationml/2006/main">
   <p:cSld>
     <p:spTree>
@@ -6897,7 +9605,7 @@
                 <a:latin typeface="PT Sans" panose="020B0503020203020204" pitchFamily="34" charset="0"/>
               </a:rPr>
               <a:pPr/>
-              <a:t>12</a:t>
+              <a:t>15</a:t>
             </a:fld>
             <a:endParaRPr lang="ru-RU" dirty="0">
               <a:latin typeface="PT Sans" panose="020B0503020203020204" pitchFamily="34" charset="0"/>
@@ -7426,7 +10134,7 @@
 </p:sld>
 </file>
 
-<file path=ppt/slides/slide13.xml><?xml version="1.0" encoding="utf-8"?>
+<file path=ppt/slides/slide16.xml><?xml version="1.0" encoding="utf-8"?>
 <p:sld xmlns:a="http://schemas.openxmlformats.org/drawingml/2006/main" xmlns:r="http://schemas.openxmlformats.org/officeDocument/2006/relationships" xmlns:p="http://schemas.openxmlformats.org/presentationml/2006/main">
   <p:cSld>
     <p:spTree>
@@ -7468,7 +10176,7 @@
                 <a:latin typeface="PT Sans" panose="020B0503020203020204" pitchFamily="34" charset="0"/>
               </a:rPr>
               <a:pPr/>
-              <a:t>13</a:t>
+              <a:t>16</a:t>
             </a:fld>
             <a:endParaRPr lang="ru-RU" dirty="0">
               <a:latin typeface="PT Sans" panose="020B0503020203020204" pitchFamily="34" charset="0"/>
@@ -8523,7 +11231,7 @@
 </p:sld>
 </file>
 
-<file path=ppt/slides/slide14.xml><?xml version="1.0" encoding="utf-8"?>
+<file path=ppt/slides/slide17.xml><?xml version="1.0" encoding="utf-8"?>
 <p:sld xmlns:a="http://schemas.openxmlformats.org/drawingml/2006/main" xmlns:r="http://schemas.openxmlformats.org/officeDocument/2006/relationships" xmlns:p="http://schemas.openxmlformats.org/presentationml/2006/main">
   <p:cSld>
     <p:spTree>
@@ -8565,7 +11273,7 @@
                 <a:latin typeface="PT Sans" panose="020B0503020203020204" pitchFamily="34" charset="0"/>
               </a:rPr>
               <a:pPr/>
-              <a:t>14</a:t>
+              <a:t>17</a:t>
             </a:fld>
             <a:endParaRPr lang="ru-RU" dirty="0">
               <a:latin typeface="PT Sans" panose="020B0503020203020204" pitchFamily="34" charset="0"/>
@@ -9195,7 +11903,7 @@
 </p:sld>
 </file>
 
-<file path=ppt/slides/slide15.xml><?xml version="1.0" encoding="utf-8"?>
+<file path=ppt/slides/slide18.xml><?xml version="1.0" encoding="utf-8"?>
 <p:sld xmlns:a="http://schemas.openxmlformats.org/drawingml/2006/main" xmlns:r="http://schemas.openxmlformats.org/officeDocument/2006/relationships" xmlns:p="http://schemas.openxmlformats.org/presentationml/2006/main">
   <p:cSld>
     <p:spTree>
@@ -9237,7 +11945,7 @@
                 <a:latin typeface="PT Sans" panose="020B0503020203020204" pitchFamily="34" charset="0"/>
               </a:rPr>
               <a:pPr/>
-              <a:t>15</a:t>
+              <a:t>18</a:t>
             </a:fld>
             <a:endParaRPr lang="ru-RU" dirty="0">
               <a:latin typeface="PT Sans" panose="020B0503020203020204" pitchFamily="34" charset="0"/>
@@ -9967,7 +12675,7 @@
 </p:sld>
 </file>
 
-<file path=ppt/slides/slide16.xml><?xml version="1.0" encoding="utf-8"?>
+<file path=ppt/slides/slide19.xml><?xml version="1.0" encoding="utf-8"?>
 <p:sld xmlns:a="http://schemas.openxmlformats.org/drawingml/2006/main" xmlns:r="http://schemas.openxmlformats.org/officeDocument/2006/relationships" xmlns:p="http://schemas.openxmlformats.org/presentationml/2006/main">
   <p:cSld>
     <p:spTree>
@@ -10039,7 +12747,7 @@
                 <a:latin typeface="PT Sans" panose="020B0503020203020204" pitchFamily="34" charset="0"/>
               </a:rPr>
               <a:pPr/>
-              <a:t>16</a:t>
+              <a:t>19</a:t>
             </a:fld>
             <a:endParaRPr lang="ru-RU" dirty="0">
               <a:latin typeface="PT Sans" panose="020B0503020203020204" pitchFamily="34" charset="0"/>
@@ -10606,7 +13314,21 @@
                 <a:effectLst/>
                 <a:latin typeface="pplxSerif"/>
               </a:rPr>
-              <a:t>Модель с топ‑10 признаками:</a:t>
+              <a:t>Модель с топ‑</a:t>
+            </a:r>
+            <a:r>
+              <a:rPr lang="en-US" b="0" i="0" dirty="0">
+                <a:effectLst/>
+                <a:latin typeface="pplxSerif"/>
+              </a:rPr>
+              <a:t>5</a:t>
+            </a:r>
+            <a:r>
+              <a:rPr lang="ru-RU" b="0" i="0" dirty="0">
+                <a:effectLst/>
+                <a:latin typeface="pplxSerif"/>
+              </a:rPr>
+              <a:t> признаками:</a:t>
             </a:r>
           </a:p>
           <a:p>
@@ -10672,7 +13394,643 @@
 </p:sld>
 </file>
 
-<file path=ppt/slides/slide17.xml><?xml version="1.0" encoding="utf-8"?>
+<file path=ppt/slides/slide2.xml><?xml version="1.0" encoding="utf-8"?>
+<p:sld xmlns:a="http://schemas.openxmlformats.org/drawingml/2006/main" xmlns:r="http://schemas.openxmlformats.org/officeDocument/2006/relationships" xmlns:p="http://schemas.openxmlformats.org/presentationml/2006/main">
+  <p:cSld>
+    <p:spTree>
+      <p:nvGrpSpPr>
+        <p:cNvPr id="1" name=""/>
+        <p:cNvGrpSpPr/>
+        <p:nvPr/>
+      </p:nvGrpSpPr>
+      <p:grpSpPr>
+        <a:xfrm>
+          <a:off x="0" y="0"/>
+          <a:ext cx="0" cy="0"/>
+          <a:chOff x="0" y="0"/>
+          <a:chExt cx="0" cy="0"/>
+        </a:xfrm>
+      </p:grpSpPr>
+      <p:sp>
+        <p:nvSpPr>
+          <p:cNvPr id="13" name="Номер слайда 12"/>
+          <p:cNvSpPr>
+            <a:spLocks noGrp="1"/>
+          </p:cNvSpPr>
+          <p:nvPr>
+            <p:ph type="sldNum" sz="quarter" idx="12"/>
+          </p:nvPr>
+        </p:nvSpPr>
+        <p:spPr/>
+        <p:txBody>
+          <a:bodyPr/>
+          <a:lstStyle/>
+          <a:p>
+            <a:fld id="{B19B0651-EE4F-4900-A07F-96A6BFA9D0F0}" type="slidenum">
+              <a:rPr lang="ru-RU" smtClean="0">
+                <a:latin typeface="PT Sans" panose="020B0503020203020204" pitchFamily="34" charset="0"/>
+              </a:rPr>
+              <a:pPr/>
+              <a:t>2</a:t>
+            </a:fld>
+            <a:endParaRPr lang="ru-RU" dirty="0">
+              <a:latin typeface="PT Sans" panose="020B0503020203020204" pitchFamily="34" charset="0"/>
+            </a:endParaRPr>
+          </a:p>
+        </p:txBody>
+      </p:sp>
+      <p:grpSp>
+        <p:nvGrpSpPr>
+          <p:cNvPr id="24" name="Группа 23">
+            <a:extLst>
+              <a:ext uri="{FF2B5EF4-FFF2-40B4-BE49-F238E27FC236}">
+                <a16:creationId xmlns:a16="http://schemas.microsoft.com/office/drawing/2014/main" id="{98A76A24-00EA-EE42-8A4F-846D0D0A92B0}"/>
+              </a:ext>
+            </a:extLst>
+          </p:cNvPr>
+          <p:cNvGrpSpPr/>
+          <p:nvPr/>
+        </p:nvGrpSpPr>
+        <p:grpSpPr>
+          <a:xfrm>
+            <a:off x="-50" y="0"/>
+            <a:ext cx="827700" cy="6858000"/>
+            <a:chOff x="-50" y="0"/>
+            <a:chExt cx="827700" cy="5143500"/>
+          </a:xfrm>
+        </p:grpSpPr>
+        <p:sp>
+          <p:nvSpPr>
+            <p:cNvPr id="25" name="Google Shape;106;p3">
+              <a:extLst>
+                <a:ext uri="{FF2B5EF4-FFF2-40B4-BE49-F238E27FC236}">
+                  <a16:creationId xmlns:a16="http://schemas.microsoft.com/office/drawing/2014/main" id="{1212ABD6-BB78-564D-90F4-45A9BF52F65A}"/>
+                </a:ext>
+              </a:extLst>
+            </p:cNvPr>
+            <p:cNvSpPr/>
+            <p:nvPr/>
+          </p:nvSpPr>
+          <p:spPr>
+            <a:xfrm>
+              <a:off x="-50" y="0"/>
+              <a:ext cx="827700" cy="5143500"/>
+            </a:xfrm>
+            <a:prstGeom prst="rect">
+              <a:avLst/>
+            </a:prstGeom>
+            <a:gradFill>
+              <a:gsLst>
+                <a:gs pos="0">
+                  <a:srgbClr val="003061"/>
+                </a:gs>
+                <a:gs pos="50000">
+                  <a:srgbClr val="00468D"/>
+                </a:gs>
+                <a:gs pos="100000">
+                  <a:srgbClr val="0054AA"/>
+                </a:gs>
+              </a:gsLst>
+              <a:lin ang="5400000" scaled="0"/>
+            </a:gradFill>
+            <a:ln>
+              <a:noFill/>
+            </a:ln>
+          </p:spPr>
+          <p:txBody>
+            <a:bodyPr spcFirstLastPara="1" wrap="square" lIns="91425" tIns="45700" rIns="91425" bIns="45700" anchor="ctr" anchorCtr="0">
+              <a:noAutofit/>
+            </a:bodyPr>
+            <a:lstStyle/>
+            <a:p>
+              <a:pPr marL="0" marR="0" lvl="0" indent="0" algn="ctr" rtl="0">
+                <a:spcBef>
+                  <a:spcPts val="0"/>
+                </a:spcBef>
+                <a:spcAft>
+                  <a:spcPts val="0"/>
+                </a:spcAft>
+                <a:buNone/>
+              </a:pPr>
+              <a:endParaRPr sz="1800">
+                <a:solidFill>
+                  <a:schemeClr val="lt1"/>
+                </a:solidFill>
+                <a:latin typeface="PT Sans" panose="020B0503020203020204" pitchFamily="34" charset="0"/>
+                <a:ea typeface="Calibri"/>
+                <a:cs typeface="Calibri"/>
+                <a:sym typeface="Calibri"/>
+              </a:endParaRPr>
+            </a:p>
+          </p:txBody>
+        </p:sp>
+        <p:pic>
+          <p:nvPicPr>
+            <p:cNvPr id="28" name="Google Shape;107;p3" descr="C:\Users\MSShafigullin\Desktop\2020\Презентация КФУ\kfu_logo_circle_rus.png">
+              <a:extLst>
+                <a:ext uri="{FF2B5EF4-FFF2-40B4-BE49-F238E27FC236}">
+                  <a16:creationId xmlns:a16="http://schemas.microsoft.com/office/drawing/2014/main" id="{C968D678-6F52-2F45-8BE7-5E2313AF23D6}"/>
+                </a:ext>
+              </a:extLst>
+            </p:cNvPr>
+            <p:cNvPicPr preferRelativeResize="0"/>
+            <p:nvPr/>
+          </p:nvPicPr>
+          <p:blipFill rotWithShape="1">
+            <a:blip r:embed="rId3">
+              <a:alphaModFix/>
+            </a:blip>
+            <a:srcRect/>
+            <a:stretch/>
+          </p:blipFill>
+          <p:spPr>
+            <a:xfrm>
+              <a:off x="137267" y="87534"/>
+              <a:ext cx="553050" cy="432728"/>
+            </a:xfrm>
+            <a:prstGeom prst="rect">
+              <a:avLst/>
+            </a:prstGeom>
+            <a:noFill/>
+            <a:ln>
+              <a:noFill/>
+            </a:ln>
+          </p:spPr>
+        </p:pic>
+        <p:pic>
+          <p:nvPicPr>
+            <p:cNvPr id="30" name="Google Shape;109;p3" descr="C:\Users\MSShafigullin\Desktop\Проекты\Презентация по ДК\qs.jpg">
+              <a:extLst>
+                <a:ext uri="{FF2B5EF4-FFF2-40B4-BE49-F238E27FC236}">
+                  <a16:creationId xmlns:a16="http://schemas.microsoft.com/office/drawing/2014/main" id="{1F22E8DB-9008-9D4B-9E64-C397CC33A9DA}"/>
+                </a:ext>
+              </a:extLst>
+            </p:cNvPr>
+            <p:cNvPicPr preferRelativeResize="0"/>
+            <p:nvPr/>
+          </p:nvPicPr>
+          <p:blipFill rotWithShape="1">
+            <a:blip r:embed="rId4">
+              <a:alphaModFix/>
+            </a:blip>
+            <a:srcRect/>
+            <a:stretch/>
+          </p:blipFill>
+          <p:spPr>
+            <a:xfrm>
+              <a:off x="237087" y="4422472"/>
+              <a:ext cx="353386" cy="353386"/>
+            </a:xfrm>
+            <a:prstGeom prst="rect">
+              <a:avLst/>
+            </a:prstGeom>
+            <a:noFill/>
+            <a:ln>
+              <a:noFill/>
+            </a:ln>
+          </p:spPr>
+        </p:pic>
+        <p:pic>
+          <p:nvPicPr>
+            <p:cNvPr id="31" name="Google Shape;110;p3" descr="C:\Users\MSShafigullin\Desktop\2020\Презентация КФУ\THE.png">
+              <a:extLst>
+                <a:ext uri="{FF2B5EF4-FFF2-40B4-BE49-F238E27FC236}">
+                  <a16:creationId xmlns:a16="http://schemas.microsoft.com/office/drawing/2014/main" id="{5E9D660B-F40F-CB41-B4B6-62BD62C97A47}"/>
+                </a:ext>
+              </a:extLst>
+            </p:cNvPr>
+            <p:cNvPicPr preferRelativeResize="0"/>
+            <p:nvPr/>
+          </p:nvPicPr>
+          <p:blipFill rotWithShape="1">
+            <a:blip r:embed="rId5">
+              <a:alphaModFix/>
+            </a:blip>
+            <a:srcRect/>
+            <a:stretch/>
+          </p:blipFill>
+          <p:spPr>
+            <a:xfrm>
+              <a:off x="287779" y="3741120"/>
+              <a:ext cx="252000" cy="252000"/>
+            </a:xfrm>
+            <a:prstGeom prst="rect">
+              <a:avLst/>
+            </a:prstGeom>
+            <a:noFill/>
+            <a:ln>
+              <a:noFill/>
+            </a:ln>
+          </p:spPr>
+        </p:pic>
+        <p:sp>
+          <p:nvSpPr>
+            <p:cNvPr id="33" name="Google Shape;111;p3">
+              <a:extLst>
+                <a:ext uri="{FF2B5EF4-FFF2-40B4-BE49-F238E27FC236}">
+                  <a16:creationId xmlns:a16="http://schemas.microsoft.com/office/drawing/2014/main" id="{23A12878-4A5D-E648-A640-94DEA9532F72}"/>
+                </a:ext>
+              </a:extLst>
+            </p:cNvPr>
+            <p:cNvSpPr txBox="1"/>
+            <p:nvPr/>
+          </p:nvSpPr>
+          <p:spPr>
+            <a:xfrm>
+              <a:off x="84051" y="4728776"/>
+              <a:ext cx="659482" cy="253886"/>
+            </a:xfrm>
+            <a:prstGeom prst="rect">
+              <a:avLst/>
+            </a:prstGeom>
+            <a:noFill/>
+            <a:ln>
+              <a:noFill/>
+            </a:ln>
+          </p:spPr>
+          <p:txBody>
+            <a:bodyPr spcFirstLastPara="1" wrap="square" lIns="91425" tIns="45700" rIns="91425" bIns="45700" anchor="t" anchorCtr="0">
+              <a:spAutoFit/>
+            </a:bodyPr>
+            <a:lstStyle/>
+            <a:p>
+              <a:pPr marL="0" marR="0" lvl="0" indent="0" algn="ctr" rtl="0">
+                <a:lnSpc>
+                  <a:spcPct val="100000"/>
+                </a:lnSpc>
+                <a:spcBef>
+                  <a:spcPts val="0"/>
+                </a:spcBef>
+                <a:spcAft>
+                  <a:spcPts val="0"/>
+                </a:spcAft>
+                <a:buClr>
+                  <a:schemeClr val="lt1"/>
+                </a:buClr>
+                <a:buSzPts val="800"/>
+                <a:buFont typeface="PT Sans"/>
+                <a:buNone/>
+              </a:pPr>
+              <a:r>
+                <a:rPr lang="ru-RU" sz="800" b="0">
+                  <a:solidFill>
+                    <a:schemeClr val="lt1"/>
+                  </a:solidFill>
+                  <a:latin typeface="PT Sans" panose="020B0503020203020204" pitchFamily="34" charset="0"/>
+                  <a:ea typeface="PT Sans"/>
+                  <a:cs typeface="PT Sans"/>
+                  <a:sym typeface="PT Sans"/>
+                </a:rPr>
+                <a:t>370</a:t>
+              </a:r>
+              <a:endParaRPr>
+                <a:latin typeface="PT Sans" panose="020B0503020203020204" pitchFamily="34" charset="0"/>
+              </a:endParaRPr>
+            </a:p>
+            <a:p>
+              <a:pPr marL="0" marR="0" lvl="0" indent="0" algn="ctr" rtl="0">
+                <a:lnSpc>
+                  <a:spcPct val="100000"/>
+                </a:lnSpc>
+                <a:spcBef>
+                  <a:spcPts val="0"/>
+                </a:spcBef>
+                <a:spcAft>
+                  <a:spcPts val="0"/>
+                </a:spcAft>
+                <a:buClr>
+                  <a:schemeClr val="lt1"/>
+                </a:buClr>
+                <a:buSzPts val="800"/>
+                <a:buFont typeface="PT Sans"/>
+                <a:buNone/>
+              </a:pPr>
+              <a:r>
+                <a:rPr lang="ru-RU" sz="800" b="0" u="none" strike="noStrike" cap="none">
+                  <a:solidFill>
+                    <a:schemeClr val="lt1"/>
+                  </a:solidFill>
+                  <a:latin typeface="PT Sans" panose="020B0503020203020204" pitchFamily="34" charset="0"/>
+                  <a:ea typeface="PT Sans"/>
+                  <a:cs typeface="PT Sans"/>
+                  <a:sym typeface="PT Sans"/>
+                </a:rPr>
+                <a:t>13</a:t>
+              </a:r>
+              <a:endParaRPr sz="800" b="0" u="none" strike="noStrike" cap="none">
+                <a:solidFill>
+                  <a:schemeClr val="lt1"/>
+                </a:solidFill>
+                <a:latin typeface="PT Sans" panose="020B0503020203020204" pitchFamily="34" charset="0"/>
+                <a:ea typeface="PT Sans"/>
+                <a:cs typeface="PT Sans"/>
+                <a:sym typeface="PT Sans"/>
+              </a:endParaRPr>
+            </a:p>
+          </p:txBody>
+        </p:sp>
+        <p:sp>
+          <p:nvSpPr>
+            <p:cNvPr id="34" name="Google Shape;112;p3">
+              <a:extLst>
+                <a:ext uri="{FF2B5EF4-FFF2-40B4-BE49-F238E27FC236}">
+                  <a16:creationId xmlns:a16="http://schemas.microsoft.com/office/drawing/2014/main" id="{0525B736-A5F9-A04E-92B8-E50E60AAE2C0}"/>
+                </a:ext>
+              </a:extLst>
+            </p:cNvPr>
+            <p:cNvSpPr txBox="1"/>
+            <p:nvPr/>
+          </p:nvSpPr>
+          <p:spPr>
+            <a:xfrm>
+              <a:off x="84051" y="4083918"/>
+              <a:ext cx="659482" cy="253886"/>
+            </a:xfrm>
+            <a:prstGeom prst="rect">
+              <a:avLst/>
+            </a:prstGeom>
+            <a:noFill/>
+            <a:ln>
+              <a:noFill/>
+            </a:ln>
+          </p:spPr>
+          <p:txBody>
+            <a:bodyPr spcFirstLastPara="1" wrap="square" lIns="91425" tIns="45700" rIns="91425" bIns="45700" anchor="t" anchorCtr="0">
+              <a:spAutoFit/>
+            </a:bodyPr>
+            <a:lstStyle/>
+            <a:p>
+              <a:pPr marL="0" marR="0" lvl="0" indent="0" algn="ctr" rtl="0">
+                <a:lnSpc>
+                  <a:spcPct val="100000"/>
+                </a:lnSpc>
+                <a:spcBef>
+                  <a:spcPts val="0"/>
+                </a:spcBef>
+                <a:spcAft>
+                  <a:spcPts val="0"/>
+                </a:spcAft>
+                <a:buClr>
+                  <a:schemeClr val="lt1"/>
+                </a:buClr>
+                <a:buSzPts val="800"/>
+                <a:buFont typeface="PT Sans"/>
+                <a:buNone/>
+              </a:pPr>
+              <a:r>
+                <a:rPr lang="ru-RU" sz="800" b="0">
+                  <a:solidFill>
+                    <a:schemeClr val="lt1"/>
+                  </a:solidFill>
+                  <a:latin typeface="PT Sans" panose="020B0503020203020204" pitchFamily="34" charset="0"/>
+                  <a:ea typeface="PT Sans"/>
+                  <a:cs typeface="PT Sans"/>
+                  <a:sym typeface="PT Sans"/>
+                </a:rPr>
+                <a:t>601-800</a:t>
+              </a:r>
+              <a:endParaRPr>
+                <a:latin typeface="PT Sans" panose="020B0503020203020204" pitchFamily="34" charset="0"/>
+              </a:endParaRPr>
+            </a:p>
+            <a:p>
+              <a:pPr marL="0" marR="0" lvl="0" indent="0" algn="ctr" rtl="0">
+                <a:lnSpc>
+                  <a:spcPct val="100000"/>
+                </a:lnSpc>
+                <a:spcBef>
+                  <a:spcPts val="0"/>
+                </a:spcBef>
+                <a:spcAft>
+                  <a:spcPts val="0"/>
+                </a:spcAft>
+                <a:buClr>
+                  <a:schemeClr val="lt1"/>
+                </a:buClr>
+                <a:buSzPts val="800"/>
+                <a:buFont typeface="PT Sans"/>
+                <a:buNone/>
+              </a:pPr>
+              <a:r>
+                <a:rPr lang="ru-RU" sz="800" b="0" u="none" strike="noStrike" cap="none">
+                  <a:solidFill>
+                    <a:schemeClr val="lt1"/>
+                  </a:solidFill>
+                  <a:latin typeface="PT Sans" panose="020B0503020203020204" pitchFamily="34" charset="0"/>
+                  <a:ea typeface="PT Sans"/>
+                  <a:cs typeface="PT Sans"/>
+                  <a:sym typeface="PT Sans"/>
+                </a:rPr>
+                <a:t>9</a:t>
+              </a:r>
+              <a:endParaRPr sz="800" b="0" u="none" strike="noStrike" cap="none">
+                <a:solidFill>
+                  <a:schemeClr val="lt1"/>
+                </a:solidFill>
+                <a:latin typeface="PT Sans" panose="020B0503020203020204" pitchFamily="34" charset="0"/>
+                <a:ea typeface="PT Sans"/>
+                <a:cs typeface="PT Sans"/>
+                <a:sym typeface="PT Sans"/>
+              </a:endParaRPr>
+            </a:p>
+          </p:txBody>
+        </p:sp>
+      </p:grpSp>
+      <p:sp>
+        <p:nvSpPr>
+          <p:cNvPr id="37" name="Google Shape;108;p3">
+            <a:extLst>
+              <a:ext uri="{FF2B5EF4-FFF2-40B4-BE49-F238E27FC236}">
+                <a16:creationId xmlns:a16="http://schemas.microsoft.com/office/drawing/2014/main" id="{5493CD04-205D-294C-BD53-0914C34565C1}"/>
+              </a:ext>
+            </a:extLst>
+          </p:cNvPr>
+          <p:cNvSpPr txBox="1"/>
+          <p:nvPr/>
+        </p:nvSpPr>
+        <p:spPr>
+          <a:xfrm>
+            <a:off x="964967" y="220551"/>
+            <a:ext cx="7344816" cy="369291"/>
+          </a:xfrm>
+          <a:prstGeom prst="rect">
+            <a:avLst/>
+          </a:prstGeom>
+          <a:noFill/>
+          <a:ln>
+            <a:noFill/>
+          </a:ln>
+        </p:spPr>
+        <p:txBody>
+          <a:bodyPr spcFirstLastPara="1" wrap="square" lIns="91425" tIns="45700" rIns="91425" bIns="45700" anchor="t" anchorCtr="0">
+            <a:spAutoFit/>
+          </a:bodyPr>
+          <a:lstStyle/>
+          <a:p>
+            <a:pPr marL="0" marR="0" lvl="0" indent="0" algn="l" rtl="0">
+              <a:spcBef>
+                <a:spcPts val="0"/>
+              </a:spcBef>
+              <a:spcAft>
+                <a:spcPts val="0"/>
+              </a:spcAft>
+              <a:buNone/>
+            </a:pPr>
+            <a:r>
+              <a:rPr lang="ru-RU" dirty="0">
+                <a:solidFill>
+                  <a:srgbClr val="00549F"/>
+                </a:solidFill>
+                <a:latin typeface="PT Sans"/>
+                <a:ea typeface="PT Sans"/>
+                <a:cs typeface="PT Sans"/>
+                <a:sym typeface="PT Sans"/>
+              </a:rPr>
+              <a:t>Введение</a:t>
+            </a:r>
+            <a:endParaRPr lang="en-US" dirty="0">
+              <a:solidFill>
+                <a:srgbClr val="00549F"/>
+              </a:solidFill>
+              <a:latin typeface="PT Sans"/>
+              <a:ea typeface="PT Sans"/>
+              <a:cs typeface="PT Sans"/>
+              <a:sym typeface="PT Sans"/>
+            </a:endParaRPr>
+          </a:p>
+        </p:txBody>
+      </p:sp>
+      <p:sp>
+        <p:nvSpPr>
+          <p:cNvPr id="12" name="Объект 2"/>
+          <p:cNvSpPr>
+            <a:spLocks noGrp="1"/>
+          </p:cNvSpPr>
+          <p:nvPr>
+            <p:ph idx="1"/>
+          </p:nvPr>
+        </p:nvSpPr>
+        <p:spPr>
+          <a:xfrm>
+            <a:off x="1043608" y="926349"/>
+            <a:ext cx="10562698" cy="5677647"/>
+          </a:xfrm>
+        </p:spPr>
+        <p:txBody>
+          <a:bodyPr>
+            <a:normAutofit/>
+          </a:bodyPr>
+          <a:lstStyle/>
+          <a:p>
+            <a:pPr marL="0" indent="0" algn="just">
+              <a:buNone/>
+            </a:pPr>
+            <a:r>
+              <a:rPr lang="ru-RU" sz="2400" dirty="0"/>
+              <a:t>Цели:</a:t>
+            </a:r>
+          </a:p>
+          <a:p>
+            <a:pPr algn="just"/>
+            <a:r>
+              <a:rPr lang="ru-RU" sz="2400" dirty="0"/>
+              <a:t>Обучить модель </a:t>
+            </a:r>
+            <a:r>
+              <a:rPr lang="ru-RU" sz="2400" dirty="0" err="1"/>
+              <a:t>Random</a:t>
+            </a:r>
+            <a:r>
+              <a:rPr lang="ru-RU" sz="2400" dirty="0"/>
+              <a:t> </a:t>
+            </a:r>
+            <a:r>
+              <a:rPr lang="ru-RU" sz="2400" dirty="0" err="1"/>
+              <a:t>Forest</a:t>
+            </a:r>
+            <a:r>
+              <a:rPr lang="ru-RU" sz="2400" dirty="0"/>
+              <a:t> на биомедицинских данных </a:t>
+            </a:r>
+            <a:r>
+              <a:rPr lang="ru-RU" sz="2400" dirty="0" err="1"/>
+              <a:t>Pima</a:t>
+            </a:r>
+            <a:r>
+              <a:rPr lang="ru-RU" sz="2400" dirty="0"/>
+              <a:t> </a:t>
+            </a:r>
+            <a:r>
+              <a:rPr lang="ru-RU" sz="2400" dirty="0" err="1"/>
+              <a:t>Indians</a:t>
+            </a:r>
+            <a:r>
+              <a:rPr lang="ru-RU" sz="2400" dirty="0"/>
+              <a:t> </a:t>
+            </a:r>
+            <a:r>
+              <a:rPr lang="ru-RU" sz="2400" dirty="0" err="1"/>
+              <a:t>Diabetes</a:t>
+            </a:r>
+            <a:r>
+              <a:rPr lang="ru-RU" sz="2400" dirty="0"/>
+              <a:t>.</a:t>
+            </a:r>
+          </a:p>
+          <a:p>
+            <a:pPr algn="just"/>
+            <a:r>
+              <a:rPr lang="ru-RU" sz="2400" dirty="0"/>
+              <a:t>Освоить два подхода к оценке важности признаков: </a:t>
+            </a:r>
+            <a:r>
+              <a:rPr lang="ru-RU" sz="2400" dirty="0" err="1"/>
+              <a:t>Gini</a:t>
+            </a:r>
+            <a:r>
+              <a:rPr lang="ru-RU" sz="2400" dirty="0"/>
+              <a:t> и </a:t>
+            </a:r>
+            <a:r>
+              <a:rPr lang="ru-RU" sz="2400" dirty="0" err="1"/>
+              <a:t>permutation</a:t>
+            </a:r>
+            <a:r>
+              <a:rPr lang="ru-RU" sz="2400" dirty="0"/>
+              <a:t> </a:t>
+            </a:r>
+            <a:r>
+              <a:rPr lang="ru-RU" sz="2400" dirty="0" err="1"/>
+              <a:t>importance</a:t>
+            </a:r>
+            <a:r>
+              <a:rPr lang="ru-RU" sz="2400" dirty="0"/>
+              <a:t>.</a:t>
+            </a:r>
+          </a:p>
+          <a:p>
+            <a:pPr algn="just"/>
+            <a:r>
+              <a:rPr lang="ru-RU" sz="2400" dirty="0"/>
+              <a:t>Выбрать топ‑5 признаков и сравнить качество модели на полном наборе и на сокращённом.</a:t>
+            </a:r>
+          </a:p>
+        </p:txBody>
+      </p:sp>
+    </p:spTree>
+    <p:extLst>
+      <p:ext uri="{BB962C8B-B14F-4D97-AF65-F5344CB8AC3E}">
+        <p14:creationId xmlns:p14="http://schemas.microsoft.com/office/powerpoint/2010/main" val="2824079103"/>
+      </p:ext>
+    </p:extLst>
+  </p:cSld>
+  <p:clrMapOvr>
+    <a:masterClrMapping/>
+  </p:clrMapOvr>
+</p:sld>
+</file>
+
+<file path=ppt/slides/slide20.xml><?xml version="1.0" encoding="utf-8"?>
 <p:sld xmlns:a="http://schemas.openxmlformats.org/drawingml/2006/main" xmlns:r="http://schemas.openxmlformats.org/officeDocument/2006/relationships" xmlns:p="http://schemas.openxmlformats.org/presentationml/2006/main">
   <p:cSld>
     <p:spTree>
@@ -10714,7 +14072,7 @@
                 <a:latin typeface="PT Sans" panose="020B0503020203020204" pitchFamily="34" charset="0"/>
               </a:rPr>
               <a:pPr/>
-              <a:t>17</a:t>
+              <a:t>20</a:t>
             </a:fld>
             <a:endParaRPr lang="ru-RU" dirty="0">
               <a:latin typeface="PT Sans" panose="020B0503020203020204" pitchFamily="34" charset="0"/>
@@ -11371,7 +14729,7 @@
 </p:sld>
 </file>
 
-<file path=ppt/slides/slide18.xml><?xml version="1.0" encoding="utf-8"?>
+<file path=ppt/slides/slide21.xml><?xml version="1.0" encoding="utf-8"?>
 <p:sld xmlns:a="http://schemas.openxmlformats.org/drawingml/2006/main" xmlns:r="http://schemas.openxmlformats.org/officeDocument/2006/relationships" xmlns:p="http://schemas.openxmlformats.org/presentationml/2006/main">
   <p:cSld>
     <p:spTree>
@@ -11413,7 +14771,7 @@
                 <a:latin typeface="PT Sans" panose="020B0503020203020204" pitchFamily="34" charset="0"/>
               </a:rPr>
               <a:pPr/>
-              <a:t>18</a:t>
+              <a:t>21</a:t>
             </a:fld>
             <a:endParaRPr lang="ru-RU" dirty="0">
               <a:latin typeface="PT Sans" panose="020B0503020203020204" pitchFamily="34" charset="0"/>
@@ -12068,7 +15426,7 @@
 </p:sld>
 </file>
 
-<file path=ppt/slides/slide19.xml><?xml version="1.0" encoding="utf-8"?>
+<file path=ppt/slides/slide22.xml><?xml version="1.0" encoding="utf-8"?>
 <p:sld xmlns:a="http://schemas.openxmlformats.org/drawingml/2006/main" xmlns:r="http://schemas.openxmlformats.org/officeDocument/2006/relationships" xmlns:p="http://schemas.openxmlformats.org/presentationml/2006/main">
   <p:cSld>
     <p:spTree>
@@ -12110,7 +15468,7 @@
                 <a:latin typeface="PT Sans" panose="020B0503020203020204" pitchFamily="34" charset="0"/>
               </a:rPr>
               <a:pPr/>
-              <a:t>19</a:t>
+              <a:t>22</a:t>
             </a:fld>
             <a:endParaRPr lang="ru-RU" dirty="0">
               <a:latin typeface="PT Sans" panose="020B0503020203020204" pitchFamily="34" charset="0"/>
@@ -13802,643 +17160,7 @@
 </p:sld>
 </file>
 
-<file path=ppt/slides/slide2.xml><?xml version="1.0" encoding="utf-8"?>
-<p:sld xmlns:a="http://schemas.openxmlformats.org/drawingml/2006/main" xmlns:r="http://schemas.openxmlformats.org/officeDocument/2006/relationships" xmlns:p="http://schemas.openxmlformats.org/presentationml/2006/main">
-  <p:cSld>
-    <p:spTree>
-      <p:nvGrpSpPr>
-        <p:cNvPr id="1" name=""/>
-        <p:cNvGrpSpPr/>
-        <p:nvPr/>
-      </p:nvGrpSpPr>
-      <p:grpSpPr>
-        <a:xfrm>
-          <a:off x="0" y="0"/>
-          <a:ext cx="0" cy="0"/>
-          <a:chOff x="0" y="0"/>
-          <a:chExt cx="0" cy="0"/>
-        </a:xfrm>
-      </p:grpSpPr>
-      <p:sp>
-        <p:nvSpPr>
-          <p:cNvPr id="13" name="Номер слайда 12"/>
-          <p:cNvSpPr>
-            <a:spLocks noGrp="1"/>
-          </p:cNvSpPr>
-          <p:nvPr>
-            <p:ph type="sldNum" sz="quarter" idx="12"/>
-          </p:nvPr>
-        </p:nvSpPr>
-        <p:spPr/>
-        <p:txBody>
-          <a:bodyPr/>
-          <a:lstStyle/>
-          <a:p>
-            <a:fld id="{B19B0651-EE4F-4900-A07F-96A6BFA9D0F0}" type="slidenum">
-              <a:rPr lang="ru-RU" smtClean="0">
-                <a:latin typeface="PT Sans" panose="020B0503020203020204" pitchFamily="34" charset="0"/>
-              </a:rPr>
-              <a:pPr/>
-              <a:t>2</a:t>
-            </a:fld>
-            <a:endParaRPr lang="ru-RU" dirty="0">
-              <a:latin typeface="PT Sans" panose="020B0503020203020204" pitchFamily="34" charset="0"/>
-            </a:endParaRPr>
-          </a:p>
-        </p:txBody>
-      </p:sp>
-      <p:grpSp>
-        <p:nvGrpSpPr>
-          <p:cNvPr id="24" name="Группа 23">
-            <a:extLst>
-              <a:ext uri="{FF2B5EF4-FFF2-40B4-BE49-F238E27FC236}">
-                <a16:creationId xmlns:a16="http://schemas.microsoft.com/office/drawing/2014/main" id="{98A76A24-00EA-EE42-8A4F-846D0D0A92B0}"/>
-              </a:ext>
-            </a:extLst>
-          </p:cNvPr>
-          <p:cNvGrpSpPr/>
-          <p:nvPr/>
-        </p:nvGrpSpPr>
-        <p:grpSpPr>
-          <a:xfrm>
-            <a:off x="-50" y="0"/>
-            <a:ext cx="827700" cy="6858000"/>
-            <a:chOff x="-50" y="0"/>
-            <a:chExt cx="827700" cy="5143500"/>
-          </a:xfrm>
-        </p:grpSpPr>
-        <p:sp>
-          <p:nvSpPr>
-            <p:cNvPr id="25" name="Google Shape;106;p3">
-              <a:extLst>
-                <a:ext uri="{FF2B5EF4-FFF2-40B4-BE49-F238E27FC236}">
-                  <a16:creationId xmlns:a16="http://schemas.microsoft.com/office/drawing/2014/main" id="{1212ABD6-BB78-564D-90F4-45A9BF52F65A}"/>
-                </a:ext>
-              </a:extLst>
-            </p:cNvPr>
-            <p:cNvSpPr/>
-            <p:nvPr/>
-          </p:nvSpPr>
-          <p:spPr>
-            <a:xfrm>
-              <a:off x="-50" y="0"/>
-              <a:ext cx="827700" cy="5143500"/>
-            </a:xfrm>
-            <a:prstGeom prst="rect">
-              <a:avLst/>
-            </a:prstGeom>
-            <a:gradFill>
-              <a:gsLst>
-                <a:gs pos="0">
-                  <a:srgbClr val="003061"/>
-                </a:gs>
-                <a:gs pos="50000">
-                  <a:srgbClr val="00468D"/>
-                </a:gs>
-                <a:gs pos="100000">
-                  <a:srgbClr val="0054AA"/>
-                </a:gs>
-              </a:gsLst>
-              <a:lin ang="5400000" scaled="0"/>
-            </a:gradFill>
-            <a:ln>
-              <a:noFill/>
-            </a:ln>
-          </p:spPr>
-          <p:txBody>
-            <a:bodyPr spcFirstLastPara="1" wrap="square" lIns="91425" tIns="45700" rIns="91425" bIns="45700" anchor="ctr" anchorCtr="0">
-              <a:noAutofit/>
-            </a:bodyPr>
-            <a:lstStyle/>
-            <a:p>
-              <a:pPr marL="0" marR="0" lvl="0" indent="0" algn="ctr" rtl="0">
-                <a:spcBef>
-                  <a:spcPts val="0"/>
-                </a:spcBef>
-                <a:spcAft>
-                  <a:spcPts val="0"/>
-                </a:spcAft>
-                <a:buNone/>
-              </a:pPr>
-              <a:endParaRPr sz="1800">
-                <a:solidFill>
-                  <a:schemeClr val="lt1"/>
-                </a:solidFill>
-                <a:latin typeface="PT Sans" panose="020B0503020203020204" pitchFamily="34" charset="0"/>
-                <a:ea typeface="Calibri"/>
-                <a:cs typeface="Calibri"/>
-                <a:sym typeface="Calibri"/>
-              </a:endParaRPr>
-            </a:p>
-          </p:txBody>
-        </p:sp>
-        <p:pic>
-          <p:nvPicPr>
-            <p:cNvPr id="28" name="Google Shape;107;p3" descr="C:\Users\MSShafigullin\Desktop\2020\Презентация КФУ\kfu_logo_circle_rus.png">
-              <a:extLst>
-                <a:ext uri="{FF2B5EF4-FFF2-40B4-BE49-F238E27FC236}">
-                  <a16:creationId xmlns:a16="http://schemas.microsoft.com/office/drawing/2014/main" id="{C968D678-6F52-2F45-8BE7-5E2313AF23D6}"/>
-                </a:ext>
-              </a:extLst>
-            </p:cNvPr>
-            <p:cNvPicPr preferRelativeResize="0"/>
-            <p:nvPr/>
-          </p:nvPicPr>
-          <p:blipFill rotWithShape="1">
-            <a:blip r:embed="rId3">
-              <a:alphaModFix/>
-            </a:blip>
-            <a:srcRect/>
-            <a:stretch/>
-          </p:blipFill>
-          <p:spPr>
-            <a:xfrm>
-              <a:off x="137267" y="87534"/>
-              <a:ext cx="553050" cy="432728"/>
-            </a:xfrm>
-            <a:prstGeom prst="rect">
-              <a:avLst/>
-            </a:prstGeom>
-            <a:noFill/>
-            <a:ln>
-              <a:noFill/>
-            </a:ln>
-          </p:spPr>
-        </p:pic>
-        <p:pic>
-          <p:nvPicPr>
-            <p:cNvPr id="30" name="Google Shape;109;p3" descr="C:\Users\MSShafigullin\Desktop\Проекты\Презентация по ДК\qs.jpg">
-              <a:extLst>
-                <a:ext uri="{FF2B5EF4-FFF2-40B4-BE49-F238E27FC236}">
-                  <a16:creationId xmlns:a16="http://schemas.microsoft.com/office/drawing/2014/main" id="{1F22E8DB-9008-9D4B-9E64-C397CC33A9DA}"/>
-                </a:ext>
-              </a:extLst>
-            </p:cNvPr>
-            <p:cNvPicPr preferRelativeResize="0"/>
-            <p:nvPr/>
-          </p:nvPicPr>
-          <p:blipFill rotWithShape="1">
-            <a:blip r:embed="rId4">
-              <a:alphaModFix/>
-            </a:blip>
-            <a:srcRect/>
-            <a:stretch/>
-          </p:blipFill>
-          <p:spPr>
-            <a:xfrm>
-              <a:off x="237087" y="4422472"/>
-              <a:ext cx="353386" cy="353386"/>
-            </a:xfrm>
-            <a:prstGeom prst="rect">
-              <a:avLst/>
-            </a:prstGeom>
-            <a:noFill/>
-            <a:ln>
-              <a:noFill/>
-            </a:ln>
-          </p:spPr>
-        </p:pic>
-        <p:pic>
-          <p:nvPicPr>
-            <p:cNvPr id="31" name="Google Shape;110;p3" descr="C:\Users\MSShafigullin\Desktop\2020\Презентация КФУ\THE.png">
-              <a:extLst>
-                <a:ext uri="{FF2B5EF4-FFF2-40B4-BE49-F238E27FC236}">
-                  <a16:creationId xmlns:a16="http://schemas.microsoft.com/office/drawing/2014/main" id="{5E9D660B-F40F-CB41-B4B6-62BD62C97A47}"/>
-                </a:ext>
-              </a:extLst>
-            </p:cNvPr>
-            <p:cNvPicPr preferRelativeResize="0"/>
-            <p:nvPr/>
-          </p:nvPicPr>
-          <p:blipFill rotWithShape="1">
-            <a:blip r:embed="rId5">
-              <a:alphaModFix/>
-            </a:blip>
-            <a:srcRect/>
-            <a:stretch/>
-          </p:blipFill>
-          <p:spPr>
-            <a:xfrm>
-              <a:off x="287779" y="3741120"/>
-              <a:ext cx="252000" cy="252000"/>
-            </a:xfrm>
-            <a:prstGeom prst="rect">
-              <a:avLst/>
-            </a:prstGeom>
-            <a:noFill/>
-            <a:ln>
-              <a:noFill/>
-            </a:ln>
-          </p:spPr>
-        </p:pic>
-        <p:sp>
-          <p:nvSpPr>
-            <p:cNvPr id="33" name="Google Shape;111;p3">
-              <a:extLst>
-                <a:ext uri="{FF2B5EF4-FFF2-40B4-BE49-F238E27FC236}">
-                  <a16:creationId xmlns:a16="http://schemas.microsoft.com/office/drawing/2014/main" id="{23A12878-4A5D-E648-A640-94DEA9532F72}"/>
-                </a:ext>
-              </a:extLst>
-            </p:cNvPr>
-            <p:cNvSpPr txBox="1"/>
-            <p:nvPr/>
-          </p:nvSpPr>
-          <p:spPr>
-            <a:xfrm>
-              <a:off x="84051" y="4728776"/>
-              <a:ext cx="659482" cy="253886"/>
-            </a:xfrm>
-            <a:prstGeom prst="rect">
-              <a:avLst/>
-            </a:prstGeom>
-            <a:noFill/>
-            <a:ln>
-              <a:noFill/>
-            </a:ln>
-          </p:spPr>
-          <p:txBody>
-            <a:bodyPr spcFirstLastPara="1" wrap="square" lIns="91425" tIns="45700" rIns="91425" bIns="45700" anchor="t" anchorCtr="0">
-              <a:spAutoFit/>
-            </a:bodyPr>
-            <a:lstStyle/>
-            <a:p>
-              <a:pPr marL="0" marR="0" lvl="0" indent="0" algn="ctr" rtl="0">
-                <a:lnSpc>
-                  <a:spcPct val="100000"/>
-                </a:lnSpc>
-                <a:spcBef>
-                  <a:spcPts val="0"/>
-                </a:spcBef>
-                <a:spcAft>
-                  <a:spcPts val="0"/>
-                </a:spcAft>
-                <a:buClr>
-                  <a:schemeClr val="lt1"/>
-                </a:buClr>
-                <a:buSzPts val="800"/>
-                <a:buFont typeface="PT Sans"/>
-                <a:buNone/>
-              </a:pPr>
-              <a:r>
-                <a:rPr lang="ru-RU" sz="800" b="0">
-                  <a:solidFill>
-                    <a:schemeClr val="lt1"/>
-                  </a:solidFill>
-                  <a:latin typeface="PT Sans" panose="020B0503020203020204" pitchFamily="34" charset="0"/>
-                  <a:ea typeface="PT Sans"/>
-                  <a:cs typeface="PT Sans"/>
-                  <a:sym typeface="PT Sans"/>
-                </a:rPr>
-                <a:t>370</a:t>
-              </a:r>
-              <a:endParaRPr>
-                <a:latin typeface="PT Sans" panose="020B0503020203020204" pitchFamily="34" charset="0"/>
-              </a:endParaRPr>
-            </a:p>
-            <a:p>
-              <a:pPr marL="0" marR="0" lvl="0" indent="0" algn="ctr" rtl="0">
-                <a:lnSpc>
-                  <a:spcPct val="100000"/>
-                </a:lnSpc>
-                <a:spcBef>
-                  <a:spcPts val="0"/>
-                </a:spcBef>
-                <a:spcAft>
-                  <a:spcPts val="0"/>
-                </a:spcAft>
-                <a:buClr>
-                  <a:schemeClr val="lt1"/>
-                </a:buClr>
-                <a:buSzPts val="800"/>
-                <a:buFont typeface="PT Sans"/>
-                <a:buNone/>
-              </a:pPr>
-              <a:r>
-                <a:rPr lang="ru-RU" sz="800" b="0" u="none" strike="noStrike" cap="none">
-                  <a:solidFill>
-                    <a:schemeClr val="lt1"/>
-                  </a:solidFill>
-                  <a:latin typeface="PT Sans" panose="020B0503020203020204" pitchFamily="34" charset="0"/>
-                  <a:ea typeface="PT Sans"/>
-                  <a:cs typeface="PT Sans"/>
-                  <a:sym typeface="PT Sans"/>
-                </a:rPr>
-                <a:t>13</a:t>
-              </a:r>
-              <a:endParaRPr sz="800" b="0" u="none" strike="noStrike" cap="none">
-                <a:solidFill>
-                  <a:schemeClr val="lt1"/>
-                </a:solidFill>
-                <a:latin typeface="PT Sans" panose="020B0503020203020204" pitchFamily="34" charset="0"/>
-                <a:ea typeface="PT Sans"/>
-                <a:cs typeface="PT Sans"/>
-                <a:sym typeface="PT Sans"/>
-              </a:endParaRPr>
-            </a:p>
-          </p:txBody>
-        </p:sp>
-        <p:sp>
-          <p:nvSpPr>
-            <p:cNvPr id="34" name="Google Shape;112;p3">
-              <a:extLst>
-                <a:ext uri="{FF2B5EF4-FFF2-40B4-BE49-F238E27FC236}">
-                  <a16:creationId xmlns:a16="http://schemas.microsoft.com/office/drawing/2014/main" id="{0525B736-A5F9-A04E-92B8-E50E60AAE2C0}"/>
-                </a:ext>
-              </a:extLst>
-            </p:cNvPr>
-            <p:cNvSpPr txBox="1"/>
-            <p:nvPr/>
-          </p:nvSpPr>
-          <p:spPr>
-            <a:xfrm>
-              <a:off x="84051" y="4083918"/>
-              <a:ext cx="659482" cy="253886"/>
-            </a:xfrm>
-            <a:prstGeom prst="rect">
-              <a:avLst/>
-            </a:prstGeom>
-            <a:noFill/>
-            <a:ln>
-              <a:noFill/>
-            </a:ln>
-          </p:spPr>
-          <p:txBody>
-            <a:bodyPr spcFirstLastPara="1" wrap="square" lIns="91425" tIns="45700" rIns="91425" bIns="45700" anchor="t" anchorCtr="0">
-              <a:spAutoFit/>
-            </a:bodyPr>
-            <a:lstStyle/>
-            <a:p>
-              <a:pPr marL="0" marR="0" lvl="0" indent="0" algn="ctr" rtl="0">
-                <a:lnSpc>
-                  <a:spcPct val="100000"/>
-                </a:lnSpc>
-                <a:spcBef>
-                  <a:spcPts val="0"/>
-                </a:spcBef>
-                <a:spcAft>
-                  <a:spcPts val="0"/>
-                </a:spcAft>
-                <a:buClr>
-                  <a:schemeClr val="lt1"/>
-                </a:buClr>
-                <a:buSzPts val="800"/>
-                <a:buFont typeface="PT Sans"/>
-                <a:buNone/>
-              </a:pPr>
-              <a:r>
-                <a:rPr lang="ru-RU" sz="800" b="0">
-                  <a:solidFill>
-                    <a:schemeClr val="lt1"/>
-                  </a:solidFill>
-                  <a:latin typeface="PT Sans" panose="020B0503020203020204" pitchFamily="34" charset="0"/>
-                  <a:ea typeface="PT Sans"/>
-                  <a:cs typeface="PT Sans"/>
-                  <a:sym typeface="PT Sans"/>
-                </a:rPr>
-                <a:t>601-800</a:t>
-              </a:r>
-              <a:endParaRPr>
-                <a:latin typeface="PT Sans" panose="020B0503020203020204" pitchFamily="34" charset="0"/>
-              </a:endParaRPr>
-            </a:p>
-            <a:p>
-              <a:pPr marL="0" marR="0" lvl="0" indent="0" algn="ctr" rtl="0">
-                <a:lnSpc>
-                  <a:spcPct val="100000"/>
-                </a:lnSpc>
-                <a:spcBef>
-                  <a:spcPts val="0"/>
-                </a:spcBef>
-                <a:spcAft>
-                  <a:spcPts val="0"/>
-                </a:spcAft>
-                <a:buClr>
-                  <a:schemeClr val="lt1"/>
-                </a:buClr>
-                <a:buSzPts val="800"/>
-                <a:buFont typeface="PT Sans"/>
-                <a:buNone/>
-              </a:pPr>
-              <a:r>
-                <a:rPr lang="ru-RU" sz="800" b="0" u="none" strike="noStrike" cap="none">
-                  <a:solidFill>
-                    <a:schemeClr val="lt1"/>
-                  </a:solidFill>
-                  <a:latin typeface="PT Sans" panose="020B0503020203020204" pitchFamily="34" charset="0"/>
-                  <a:ea typeface="PT Sans"/>
-                  <a:cs typeface="PT Sans"/>
-                  <a:sym typeface="PT Sans"/>
-                </a:rPr>
-                <a:t>9</a:t>
-              </a:r>
-              <a:endParaRPr sz="800" b="0" u="none" strike="noStrike" cap="none">
-                <a:solidFill>
-                  <a:schemeClr val="lt1"/>
-                </a:solidFill>
-                <a:latin typeface="PT Sans" panose="020B0503020203020204" pitchFamily="34" charset="0"/>
-                <a:ea typeface="PT Sans"/>
-                <a:cs typeface="PT Sans"/>
-                <a:sym typeface="PT Sans"/>
-              </a:endParaRPr>
-            </a:p>
-          </p:txBody>
-        </p:sp>
-      </p:grpSp>
-      <p:sp>
-        <p:nvSpPr>
-          <p:cNvPr id="37" name="Google Shape;108;p3">
-            <a:extLst>
-              <a:ext uri="{FF2B5EF4-FFF2-40B4-BE49-F238E27FC236}">
-                <a16:creationId xmlns:a16="http://schemas.microsoft.com/office/drawing/2014/main" id="{5493CD04-205D-294C-BD53-0914C34565C1}"/>
-              </a:ext>
-            </a:extLst>
-          </p:cNvPr>
-          <p:cNvSpPr txBox="1"/>
-          <p:nvPr/>
-        </p:nvSpPr>
-        <p:spPr>
-          <a:xfrm>
-            <a:off x="964967" y="220551"/>
-            <a:ext cx="7344816" cy="369291"/>
-          </a:xfrm>
-          <a:prstGeom prst="rect">
-            <a:avLst/>
-          </a:prstGeom>
-          <a:noFill/>
-          <a:ln>
-            <a:noFill/>
-          </a:ln>
-        </p:spPr>
-        <p:txBody>
-          <a:bodyPr spcFirstLastPara="1" wrap="square" lIns="91425" tIns="45700" rIns="91425" bIns="45700" anchor="t" anchorCtr="0">
-            <a:spAutoFit/>
-          </a:bodyPr>
-          <a:lstStyle/>
-          <a:p>
-            <a:pPr marL="0" marR="0" lvl="0" indent="0" algn="l" rtl="0">
-              <a:spcBef>
-                <a:spcPts val="0"/>
-              </a:spcBef>
-              <a:spcAft>
-                <a:spcPts val="0"/>
-              </a:spcAft>
-              <a:buNone/>
-            </a:pPr>
-            <a:r>
-              <a:rPr lang="ru-RU" dirty="0">
-                <a:solidFill>
-                  <a:srgbClr val="00549F"/>
-                </a:solidFill>
-                <a:latin typeface="PT Sans"/>
-                <a:ea typeface="PT Sans"/>
-                <a:cs typeface="PT Sans"/>
-                <a:sym typeface="PT Sans"/>
-              </a:rPr>
-              <a:t>Введение</a:t>
-            </a:r>
-            <a:endParaRPr lang="en-US" dirty="0">
-              <a:solidFill>
-                <a:srgbClr val="00549F"/>
-              </a:solidFill>
-              <a:latin typeface="PT Sans"/>
-              <a:ea typeface="PT Sans"/>
-              <a:cs typeface="PT Sans"/>
-              <a:sym typeface="PT Sans"/>
-            </a:endParaRPr>
-          </a:p>
-        </p:txBody>
-      </p:sp>
-      <p:sp>
-        <p:nvSpPr>
-          <p:cNvPr id="12" name="Объект 2"/>
-          <p:cNvSpPr>
-            <a:spLocks noGrp="1"/>
-          </p:cNvSpPr>
-          <p:nvPr>
-            <p:ph idx="1"/>
-          </p:nvPr>
-        </p:nvSpPr>
-        <p:spPr>
-          <a:xfrm>
-            <a:off x="1043608" y="926349"/>
-            <a:ext cx="10562698" cy="5677647"/>
-          </a:xfrm>
-        </p:spPr>
-        <p:txBody>
-          <a:bodyPr>
-            <a:normAutofit/>
-          </a:bodyPr>
-          <a:lstStyle/>
-          <a:p>
-            <a:pPr marL="0" indent="0" algn="just">
-              <a:buNone/>
-            </a:pPr>
-            <a:r>
-              <a:rPr lang="ru-RU" sz="2400" dirty="0"/>
-              <a:t>Цели:</a:t>
-            </a:r>
-          </a:p>
-          <a:p>
-            <a:pPr algn="just"/>
-            <a:r>
-              <a:rPr lang="ru-RU" sz="2400" dirty="0"/>
-              <a:t>Обучить модель </a:t>
-            </a:r>
-            <a:r>
-              <a:rPr lang="ru-RU" sz="2400" dirty="0" err="1"/>
-              <a:t>Random</a:t>
-            </a:r>
-            <a:r>
-              <a:rPr lang="ru-RU" sz="2400" dirty="0"/>
-              <a:t> </a:t>
-            </a:r>
-            <a:r>
-              <a:rPr lang="ru-RU" sz="2400" dirty="0" err="1"/>
-              <a:t>Forest</a:t>
-            </a:r>
-            <a:r>
-              <a:rPr lang="ru-RU" sz="2400" dirty="0"/>
-              <a:t> на биомедицинских данных </a:t>
-            </a:r>
-            <a:r>
-              <a:rPr lang="ru-RU" sz="2400" dirty="0" err="1"/>
-              <a:t>Pima</a:t>
-            </a:r>
-            <a:r>
-              <a:rPr lang="ru-RU" sz="2400" dirty="0"/>
-              <a:t> </a:t>
-            </a:r>
-            <a:r>
-              <a:rPr lang="ru-RU" sz="2400" dirty="0" err="1"/>
-              <a:t>Indians</a:t>
-            </a:r>
-            <a:r>
-              <a:rPr lang="ru-RU" sz="2400" dirty="0"/>
-              <a:t> </a:t>
-            </a:r>
-            <a:r>
-              <a:rPr lang="ru-RU" sz="2400" dirty="0" err="1"/>
-              <a:t>Diabetes</a:t>
-            </a:r>
-            <a:r>
-              <a:rPr lang="ru-RU" sz="2400" dirty="0"/>
-              <a:t>.</a:t>
-            </a:r>
-          </a:p>
-          <a:p>
-            <a:pPr algn="just"/>
-            <a:r>
-              <a:rPr lang="ru-RU" sz="2400" dirty="0"/>
-              <a:t>Освоить два подхода к оценке важности признаков: </a:t>
-            </a:r>
-            <a:r>
-              <a:rPr lang="ru-RU" sz="2400" dirty="0" err="1"/>
-              <a:t>Gini</a:t>
-            </a:r>
-            <a:r>
-              <a:rPr lang="ru-RU" sz="2400" dirty="0"/>
-              <a:t> и </a:t>
-            </a:r>
-            <a:r>
-              <a:rPr lang="ru-RU" sz="2400" dirty="0" err="1"/>
-              <a:t>permutation</a:t>
-            </a:r>
-            <a:r>
-              <a:rPr lang="ru-RU" sz="2400" dirty="0"/>
-              <a:t> </a:t>
-            </a:r>
-            <a:r>
-              <a:rPr lang="ru-RU" sz="2400" dirty="0" err="1"/>
-              <a:t>importance</a:t>
-            </a:r>
-            <a:r>
-              <a:rPr lang="ru-RU" sz="2400" dirty="0"/>
-              <a:t>.</a:t>
-            </a:r>
-          </a:p>
-          <a:p>
-            <a:pPr algn="just"/>
-            <a:r>
-              <a:rPr lang="ru-RU" sz="2400" dirty="0"/>
-              <a:t>Выбрать топ‑5 признаков и сравнить качество модели на полном наборе и на сокращённом.</a:t>
-            </a:r>
-          </a:p>
-        </p:txBody>
-      </p:sp>
-    </p:spTree>
-    <p:extLst>
-      <p:ext uri="{BB962C8B-B14F-4D97-AF65-F5344CB8AC3E}">
-        <p14:creationId xmlns:p14="http://schemas.microsoft.com/office/powerpoint/2010/main" val="2824079103"/>
-      </p:ext>
-    </p:extLst>
-  </p:cSld>
-  <p:clrMapOvr>
-    <a:masterClrMapping/>
-  </p:clrMapOvr>
-</p:sld>
-</file>
-
-<file path=ppt/slides/slide20.xml><?xml version="1.0" encoding="utf-8"?>
+<file path=ppt/slides/slide23.xml><?xml version="1.0" encoding="utf-8"?>
 <p:sld xmlns:a="http://schemas.openxmlformats.org/drawingml/2006/main" xmlns:r="http://schemas.openxmlformats.org/officeDocument/2006/relationships" xmlns:p="http://schemas.openxmlformats.org/presentationml/2006/main">
   <p:cSld>
     <p:spTree>
@@ -14480,7 +17202,7 @@
                 <a:latin typeface="PT Sans" panose="020B0503020203020204" pitchFamily="34" charset="0"/>
               </a:rPr>
               <a:pPr/>
-              <a:t>20</a:t>
+              <a:t>23</a:t>
             </a:fld>
             <a:endParaRPr lang="ru-RU" dirty="0">
               <a:latin typeface="PT Sans" panose="020B0503020203020204" pitchFamily="34" charset="0"/>
@@ -15034,7 +17756,7 @@
 </p:sld>
 </file>
 
-<file path=ppt/slides/slide21.xml><?xml version="1.0" encoding="utf-8"?>
+<file path=ppt/slides/slide24.xml><?xml version="1.0" encoding="utf-8"?>
 <p:sld xmlns:a="http://schemas.openxmlformats.org/drawingml/2006/main" xmlns:r="http://schemas.openxmlformats.org/officeDocument/2006/relationships" xmlns:p="http://schemas.openxmlformats.org/presentationml/2006/main">
   <p:cSld>
     <p:spTree>
@@ -15076,7 +17798,7 @@
                 <a:latin typeface="PT Sans" panose="020B0503020203020204" pitchFamily="34" charset="0"/>
               </a:rPr>
               <a:pPr/>
-              <a:t>21</a:t>
+              <a:t>24</a:t>
             </a:fld>
             <a:endParaRPr lang="ru-RU" dirty="0">
               <a:latin typeface="PT Sans" panose="020B0503020203020204" pitchFamily="34" charset="0"/>
@@ -16252,7 +18974,7 @@
 </p:sld>
 </file>
 
-<file path=ppt/slides/slide22.xml><?xml version="1.0" encoding="utf-8"?>
+<file path=ppt/slides/slide25.xml><?xml version="1.0" encoding="utf-8"?>
 <p:sld xmlns:a="http://schemas.openxmlformats.org/drawingml/2006/main" xmlns:r="http://schemas.openxmlformats.org/officeDocument/2006/relationships" xmlns:p="http://schemas.openxmlformats.org/presentationml/2006/main">
   <p:cSld>
     <p:spTree>
@@ -17970,6 +20692,2729 @@
             <a:p>
               <a:pPr lvl="0"/>
               <a:r>
+                <a:rPr lang="ru-RU" sz="2000" dirty="0">
+                  <a:solidFill>
+                    <a:schemeClr val="lt1"/>
+                  </a:solidFill>
+                  <a:latin typeface="PT Sans" panose="020B0503020203020204" pitchFamily="34" charset="0"/>
+                  <a:ea typeface="PT Sans"/>
+                  <a:cs typeface="PT Sans"/>
+                  <a:sym typeface="PT Sans"/>
+                </a:rPr>
+                <a:t>Клонирование репозитория из </a:t>
+              </a:r>
+              <a:r>
+                <a:rPr lang="ru-RU" sz="2000" dirty="0" err="1">
+                  <a:solidFill>
+                    <a:schemeClr val="lt1"/>
+                  </a:solidFill>
+                  <a:latin typeface="PT Sans" panose="020B0503020203020204" pitchFamily="34" charset="0"/>
+                  <a:ea typeface="PT Sans"/>
+                  <a:cs typeface="PT Sans"/>
+                  <a:sym typeface="PT Sans"/>
+                </a:rPr>
+                <a:t>GitHub</a:t>
+              </a:r>
+              <a:r>
+                <a:rPr lang="ru-RU" sz="2000" dirty="0">
+                  <a:solidFill>
+                    <a:schemeClr val="lt1"/>
+                  </a:solidFill>
+                  <a:latin typeface="PT Sans" panose="020B0503020203020204" pitchFamily="34" charset="0"/>
+                  <a:ea typeface="PT Sans"/>
+                  <a:cs typeface="PT Sans"/>
+                  <a:sym typeface="PT Sans"/>
+                </a:rPr>
+                <a:t> в </a:t>
+              </a:r>
+              <a:r>
+                <a:rPr lang="ru-RU" sz="2000" dirty="0" err="1">
+                  <a:solidFill>
+                    <a:schemeClr val="lt1"/>
+                  </a:solidFill>
+                  <a:latin typeface="PT Sans" panose="020B0503020203020204" pitchFamily="34" charset="0"/>
+                  <a:ea typeface="PT Sans"/>
+                  <a:cs typeface="PT Sans"/>
+                  <a:sym typeface="PT Sans"/>
+                </a:rPr>
+                <a:t>RStudio</a:t>
+              </a:r>
+              <a:endParaRPr lang="ru-RU" sz="2000" dirty="0">
+                <a:solidFill>
+                  <a:schemeClr val="lt1"/>
+                </a:solidFill>
+                <a:latin typeface="PT Sans" panose="020B0503020203020204" pitchFamily="34" charset="0"/>
+                <a:ea typeface="PT Sans"/>
+                <a:cs typeface="PT Sans"/>
+                <a:sym typeface="PT Sans"/>
+              </a:endParaRPr>
+            </a:p>
+          </p:txBody>
+        </p:sp>
+        <p:pic>
+          <p:nvPicPr>
+            <p:cNvPr id="14" name="Google Shape;136;p5" descr="C:\Users\MSShafigullin\Desktop\Проекты\Презентация по ДК\qs.jpg">
+              <a:extLst>
+                <a:ext uri="{FF2B5EF4-FFF2-40B4-BE49-F238E27FC236}">
+                  <a16:creationId xmlns:a16="http://schemas.microsoft.com/office/drawing/2014/main" id="{9F8DFA2B-AC78-464C-BC1D-62929B6D8A97}"/>
+                </a:ext>
+              </a:extLst>
+            </p:cNvPr>
+            <p:cNvPicPr preferRelativeResize="0"/>
+            <p:nvPr/>
+          </p:nvPicPr>
+          <p:blipFill rotWithShape="1">
+            <a:blip r:embed="rId4">
+              <a:alphaModFix/>
+            </a:blip>
+            <a:srcRect/>
+            <a:stretch/>
+          </p:blipFill>
+          <p:spPr>
+            <a:xfrm>
+              <a:off x="7878094" y="367563"/>
+              <a:ext cx="353386" cy="353386"/>
+            </a:xfrm>
+            <a:prstGeom prst="rect">
+              <a:avLst/>
+            </a:prstGeom>
+            <a:noFill/>
+            <a:ln>
+              <a:noFill/>
+            </a:ln>
+          </p:spPr>
+        </p:pic>
+        <p:pic>
+          <p:nvPicPr>
+            <p:cNvPr id="15" name="Google Shape;137;p5" descr="C:\Users\MSShafigullin\Desktop\2020\Презентация КФУ\THE.png">
+              <a:extLst>
+                <a:ext uri="{FF2B5EF4-FFF2-40B4-BE49-F238E27FC236}">
+                  <a16:creationId xmlns:a16="http://schemas.microsoft.com/office/drawing/2014/main" id="{835D2624-2EF8-2144-9816-A09872F47777}"/>
+                </a:ext>
+              </a:extLst>
+            </p:cNvPr>
+            <p:cNvPicPr preferRelativeResize="0"/>
+            <p:nvPr/>
+          </p:nvPicPr>
+          <p:blipFill rotWithShape="1">
+            <a:blip r:embed="rId5">
+              <a:alphaModFix/>
+            </a:blip>
+            <a:srcRect/>
+            <a:stretch/>
+          </p:blipFill>
+          <p:spPr>
+            <a:xfrm>
+              <a:off x="7928787" y="114719"/>
+              <a:ext cx="252000" cy="252000"/>
+            </a:xfrm>
+            <a:prstGeom prst="rect">
+              <a:avLst/>
+            </a:prstGeom>
+            <a:noFill/>
+            <a:ln>
+              <a:noFill/>
+            </a:ln>
+          </p:spPr>
+        </p:pic>
+        <p:sp>
+          <p:nvSpPr>
+            <p:cNvPr id="16" name="Google Shape;138;p5">
+              <a:extLst>
+                <a:ext uri="{FF2B5EF4-FFF2-40B4-BE49-F238E27FC236}">
+                  <a16:creationId xmlns:a16="http://schemas.microsoft.com/office/drawing/2014/main" id="{841F1A31-5CCC-E941-956A-F47E7E67D768}"/>
+                </a:ext>
+              </a:extLst>
+            </p:cNvPr>
+            <p:cNvSpPr txBox="1"/>
+            <p:nvPr/>
+          </p:nvSpPr>
+          <p:spPr>
+            <a:xfrm>
+              <a:off x="8279432" y="374979"/>
+              <a:ext cx="659482" cy="272188"/>
+            </a:xfrm>
+            <a:prstGeom prst="rect">
+              <a:avLst/>
+            </a:prstGeom>
+            <a:noFill/>
+            <a:ln>
+              <a:noFill/>
+            </a:ln>
+          </p:spPr>
+          <p:txBody>
+            <a:bodyPr spcFirstLastPara="1" wrap="square" lIns="91425" tIns="45700" rIns="91425" bIns="45700" anchor="t" anchorCtr="0">
+              <a:spAutoFit/>
+            </a:bodyPr>
+            <a:lstStyle/>
+            <a:p>
+              <a:pPr marL="0" marR="0" lvl="0" indent="0" algn="l" rtl="0">
+                <a:lnSpc>
+                  <a:spcPct val="100000"/>
+                </a:lnSpc>
+                <a:spcBef>
+                  <a:spcPts val="0"/>
+                </a:spcBef>
+                <a:spcAft>
+                  <a:spcPts val="0"/>
+                </a:spcAft>
+                <a:buClr>
+                  <a:schemeClr val="lt1"/>
+                </a:buClr>
+                <a:buSzPts val="800"/>
+                <a:buFont typeface="PT Sans"/>
+                <a:buNone/>
+              </a:pPr>
+              <a:r>
+                <a:rPr lang="ru-RU" sz="800" b="0">
+                  <a:solidFill>
+                    <a:schemeClr val="lt1"/>
+                  </a:solidFill>
+                  <a:latin typeface="PT Sans" panose="020B0503020203020204" pitchFamily="34" charset="0"/>
+                  <a:ea typeface="PT Sans"/>
+                  <a:cs typeface="PT Sans"/>
+                  <a:sym typeface="PT Sans"/>
+                </a:rPr>
+                <a:t>370</a:t>
+              </a:r>
+              <a:endParaRPr>
+                <a:latin typeface="PT Sans" panose="020B0503020203020204" pitchFamily="34" charset="0"/>
+              </a:endParaRPr>
+            </a:p>
+            <a:p>
+              <a:pPr marL="0" marR="0" lvl="0" indent="0" algn="l" rtl="0">
+                <a:lnSpc>
+                  <a:spcPct val="100000"/>
+                </a:lnSpc>
+                <a:spcBef>
+                  <a:spcPts val="0"/>
+                </a:spcBef>
+                <a:spcAft>
+                  <a:spcPts val="0"/>
+                </a:spcAft>
+                <a:buClr>
+                  <a:schemeClr val="lt1"/>
+                </a:buClr>
+                <a:buSzPts val="800"/>
+                <a:buFont typeface="PT Sans"/>
+                <a:buNone/>
+              </a:pPr>
+              <a:r>
+                <a:rPr lang="ru-RU" sz="800" b="0" u="none" strike="noStrike" cap="none">
+                  <a:solidFill>
+                    <a:schemeClr val="lt1"/>
+                  </a:solidFill>
+                  <a:latin typeface="PT Sans" panose="020B0503020203020204" pitchFamily="34" charset="0"/>
+                  <a:ea typeface="PT Sans"/>
+                  <a:cs typeface="PT Sans"/>
+                  <a:sym typeface="PT Sans"/>
+                </a:rPr>
+                <a:t>13</a:t>
+              </a:r>
+              <a:endParaRPr sz="800" b="0" u="none" strike="noStrike" cap="none">
+                <a:solidFill>
+                  <a:schemeClr val="lt1"/>
+                </a:solidFill>
+                <a:latin typeface="PT Sans" panose="020B0503020203020204" pitchFamily="34" charset="0"/>
+                <a:ea typeface="PT Sans"/>
+                <a:cs typeface="PT Sans"/>
+                <a:sym typeface="PT Sans"/>
+              </a:endParaRPr>
+            </a:p>
+          </p:txBody>
+        </p:sp>
+        <p:sp>
+          <p:nvSpPr>
+            <p:cNvPr id="17" name="Google Shape;139;p5">
+              <a:extLst>
+                <a:ext uri="{FF2B5EF4-FFF2-40B4-BE49-F238E27FC236}">
+                  <a16:creationId xmlns:a16="http://schemas.microsoft.com/office/drawing/2014/main" id="{A28DBFF6-9F47-6244-B20A-895959377BC2}"/>
+                </a:ext>
+              </a:extLst>
+            </p:cNvPr>
+            <p:cNvSpPr txBox="1"/>
+            <p:nvPr/>
+          </p:nvSpPr>
+          <p:spPr>
+            <a:xfrm>
+              <a:off x="8279432" y="71442"/>
+              <a:ext cx="659482" cy="272188"/>
+            </a:xfrm>
+            <a:prstGeom prst="rect">
+              <a:avLst/>
+            </a:prstGeom>
+            <a:noFill/>
+            <a:ln>
+              <a:noFill/>
+            </a:ln>
+          </p:spPr>
+          <p:txBody>
+            <a:bodyPr spcFirstLastPara="1" wrap="square" lIns="91425" tIns="45700" rIns="91425" bIns="45700" anchor="t" anchorCtr="0">
+              <a:spAutoFit/>
+            </a:bodyPr>
+            <a:lstStyle/>
+            <a:p>
+              <a:pPr marL="0" marR="0" lvl="0" indent="0" algn="l" rtl="0">
+                <a:lnSpc>
+                  <a:spcPct val="100000"/>
+                </a:lnSpc>
+                <a:spcBef>
+                  <a:spcPts val="0"/>
+                </a:spcBef>
+                <a:spcAft>
+                  <a:spcPts val="0"/>
+                </a:spcAft>
+                <a:buClr>
+                  <a:schemeClr val="lt1"/>
+                </a:buClr>
+                <a:buSzPts val="800"/>
+                <a:buFont typeface="PT Sans"/>
+                <a:buNone/>
+              </a:pPr>
+              <a:r>
+                <a:rPr lang="ru-RU" sz="800" b="0">
+                  <a:solidFill>
+                    <a:schemeClr val="lt1"/>
+                  </a:solidFill>
+                  <a:latin typeface="PT Sans" panose="020B0503020203020204" pitchFamily="34" charset="0"/>
+                  <a:ea typeface="PT Sans"/>
+                  <a:cs typeface="PT Sans"/>
+                  <a:sym typeface="PT Sans"/>
+                </a:rPr>
+                <a:t>601-800</a:t>
+              </a:r>
+              <a:endParaRPr>
+                <a:latin typeface="PT Sans" panose="020B0503020203020204" pitchFamily="34" charset="0"/>
+              </a:endParaRPr>
+            </a:p>
+            <a:p>
+              <a:pPr marL="0" marR="0" lvl="0" indent="0" algn="l" rtl="0">
+                <a:lnSpc>
+                  <a:spcPct val="100000"/>
+                </a:lnSpc>
+                <a:spcBef>
+                  <a:spcPts val="0"/>
+                </a:spcBef>
+                <a:spcAft>
+                  <a:spcPts val="0"/>
+                </a:spcAft>
+                <a:buClr>
+                  <a:schemeClr val="lt1"/>
+                </a:buClr>
+                <a:buSzPts val="800"/>
+                <a:buFont typeface="PT Sans"/>
+                <a:buNone/>
+              </a:pPr>
+              <a:r>
+                <a:rPr lang="ru-RU" sz="800" b="0" u="none" strike="noStrike" cap="none">
+                  <a:solidFill>
+                    <a:schemeClr val="lt1"/>
+                  </a:solidFill>
+                  <a:latin typeface="PT Sans" panose="020B0503020203020204" pitchFamily="34" charset="0"/>
+                  <a:ea typeface="PT Sans"/>
+                  <a:cs typeface="PT Sans"/>
+                  <a:sym typeface="PT Sans"/>
+                </a:rPr>
+                <a:t>9</a:t>
+              </a:r>
+              <a:endParaRPr sz="800" b="0" u="none" strike="noStrike" cap="none">
+                <a:solidFill>
+                  <a:schemeClr val="lt1"/>
+                </a:solidFill>
+                <a:latin typeface="PT Sans" panose="020B0503020203020204" pitchFamily="34" charset="0"/>
+                <a:ea typeface="PT Sans"/>
+                <a:cs typeface="PT Sans"/>
+                <a:sym typeface="PT Sans"/>
+              </a:endParaRPr>
+            </a:p>
+          </p:txBody>
+        </p:sp>
+      </p:grpSp>
+      <p:sp>
+        <p:nvSpPr>
+          <p:cNvPr id="19" name="Объект 2">
+            <a:extLst>
+              <a:ext uri="{FF2B5EF4-FFF2-40B4-BE49-F238E27FC236}">
+                <a16:creationId xmlns:a16="http://schemas.microsoft.com/office/drawing/2014/main" id="{30C61546-9215-4D0C-81CB-5EE3A5637E25}"/>
+              </a:ext>
+            </a:extLst>
+          </p:cNvPr>
+          <p:cNvSpPr>
+            <a:spLocks noGrp="1"/>
+          </p:cNvSpPr>
+          <p:nvPr>
+            <p:ph idx="1"/>
+          </p:nvPr>
+        </p:nvSpPr>
+        <p:spPr>
+          <a:xfrm>
+            <a:off x="183023" y="1223234"/>
+            <a:ext cx="11423283" cy="5677647"/>
+          </a:xfrm>
+        </p:spPr>
+        <p:txBody>
+          <a:bodyPr>
+            <a:normAutofit/>
+          </a:bodyPr>
+          <a:lstStyle/>
+          <a:p>
+            <a:pPr marL="0" indent="0" algn="just">
+              <a:buNone/>
+            </a:pPr>
+            <a:r>
+              <a:rPr lang="ru-RU" dirty="0">
+                <a:latin typeface="+mj-lt"/>
+                <a:ea typeface="Cambria Math" panose="02040503050406030204" pitchFamily="18" charset="0"/>
+              </a:rPr>
+              <a:t>Подготовка в </a:t>
+            </a:r>
+            <a:r>
+              <a:rPr lang="en-US" dirty="0">
+                <a:latin typeface="+mj-lt"/>
+                <a:ea typeface="Cambria Math" panose="02040503050406030204" pitchFamily="18" charset="0"/>
+              </a:rPr>
+              <a:t>GitHub</a:t>
+            </a:r>
+          </a:p>
+          <a:p>
+            <a:pPr marL="457200" lvl="1" indent="0" algn="just">
+              <a:buNone/>
+            </a:pPr>
+            <a:r>
+              <a:rPr lang="ru-RU" dirty="0">
+                <a:latin typeface="+mj-lt"/>
+                <a:ea typeface="Cambria Math" panose="02040503050406030204" pitchFamily="18" charset="0"/>
+              </a:rPr>
+              <a:t>Зайдите на страницу репозитория курса.</a:t>
+            </a:r>
+          </a:p>
+          <a:p>
+            <a:pPr marL="457200" lvl="1" indent="0" algn="just">
+              <a:buNone/>
+            </a:pPr>
+            <a:r>
+              <a:rPr lang="ru-RU" dirty="0">
+                <a:latin typeface="+mj-lt"/>
+                <a:ea typeface="Cambria Math" panose="02040503050406030204" pitchFamily="18" charset="0"/>
+              </a:rPr>
+              <a:t>Нажмите </a:t>
+            </a:r>
+            <a:r>
+              <a:rPr lang="en-US" dirty="0">
+                <a:latin typeface="+mj-lt"/>
+                <a:ea typeface="Cambria Math" panose="02040503050406030204" pitchFamily="18" charset="0"/>
+              </a:rPr>
+              <a:t>Code → HTTPS </a:t>
+            </a:r>
+            <a:r>
+              <a:rPr lang="ru-RU" dirty="0">
+                <a:latin typeface="+mj-lt"/>
+                <a:ea typeface="Cambria Math" panose="02040503050406030204" pitchFamily="18" charset="0"/>
+              </a:rPr>
+              <a:t>и скопируйте </a:t>
+            </a:r>
+            <a:r>
+              <a:rPr lang="en-US" dirty="0">
+                <a:latin typeface="+mj-lt"/>
+                <a:ea typeface="Cambria Math" panose="02040503050406030204" pitchFamily="18" charset="0"/>
+              </a:rPr>
+              <a:t>URL</a:t>
+            </a:r>
+            <a:r>
+              <a:rPr lang="ru-RU" dirty="0">
+                <a:latin typeface="+mj-lt"/>
+                <a:ea typeface="Cambria Math" panose="02040503050406030204" pitchFamily="18" charset="0"/>
+              </a:rPr>
+              <a:t>:</a:t>
+            </a:r>
+          </a:p>
+          <a:p>
+            <a:pPr marL="457200" lvl="1" indent="0" algn="just">
+              <a:buNone/>
+            </a:pPr>
+            <a:r>
+              <a:rPr lang="en-US" dirty="0">
+                <a:latin typeface="+mj-lt"/>
+                <a:ea typeface="Cambria Math" panose="02040503050406030204" pitchFamily="18" charset="0"/>
+                <a:hlinkClick r:id="rId6"/>
+              </a:rPr>
+              <a:t>https://github.com/RamiliaV/DV3_AI_repository</a:t>
+            </a:r>
+            <a:endParaRPr lang="en-US" dirty="0">
+              <a:latin typeface="+mj-lt"/>
+              <a:ea typeface="Cambria Math" panose="02040503050406030204" pitchFamily="18" charset="0"/>
+            </a:endParaRPr>
+          </a:p>
+          <a:p>
+            <a:pPr marL="0" indent="0" algn="just">
+              <a:buNone/>
+            </a:pPr>
+            <a:r>
+              <a:rPr lang="ru-RU" dirty="0">
+                <a:latin typeface="+mj-lt"/>
+                <a:ea typeface="Cambria Math" panose="02040503050406030204" pitchFamily="18" charset="0"/>
+              </a:rPr>
+              <a:t>Создание проекта в </a:t>
+            </a:r>
+            <a:r>
+              <a:rPr lang="en-US" dirty="0">
+                <a:latin typeface="+mj-lt"/>
+                <a:ea typeface="Cambria Math" panose="02040503050406030204" pitchFamily="18" charset="0"/>
+              </a:rPr>
+              <a:t>RStudio</a:t>
+            </a:r>
+          </a:p>
+          <a:p>
+            <a:pPr marL="457200" lvl="1" indent="0" algn="just">
+              <a:buNone/>
+            </a:pPr>
+            <a:r>
+              <a:rPr lang="en-US" dirty="0">
+                <a:latin typeface="+mj-lt"/>
+                <a:ea typeface="Cambria Math" panose="02040503050406030204" pitchFamily="18" charset="0"/>
+              </a:rPr>
+              <a:t>RStudio → File → New Project…</a:t>
+            </a:r>
+          </a:p>
+          <a:p>
+            <a:pPr marL="457200" lvl="1" indent="0" algn="just">
+              <a:buNone/>
+            </a:pPr>
+            <a:r>
+              <a:rPr lang="en-US" dirty="0">
+                <a:latin typeface="+mj-lt"/>
+                <a:ea typeface="Cambria Math" panose="02040503050406030204" pitchFamily="18" charset="0"/>
+              </a:rPr>
+              <a:t>Version Control → Git.</a:t>
+            </a:r>
+          </a:p>
+          <a:p>
+            <a:pPr marL="457200" lvl="1" indent="0" algn="just">
+              <a:buNone/>
+            </a:pPr>
+            <a:r>
+              <a:rPr lang="ru-RU" dirty="0">
+                <a:latin typeface="+mj-lt"/>
+                <a:ea typeface="Cambria Math" panose="02040503050406030204" pitchFamily="18" charset="0"/>
+              </a:rPr>
+              <a:t>В поле </a:t>
+            </a:r>
+            <a:r>
+              <a:rPr lang="en-US" dirty="0">
+                <a:latin typeface="+mj-lt"/>
+                <a:ea typeface="Cambria Math" panose="02040503050406030204" pitchFamily="18" charset="0"/>
+              </a:rPr>
+              <a:t>Repository URL </a:t>
+            </a:r>
+            <a:r>
+              <a:rPr lang="ru-RU" dirty="0">
+                <a:latin typeface="+mj-lt"/>
+                <a:ea typeface="Cambria Math" panose="02040503050406030204" pitchFamily="18" charset="0"/>
+              </a:rPr>
+              <a:t>вставьте ссылку </a:t>
+            </a:r>
+            <a:r>
+              <a:rPr lang="en-US" dirty="0">
+                <a:latin typeface="+mj-lt"/>
+                <a:ea typeface="Cambria Math" panose="02040503050406030204" pitchFamily="18" charset="0"/>
+              </a:rPr>
+              <a:t>GitHub.</a:t>
+            </a:r>
+          </a:p>
+          <a:p>
+            <a:pPr marL="457200" lvl="1" indent="0" algn="just">
+              <a:buNone/>
+            </a:pPr>
+            <a:r>
+              <a:rPr lang="ru-RU" dirty="0">
+                <a:latin typeface="+mj-lt"/>
+                <a:ea typeface="Cambria Math" panose="02040503050406030204" pitchFamily="18" charset="0"/>
+              </a:rPr>
+              <a:t>Выберите папку на диске (путь к проекту) и нажмите </a:t>
+            </a:r>
+            <a:r>
+              <a:rPr lang="en-US" dirty="0">
+                <a:latin typeface="+mj-lt"/>
+                <a:ea typeface="Cambria Math" panose="02040503050406030204" pitchFamily="18" charset="0"/>
+              </a:rPr>
+              <a:t>Create Project.</a:t>
+            </a:r>
+          </a:p>
+          <a:p>
+            <a:pPr marL="457200" lvl="1" indent="0" algn="just">
+              <a:buNone/>
+            </a:pPr>
+            <a:r>
+              <a:rPr lang="en-US" dirty="0">
+                <a:latin typeface="+mj-lt"/>
+                <a:ea typeface="Cambria Math" panose="02040503050406030204" pitchFamily="18" charset="0"/>
+              </a:rPr>
+              <a:t>RStudio </a:t>
+            </a:r>
+            <a:r>
+              <a:rPr lang="ru-RU" dirty="0">
+                <a:latin typeface="+mj-lt"/>
+                <a:ea typeface="Cambria Math" panose="02040503050406030204" pitchFamily="18" charset="0"/>
+              </a:rPr>
+              <a:t>создаст локальный клон репозитория и откроет его как проект.</a:t>
+            </a:r>
+          </a:p>
+          <a:p>
+            <a:pPr marL="0" indent="0" algn="just">
+              <a:buNone/>
+            </a:pPr>
+            <a:endParaRPr lang="ru-RU" dirty="0">
+              <a:latin typeface="+mj-lt"/>
+              <a:ea typeface="Cambria Math" panose="02040503050406030204" pitchFamily="18" charset="0"/>
+            </a:endParaRPr>
+          </a:p>
+        </p:txBody>
+      </p:sp>
+    </p:spTree>
+    <p:extLst>
+      <p:ext uri="{BB962C8B-B14F-4D97-AF65-F5344CB8AC3E}">
+        <p14:creationId xmlns:p14="http://schemas.microsoft.com/office/powerpoint/2010/main" val="418711187"/>
+      </p:ext>
+    </p:extLst>
+  </p:cSld>
+  <p:clrMapOvr>
+    <a:masterClrMapping/>
+  </p:clrMapOvr>
+</p:sld>
+</file>
+
+<file path=ppt/slides/slide6.xml><?xml version="1.0" encoding="utf-8"?>
+<p:sld xmlns:a="http://schemas.openxmlformats.org/drawingml/2006/main" xmlns:r="http://schemas.openxmlformats.org/officeDocument/2006/relationships" xmlns:p="http://schemas.openxmlformats.org/presentationml/2006/main">
+  <p:cSld>
+    <p:spTree>
+      <p:nvGrpSpPr>
+        <p:cNvPr id="1" name=""/>
+        <p:cNvGrpSpPr/>
+        <p:nvPr/>
+      </p:nvGrpSpPr>
+      <p:grpSpPr>
+        <a:xfrm>
+          <a:off x="0" y="0"/>
+          <a:ext cx="0" cy="0"/>
+          <a:chOff x="0" y="0"/>
+          <a:chExt cx="0" cy="0"/>
+        </a:xfrm>
+      </p:grpSpPr>
+      <p:sp>
+        <p:nvSpPr>
+          <p:cNvPr id="13" name="Номер слайда 12"/>
+          <p:cNvSpPr>
+            <a:spLocks noGrp="1"/>
+          </p:cNvSpPr>
+          <p:nvPr>
+            <p:ph type="sldNum" sz="quarter" idx="12"/>
+          </p:nvPr>
+        </p:nvSpPr>
+        <p:spPr>
+          <a:xfrm>
+            <a:off x="9274478" y="6356350"/>
+            <a:ext cx="2743200" cy="365125"/>
+          </a:xfrm>
+        </p:spPr>
+        <p:txBody>
+          <a:bodyPr/>
+          <a:lstStyle/>
+          <a:p>
+            <a:fld id="{B19B0651-EE4F-4900-A07F-96A6BFA9D0F0}" type="slidenum">
+              <a:rPr lang="ru-RU" smtClean="0">
+                <a:latin typeface="PT Sans" panose="020B0503020203020204" pitchFamily="34" charset="0"/>
+              </a:rPr>
+              <a:pPr/>
+              <a:t>6</a:t>
+            </a:fld>
+            <a:endParaRPr lang="ru-RU" dirty="0">
+              <a:latin typeface="PT Sans" panose="020B0503020203020204" pitchFamily="34" charset="0"/>
+            </a:endParaRPr>
+          </a:p>
+        </p:txBody>
+      </p:sp>
+      <p:grpSp>
+        <p:nvGrpSpPr>
+          <p:cNvPr id="9" name="Группа 8">
+            <a:extLst>
+              <a:ext uri="{FF2B5EF4-FFF2-40B4-BE49-F238E27FC236}">
+                <a16:creationId xmlns:a16="http://schemas.microsoft.com/office/drawing/2014/main" id="{D7342440-FCEE-2E4F-950F-6FE7857B3EB5}"/>
+              </a:ext>
+            </a:extLst>
+          </p:cNvPr>
+          <p:cNvGrpSpPr/>
+          <p:nvPr/>
+        </p:nvGrpSpPr>
+        <p:grpSpPr>
+          <a:xfrm>
+            <a:off x="0" y="-4966"/>
+            <a:ext cx="12192000" cy="1035565"/>
+            <a:chOff x="0" y="1924"/>
+            <a:chExt cx="9144000" cy="832664"/>
+          </a:xfrm>
+        </p:grpSpPr>
+        <p:sp>
+          <p:nvSpPr>
+            <p:cNvPr id="10" name="Google Shape;133;p5">
+              <a:extLst>
+                <a:ext uri="{FF2B5EF4-FFF2-40B4-BE49-F238E27FC236}">
+                  <a16:creationId xmlns:a16="http://schemas.microsoft.com/office/drawing/2014/main" id="{E1FF157E-1AAE-A345-AC22-C4FE991023F3}"/>
+                </a:ext>
+              </a:extLst>
+            </p:cNvPr>
+            <p:cNvSpPr/>
+            <p:nvPr/>
+          </p:nvSpPr>
+          <p:spPr>
+            <a:xfrm>
+              <a:off x="0" y="1924"/>
+              <a:ext cx="9144000" cy="832664"/>
+            </a:xfrm>
+            <a:prstGeom prst="rect">
+              <a:avLst/>
+            </a:prstGeom>
+            <a:gradFill>
+              <a:gsLst>
+                <a:gs pos="0">
+                  <a:srgbClr val="003061"/>
+                </a:gs>
+                <a:gs pos="50000">
+                  <a:srgbClr val="00468D"/>
+                </a:gs>
+                <a:gs pos="100000">
+                  <a:srgbClr val="0054AA"/>
+                </a:gs>
+              </a:gsLst>
+              <a:lin ang="5400000" scaled="0"/>
+            </a:gradFill>
+            <a:ln>
+              <a:noFill/>
+            </a:ln>
+          </p:spPr>
+          <p:txBody>
+            <a:bodyPr spcFirstLastPara="1" wrap="square" lIns="91425" tIns="45700" rIns="91425" bIns="45700" anchor="ctr" anchorCtr="0">
+              <a:noAutofit/>
+            </a:bodyPr>
+            <a:lstStyle/>
+            <a:p>
+              <a:pPr marL="0" marR="0" lvl="0" indent="0" algn="ctr" rtl="0">
+                <a:spcBef>
+                  <a:spcPts val="0"/>
+                </a:spcBef>
+                <a:spcAft>
+                  <a:spcPts val="0"/>
+                </a:spcAft>
+                <a:buNone/>
+              </a:pPr>
+              <a:endParaRPr sz="1800" dirty="0">
+                <a:solidFill>
+                  <a:schemeClr val="lt1"/>
+                </a:solidFill>
+                <a:latin typeface="PT Sans" panose="020B0503020203020204" pitchFamily="34" charset="0"/>
+                <a:ea typeface="Calibri"/>
+                <a:cs typeface="Calibri"/>
+                <a:sym typeface="Calibri"/>
+              </a:endParaRPr>
+            </a:p>
+          </p:txBody>
+        </p:sp>
+        <p:pic>
+          <p:nvPicPr>
+            <p:cNvPr id="11" name="Google Shape;134;p5" descr="C:\Users\MSShafigullin\Desktop\2020\Презентация КФУ\kfu_logo_circle_rus.png">
+              <a:extLst>
+                <a:ext uri="{FF2B5EF4-FFF2-40B4-BE49-F238E27FC236}">
+                  <a16:creationId xmlns:a16="http://schemas.microsoft.com/office/drawing/2014/main" id="{25CDED6D-DB62-6B41-9BFC-DFBDD55047A7}"/>
+                </a:ext>
+              </a:extLst>
+            </p:cNvPr>
+            <p:cNvPicPr preferRelativeResize="0"/>
+            <p:nvPr/>
+          </p:nvPicPr>
+          <p:blipFill rotWithShape="1">
+            <a:blip r:embed="rId3">
+              <a:alphaModFix/>
+            </a:blip>
+            <a:srcRect/>
+            <a:stretch/>
+          </p:blipFill>
+          <p:spPr>
+            <a:xfrm>
+              <a:off x="137267" y="148256"/>
+              <a:ext cx="553050" cy="540000"/>
+            </a:xfrm>
+            <a:prstGeom prst="rect">
+              <a:avLst/>
+            </a:prstGeom>
+            <a:noFill/>
+            <a:ln>
+              <a:noFill/>
+            </a:ln>
+          </p:spPr>
+        </p:pic>
+        <p:sp>
+          <p:nvSpPr>
+            <p:cNvPr id="12" name="Google Shape;135;p5">
+              <a:extLst>
+                <a:ext uri="{FF2B5EF4-FFF2-40B4-BE49-F238E27FC236}">
+                  <a16:creationId xmlns:a16="http://schemas.microsoft.com/office/drawing/2014/main" id="{B90A0E07-9A35-E74D-859C-8109875E2889}"/>
+                </a:ext>
+              </a:extLst>
+            </p:cNvPr>
+            <p:cNvSpPr txBox="1"/>
+            <p:nvPr/>
+          </p:nvSpPr>
+          <p:spPr>
+            <a:xfrm>
+              <a:off x="835887" y="240719"/>
+              <a:ext cx="7344900" cy="321682"/>
+            </a:xfrm>
+            <a:prstGeom prst="rect">
+              <a:avLst/>
+            </a:prstGeom>
+            <a:noFill/>
+            <a:ln>
+              <a:noFill/>
+            </a:ln>
+          </p:spPr>
+          <p:txBody>
+            <a:bodyPr spcFirstLastPara="1" wrap="square" lIns="91425" tIns="45700" rIns="91425" bIns="45700" anchor="t" anchorCtr="0">
+              <a:spAutoFit/>
+            </a:bodyPr>
+            <a:lstStyle/>
+            <a:p>
+              <a:pPr lvl="0"/>
+              <a:r>
+                <a:rPr lang="ru-RU" sz="2000" dirty="0">
+                  <a:solidFill>
+                    <a:schemeClr val="lt1"/>
+                  </a:solidFill>
+                  <a:latin typeface="PT Sans" panose="020B0503020203020204" pitchFamily="34" charset="0"/>
+                  <a:ea typeface="PT Sans"/>
+                  <a:cs typeface="PT Sans"/>
+                  <a:sym typeface="PT Sans"/>
+                </a:rPr>
+                <a:t>Настройка токена и </a:t>
+              </a:r>
+              <a:r>
+                <a:rPr lang="ru-RU" sz="2000" dirty="0" err="1">
+                  <a:solidFill>
+                    <a:schemeClr val="lt1"/>
+                  </a:solidFill>
+                  <a:latin typeface="PT Sans" panose="020B0503020203020204" pitchFamily="34" charset="0"/>
+                  <a:ea typeface="PT Sans"/>
+                  <a:cs typeface="PT Sans"/>
+                  <a:sym typeface="PT Sans"/>
+                </a:rPr>
+                <a:t>git</a:t>
+              </a:r>
+              <a:r>
+                <a:rPr lang="ru-RU" sz="2000" dirty="0">
+                  <a:solidFill>
+                    <a:schemeClr val="lt1"/>
+                  </a:solidFill>
+                  <a:latin typeface="PT Sans" panose="020B0503020203020204" pitchFamily="34" charset="0"/>
+                  <a:ea typeface="PT Sans"/>
+                  <a:cs typeface="PT Sans"/>
+                  <a:sym typeface="PT Sans"/>
+                </a:rPr>
+                <a:t>‑учётных данных</a:t>
+              </a:r>
+            </a:p>
+          </p:txBody>
+        </p:sp>
+        <p:pic>
+          <p:nvPicPr>
+            <p:cNvPr id="14" name="Google Shape;136;p5" descr="C:\Users\MSShafigullin\Desktop\Проекты\Презентация по ДК\qs.jpg">
+              <a:extLst>
+                <a:ext uri="{FF2B5EF4-FFF2-40B4-BE49-F238E27FC236}">
+                  <a16:creationId xmlns:a16="http://schemas.microsoft.com/office/drawing/2014/main" id="{9F8DFA2B-AC78-464C-BC1D-62929B6D8A97}"/>
+                </a:ext>
+              </a:extLst>
+            </p:cNvPr>
+            <p:cNvPicPr preferRelativeResize="0"/>
+            <p:nvPr/>
+          </p:nvPicPr>
+          <p:blipFill rotWithShape="1">
+            <a:blip r:embed="rId4">
+              <a:alphaModFix/>
+            </a:blip>
+            <a:srcRect/>
+            <a:stretch/>
+          </p:blipFill>
+          <p:spPr>
+            <a:xfrm>
+              <a:off x="7878094" y="367563"/>
+              <a:ext cx="353386" cy="353386"/>
+            </a:xfrm>
+            <a:prstGeom prst="rect">
+              <a:avLst/>
+            </a:prstGeom>
+            <a:noFill/>
+            <a:ln>
+              <a:noFill/>
+            </a:ln>
+          </p:spPr>
+        </p:pic>
+        <p:pic>
+          <p:nvPicPr>
+            <p:cNvPr id="15" name="Google Shape;137;p5" descr="C:\Users\MSShafigullin\Desktop\2020\Презентация КФУ\THE.png">
+              <a:extLst>
+                <a:ext uri="{FF2B5EF4-FFF2-40B4-BE49-F238E27FC236}">
+                  <a16:creationId xmlns:a16="http://schemas.microsoft.com/office/drawing/2014/main" id="{835D2624-2EF8-2144-9816-A09872F47777}"/>
+                </a:ext>
+              </a:extLst>
+            </p:cNvPr>
+            <p:cNvPicPr preferRelativeResize="0"/>
+            <p:nvPr/>
+          </p:nvPicPr>
+          <p:blipFill rotWithShape="1">
+            <a:blip r:embed="rId5">
+              <a:alphaModFix/>
+            </a:blip>
+            <a:srcRect/>
+            <a:stretch/>
+          </p:blipFill>
+          <p:spPr>
+            <a:xfrm>
+              <a:off x="7928787" y="114719"/>
+              <a:ext cx="252000" cy="252000"/>
+            </a:xfrm>
+            <a:prstGeom prst="rect">
+              <a:avLst/>
+            </a:prstGeom>
+            <a:noFill/>
+            <a:ln>
+              <a:noFill/>
+            </a:ln>
+          </p:spPr>
+        </p:pic>
+        <p:sp>
+          <p:nvSpPr>
+            <p:cNvPr id="16" name="Google Shape;138;p5">
+              <a:extLst>
+                <a:ext uri="{FF2B5EF4-FFF2-40B4-BE49-F238E27FC236}">
+                  <a16:creationId xmlns:a16="http://schemas.microsoft.com/office/drawing/2014/main" id="{841F1A31-5CCC-E941-956A-F47E7E67D768}"/>
+                </a:ext>
+              </a:extLst>
+            </p:cNvPr>
+            <p:cNvSpPr txBox="1"/>
+            <p:nvPr/>
+          </p:nvSpPr>
+          <p:spPr>
+            <a:xfrm>
+              <a:off x="8279432" y="374979"/>
+              <a:ext cx="659482" cy="272188"/>
+            </a:xfrm>
+            <a:prstGeom prst="rect">
+              <a:avLst/>
+            </a:prstGeom>
+            <a:noFill/>
+            <a:ln>
+              <a:noFill/>
+            </a:ln>
+          </p:spPr>
+          <p:txBody>
+            <a:bodyPr spcFirstLastPara="1" wrap="square" lIns="91425" tIns="45700" rIns="91425" bIns="45700" anchor="t" anchorCtr="0">
+              <a:spAutoFit/>
+            </a:bodyPr>
+            <a:lstStyle/>
+            <a:p>
+              <a:pPr marL="0" marR="0" lvl="0" indent="0" algn="l" rtl="0">
+                <a:lnSpc>
+                  <a:spcPct val="100000"/>
+                </a:lnSpc>
+                <a:spcBef>
+                  <a:spcPts val="0"/>
+                </a:spcBef>
+                <a:spcAft>
+                  <a:spcPts val="0"/>
+                </a:spcAft>
+                <a:buClr>
+                  <a:schemeClr val="lt1"/>
+                </a:buClr>
+                <a:buSzPts val="800"/>
+                <a:buFont typeface="PT Sans"/>
+                <a:buNone/>
+              </a:pPr>
+              <a:r>
+                <a:rPr lang="ru-RU" sz="800" b="0">
+                  <a:solidFill>
+                    <a:schemeClr val="lt1"/>
+                  </a:solidFill>
+                  <a:latin typeface="PT Sans" panose="020B0503020203020204" pitchFamily="34" charset="0"/>
+                  <a:ea typeface="PT Sans"/>
+                  <a:cs typeface="PT Sans"/>
+                  <a:sym typeface="PT Sans"/>
+                </a:rPr>
+                <a:t>370</a:t>
+              </a:r>
+              <a:endParaRPr>
+                <a:latin typeface="PT Sans" panose="020B0503020203020204" pitchFamily="34" charset="0"/>
+              </a:endParaRPr>
+            </a:p>
+            <a:p>
+              <a:pPr marL="0" marR="0" lvl="0" indent="0" algn="l" rtl="0">
+                <a:lnSpc>
+                  <a:spcPct val="100000"/>
+                </a:lnSpc>
+                <a:spcBef>
+                  <a:spcPts val="0"/>
+                </a:spcBef>
+                <a:spcAft>
+                  <a:spcPts val="0"/>
+                </a:spcAft>
+                <a:buClr>
+                  <a:schemeClr val="lt1"/>
+                </a:buClr>
+                <a:buSzPts val="800"/>
+                <a:buFont typeface="PT Sans"/>
+                <a:buNone/>
+              </a:pPr>
+              <a:r>
+                <a:rPr lang="ru-RU" sz="800" b="0" u="none" strike="noStrike" cap="none">
+                  <a:solidFill>
+                    <a:schemeClr val="lt1"/>
+                  </a:solidFill>
+                  <a:latin typeface="PT Sans" panose="020B0503020203020204" pitchFamily="34" charset="0"/>
+                  <a:ea typeface="PT Sans"/>
+                  <a:cs typeface="PT Sans"/>
+                  <a:sym typeface="PT Sans"/>
+                </a:rPr>
+                <a:t>13</a:t>
+              </a:r>
+              <a:endParaRPr sz="800" b="0" u="none" strike="noStrike" cap="none">
+                <a:solidFill>
+                  <a:schemeClr val="lt1"/>
+                </a:solidFill>
+                <a:latin typeface="PT Sans" panose="020B0503020203020204" pitchFamily="34" charset="0"/>
+                <a:ea typeface="PT Sans"/>
+                <a:cs typeface="PT Sans"/>
+                <a:sym typeface="PT Sans"/>
+              </a:endParaRPr>
+            </a:p>
+          </p:txBody>
+        </p:sp>
+        <p:sp>
+          <p:nvSpPr>
+            <p:cNvPr id="17" name="Google Shape;139;p5">
+              <a:extLst>
+                <a:ext uri="{FF2B5EF4-FFF2-40B4-BE49-F238E27FC236}">
+                  <a16:creationId xmlns:a16="http://schemas.microsoft.com/office/drawing/2014/main" id="{A28DBFF6-9F47-6244-B20A-895959377BC2}"/>
+                </a:ext>
+              </a:extLst>
+            </p:cNvPr>
+            <p:cNvSpPr txBox="1"/>
+            <p:nvPr/>
+          </p:nvSpPr>
+          <p:spPr>
+            <a:xfrm>
+              <a:off x="8279432" y="71442"/>
+              <a:ext cx="659482" cy="272188"/>
+            </a:xfrm>
+            <a:prstGeom prst="rect">
+              <a:avLst/>
+            </a:prstGeom>
+            <a:noFill/>
+            <a:ln>
+              <a:noFill/>
+            </a:ln>
+          </p:spPr>
+          <p:txBody>
+            <a:bodyPr spcFirstLastPara="1" wrap="square" lIns="91425" tIns="45700" rIns="91425" bIns="45700" anchor="t" anchorCtr="0">
+              <a:spAutoFit/>
+            </a:bodyPr>
+            <a:lstStyle/>
+            <a:p>
+              <a:pPr marL="0" marR="0" lvl="0" indent="0" algn="l" rtl="0">
+                <a:lnSpc>
+                  <a:spcPct val="100000"/>
+                </a:lnSpc>
+                <a:spcBef>
+                  <a:spcPts val="0"/>
+                </a:spcBef>
+                <a:spcAft>
+                  <a:spcPts val="0"/>
+                </a:spcAft>
+                <a:buClr>
+                  <a:schemeClr val="lt1"/>
+                </a:buClr>
+                <a:buSzPts val="800"/>
+                <a:buFont typeface="PT Sans"/>
+                <a:buNone/>
+              </a:pPr>
+              <a:r>
+                <a:rPr lang="ru-RU" sz="800" b="0">
+                  <a:solidFill>
+                    <a:schemeClr val="lt1"/>
+                  </a:solidFill>
+                  <a:latin typeface="PT Sans" panose="020B0503020203020204" pitchFamily="34" charset="0"/>
+                  <a:ea typeface="PT Sans"/>
+                  <a:cs typeface="PT Sans"/>
+                  <a:sym typeface="PT Sans"/>
+                </a:rPr>
+                <a:t>601-800</a:t>
+              </a:r>
+              <a:endParaRPr>
+                <a:latin typeface="PT Sans" panose="020B0503020203020204" pitchFamily="34" charset="0"/>
+              </a:endParaRPr>
+            </a:p>
+            <a:p>
+              <a:pPr marL="0" marR="0" lvl="0" indent="0" algn="l" rtl="0">
+                <a:lnSpc>
+                  <a:spcPct val="100000"/>
+                </a:lnSpc>
+                <a:spcBef>
+                  <a:spcPts val="0"/>
+                </a:spcBef>
+                <a:spcAft>
+                  <a:spcPts val="0"/>
+                </a:spcAft>
+                <a:buClr>
+                  <a:schemeClr val="lt1"/>
+                </a:buClr>
+                <a:buSzPts val="800"/>
+                <a:buFont typeface="PT Sans"/>
+                <a:buNone/>
+              </a:pPr>
+              <a:r>
+                <a:rPr lang="ru-RU" sz="800" b="0" u="none" strike="noStrike" cap="none">
+                  <a:solidFill>
+                    <a:schemeClr val="lt1"/>
+                  </a:solidFill>
+                  <a:latin typeface="PT Sans" panose="020B0503020203020204" pitchFamily="34" charset="0"/>
+                  <a:ea typeface="PT Sans"/>
+                  <a:cs typeface="PT Sans"/>
+                  <a:sym typeface="PT Sans"/>
+                </a:rPr>
+                <a:t>9</a:t>
+              </a:r>
+              <a:endParaRPr sz="800" b="0" u="none" strike="noStrike" cap="none">
+                <a:solidFill>
+                  <a:schemeClr val="lt1"/>
+                </a:solidFill>
+                <a:latin typeface="PT Sans" panose="020B0503020203020204" pitchFamily="34" charset="0"/>
+                <a:ea typeface="PT Sans"/>
+                <a:cs typeface="PT Sans"/>
+                <a:sym typeface="PT Sans"/>
+              </a:endParaRPr>
+            </a:p>
+          </p:txBody>
+        </p:sp>
+      </p:grpSp>
+      <p:sp>
+        <p:nvSpPr>
+          <p:cNvPr id="19" name="Объект 2">
+            <a:extLst>
+              <a:ext uri="{FF2B5EF4-FFF2-40B4-BE49-F238E27FC236}">
+                <a16:creationId xmlns:a16="http://schemas.microsoft.com/office/drawing/2014/main" id="{30C61546-9215-4D0C-81CB-5EE3A5637E25}"/>
+              </a:ext>
+            </a:extLst>
+          </p:cNvPr>
+          <p:cNvSpPr>
+            <a:spLocks noGrp="1"/>
+          </p:cNvSpPr>
+          <p:nvPr>
+            <p:ph idx="1"/>
+          </p:nvPr>
+        </p:nvSpPr>
+        <p:spPr>
+          <a:xfrm>
+            <a:off x="183023" y="1223234"/>
+            <a:ext cx="11423283" cy="5677647"/>
+          </a:xfrm>
+        </p:spPr>
+        <p:txBody>
+          <a:bodyPr>
+            <a:normAutofit fontScale="92500"/>
+          </a:bodyPr>
+          <a:lstStyle/>
+          <a:p>
+            <a:pPr marL="0" indent="0" algn="just">
+              <a:buNone/>
+            </a:pPr>
+            <a:r>
+              <a:rPr lang="ru-RU" dirty="0">
+                <a:latin typeface="+mj-lt"/>
+                <a:ea typeface="Cambria Math" panose="02040503050406030204" pitchFamily="18" charset="0"/>
+              </a:rPr>
+              <a:t>Регистрация на </a:t>
+            </a:r>
+            <a:r>
+              <a:rPr lang="en-US" dirty="0">
+                <a:latin typeface="+mj-lt"/>
+                <a:ea typeface="Cambria Math" panose="02040503050406030204" pitchFamily="18" charset="0"/>
+              </a:rPr>
+              <a:t>github.com</a:t>
+            </a:r>
+            <a:endParaRPr lang="ru-RU" dirty="0">
+              <a:latin typeface="+mj-lt"/>
+              <a:ea typeface="Cambria Math" panose="02040503050406030204" pitchFamily="18" charset="0"/>
+            </a:endParaRPr>
+          </a:p>
+          <a:p>
+            <a:pPr marL="457200" lvl="1" indent="0" algn="just">
+              <a:buNone/>
+            </a:pPr>
+            <a:r>
+              <a:rPr lang="ru-RU" dirty="0">
+                <a:latin typeface="+mj-lt"/>
+                <a:ea typeface="Cambria Math" panose="02040503050406030204" pitchFamily="18" charset="0"/>
+              </a:rPr>
+              <a:t>Создание </a:t>
+            </a:r>
+            <a:r>
+              <a:rPr lang="en-US" dirty="0">
+                <a:latin typeface="+mj-lt"/>
+                <a:ea typeface="Cambria Math" panose="02040503050406030204" pitchFamily="18" charset="0"/>
+              </a:rPr>
+              <a:t>Personal Access Token (PAT) </a:t>
+            </a:r>
+            <a:r>
+              <a:rPr lang="ru-RU" dirty="0">
+                <a:latin typeface="+mj-lt"/>
+                <a:ea typeface="Cambria Math" panose="02040503050406030204" pitchFamily="18" charset="0"/>
+              </a:rPr>
+              <a:t>в </a:t>
+            </a:r>
+            <a:r>
+              <a:rPr lang="en-US" dirty="0">
+                <a:latin typeface="+mj-lt"/>
+                <a:ea typeface="Cambria Math" panose="02040503050406030204" pitchFamily="18" charset="0"/>
+              </a:rPr>
+              <a:t>GitHub</a:t>
+            </a:r>
+          </a:p>
+          <a:p>
+            <a:pPr marL="457200" lvl="1" indent="0" algn="just">
+              <a:buNone/>
+            </a:pPr>
+            <a:r>
+              <a:rPr lang="en-US" dirty="0">
+                <a:latin typeface="+mj-lt"/>
+                <a:ea typeface="Cambria Math" panose="02040503050406030204" pitchFamily="18" charset="0"/>
+              </a:rPr>
+              <a:t>GitHub → Settings → Developer settings → Personal access tokens.</a:t>
+            </a:r>
+          </a:p>
+          <a:p>
+            <a:pPr marL="457200" lvl="1" indent="0" algn="just">
+              <a:buNone/>
+            </a:pPr>
+            <a:r>
+              <a:rPr lang="ru-RU" dirty="0">
+                <a:latin typeface="+mj-lt"/>
+                <a:ea typeface="Cambria Math" panose="02040503050406030204" pitchFamily="18" charset="0"/>
+              </a:rPr>
+              <a:t>Создайте токен (</a:t>
+            </a:r>
+            <a:r>
+              <a:rPr lang="en-US" dirty="0">
+                <a:latin typeface="+mj-lt"/>
+                <a:ea typeface="Cambria Math" panose="02040503050406030204" pitchFamily="18" charset="0"/>
+              </a:rPr>
+              <a:t>fine-grained </a:t>
+            </a:r>
+            <a:r>
+              <a:rPr lang="ru-RU" dirty="0">
+                <a:latin typeface="+mj-lt"/>
+                <a:ea typeface="Cambria Math" panose="02040503050406030204" pitchFamily="18" charset="0"/>
+              </a:rPr>
+              <a:t>или </a:t>
+            </a:r>
+            <a:r>
+              <a:rPr lang="en-US" dirty="0">
+                <a:latin typeface="+mj-lt"/>
+                <a:ea typeface="Cambria Math" panose="02040503050406030204" pitchFamily="18" charset="0"/>
+              </a:rPr>
+              <a:t>classic) </a:t>
+            </a:r>
+            <a:r>
+              <a:rPr lang="ru-RU" dirty="0">
+                <a:latin typeface="+mj-lt"/>
+                <a:ea typeface="Cambria Math" panose="02040503050406030204" pitchFamily="18" charset="0"/>
+              </a:rPr>
+              <a:t>с правами </a:t>
+            </a:r>
+            <a:r>
+              <a:rPr lang="en-US" dirty="0">
+                <a:latin typeface="+mj-lt"/>
+                <a:ea typeface="Cambria Math" panose="02040503050406030204" pitchFamily="18" charset="0"/>
+              </a:rPr>
+              <a:t>repo.</a:t>
+            </a:r>
+          </a:p>
+          <a:p>
+            <a:pPr marL="457200" lvl="1" indent="0" algn="just">
+              <a:buNone/>
+            </a:pPr>
+            <a:r>
+              <a:rPr lang="ru-RU" dirty="0">
+                <a:latin typeface="+mj-lt"/>
+                <a:ea typeface="Cambria Math" panose="02040503050406030204" pitchFamily="18" charset="0"/>
+              </a:rPr>
+              <a:t>Скопируйте токен и сохраните его (после закрытия окна повторно не показывается).</a:t>
+            </a:r>
+          </a:p>
+          <a:p>
+            <a:pPr marL="0" indent="0" algn="just">
+              <a:buNone/>
+            </a:pPr>
+            <a:r>
+              <a:rPr lang="ru-RU" dirty="0">
+                <a:latin typeface="+mj-lt"/>
+                <a:ea typeface="Cambria Math" panose="02040503050406030204" pitchFamily="18" charset="0"/>
+              </a:rPr>
+              <a:t>Сохранение токена в </a:t>
+            </a:r>
+            <a:r>
+              <a:rPr lang="en-US" dirty="0">
+                <a:latin typeface="+mj-lt"/>
+                <a:ea typeface="Cambria Math" panose="02040503050406030204" pitchFamily="18" charset="0"/>
+              </a:rPr>
+              <a:t>R (</a:t>
+            </a:r>
+            <a:r>
+              <a:rPr lang="ru-RU" dirty="0">
+                <a:latin typeface="+mj-lt"/>
+                <a:ea typeface="Cambria Math" panose="02040503050406030204" pitchFamily="18" charset="0"/>
+              </a:rPr>
+              <a:t>один раз)</a:t>
+            </a:r>
+            <a:endParaRPr lang="en-US" dirty="0">
+              <a:latin typeface="+mj-lt"/>
+              <a:ea typeface="Cambria Math" panose="02040503050406030204" pitchFamily="18" charset="0"/>
+            </a:endParaRPr>
+          </a:p>
+          <a:p>
+            <a:pPr marL="457200" lvl="1" indent="0" algn="just">
+              <a:buNone/>
+            </a:pPr>
+            <a:r>
+              <a:rPr lang="ru-RU" dirty="0">
+                <a:latin typeface="Cambria Math" panose="02040503050406030204" pitchFamily="18" charset="0"/>
+                <a:ea typeface="Cambria Math" panose="02040503050406030204" pitchFamily="18" charset="0"/>
+              </a:rPr>
+              <a:t># Установить пакет, если ещё не установлен</a:t>
+            </a:r>
+          </a:p>
+          <a:p>
+            <a:pPr marL="457200" lvl="1" indent="0" algn="just">
+              <a:buNone/>
+            </a:pPr>
+            <a:r>
+              <a:rPr lang="ru-RU" dirty="0">
+                <a:latin typeface="Cambria Math" panose="02040503050406030204" pitchFamily="18" charset="0"/>
+                <a:ea typeface="Cambria Math" panose="02040503050406030204" pitchFamily="18" charset="0"/>
+              </a:rPr>
+              <a:t># </a:t>
+            </a:r>
+            <a:r>
+              <a:rPr lang="en-US" dirty="0" err="1">
+                <a:latin typeface="Cambria Math" panose="02040503050406030204" pitchFamily="18" charset="0"/>
+                <a:ea typeface="Cambria Math" panose="02040503050406030204" pitchFamily="18" charset="0"/>
+              </a:rPr>
+              <a:t>install.packages</a:t>
+            </a:r>
+            <a:r>
+              <a:rPr lang="en-US" dirty="0">
+                <a:latin typeface="Cambria Math" panose="02040503050406030204" pitchFamily="18" charset="0"/>
+                <a:ea typeface="Cambria Math" panose="02040503050406030204" pitchFamily="18" charset="0"/>
+              </a:rPr>
+              <a:t>("</a:t>
+            </a:r>
+            <a:r>
+              <a:rPr lang="en-US" dirty="0" err="1">
+                <a:latin typeface="Cambria Math" panose="02040503050406030204" pitchFamily="18" charset="0"/>
+                <a:ea typeface="Cambria Math" panose="02040503050406030204" pitchFamily="18" charset="0"/>
+              </a:rPr>
+              <a:t>gitcreds</a:t>
+            </a:r>
+            <a:r>
+              <a:rPr lang="en-US" dirty="0">
+                <a:latin typeface="Cambria Math" panose="02040503050406030204" pitchFamily="18" charset="0"/>
+                <a:ea typeface="Cambria Math" panose="02040503050406030204" pitchFamily="18" charset="0"/>
+              </a:rPr>
+              <a:t>")</a:t>
+            </a:r>
+          </a:p>
+          <a:p>
+            <a:pPr marL="457200" lvl="1" indent="0" algn="just">
+              <a:buNone/>
+            </a:pPr>
+            <a:r>
+              <a:rPr lang="en-US" dirty="0">
+                <a:latin typeface="Cambria Math" panose="02040503050406030204" pitchFamily="18" charset="0"/>
+                <a:ea typeface="Cambria Math" panose="02040503050406030204" pitchFamily="18" charset="0"/>
+              </a:rPr>
+              <a:t>library(</a:t>
+            </a:r>
+            <a:r>
+              <a:rPr lang="en-US" dirty="0" err="1">
+                <a:latin typeface="Cambria Math" panose="02040503050406030204" pitchFamily="18" charset="0"/>
+                <a:ea typeface="Cambria Math" panose="02040503050406030204" pitchFamily="18" charset="0"/>
+              </a:rPr>
+              <a:t>gitcreds</a:t>
+            </a:r>
+            <a:r>
+              <a:rPr lang="en-US" dirty="0">
+                <a:latin typeface="Cambria Math" panose="02040503050406030204" pitchFamily="18" charset="0"/>
+                <a:ea typeface="Cambria Math" panose="02040503050406030204" pitchFamily="18" charset="0"/>
+              </a:rPr>
+              <a:t>)</a:t>
+            </a:r>
+          </a:p>
+          <a:p>
+            <a:pPr marL="457200" lvl="1" indent="0" algn="just">
+              <a:buNone/>
+            </a:pPr>
+            <a:r>
+              <a:rPr lang="en-US" dirty="0" err="1">
+                <a:latin typeface="Cambria Math" panose="02040503050406030204" pitchFamily="18" charset="0"/>
+                <a:ea typeface="Cambria Math" panose="02040503050406030204" pitchFamily="18" charset="0"/>
+              </a:rPr>
+              <a:t>gitcreds_set</a:t>
+            </a:r>
+            <a:r>
+              <a:rPr lang="en-US" dirty="0">
+                <a:latin typeface="Cambria Math" panose="02040503050406030204" pitchFamily="18" charset="0"/>
+                <a:ea typeface="Cambria Math" panose="02040503050406030204" pitchFamily="18" charset="0"/>
+              </a:rPr>
+              <a:t>()</a:t>
+            </a:r>
+          </a:p>
+          <a:p>
+            <a:pPr marL="0" indent="0" algn="just">
+              <a:buNone/>
+            </a:pPr>
+            <a:r>
+              <a:rPr lang="ru-RU" dirty="0">
+                <a:latin typeface="+mj-lt"/>
+                <a:ea typeface="Cambria Math" panose="02040503050406030204" pitchFamily="18" charset="0"/>
+              </a:rPr>
+              <a:t>В консоли появится запрос:</a:t>
+            </a:r>
+          </a:p>
+          <a:p>
+            <a:pPr marL="0" indent="0" algn="just">
+              <a:buNone/>
+            </a:pPr>
+            <a:r>
+              <a:rPr lang="en-US" dirty="0">
+                <a:latin typeface="+mj-lt"/>
+                <a:ea typeface="Cambria Math" panose="02040503050406030204" pitchFamily="18" charset="0"/>
+              </a:rPr>
+              <a:t>	</a:t>
+            </a:r>
+            <a:r>
+              <a:rPr lang="ru-RU" dirty="0">
+                <a:latin typeface="+mj-lt"/>
+                <a:ea typeface="Cambria Math" panose="02040503050406030204" pitchFamily="18" charset="0"/>
+              </a:rPr>
+              <a:t>? </a:t>
+            </a:r>
+            <a:r>
+              <a:rPr lang="en-US" dirty="0">
+                <a:latin typeface="+mj-lt"/>
+                <a:ea typeface="Cambria Math" panose="02040503050406030204" pitchFamily="18" charset="0"/>
+              </a:rPr>
+              <a:t>Enter password or token: → </a:t>
+            </a:r>
+            <a:r>
+              <a:rPr lang="ru-RU" dirty="0">
+                <a:latin typeface="+mj-lt"/>
+                <a:ea typeface="Cambria Math" panose="02040503050406030204" pitchFamily="18" charset="0"/>
+              </a:rPr>
+              <a:t>вставьте токен </a:t>
+            </a:r>
+            <a:r>
+              <a:rPr lang="en-US" dirty="0">
+                <a:latin typeface="+mj-lt"/>
+                <a:ea typeface="Cambria Math" panose="02040503050406030204" pitchFamily="18" charset="0"/>
+              </a:rPr>
+              <a:t>GitHub </a:t>
+            </a:r>
+            <a:r>
+              <a:rPr lang="ru-RU" dirty="0">
+                <a:latin typeface="+mj-lt"/>
+                <a:ea typeface="Cambria Math" panose="02040503050406030204" pitchFamily="18" charset="0"/>
+              </a:rPr>
+              <a:t>и нажмите </a:t>
+            </a:r>
+            <a:r>
+              <a:rPr lang="en-US" dirty="0">
+                <a:latin typeface="+mj-lt"/>
+                <a:ea typeface="Cambria Math" panose="02040503050406030204" pitchFamily="18" charset="0"/>
+              </a:rPr>
+              <a:t>Enter.</a:t>
+            </a:r>
+          </a:p>
+          <a:p>
+            <a:pPr marL="0" indent="0" algn="just">
+              <a:buNone/>
+            </a:pPr>
+            <a:r>
+              <a:rPr lang="ru-RU" dirty="0">
+                <a:latin typeface="+mj-lt"/>
+                <a:ea typeface="Cambria Math" panose="02040503050406030204" pitchFamily="18" charset="0"/>
+              </a:rPr>
+              <a:t>Теперь </a:t>
+            </a:r>
+            <a:r>
+              <a:rPr lang="en-US" dirty="0">
+                <a:latin typeface="+mj-lt"/>
+                <a:ea typeface="Cambria Math" panose="02040503050406030204" pitchFamily="18" charset="0"/>
+              </a:rPr>
+              <a:t>RStudio </a:t>
+            </a:r>
+            <a:r>
+              <a:rPr lang="ru-RU" dirty="0">
+                <a:latin typeface="+mj-lt"/>
+                <a:ea typeface="Cambria Math" panose="02040503050406030204" pitchFamily="18" charset="0"/>
+              </a:rPr>
+              <a:t>будет использовать токен для операций </a:t>
+            </a:r>
+            <a:r>
+              <a:rPr lang="en-US" dirty="0">
+                <a:latin typeface="+mj-lt"/>
+                <a:ea typeface="Cambria Math" panose="02040503050406030204" pitchFamily="18" charset="0"/>
+              </a:rPr>
+              <a:t>push/pull </a:t>
+            </a:r>
+            <a:r>
+              <a:rPr lang="ru-RU" dirty="0">
+                <a:latin typeface="+mj-lt"/>
+                <a:ea typeface="Cambria Math" panose="02040503050406030204" pitchFamily="18" charset="0"/>
+              </a:rPr>
+              <a:t>по </a:t>
+            </a:r>
+            <a:r>
+              <a:rPr lang="en-US" dirty="0">
+                <a:latin typeface="+mj-lt"/>
+                <a:ea typeface="Cambria Math" panose="02040503050406030204" pitchFamily="18" charset="0"/>
+              </a:rPr>
+              <a:t>HTTPS.</a:t>
+            </a:r>
+          </a:p>
+          <a:p>
+            <a:pPr marL="0" indent="0" algn="just">
+              <a:buNone/>
+            </a:pPr>
+            <a:endParaRPr lang="ru-RU" dirty="0">
+              <a:latin typeface="+mj-lt"/>
+              <a:ea typeface="Cambria Math" panose="02040503050406030204" pitchFamily="18" charset="0"/>
+            </a:endParaRPr>
+          </a:p>
+        </p:txBody>
+      </p:sp>
+    </p:spTree>
+    <p:extLst>
+      <p:ext uri="{BB962C8B-B14F-4D97-AF65-F5344CB8AC3E}">
+        <p14:creationId xmlns:p14="http://schemas.microsoft.com/office/powerpoint/2010/main" val="1675813192"/>
+      </p:ext>
+    </p:extLst>
+  </p:cSld>
+  <p:clrMapOvr>
+    <a:masterClrMapping/>
+  </p:clrMapOvr>
+</p:sld>
+</file>
+
+<file path=ppt/slides/slide7.xml><?xml version="1.0" encoding="utf-8"?>
+<p:sld xmlns:a="http://schemas.openxmlformats.org/drawingml/2006/main" xmlns:r="http://schemas.openxmlformats.org/officeDocument/2006/relationships" xmlns:p="http://schemas.openxmlformats.org/presentationml/2006/main">
+  <p:cSld>
+    <p:spTree>
+      <p:nvGrpSpPr>
+        <p:cNvPr id="1" name=""/>
+        <p:cNvGrpSpPr/>
+        <p:nvPr/>
+      </p:nvGrpSpPr>
+      <p:grpSpPr>
+        <a:xfrm>
+          <a:off x="0" y="0"/>
+          <a:ext cx="0" cy="0"/>
+          <a:chOff x="0" y="0"/>
+          <a:chExt cx="0" cy="0"/>
+        </a:xfrm>
+      </p:grpSpPr>
+      <p:sp>
+        <p:nvSpPr>
+          <p:cNvPr id="13" name="Номер слайда 12"/>
+          <p:cNvSpPr>
+            <a:spLocks noGrp="1"/>
+          </p:cNvSpPr>
+          <p:nvPr>
+            <p:ph type="sldNum" sz="quarter" idx="12"/>
+          </p:nvPr>
+        </p:nvSpPr>
+        <p:spPr>
+          <a:xfrm>
+            <a:off x="9274478" y="6356350"/>
+            <a:ext cx="2743200" cy="365125"/>
+          </a:xfrm>
+        </p:spPr>
+        <p:txBody>
+          <a:bodyPr/>
+          <a:lstStyle/>
+          <a:p>
+            <a:fld id="{B19B0651-EE4F-4900-A07F-96A6BFA9D0F0}" type="slidenum">
+              <a:rPr lang="ru-RU" smtClean="0">
+                <a:latin typeface="PT Sans" panose="020B0503020203020204" pitchFamily="34" charset="0"/>
+              </a:rPr>
+              <a:pPr/>
+              <a:t>7</a:t>
+            </a:fld>
+            <a:endParaRPr lang="ru-RU" dirty="0">
+              <a:latin typeface="PT Sans" panose="020B0503020203020204" pitchFamily="34" charset="0"/>
+            </a:endParaRPr>
+          </a:p>
+        </p:txBody>
+      </p:sp>
+      <p:grpSp>
+        <p:nvGrpSpPr>
+          <p:cNvPr id="9" name="Группа 8">
+            <a:extLst>
+              <a:ext uri="{FF2B5EF4-FFF2-40B4-BE49-F238E27FC236}">
+                <a16:creationId xmlns:a16="http://schemas.microsoft.com/office/drawing/2014/main" id="{D7342440-FCEE-2E4F-950F-6FE7857B3EB5}"/>
+              </a:ext>
+            </a:extLst>
+          </p:cNvPr>
+          <p:cNvGrpSpPr/>
+          <p:nvPr/>
+        </p:nvGrpSpPr>
+        <p:grpSpPr>
+          <a:xfrm>
+            <a:off x="0" y="-4966"/>
+            <a:ext cx="12192000" cy="1035565"/>
+            <a:chOff x="0" y="1924"/>
+            <a:chExt cx="9144000" cy="832664"/>
+          </a:xfrm>
+        </p:grpSpPr>
+        <p:sp>
+          <p:nvSpPr>
+            <p:cNvPr id="10" name="Google Shape;133;p5">
+              <a:extLst>
+                <a:ext uri="{FF2B5EF4-FFF2-40B4-BE49-F238E27FC236}">
+                  <a16:creationId xmlns:a16="http://schemas.microsoft.com/office/drawing/2014/main" id="{E1FF157E-1AAE-A345-AC22-C4FE991023F3}"/>
+                </a:ext>
+              </a:extLst>
+            </p:cNvPr>
+            <p:cNvSpPr/>
+            <p:nvPr/>
+          </p:nvSpPr>
+          <p:spPr>
+            <a:xfrm>
+              <a:off x="0" y="1924"/>
+              <a:ext cx="9144000" cy="832664"/>
+            </a:xfrm>
+            <a:prstGeom prst="rect">
+              <a:avLst/>
+            </a:prstGeom>
+            <a:gradFill>
+              <a:gsLst>
+                <a:gs pos="0">
+                  <a:srgbClr val="003061"/>
+                </a:gs>
+                <a:gs pos="50000">
+                  <a:srgbClr val="00468D"/>
+                </a:gs>
+                <a:gs pos="100000">
+                  <a:srgbClr val="0054AA"/>
+                </a:gs>
+              </a:gsLst>
+              <a:lin ang="5400000" scaled="0"/>
+            </a:gradFill>
+            <a:ln>
+              <a:noFill/>
+            </a:ln>
+          </p:spPr>
+          <p:txBody>
+            <a:bodyPr spcFirstLastPara="1" wrap="square" lIns="91425" tIns="45700" rIns="91425" bIns="45700" anchor="ctr" anchorCtr="0">
+              <a:noAutofit/>
+            </a:bodyPr>
+            <a:lstStyle/>
+            <a:p>
+              <a:pPr marL="0" marR="0" lvl="0" indent="0" algn="ctr" rtl="0">
+                <a:spcBef>
+                  <a:spcPts val="0"/>
+                </a:spcBef>
+                <a:spcAft>
+                  <a:spcPts val="0"/>
+                </a:spcAft>
+                <a:buNone/>
+              </a:pPr>
+              <a:endParaRPr sz="1800" dirty="0">
+                <a:solidFill>
+                  <a:schemeClr val="lt1"/>
+                </a:solidFill>
+                <a:latin typeface="PT Sans" panose="020B0503020203020204" pitchFamily="34" charset="0"/>
+                <a:ea typeface="Calibri"/>
+                <a:cs typeface="Calibri"/>
+                <a:sym typeface="Calibri"/>
+              </a:endParaRPr>
+            </a:p>
+          </p:txBody>
+        </p:sp>
+        <p:pic>
+          <p:nvPicPr>
+            <p:cNvPr id="11" name="Google Shape;134;p5" descr="C:\Users\MSShafigullin\Desktop\2020\Презентация КФУ\kfu_logo_circle_rus.png">
+              <a:extLst>
+                <a:ext uri="{FF2B5EF4-FFF2-40B4-BE49-F238E27FC236}">
+                  <a16:creationId xmlns:a16="http://schemas.microsoft.com/office/drawing/2014/main" id="{25CDED6D-DB62-6B41-9BFC-DFBDD55047A7}"/>
+                </a:ext>
+              </a:extLst>
+            </p:cNvPr>
+            <p:cNvPicPr preferRelativeResize="0"/>
+            <p:nvPr/>
+          </p:nvPicPr>
+          <p:blipFill rotWithShape="1">
+            <a:blip r:embed="rId3">
+              <a:alphaModFix/>
+            </a:blip>
+            <a:srcRect/>
+            <a:stretch/>
+          </p:blipFill>
+          <p:spPr>
+            <a:xfrm>
+              <a:off x="137267" y="148256"/>
+              <a:ext cx="553050" cy="540000"/>
+            </a:xfrm>
+            <a:prstGeom prst="rect">
+              <a:avLst/>
+            </a:prstGeom>
+            <a:noFill/>
+            <a:ln>
+              <a:noFill/>
+            </a:ln>
+          </p:spPr>
+        </p:pic>
+        <p:sp>
+          <p:nvSpPr>
+            <p:cNvPr id="12" name="Google Shape;135;p5">
+              <a:extLst>
+                <a:ext uri="{FF2B5EF4-FFF2-40B4-BE49-F238E27FC236}">
+                  <a16:creationId xmlns:a16="http://schemas.microsoft.com/office/drawing/2014/main" id="{B90A0E07-9A35-E74D-859C-8109875E2889}"/>
+                </a:ext>
+              </a:extLst>
+            </p:cNvPr>
+            <p:cNvSpPr txBox="1"/>
+            <p:nvPr/>
+          </p:nvSpPr>
+          <p:spPr>
+            <a:xfrm>
+              <a:off x="835887" y="240719"/>
+              <a:ext cx="7344900" cy="321682"/>
+            </a:xfrm>
+            <a:prstGeom prst="rect">
+              <a:avLst/>
+            </a:prstGeom>
+            <a:noFill/>
+            <a:ln>
+              <a:noFill/>
+            </a:ln>
+          </p:spPr>
+          <p:txBody>
+            <a:bodyPr spcFirstLastPara="1" wrap="square" lIns="91425" tIns="45700" rIns="91425" bIns="45700" anchor="t" anchorCtr="0">
+              <a:spAutoFit/>
+            </a:bodyPr>
+            <a:lstStyle/>
+            <a:p>
+              <a:pPr lvl="0"/>
+              <a:r>
+                <a:rPr lang="en-US" sz="2000" dirty="0" err="1">
+                  <a:solidFill>
+                    <a:schemeClr val="lt1"/>
+                  </a:solidFill>
+                  <a:latin typeface="PT Sans" panose="020B0503020203020204" pitchFamily="34" charset="0"/>
+                  <a:ea typeface="PT Sans"/>
+                  <a:cs typeface="PT Sans"/>
+                  <a:sym typeface="PT Sans"/>
+                </a:rPr>
+                <a:t>Базовый</a:t>
+              </a:r>
+              <a:r>
+                <a:rPr lang="en-US" sz="2000" dirty="0">
+                  <a:solidFill>
+                    <a:schemeClr val="lt1"/>
+                  </a:solidFill>
+                  <a:latin typeface="PT Sans" panose="020B0503020203020204" pitchFamily="34" charset="0"/>
+                  <a:ea typeface="PT Sans"/>
+                  <a:cs typeface="PT Sans"/>
+                  <a:sym typeface="PT Sans"/>
+                </a:rPr>
+                <a:t> workflow: add / commit / push / pull</a:t>
+              </a:r>
+              <a:endParaRPr lang="ru-RU" sz="2000" dirty="0">
+                <a:solidFill>
+                  <a:schemeClr val="lt1"/>
+                </a:solidFill>
+                <a:latin typeface="PT Sans" panose="020B0503020203020204" pitchFamily="34" charset="0"/>
+                <a:ea typeface="PT Sans"/>
+                <a:cs typeface="PT Sans"/>
+                <a:sym typeface="PT Sans"/>
+              </a:endParaRPr>
+            </a:p>
+          </p:txBody>
+        </p:sp>
+        <p:pic>
+          <p:nvPicPr>
+            <p:cNvPr id="14" name="Google Shape;136;p5" descr="C:\Users\MSShafigullin\Desktop\Проекты\Презентация по ДК\qs.jpg">
+              <a:extLst>
+                <a:ext uri="{FF2B5EF4-FFF2-40B4-BE49-F238E27FC236}">
+                  <a16:creationId xmlns:a16="http://schemas.microsoft.com/office/drawing/2014/main" id="{9F8DFA2B-AC78-464C-BC1D-62929B6D8A97}"/>
+                </a:ext>
+              </a:extLst>
+            </p:cNvPr>
+            <p:cNvPicPr preferRelativeResize="0"/>
+            <p:nvPr/>
+          </p:nvPicPr>
+          <p:blipFill rotWithShape="1">
+            <a:blip r:embed="rId4">
+              <a:alphaModFix/>
+            </a:blip>
+            <a:srcRect/>
+            <a:stretch/>
+          </p:blipFill>
+          <p:spPr>
+            <a:xfrm>
+              <a:off x="7878094" y="367563"/>
+              <a:ext cx="353386" cy="353386"/>
+            </a:xfrm>
+            <a:prstGeom prst="rect">
+              <a:avLst/>
+            </a:prstGeom>
+            <a:noFill/>
+            <a:ln>
+              <a:noFill/>
+            </a:ln>
+          </p:spPr>
+        </p:pic>
+        <p:pic>
+          <p:nvPicPr>
+            <p:cNvPr id="15" name="Google Shape;137;p5" descr="C:\Users\MSShafigullin\Desktop\2020\Презентация КФУ\THE.png">
+              <a:extLst>
+                <a:ext uri="{FF2B5EF4-FFF2-40B4-BE49-F238E27FC236}">
+                  <a16:creationId xmlns:a16="http://schemas.microsoft.com/office/drawing/2014/main" id="{835D2624-2EF8-2144-9816-A09872F47777}"/>
+                </a:ext>
+              </a:extLst>
+            </p:cNvPr>
+            <p:cNvPicPr preferRelativeResize="0"/>
+            <p:nvPr/>
+          </p:nvPicPr>
+          <p:blipFill rotWithShape="1">
+            <a:blip r:embed="rId5">
+              <a:alphaModFix/>
+            </a:blip>
+            <a:srcRect/>
+            <a:stretch/>
+          </p:blipFill>
+          <p:spPr>
+            <a:xfrm>
+              <a:off x="7928787" y="114719"/>
+              <a:ext cx="252000" cy="252000"/>
+            </a:xfrm>
+            <a:prstGeom prst="rect">
+              <a:avLst/>
+            </a:prstGeom>
+            <a:noFill/>
+            <a:ln>
+              <a:noFill/>
+            </a:ln>
+          </p:spPr>
+        </p:pic>
+        <p:sp>
+          <p:nvSpPr>
+            <p:cNvPr id="16" name="Google Shape;138;p5">
+              <a:extLst>
+                <a:ext uri="{FF2B5EF4-FFF2-40B4-BE49-F238E27FC236}">
+                  <a16:creationId xmlns:a16="http://schemas.microsoft.com/office/drawing/2014/main" id="{841F1A31-5CCC-E941-956A-F47E7E67D768}"/>
+                </a:ext>
+              </a:extLst>
+            </p:cNvPr>
+            <p:cNvSpPr txBox="1"/>
+            <p:nvPr/>
+          </p:nvSpPr>
+          <p:spPr>
+            <a:xfrm>
+              <a:off x="8279432" y="374979"/>
+              <a:ext cx="659482" cy="272188"/>
+            </a:xfrm>
+            <a:prstGeom prst="rect">
+              <a:avLst/>
+            </a:prstGeom>
+            <a:noFill/>
+            <a:ln>
+              <a:noFill/>
+            </a:ln>
+          </p:spPr>
+          <p:txBody>
+            <a:bodyPr spcFirstLastPara="1" wrap="square" lIns="91425" tIns="45700" rIns="91425" bIns="45700" anchor="t" anchorCtr="0">
+              <a:spAutoFit/>
+            </a:bodyPr>
+            <a:lstStyle/>
+            <a:p>
+              <a:pPr marL="0" marR="0" lvl="0" indent="0" algn="l" rtl="0">
+                <a:lnSpc>
+                  <a:spcPct val="100000"/>
+                </a:lnSpc>
+                <a:spcBef>
+                  <a:spcPts val="0"/>
+                </a:spcBef>
+                <a:spcAft>
+                  <a:spcPts val="0"/>
+                </a:spcAft>
+                <a:buClr>
+                  <a:schemeClr val="lt1"/>
+                </a:buClr>
+                <a:buSzPts val="800"/>
+                <a:buFont typeface="PT Sans"/>
+                <a:buNone/>
+              </a:pPr>
+              <a:r>
+                <a:rPr lang="ru-RU" sz="800" b="0">
+                  <a:solidFill>
+                    <a:schemeClr val="lt1"/>
+                  </a:solidFill>
+                  <a:latin typeface="PT Sans" panose="020B0503020203020204" pitchFamily="34" charset="0"/>
+                  <a:ea typeface="PT Sans"/>
+                  <a:cs typeface="PT Sans"/>
+                  <a:sym typeface="PT Sans"/>
+                </a:rPr>
+                <a:t>370</a:t>
+              </a:r>
+              <a:endParaRPr>
+                <a:latin typeface="PT Sans" panose="020B0503020203020204" pitchFamily="34" charset="0"/>
+              </a:endParaRPr>
+            </a:p>
+            <a:p>
+              <a:pPr marL="0" marR="0" lvl="0" indent="0" algn="l" rtl="0">
+                <a:lnSpc>
+                  <a:spcPct val="100000"/>
+                </a:lnSpc>
+                <a:spcBef>
+                  <a:spcPts val="0"/>
+                </a:spcBef>
+                <a:spcAft>
+                  <a:spcPts val="0"/>
+                </a:spcAft>
+                <a:buClr>
+                  <a:schemeClr val="lt1"/>
+                </a:buClr>
+                <a:buSzPts val="800"/>
+                <a:buFont typeface="PT Sans"/>
+                <a:buNone/>
+              </a:pPr>
+              <a:r>
+                <a:rPr lang="ru-RU" sz="800" b="0" u="none" strike="noStrike" cap="none">
+                  <a:solidFill>
+                    <a:schemeClr val="lt1"/>
+                  </a:solidFill>
+                  <a:latin typeface="PT Sans" panose="020B0503020203020204" pitchFamily="34" charset="0"/>
+                  <a:ea typeface="PT Sans"/>
+                  <a:cs typeface="PT Sans"/>
+                  <a:sym typeface="PT Sans"/>
+                </a:rPr>
+                <a:t>13</a:t>
+              </a:r>
+              <a:endParaRPr sz="800" b="0" u="none" strike="noStrike" cap="none">
+                <a:solidFill>
+                  <a:schemeClr val="lt1"/>
+                </a:solidFill>
+                <a:latin typeface="PT Sans" panose="020B0503020203020204" pitchFamily="34" charset="0"/>
+                <a:ea typeface="PT Sans"/>
+                <a:cs typeface="PT Sans"/>
+                <a:sym typeface="PT Sans"/>
+              </a:endParaRPr>
+            </a:p>
+          </p:txBody>
+        </p:sp>
+        <p:sp>
+          <p:nvSpPr>
+            <p:cNvPr id="17" name="Google Shape;139;p5">
+              <a:extLst>
+                <a:ext uri="{FF2B5EF4-FFF2-40B4-BE49-F238E27FC236}">
+                  <a16:creationId xmlns:a16="http://schemas.microsoft.com/office/drawing/2014/main" id="{A28DBFF6-9F47-6244-B20A-895959377BC2}"/>
+                </a:ext>
+              </a:extLst>
+            </p:cNvPr>
+            <p:cNvSpPr txBox="1"/>
+            <p:nvPr/>
+          </p:nvSpPr>
+          <p:spPr>
+            <a:xfrm>
+              <a:off x="8279432" y="71442"/>
+              <a:ext cx="659482" cy="272188"/>
+            </a:xfrm>
+            <a:prstGeom prst="rect">
+              <a:avLst/>
+            </a:prstGeom>
+            <a:noFill/>
+            <a:ln>
+              <a:noFill/>
+            </a:ln>
+          </p:spPr>
+          <p:txBody>
+            <a:bodyPr spcFirstLastPara="1" wrap="square" lIns="91425" tIns="45700" rIns="91425" bIns="45700" anchor="t" anchorCtr="0">
+              <a:spAutoFit/>
+            </a:bodyPr>
+            <a:lstStyle/>
+            <a:p>
+              <a:pPr marL="0" marR="0" lvl="0" indent="0" algn="l" rtl="0">
+                <a:lnSpc>
+                  <a:spcPct val="100000"/>
+                </a:lnSpc>
+                <a:spcBef>
+                  <a:spcPts val="0"/>
+                </a:spcBef>
+                <a:spcAft>
+                  <a:spcPts val="0"/>
+                </a:spcAft>
+                <a:buClr>
+                  <a:schemeClr val="lt1"/>
+                </a:buClr>
+                <a:buSzPts val="800"/>
+                <a:buFont typeface="PT Sans"/>
+                <a:buNone/>
+              </a:pPr>
+              <a:r>
+                <a:rPr lang="ru-RU" sz="800" b="0">
+                  <a:solidFill>
+                    <a:schemeClr val="lt1"/>
+                  </a:solidFill>
+                  <a:latin typeface="PT Sans" panose="020B0503020203020204" pitchFamily="34" charset="0"/>
+                  <a:ea typeface="PT Sans"/>
+                  <a:cs typeface="PT Sans"/>
+                  <a:sym typeface="PT Sans"/>
+                </a:rPr>
+                <a:t>601-800</a:t>
+              </a:r>
+              <a:endParaRPr>
+                <a:latin typeface="PT Sans" panose="020B0503020203020204" pitchFamily="34" charset="0"/>
+              </a:endParaRPr>
+            </a:p>
+            <a:p>
+              <a:pPr marL="0" marR="0" lvl="0" indent="0" algn="l" rtl="0">
+                <a:lnSpc>
+                  <a:spcPct val="100000"/>
+                </a:lnSpc>
+                <a:spcBef>
+                  <a:spcPts val="0"/>
+                </a:spcBef>
+                <a:spcAft>
+                  <a:spcPts val="0"/>
+                </a:spcAft>
+                <a:buClr>
+                  <a:schemeClr val="lt1"/>
+                </a:buClr>
+                <a:buSzPts val="800"/>
+                <a:buFont typeface="PT Sans"/>
+                <a:buNone/>
+              </a:pPr>
+              <a:r>
+                <a:rPr lang="ru-RU" sz="800" b="0" u="none" strike="noStrike" cap="none">
+                  <a:solidFill>
+                    <a:schemeClr val="lt1"/>
+                  </a:solidFill>
+                  <a:latin typeface="PT Sans" panose="020B0503020203020204" pitchFamily="34" charset="0"/>
+                  <a:ea typeface="PT Sans"/>
+                  <a:cs typeface="PT Sans"/>
+                  <a:sym typeface="PT Sans"/>
+                </a:rPr>
+                <a:t>9</a:t>
+              </a:r>
+              <a:endParaRPr sz="800" b="0" u="none" strike="noStrike" cap="none">
+                <a:solidFill>
+                  <a:schemeClr val="lt1"/>
+                </a:solidFill>
+                <a:latin typeface="PT Sans" panose="020B0503020203020204" pitchFamily="34" charset="0"/>
+                <a:ea typeface="PT Sans"/>
+                <a:cs typeface="PT Sans"/>
+                <a:sym typeface="PT Sans"/>
+              </a:endParaRPr>
+            </a:p>
+          </p:txBody>
+        </p:sp>
+      </p:grpSp>
+      <p:sp>
+        <p:nvSpPr>
+          <p:cNvPr id="19" name="Объект 2">
+            <a:extLst>
+              <a:ext uri="{FF2B5EF4-FFF2-40B4-BE49-F238E27FC236}">
+                <a16:creationId xmlns:a16="http://schemas.microsoft.com/office/drawing/2014/main" id="{30C61546-9215-4D0C-81CB-5EE3A5637E25}"/>
+              </a:ext>
+            </a:extLst>
+          </p:cNvPr>
+          <p:cNvSpPr>
+            <a:spLocks noGrp="1"/>
+          </p:cNvSpPr>
+          <p:nvPr>
+            <p:ph idx="1"/>
+          </p:nvPr>
+        </p:nvSpPr>
+        <p:spPr>
+          <a:xfrm>
+            <a:off x="183023" y="1223234"/>
+            <a:ext cx="11423283" cy="5677647"/>
+          </a:xfrm>
+        </p:spPr>
+        <p:txBody>
+          <a:bodyPr>
+            <a:normAutofit/>
+          </a:bodyPr>
+          <a:lstStyle/>
+          <a:p>
+            <a:pPr marL="0" indent="0" algn="just">
+              <a:buNone/>
+            </a:pPr>
+            <a:r>
+              <a:rPr lang="ru-RU" dirty="0">
+                <a:latin typeface="+mj-lt"/>
+                <a:ea typeface="Cambria Math" panose="02040503050406030204" pitchFamily="18" charset="0"/>
+              </a:rPr>
+              <a:t>Добавление и коммит изменений</a:t>
+            </a:r>
+          </a:p>
+          <a:p>
+            <a:pPr marL="457200" lvl="1" indent="0" algn="just">
+              <a:buNone/>
+            </a:pPr>
+            <a:r>
+              <a:rPr lang="ru-RU" dirty="0">
+                <a:latin typeface="+mj-lt"/>
+                <a:ea typeface="Cambria Math" panose="02040503050406030204" pitchFamily="18" charset="0"/>
+              </a:rPr>
+              <a:t>В </a:t>
+            </a:r>
+            <a:r>
+              <a:rPr lang="ru-RU" dirty="0" err="1">
+                <a:latin typeface="+mj-lt"/>
+                <a:ea typeface="Cambria Math" panose="02040503050406030204" pitchFamily="18" charset="0"/>
+              </a:rPr>
+              <a:t>RStudio</a:t>
+            </a:r>
+            <a:r>
+              <a:rPr lang="ru-RU" dirty="0">
+                <a:latin typeface="+mj-lt"/>
+                <a:ea typeface="Cambria Math" panose="02040503050406030204" pitchFamily="18" charset="0"/>
+              </a:rPr>
+              <a:t> откройте вкладку </a:t>
+            </a:r>
+            <a:r>
+              <a:rPr lang="ru-RU" dirty="0" err="1">
+                <a:latin typeface="+mj-lt"/>
+                <a:ea typeface="Cambria Math" panose="02040503050406030204" pitchFamily="18" charset="0"/>
+              </a:rPr>
+              <a:t>Git</a:t>
+            </a:r>
+            <a:r>
+              <a:rPr lang="ru-RU" dirty="0">
+                <a:latin typeface="+mj-lt"/>
+                <a:ea typeface="Cambria Math" panose="02040503050406030204" pitchFamily="18" charset="0"/>
+              </a:rPr>
+              <a:t>.</a:t>
+            </a:r>
+          </a:p>
+          <a:p>
+            <a:pPr marL="457200" lvl="1" indent="0" algn="just">
+              <a:buNone/>
+            </a:pPr>
+            <a:r>
+              <a:rPr lang="ru-RU" dirty="0">
+                <a:latin typeface="+mj-lt"/>
+                <a:ea typeface="Cambria Math" panose="02040503050406030204" pitchFamily="18" charset="0"/>
+              </a:rPr>
+              <a:t>Отметьте галочками изменённые файлы (столбец </a:t>
+            </a:r>
+            <a:r>
+              <a:rPr lang="ru-RU" dirty="0" err="1">
+                <a:latin typeface="+mj-lt"/>
+                <a:ea typeface="Cambria Math" panose="02040503050406030204" pitchFamily="18" charset="0"/>
+              </a:rPr>
+              <a:t>Staged</a:t>
+            </a:r>
+            <a:r>
+              <a:rPr lang="ru-RU" dirty="0">
+                <a:latin typeface="+mj-lt"/>
+                <a:ea typeface="Cambria Math" panose="02040503050406030204" pitchFamily="18" charset="0"/>
+              </a:rPr>
+              <a:t>).</a:t>
+            </a:r>
+          </a:p>
+          <a:p>
+            <a:pPr marL="457200" lvl="1" indent="0" algn="just">
+              <a:buNone/>
+            </a:pPr>
+            <a:r>
+              <a:rPr lang="ru-RU" dirty="0">
+                <a:latin typeface="+mj-lt"/>
+                <a:ea typeface="Cambria Math" panose="02040503050406030204" pitchFamily="18" charset="0"/>
+              </a:rPr>
+              <a:t>Нажмите </a:t>
+            </a:r>
+            <a:r>
+              <a:rPr lang="ru-RU" dirty="0" err="1">
+                <a:latin typeface="+mj-lt"/>
+                <a:ea typeface="Cambria Math" panose="02040503050406030204" pitchFamily="18" charset="0"/>
+              </a:rPr>
+              <a:t>Commit</a:t>
+            </a:r>
+            <a:r>
+              <a:rPr lang="ru-RU" dirty="0">
+                <a:latin typeface="+mj-lt"/>
+                <a:ea typeface="Cambria Math" panose="02040503050406030204" pitchFamily="18" charset="0"/>
+              </a:rPr>
+              <a:t>:</a:t>
+            </a:r>
+          </a:p>
+          <a:p>
+            <a:pPr marL="457200" lvl="1" indent="0" algn="just">
+              <a:buNone/>
+            </a:pPr>
+            <a:r>
+              <a:rPr lang="ru-RU" dirty="0">
+                <a:latin typeface="+mj-lt"/>
+                <a:ea typeface="Cambria Math" panose="02040503050406030204" pitchFamily="18" charset="0"/>
+              </a:rPr>
+              <a:t>Введите осмысленное сообщение (например, </a:t>
+            </a:r>
+            <a:r>
+              <a:rPr lang="ru-RU" dirty="0" err="1">
+                <a:latin typeface="+mj-lt"/>
+                <a:ea typeface="Cambria Math" panose="02040503050406030204" pitchFamily="18" charset="0"/>
+              </a:rPr>
+              <a:t>add</a:t>
+            </a:r>
+            <a:r>
+              <a:rPr lang="ru-RU" dirty="0">
+                <a:latin typeface="+mj-lt"/>
+                <a:ea typeface="Cambria Math" panose="02040503050406030204" pitchFamily="18" charset="0"/>
+              </a:rPr>
+              <a:t> </a:t>
+            </a:r>
+            <a:r>
+              <a:rPr lang="ru-RU" dirty="0" err="1">
+                <a:latin typeface="+mj-lt"/>
+                <a:ea typeface="Cambria Math" panose="02040503050406030204" pitchFamily="18" charset="0"/>
+              </a:rPr>
+              <a:t>script</a:t>
+            </a:r>
+            <a:r>
+              <a:rPr lang="ru-RU" dirty="0">
+                <a:latin typeface="+mj-lt"/>
+                <a:ea typeface="Cambria Math" panose="02040503050406030204" pitchFamily="18" charset="0"/>
+              </a:rPr>
+              <a:t> </a:t>
+            </a:r>
+            <a:r>
+              <a:rPr lang="ru-RU" dirty="0" err="1">
+                <a:latin typeface="+mj-lt"/>
+                <a:ea typeface="Cambria Math" panose="02040503050406030204" pitchFamily="18" charset="0"/>
+              </a:rPr>
+              <a:t>for</a:t>
+            </a:r>
+            <a:r>
+              <a:rPr lang="ru-RU" dirty="0">
+                <a:latin typeface="+mj-lt"/>
+                <a:ea typeface="Cambria Math" panose="02040503050406030204" pitchFamily="18" charset="0"/>
+              </a:rPr>
+              <a:t> </a:t>
+            </a:r>
+            <a:r>
+              <a:rPr lang="ru-RU" dirty="0" err="1">
+                <a:latin typeface="+mj-lt"/>
+                <a:ea typeface="Cambria Math" panose="02040503050406030204" pitchFamily="18" charset="0"/>
+              </a:rPr>
+              <a:t>practice</a:t>
+            </a:r>
+            <a:r>
+              <a:rPr lang="ru-RU" dirty="0">
+                <a:latin typeface="+mj-lt"/>
+                <a:ea typeface="Cambria Math" panose="02040503050406030204" pitchFamily="18" charset="0"/>
+              </a:rPr>
+              <a:t> 3).</a:t>
+            </a:r>
+          </a:p>
+          <a:p>
+            <a:pPr marL="457200" lvl="1" indent="0" algn="just">
+              <a:buNone/>
+            </a:pPr>
+            <a:r>
+              <a:rPr lang="ru-RU" dirty="0">
+                <a:latin typeface="+mj-lt"/>
+                <a:ea typeface="Cambria Math" panose="02040503050406030204" pitchFamily="18" charset="0"/>
+              </a:rPr>
+              <a:t>Нажмите </a:t>
+            </a:r>
+            <a:r>
+              <a:rPr lang="ru-RU" dirty="0" err="1">
+                <a:latin typeface="+mj-lt"/>
+                <a:ea typeface="Cambria Math" panose="02040503050406030204" pitchFamily="18" charset="0"/>
+              </a:rPr>
+              <a:t>Commit</a:t>
+            </a:r>
+            <a:r>
+              <a:rPr lang="ru-RU" dirty="0">
+                <a:latin typeface="+mj-lt"/>
+                <a:ea typeface="Cambria Math" panose="02040503050406030204" pitchFamily="18" charset="0"/>
+              </a:rPr>
+              <a:t>.</a:t>
+            </a:r>
+          </a:p>
+          <a:p>
+            <a:pPr marL="0" indent="0" algn="just">
+              <a:buNone/>
+            </a:pPr>
+            <a:r>
+              <a:rPr lang="ru-RU" dirty="0">
+                <a:latin typeface="+mj-lt"/>
+                <a:ea typeface="Cambria Math" panose="02040503050406030204" pitchFamily="18" charset="0"/>
+              </a:rPr>
+              <a:t>Отправка изменений на </a:t>
+            </a:r>
+            <a:r>
+              <a:rPr lang="ru-RU" dirty="0" err="1">
+                <a:latin typeface="+mj-lt"/>
+                <a:ea typeface="Cambria Math" panose="02040503050406030204" pitchFamily="18" charset="0"/>
+              </a:rPr>
+              <a:t>GitHub</a:t>
+            </a:r>
+            <a:r>
+              <a:rPr lang="ru-RU" dirty="0">
+                <a:latin typeface="+mj-lt"/>
+                <a:ea typeface="Cambria Math" panose="02040503050406030204" pitchFamily="18" charset="0"/>
+              </a:rPr>
+              <a:t> (</a:t>
+            </a:r>
+            <a:r>
+              <a:rPr lang="ru-RU" dirty="0" err="1">
+                <a:latin typeface="+mj-lt"/>
+                <a:ea typeface="Cambria Math" panose="02040503050406030204" pitchFamily="18" charset="0"/>
+              </a:rPr>
+              <a:t>push</a:t>
+            </a:r>
+            <a:r>
+              <a:rPr lang="ru-RU" dirty="0">
+                <a:latin typeface="+mj-lt"/>
+                <a:ea typeface="Cambria Math" panose="02040503050406030204" pitchFamily="18" charset="0"/>
+              </a:rPr>
+              <a:t>)</a:t>
+            </a:r>
+          </a:p>
+          <a:p>
+            <a:pPr marL="457200" lvl="1" indent="0" algn="just">
+              <a:buNone/>
+            </a:pPr>
+            <a:r>
+              <a:rPr lang="ru-RU" dirty="0">
+                <a:latin typeface="+mj-lt"/>
+                <a:ea typeface="Cambria Math" panose="02040503050406030204" pitchFamily="18" charset="0"/>
+              </a:rPr>
+              <a:t>После успешного </a:t>
+            </a:r>
+            <a:r>
+              <a:rPr lang="ru-RU" dirty="0" err="1">
+                <a:latin typeface="+mj-lt"/>
+                <a:ea typeface="Cambria Math" panose="02040503050406030204" pitchFamily="18" charset="0"/>
+              </a:rPr>
+              <a:t>commit</a:t>
+            </a:r>
+            <a:r>
+              <a:rPr lang="ru-RU" dirty="0">
+                <a:latin typeface="+mj-lt"/>
+                <a:ea typeface="Cambria Math" panose="02040503050406030204" pitchFamily="18" charset="0"/>
+              </a:rPr>
+              <a:t> в той же вкладке </a:t>
+            </a:r>
+            <a:r>
+              <a:rPr lang="ru-RU" dirty="0" err="1">
+                <a:latin typeface="+mj-lt"/>
+                <a:ea typeface="Cambria Math" panose="02040503050406030204" pitchFamily="18" charset="0"/>
+              </a:rPr>
+              <a:t>Git</a:t>
+            </a:r>
+            <a:r>
+              <a:rPr lang="ru-RU" dirty="0">
+                <a:latin typeface="+mj-lt"/>
+                <a:ea typeface="Cambria Math" panose="02040503050406030204" pitchFamily="18" charset="0"/>
+              </a:rPr>
+              <a:t> нажмите </a:t>
+            </a:r>
+            <a:r>
+              <a:rPr lang="ru-RU" dirty="0" err="1">
+                <a:latin typeface="+mj-lt"/>
+                <a:ea typeface="Cambria Math" panose="02040503050406030204" pitchFamily="18" charset="0"/>
+              </a:rPr>
+              <a:t>Push</a:t>
+            </a:r>
+            <a:r>
+              <a:rPr lang="ru-RU" dirty="0">
+                <a:latin typeface="+mj-lt"/>
+                <a:ea typeface="Cambria Math" panose="02040503050406030204" pitchFamily="18" charset="0"/>
+              </a:rPr>
+              <a:t>.</a:t>
+            </a:r>
+          </a:p>
+          <a:p>
+            <a:pPr marL="457200" lvl="1" indent="0" algn="just">
+              <a:buNone/>
+            </a:pPr>
+            <a:r>
+              <a:rPr lang="ru-RU" dirty="0">
+                <a:latin typeface="+mj-lt"/>
+                <a:ea typeface="Cambria Math" panose="02040503050406030204" pitchFamily="18" charset="0"/>
+              </a:rPr>
+              <a:t>При первом </a:t>
+            </a:r>
+            <a:r>
+              <a:rPr lang="ru-RU" dirty="0" err="1">
+                <a:latin typeface="+mj-lt"/>
+                <a:ea typeface="Cambria Math" panose="02040503050406030204" pitchFamily="18" charset="0"/>
+              </a:rPr>
+              <a:t>push</a:t>
+            </a:r>
+            <a:r>
+              <a:rPr lang="ru-RU" dirty="0">
+                <a:latin typeface="+mj-lt"/>
+                <a:ea typeface="Cambria Math" panose="02040503050406030204" pitchFamily="18" charset="0"/>
+              </a:rPr>
+              <a:t> может запросить токен/логин (если </a:t>
+            </a:r>
+            <a:r>
+              <a:rPr lang="ru-RU" dirty="0" err="1">
+                <a:latin typeface="+mj-lt"/>
+                <a:ea typeface="Cambria Math" panose="02040503050406030204" pitchFamily="18" charset="0"/>
+              </a:rPr>
+              <a:t>gitcreds</a:t>
+            </a:r>
+            <a:r>
+              <a:rPr lang="ru-RU" dirty="0">
+                <a:latin typeface="+mj-lt"/>
+                <a:ea typeface="Cambria Math" panose="02040503050406030204" pitchFamily="18" charset="0"/>
+              </a:rPr>
+              <a:t> не настроен).</a:t>
+            </a:r>
+          </a:p>
+          <a:p>
+            <a:pPr marL="0" indent="0" algn="just">
+              <a:buNone/>
+            </a:pPr>
+            <a:r>
+              <a:rPr lang="ru-RU" dirty="0">
+                <a:latin typeface="+mj-lt"/>
+                <a:ea typeface="Cambria Math" panose="02040503050406030204" pitchFamily="18" charset="0"/>
+              </a:rPr>
+              <a:t>Получение изменений с </a:t>
+            </a:r>
+            <a:r>
+              <a:rPr lang="ru-RU" dirty="0" err="1">
+                <a:latin typeface="+mj-lt"/>
+                <a:ea typeface="Cambria Math" panose="02040503050406030204" pitchFamily="18" charset="0"/>
+              </a:rPr>
+              <a:t>GitHub</a:t>
+            </a:r>
+            <a:r>
+              <a:rPr lang="ru-RU" dirty="0">
+                <a:latin typeface="+mj-lt"/>
+                <a:ea typeface="Cambria Math" panose="02040503050406030204" pitchFamily="18" charset="0"/>
+              </a:rPr>
+              <a:t> (</a:t>
+            </a:r>
+            <a:r>
+              <a:rPr lang="ru-RU" dirty="0" err="1">
+                <a:latin typeface="+mj-lt"/>
+                <a:ea typeface="Cambria Math" panose="02040503050406030204" pitchFamily="18" charset="0"/>
+              </a:rPr>
+              <a:t>pull</a:t>
+            </a:r>
+            <a:r>
+              <a:rPr lang="ru-RU" dirty="0">
+                <a:latin typeface="+mj-lt"/>
+                <a:ea typeface="Cambria Math" panose="02040503050406030204" pitchFamily="18" charset="0"/>
+              </a:rPr>
+              <a:t>)</a:t>
+            </a:r>
+          </a:p>
+          <a:p>
+            <a:pPr marL="457200" lvl="1" indent="0" algn="just">
+              <a:buNone/>
+            </a:pPr>
+            <a:r>
+              <a:rPr lang="ru-RU" dirty="0">
+                <a:latin typeface="+mj-lt"/>
+                <a:ea typeface="Cambria Math" panose="02040503050406030204" pitchFamily="18" charset="0"/>
+              </a:rPr>
+              <a:t>Перед началом работы полезно нажать Pull, чтобы обновить локальную копию.</a:t>
+            </a:r>
+          </a:p>
+          <a:p>
+            <a:pPr marL="457200" lvl="1" indent="0" algn="just">
+              <a:buNone/>
+            </a:pPr>
+            <a:r>
+              <a:rPr lang="ru-RU" dirty="0">
+                <a:latin typeface="+mj-lt"/>
+                <a:ea typeface="Cambria Math" panose="02040503050406030204" pitchFamily="18" charset="0"/>
+              </a:rPr>
+              <a:t>Если есть конфликты, </a:t>
+            </a:r>
+            <a:r>
+              <a:rPr lang="ru-RU" dirty="0" err="1">
+                <a:latin typeface="+mj-lt"/>
+                <a:ea typeface="Cambria Math" panose="02040503050406030204" pitchFamily="18" charset="0"/>
+              </a:rPr>
+              <a:t>RStudio</a:t>
+            </a:r>
+            <a:r>
+              <a:rPr lang="ru-RU" dirty="0">
+                <a:latin typeface="+mj-lt"/>
+                <a:ea typeface="Cambria Math" panose="02040503050406030204" pitchFamily="18" charset="0"/>
+              </a:rPr>
+              <a:t> подсветит проблемные файлы — их нужно вручную исправить и снова сделать </a:t>
+            </a:r>
+            <a:r>
+              <a:rPr lang="ru-RU" dirty="0" err="1">
+                <a:latin typeface="+mj-lt"/>
+                <a:ea typeface="Cambria Math" panose="02040503050406030204" pitchFamily="18" charset="0"/>
+              </a:rPr>
+              <a:t>commit</a:t>
+            </a:r>
+            <a:r>
+              <a:rPr lang="ru-RU" dirty="0">
+                <a:latin typeface="+mj-lt"/>
+                <a:ea typeface="Cambria Math" panose="02040503050406030204" pitchFamily="18" charset="0"/>
+              </a:rPr>
+              <a:t>/</a:t>
+            </a:r>
+            <a:r>
+              <a:rPr lang="ru-RU" dirty="0" err="1">
+                <a:latin typeface="+mj-lt"/>
+                <a:ea typeface="Cambria Math" panose="02040503050406030204" pitchFamily="18" charset="0"/>
+              </a:rPr>
+              <a:t>push</a:t>
+            </a:r>
+            <a:r>
+              <a:rPr lang="ru-RU" dirty="0">
+                <a:latin typeface="+mj-lt"/>
+                <a:ea typeface="Cambria Math" panose="02040503050406030204" pitchFamily="18" charset="0"/>
+              </a:rPr>
+              <a:t>.</a:t>
+            </a:r>
+          </a:p>
+        </p:txBody>
+      </p:sp>
+    </p:spTree>
+    <p:extLst>
+      <p:ext uri="{BB962C8B-B14F-4D97-AF65-F5344CB8AC3E}">
+        <p14:creationId xmlns:p14="http://schemas.microsoft.com/office/powerpoint/2010/main" val="4111810191"/>
+      </p:ext>
+    </p:extLst>
+  </p:cSld>
+  <p:clrMapOvr>
+    <a:masterClrMapping/>
+  </p:clrMapOvr>
+</p:sld>
+</file>
+
+<file path=ppt/slides/slide8.xml><?xml version="1.0" encoding="utf-8"?>
+<p:sld xmlns:a="http://schemas.openxmlformats.org/drawingml/2006/main" xmlns:r="http://schemas.openxmlformats.org/officeDocument/2006/relationships" xmlns:p="http://schemas.openxmlformats.org/presentationml/2006/main">
+  <p:cSld>
+    <p:spTree>
+      <p:nvGrpSpPr>
+        <p:cNvPr id="1" name=""/>
+        <p:cNvGrpSpPr/>
+        <p:nvPr/>
+      </p:nvGrpSpPr>
+      <p:grpSpPr>
+        <a:xfrm>
+          <a:off x="0" y="0"/>
+          <a:ext cx="0" cy="0"/>
+          <a:chOff x="0" y="0"/>
+          <a:chExt cx="0" cy="0"/>
+        </a:xfrm>
+      </p:grpSpPr>
+      <p:sp>
+        <p:nvSpPr>
+          <p:cNvPr id="13" name="Номер слайда 12"/>
+          <p:cNvSpPr>
+            <a:spLocks noGrp="1"/>
+          </p:cNvSpPr>
+          <p:nvPr>
+            <p:ph type="sldNum" sz="quarter" idx="12"/>
+          </p:nvPr>
+        </p:nvSpPr>
+        <p:spPr>
+          <a:xfrm>
+            <a:off x="9274478" y="6356350"/>
+            <a:ext cx="2743200" cy="365125"/>
+          </a:xfrm>
+        </p:spPr>
+        <p:txBody>
+          <a:bodyPr/>
+          <a:lstStyle/>
+          <a:p>
+            <a:fld id="{B19B0651-EE4F-4900-A07F-96A6BFA9D0F0}" type="slidenum">
+              <a:rPr lang="ru-RU" smtClean="0">
+                <a:latin typeface="PT Sans" panose="020B0503020203020204" pitchFamily="34" charset="0"/>
+              </a:rPr>
+              <a:pPr/>
+              <a:t>8</a:t>
+            </a:fld>
+            <a:endParaRPr lang="ru-RU" dirty="0">
+              <a:latin typeface="PT Sans" panose="020B0503020203020204" pitchFamily="34" charset="0"/>
+            </a:endParaRPr>
+          </a:p>
+        </p:txBody>
+      </p:sp>
+      <p:grpSp>
+        <p:nvGrpSpPr>
+          <p:cNvPr id="9" name="Группа 8">
+            <a:extLst>
+              <a:ext uri="{FF2B5EF4-FFF2-40B4-BE49-F238E27FC236}">
+                <a16:creationId xmlns:a16="http://schemas.microsoft.com/office/drawing/2014/main" id="{D7342440-FCEE-2E4F-950F-6FE7857B3EB5}"/>
+              </a:ext>
+            </a:extLst>
+          </p:cNvPr>
+          <p:cNvGrpSpPr/>
+          <p:nvPr/>
+        </p:nvGrpSpPr>
+        <p:grpSpPr>
+          <a:xfrm>
+            <a:off x="0" y="-4966"/>
+            <a:ext cx="12192000" cy="1035565"/>
+            <a:chOff x="0" y="1924"/>
+            <a:chExt cx="9144000" cy="832664"/>
+          </a:xfrm>
+        </p:grpSpPr>
+        <p:sp>
+          <p:nvSpPr>
+            <p:cNvPr id="10" name="Google Shape;133;p5">
+              <a:extLst>
+                <a:ext uri="{FF2B5EF4-FFF2-40B4-BE49-F238E27FC236}">
+                  <a16:creationId xmlns:a16="http://schemas.microsoft.com/office/drawing/2014/main" id="{E1FF157E-1AAE-A345-AC22-C4FE991023F3}"/>
+                </a:ext>
+              </a:extLst>
+            </p:cNvPr>
+            <p:cNvSpPr/>
+            <p:nvPr/>
+          </p:nvSpPr>
+          <p:spPr>
+            <a:xfrm>
+              <a:off x="0" y="1924"/>
+              <a:ext cx="9144000" cy="832664"/>
+            </a:xfrm>
+            <a:prstGeom prst="rect">
+              <a:avLst/>
+            </a:prstGeom>
+            <a:gradFill>
+              <a:gsLst>
+                <a:gs pos="0">
+                  <a:srgbClr val="003061"/>
+                </a:gs>
+                <a:gs pos="50000">
+                  <a:srgbClr val="00468D"/>
+                </a:gs>
+                <a:gs pos="100000">
+                  <a:srgbClr val="0054AA"/>
+                </a:gs>
+              </a:gsLst>
+              <a:lin ang="5400000" scaled="0"/>
+            </a:gradFill>
+            <a:ln>
+              <a:noFill/>
+            </a:ln>
+          </p:spPr>
+          <p:txBody>
+            <a:bodyPr spcFirstLastPara="1" wrap="square" lIns="91425" tIns="45700" rIns="91425" bIns="45700" anchor="ctr" anchorCtr="0">
+              <a:noAutofit/>
+            </a:bodyPr>
+            <a:lstStyle/>
+            <a:p>
+              <a:pPr marL="0" marR="0" lvl="0" indent="0" algn="ctr" rtl="0">
+                <a:spcBef>
+                  <a:spcPts val="0"/>
+                </a:spcBef>
+                <a:spcAft>
+                  <a:spcPts val="0"/>
+                </a:spcAft>
+                <a:buNone/>
+              </a:pPr>
+              <a:endParaRPr sz="1800" dirty="0">
+                <a:solidFill>
+                  <a:schemeClr val="lt1"/>
+                </a:solidFill>
+                <a:latin typeface="PT Sans" panose="020B0503020203020204" pitchFamily="34" charset="0"/>
+                <a:ea typeface="Calibri"/>
+                <a:cs typeface="Calibri"/>
+                <a:sym typeface="Calibri"/>
+              </a:endParaRPr>
+            </a:p>
+          </p:txBody>
+        </p:sp>
+        <p:pic>
+          <p:nvPicPr>
+            <p:cNvPr id="11" name="Google Shape;134;p5" descr="C:\Users\MSShafigullin\Desktop\2020\Презентация КФУ\kfu_logo_circle_rus.png">
+              <a:extLst>
+                <a:ext uri="{FF2B5EF4-FFF2-40B4-BE49-F238E27FC236}">
+                  <a16:creationId xmlns:a16="http://schemas.microsoft.com/office/drawing/2014/main" id="{25CDED6D-DB62-6B41-9BFC-DFBDD55047A7}"/>
+                </a:ext>
+              </a:extLst>
+            </p:cNvPr>
+            <p:cNvPicPr preferRelativeResize="0"/>
+            <p:nvPr/>
+          </p:nvPicPr>
+          <p:blipFill rotWithShape="1">
+            <a:blip r:embed="rId3">
+              <a:alphaModFix/>
+            </a:blip>
+            <a:srcRect/>
+            <a:stretch/>
+          </p:blipFill>
+          <p:spPr>
+            <a:xfrm>
+              <a:off x="137267" y="148256"/>
+              <a:ext cx="553050" cy="540000"/>
+            </a:xfrm>
+            <a:prstGeom prst="rect">
+              <a:avLst/>
+            </a:prstGeom>
+            <a:noFill/>
+            <a:ln>
+              <a:noFill/>
+            </a:ln>
+          </p:spPr>
+        </p:pic>
+        <p:sp>
+          <p:nvSpPr>
+            <p:cNvPr id="12" name="Google Shape;135;p5">
+              <a:extLst>
+                <a:ext uri="{FF2B5EF4-FFF2-40B4-BE49-F238E27FC236}">
+                  <a16:creationId xmlns:a16="http://schemas.microsoft.com/office/drawing/2014/main" id="{B90A0E07-9A35-E74D-859C-8109875E2889}"/>
+                </a:ext>
+              </a:extLst>
+            </p:cNvPr>
+            <p:cNvSpPr txBox="1"/>
+            <p:nvPr/>
+          </p:nvSpPr>
+          <p:spPr>
+            <a:xfrm>
+              <a:off x="835887" y="240719"/>
+              <a:ext cx="7344900" cy="321682"/>
+            </a:xfrm>
+            <a:prstGeom prst="rect">
+              <a:avLst/>
+            </a:prstGeom>
+            <a:noFill/>
+            <a:ln>
+              <a:noFill/>
+            </a:ln>
+          </p:spPr>
+          <p:txBody>
+            <a:bodyPr spcFirstLastPara="1" wrap="square" lIns="91425" tIns="45700" rIns="91425" bIns="45700" anchor="t" anchorCtr="0">
+              <a:spAutoFit/>
+            </a:bodyPr>
+            <a:lstStyle/>
+            <a:p>
+              <a:pPr lvl="0"/>
+              <a:r>
                 <a:rPr lang="en-US" sz="2000" dirty="0">
                   <a:solidFill>
                     <a:schemeClr val="lt1"/>
@@ -18374,7 +23819,7 @@
 </p:sld>
 </file>
 
-<file path=ppt/slides/slide6.xml><?xml version="1.0" encoding="utf-8"?>
+<file path=ppt/slides/slide9.xml><?xml version="1.0" encoding="utf-8"?>
 <p:sld xmlns:a="http://schemas.openxmlformats.org/drawingml/2006/main" xmlns:r="http://schemas.openxmlformats.org/officeDocument/2006/relationships" xmlns:p="http://schemas.openxmlformats.org/presentationml/2006/main">
   <p:cSld>
     <p:spTree>
@@ -18416,7 +23861,7 @@
                 <a:latin typeface="PT Sans" panose="020B0503020203020204" pitchFamily="34" charset="0"/>
               </a:rPr>
               <a:pPr/>
-              <a:t>6</a:t>
+              <a:t>9</a:t>
             </a:fld>
             <a:endParaRPr lang="ru-RU" dirty="0">
               <a:latin typeface="PT Sans" panose="020B0503020203020204" pitchFamily="34" charset="0"/>
@@ -19168,2435 +24613,6 @@
     <p:extLst>
       <p:ext uri="{BB962C8B-B14F-4D97-AF65-F5344CB8AC3E}">
         <p14:creationId xmlns:p14="http://schemas.microsoft.com/office/powerpoint/2010/main" val="87833091"/>
-      </p:ext>
-    </p:extLst>
-  </p:cSld>
-  <p:clrMapOvr>
-    <a:masterClrMapping/>
-  </p:clrMapOvr>
-</p:sld>
-</file>
-
-<file path=ppt/slides/slide7.xml><?xml version="1.0" encoding="utf-8"?>
-<p:sld xmlns:a="http://schemas.openxmlformats.org/drawingml/2006/main" xmlns:r="http://schemas.openxmlformats.org/officeDocument/2006/relationships" xmlns:p="http://schemas.openxmlformats.org/presentationml/2006/main">
-  <p:cSld>
-    <p:spTree>
-      <p:nvGrpSpPr>
-        <p:cNvPr id="1" name=""/>
-        <p:cNvGrpSpPr/>
-        <p:nvPr/>
-      </p:nvGrpSpPr>
-      <p:grpSpPr>
-        <a:xfrm>
-          <a:off x="0" y="0"/>
-          <a:ext cx="0" cy="0"/>
-          <a:chOff x="0" y="0"/>
-          <a:chExt cx="0" cy="0"/>
-        </a:xfrm>
-      </p:grpSpPr>
-      <p:sp>
-        <p:nvSpPr>
-          <p:cNvPr id="13" name="Номер слайда 12"/>
-          <p:cNvSpPr>
-            <a:spLocks noGrp="1"/>
-          </p:cNvSpPr>
-          <p:nvPr>
-            <p:ph type="sldNum" sz="quarter" idx="12"/>
-          </p:nvPr>
-        </p:nvSpPr>
-        <p:spPr>
-          <a:xfrm>
-            <a:off x="9274478" y="6356350"/>
-            <a:ext cx="2743200" cy="365125"/>
-          </a:xfrm>
-        </p:spPr>
-        <p:txBody>
-          <a:bodyPr/>
-          <a:lstStyle/>
-          <a:p>
-            <a:fld id="{B19B0651-EE4F-4900-A07F-96A6BFA9D0F0}" type="slidenum">
-              <a:rPr lang="ru-RU" smtClean="0">
-                <a:latin typeface="PT Sans" panose="020B0503020203020204" pitchFamily="34" charset="0"/>
-              </a:rPr>
-              <a:pPr/>
-              <a:t>7</a:t>
-            </a:fld>
-            <a:endParaRPr lang="ru-RU" dirty="0">
-              <a:latin typeface="PT Sans" panose="020B0503020203020204" pitchFamily="34" charset="0"/>
-            </a:endParaRPr>
-          </a:p>
-        </p:txBody>
-      </p:sp>
-      <p:grpSp>
-        <p:nvGrpSpPr>
-          <p:cNvPr id="9" name="Группа 8">
-            <a:extLst>
-              <a:ext uri="{FF2B5EF4-FFF2-40B4-BE49-F238E27FC236}">
-                <a16:creationId xmlns:a16="http://schemas.microsoft.com/office/drawing/2014/main" id="{D7342440-FCEE-2E4F-950F-6FE7857B3EB5}"/>
-              </a:ext>
-            </a:extLst>
-          </p:cNvPr>
-          <p:cNvGrpSpPr/>
-          <p:nvPr/>
-        </p:nvGrpSpPr>
-        <p:grpSpPr>
-          <a:xfrm>
-            <a:off x="0" y="-4966"/>
-            <a:ext cx="12192000" cy="1035565"/>
-            <a:chOff x="0" y="1924"/>
-            <a:chExt cx="9144000" cy="832664"/>
-          </a:xfrm>
-        </p:grpSpPr>
-        <p:sp>
-          <p:nvSpPr>
-            <p:cNvPr id="10" name="Google Shape;133;p5">
-              <a:extLst>
-                <a:ext uri="{FF2B5EF4-FFF2-40B4-BE49-F238E27FC236}">
-                  <a16:creationId xmlns:a16="http://schemas.microsoft.com/office/drawing/2014/main" id="{E1FF157E-1AAE-A345-AC22-C4FE991023F3}"/>
-                </a:ext>
-              </a:extLst>
-            </p:cNvPr>
-            <p:cNvSpPr/>
-            <p:nvPr/>
-          </p:nvSpPr>
-          <p:spPr>
-            <a:xfrm>
-              <a:off x="0" y="1924"/>
-              <a:ext cx="9144000" cy="832664"/>
-            </a:xfrm>
-            <a:prstGeom prst="rect">
-              <a:avLst/>
-            </a:prstGeom>
-            <a:gradFill>
-              <a:gsLst>
-                <a:gs pos="0">
-                  <a:srgbClr val="003061"/>
-                </a:gs>
-                <a:gs pos="50000">
-                  <a:srgbClr val="00468D"/>
-                </a:gs>
-                <a:gs pos="100000">
-                  <a:srgbClr val="0054AA"/>
-                </a:gs>
-              </a:gsLst>
-              <a:lin ang="5400000" scaled="0"/>
-            </a:gradFill>
-            <a:ln>
-              <a:noFill/>
-            </a:ln>
-          </p:spPr>
-          <p:txBody>
-            <a:bodyPr spcFirstLastPara="1" wrap="square" lIns="91425" tIns="45700" rIns="91425" bIns="45700" anchor="ctr" anchorCtr="0">
-              <a:noAutofit/>
-            </a:bodyPr>
-            <a:lstStyle/>
-            <a:p>
-              <a:pPr marL="0" marR="0" lvl="0" indent="0" algn="ctr" rtl="0">
-                <a:spcBef>
-                  <a:spcPts val="0"/>
-                </a:spcBef>
-                <a:spcAft>
-                  <a:spcPts val="0"/>
-                </a:spcAft>
-                <a:buNone/>
-              </a:pPr>
-              <a:endParaRPr sz="1800" dirty="0">
-                <a:solidFill>
-                  <a:schemeClr val="lt1"/>
-                </a:solidFill>
-                <a:latin typeface="PT Sans" panose="020B0503020203020204" pitchFamily="34" charset="0"/>
-                <a:ea typeface="Calibri"/>
-                <a:cs typeface="Calibri"/>
-                <a:sym typeface="Calibri"/>
-              </a:endParaRPr>
-            </a:p>
-          </p:txBody>
-        </p:sp>
-        <p:pic>
-          <p:nvPicPr>
-            <p:cNvPr id="11" name="Google Shape;134;p5" descr="C:\Users\MSShafigullin\Desktop\2020\Презентация КФУ\kfu_logo_circle_rus.png">
-              <a:extLst>
-                <a:ext uri="{FF2B5EF4-FFF2-40B4-BE49-F238E27FC236}">
-                  <a16:creationId xmlns:a16="http://schemas.microsoft.com/office/drawing/2014/main" id="{25CDED6D-DB62-6B41-9BFC-DFBDD55047A7}"/>
-                </a:ext>
-              </a:extLst>
-            </p:cNvPr>
-            <p:cNvPicPr preferRelativeResize="0"/>
-            <p:nvPr/>
-          </p:nvPicPr>
-          <p:blipFill rotWithShape="1">
-            <a:blip r:embed="rId3">
-              <a:alphaModFix/>
-            </a:blip>
-            <a:srcRect/>
-            <a:stretch/>
-          </p:blipFill>
-          <p:spPr>
-            <a:xfrm>
-              <a:off x="137267" y="148256"/>
-              <a:ext cx="553050" cy="540000"/>
-            </a:xfrm>
-            <a:prstGeom prst="rect">
-              <a:avLst/>
-            </a:prstGeom>
-            <a:noFill/>
-            <a:ln>
-              <a:noFill/>
-            </a:ln>
-          </p:spPr>
-        </p:pic>
-        <p:sp>
-          <p:nvSpPr>
-            <p:cNvPr id="12" name="Google Shape;135;p5">
-              <a:extLst>
-                <a:ext uri="{FF2B5EF4-FFF2-40B4-BE49-F238E27FC236}">
-                  <a16:creationId xmlns:a16="http://schemas.microsoft.com/office/drawing/2014/main" id="{B90A0E07-9A35-E74D-859C-8109875E2889}"/>
-                </a:ext>
-              </a:extLst>
-            </p:cNvPr>
-            <p:cNvSpPr txBox="1"/>
-            <p:nvPr/>
-          </p:nvSpPr>
-          <p:spPr>
-            <a:xfrm>
-              <a:off x="835887" y="240719"/>
-              <a:ext cx="7344900" cy="321682"/>
-            </a:xfrm>
-            <a:prstGeom prst="rect">
-              <a:avLst/>
-            </a:prstGeom>
-            <a:noFill/>
-            <a:ln>
-              <a:noFill/>
-            </a:ln>
-          </p:spPr>
-          <p:txBody>
-            <a:bodyPr spcFirstLastPara="1" wrap="square" lIns="91425" tIns="45700" rIns="91425" bIns="45700" anchor="t" anchorCtr="0">
-              <a:spAutoFit/>
-            </a:bodyPr>
-            <a:lstStyle/>
-            <a:p>
-              <a:pPr lvl="0"/>
-              <a:r>
-                <a:rPr lang="ru-RU" sz="2000" dirty="0">
-                  <a:solidFill>
-                    <a:schemeClr val="lt1"/>
-                  </a:solidFill>
-                  <a:latin typeface="PT Sans" panose="020B0503020203020204" pitchFamily="34" charset="0"/>
-                  <a:ea typeface="PT Sans"/>
-                  <a:cs typeface="PT Sans"/>
-                  <a:sym typeface="PT Sans"/>
-                </a:rPr>
-                <a:t>Разбиение на </a:t>
-              </a:r>
-              <a:r>
-                <a:rPr lang="en-US" sz="2000" dirty="0">
-                  <a:solidFill>
-                    <a:schemeClr val="lt1"/>
-                  </a:solidFill>
-                  <a:latin typeface="PT Sans" panose="020B0503020203020204" pitchFamily="34" charset="0"/>
-                  <a:ea typeface="PT Sans"/>
-                  <a:cs typeface="PT Sans"/>
-                  <a:sym typeface="PT Sans"/>
-                </a:rPr>
-                <a:t>train / test</a:t>
-              </a:r>
-            </a:p>
-          </p:txBody>
-        </p:sp>
-        <p:pic>
-          <p:nvPicPr>
-            <p:cNvPr id="14" name="Google Shape;136;p5" descr="C:\Users\MSShafigullin\Desktop\Проекты\Презентация по ДК\qs.jpg">
-              <a:extLst>
-                <a:ext uri="{FF2B5EF4-FFF2-40B4-BE49-F238E27FC236}">
-                  <a16:creationId xmlns:a16="http://schemas.microsoft.com/office/drawing/2014/main" id="{9F8DFA2B-AC78-464C-BC1D-62929B6D8A97}"/>
-                </a:ext>
-              </a:extLst>
-            </p:cNvPr>
-            <p:cNvPicPr preferRelativeResize="0"/>
-            <p:nvPr/>
-          </p:nvPicPr>
-          <p:blipFill rotWithShape="1">
-            <a:blip r:embed="rId4">
-              <a:alphaModFix/>
-            </a:blip>
-            <a:srcRect/>
-            <a:stretch/>
-          </p:blipFill>
-          <p:spPr>
-            <a:xfrm>
-              <a:off x="7878094" y="367563"/>
-              <a:ext cx="353386" cy="353386"/>
-            </a:xfrm>
-            <a:prstGeom prst="rect">
-              <a:avLst/>
-            </a:prstGeom>
-            <a:noFill/>
-            <a:ln>
-              <a:noFill/>
-            </a:ln>
-          </p:spPr>
-        </p:pic>
-        <p:pic>
-          <p:nvPicPr>
-            <p:cNvPr id="15" name="Google Shape;137;p5" descr="C:\Users\MSShafigullin\Desktop\2020\Презентация КФУ\THE.png">
-              <a:extLst>
-                <a:ext uri="{FF2B5EF4-FFF2-40B4-BE49-F238E27FC236}">
-                  <a16:creationId xmlns:a16="http://schemas.microsoft.com/office/drawing/2014/main" id="{835D2624-2EF8-2144-9816-A09872F47777}"/>
-                </a:ext>
-              </a:extLst>
-            </p:cNvPr>
-            <p:cNvPicPr preferRelativeResize="0"/>
-            <p:nvPr/>
-          </p:nvPicPr>
-          <p:blipFill rotWithShape="1">
-            <a:blip r:embed="rId5">
-              <a:alphaModFix/>
-            </a:blip>
-            <a:srcRect/>
-            <a:stretch/>
-          </p:blipFill>
-          <p:spPr>
-            <a:xfrm>
-              <a:off x="7928787" y="114719"/>
-              <a:ext cx="252000" cy="252000"/>
-            </a:xfrm>
-            <a:prstGeom prst="rect">
-              <a:avLst/>
-            </a:prstGeom>
-            <a:noFill/>
-            <a:ln>
-              <a:noFill/>
-            </a:ln>
-          </p:spPr>
-        </p:pic>
-        <p:sp>
-          <p:nvSpPr>
-            <p:cNvPr id="16" name="Google Shape;138;p5">
-              <a:extLst>
-                <a:ext uri="{FF2B5EF4-FFF2-40B4-BE49-F238E27FC236}">
-                  <a16:creationId xmlns:a16="http://schemas.microsoft.com/office/drawing/2014/main" id="{841F1A31-5CCC-E941-956A-F47E7E67D768}"/>
-                </a:ext>
-              </a:extLst>
-            </p:cNvPr>
-            <p:cNvSpPr txBox="1"/>
-            <p:nvPr/>
-          </p:nvSpPr>
-          <p:spPr>
-            <a:xfrm>
-              <a:off x="8279432" y="374979"/>
-              <a:ext cx="659482" cy="272188"/>
-            </a:xfrm>
-            <a:prstGeom prst="rect">
-              <a:avLst/>
-            </a:prstGeom>
-            <a:noFill/>
-            <a:ln>
-              <a:noFill/>
-            </a:ln>
-          </p:spPr>
-          <p:txBody>
-            <a:bodyPr spcFirstLastPara="1" wrap="square" lIns="91425" tIns="45700" rIns="91425" bIns="45700" anchor="t" anchorCtr="0">
-              <a:spAutoFit/>
-            </a:bodyPr>
-            <a:lstStyle/>
-            <a:p>
-              <a:pPr marL="0" marR="0" lvl="0" indent="0" algn="l" rtl="0">
-                <a:lnSpc>
-                  <a:spcPct val="100000"/>
-                </a:lnSpc>
-                <a:spcBef>
-                  <a:spcPts val="0"/>
-                </a:spcBef>
-                <a:spcAft>
-                  <a:spcPts val="0"/>
-                </a:spcAft>
-                <a:buClr>
-                  <a:schemeClr val="lt1"/>
-                </a:buClr>
-                <a:buSzPts val="800"/>
-                <a:buFont typeface="PT Sans"/>
-                <a:buNone/>
-              </a:pPr>
-              <a:r>
-                <a:rPr lang="ru-RU" sz="800" b="0">
-                  <a:solidFill>
-                    <a:schemeClr val="lt1"/>
-                  </a:solidFill>
-                  <a:latin typeface="PT Sans" panose="020B0503020203020204" pitchFamily="34" charset="0"/>
-                  <a:ea typeface="PT Sans"/>
-                  <a:cs typeface="PT Sans"/>
-                  <a:sym typeface="PT Sans"/>
-                </a:rPr>
-                <a:t>370</a:t>
-              </a:r>
-              <a:endParaRPr>
-                <a:latin typeface="PT Sans" panose="020B0503020203020204" pitchFamily="34" charset="0"/>
-              </a:endParaRPr>
-            </a:p>
-            <a:p>
-              <a:pPr marL="0" marR="0" lvl="0" indent="0" algn="l" rtl="0">
-                <a:lnSpc>
-                  <a:spcPct val="100000"/>
-                </a:lnSpc>
-                <a:spcBef>
-                  <a:spcPts val="0"/>
-                </a:spcBef>
-                <a:spcAft>
-                  <a:spcPts val="0"/>
-                </a:spcAft>
-                <a:buClr>
-                  <a:schemeClr val="lt1"/>
-                </a:buClr>
-                <a:buSzPts val="800"/>
-                <a:buFont typeface="PT Sans"/>
-                <a:buNone/>
-              </a:pPr>
-              <a:r>
-                <a:rPr lang="ru-RU" sz="800" b="0" u="none" strike="noStrike" cap="none">
-                  <a:solidFill>
-                    <a:schemeClr val="lt1"/>
-                  </a:solidFill>
-                  <a:latin typeface="PT Sans" panose="020B0503020203020204" pitchFamily="34" charset="0"/>
-                  <a:ea typeface="PT Sans"/>
-                  <a:cs typeface="PT Sans"/>
-                  <a:sym typeface="PT Sans"/>
-                </a:rPr>
-                <a:t>13</a:t>
-              </a:r>
-              <a:endParaRPr sz="800" b="0" u="none" strike="noStrike" cap="none">
-                <a:solidFill>
-                  <a:schemeClr val="lt1"/>
-                </a:solidFill>
-                <a:latin typeface="PT Sans" panose="020B0503020203020204" pitchFamily="34" charset="0"/>
-                <a:ea typeface="PT Sans"/>
-                <a:cs typeface="PT Sans"/>
-                <a:sym typeface="PT Sans"/>
-              </a:endParaRPr>
-            </a:p>
-          </p:txBody>
-        </p:sp>
-        <p:sp>
-          <p:nvSpPr>
-            <p:cNvPr id="17" name="Google Shape;139;p5">
-              <a:extLst>
-                <a:ext uri="{FF2B5EF4-FFF2-40B4-BE49-F238E27FC236}">
-                  <a16:creationId xmlns:a16="http://schemas.microsoft.com/office/drawing/2014/main" id="{A28DBFF6-9F47-6244-B20A-895959377BC2}"/>
-                </a:ext>
-              </a:extLst>
-            </p:cNvPr>
-            <p:cNvSpPr txBox="1"/>
-            <p:nvPr/>
-          </p:nvSpPr>
-          <p:spPr>
-            <a:xfrm>
-              <a:off x="8279432" y="71442"/>
-              <a:ext cx="659482" cy="272188"/>
-            </a:xfrm>
-            <a:prstGeom prst="rect">
-              <a:avLst/>
-            </a:prstGeom>
-            <a:noFill/>
-            <a:ln>
-              <a:noFill/>
-            </a:ln>
-          </p:spPr>
-          <p:txBody>
-            <a:bodyPr spcFirstLastPara="1" wrap="square" lIns="91425" tIns="45700" rIns="91425" bIns="45700" anchor="t" anchorCtr="0">
-              <a:spAutoFit/>
-            </a:bodyPr>
-            <a:lstStyle/>
-            <a:p>
-              <a:pPr marL="0" marR="0" lvl="0" indent="0" algn="l" rtl="0">
-                <a:lnSpc>
-                  <a:spcPct val="100000"/>
-                </a:lnSpc>
-                <a:spcBef>
-                  <a:spcPts val="0"/>
-                </a:spcBef>
-                <a:spcAft>
-                  <a:spcPts val="0"/>
-                </a:spcAft>
-                <a:buClr>
-                  <a:schemeClr val="lt1"/>
-                </a:buClr>
-                <a:buSzPts val="800"/>
-                <a:buFont typeface="PT Sans"/>
-                <a:buNone/>
-              </a:pPr>
-              <a:r>
-                <a:rPr lang="ru-RU" sz="800" b="0">
-                  <a:solidFill>
-                    <a:schemeClr val="lt1"/>
-                  </a:solidFill>
-                  <a:latin typeface="PT Sans" panose="020B0503020203020204" pitchFamily="34" charset="0"/>
-                  <a:ea typeface="PT Sans"/>
-                  <a:cs typeface="PT Sans"/>
-                  <a:sym typeface="PT Sans"/>
-                </a:rPr>
-                <a:t>601-800</a:t>
-              </a:r>
-              <a:endParaRPr>
-                <a:latin typeface="PT Sans" panose="020B0503020203020204" pitchFamily="34" charset="0"/>
-              </a:endParaRPr>
-            </a:p>
-            <a:p>
-              <a:pPr marL="0" marR="0" lvl="0" indent="0" algn="l" rtl="0">
-                <a:lnSpc>
-                  <a:spcPct val="100000"/>
-                </a:lnSpc>
-                <a:spcBef>
-                  <a:spcPts val="0"/>
-                </a:spcBef>
-                <a:spcAft>
-                  <a:spcPts val="0"/>
-                </a:spcAft>
-                <a:buClr>
-                  <a:schemeClr val="lt1"/>
-                </a:buClr>
-                <a:buSzPts val="800"/>
-                <a:buFont typeface="PT Sans"/>
-                <a:buNone/>
-              </a:pPr>
-              <a:r>
-                <a:rPr lang="ru-RU" sz="800" b="0" u="none" strike="noStrike" cap="none">
-                  <a:solidFill>
-                    <a:schemeClr val="lt1"/>
-                  </a:solidFill>
-                  <a:latin typeface="PT Sans" panose="020B0503020203020204" pitchFamily="34" charset="0"/>
-                  <a:ea typeface="PT Sans"/>
-                  <a:cs typeface="PT Sans"/>
-                  <a:sym typeface="PT Sans"/>
-                </a:rPr>
-                <a:t>9</a:t>
-              </a:r>
-              <a:endParaRPr sz="800" b="0" u="none" strike="noStrike" cap="none">
-                <a:solidFill>
-                  <a:schemeClr val="lt1"/>
-                </a:solidFill>
-                <a:latin typeface="PT Sans" panose="020B0503020203020204" pitchFamily="34" charset="0"/>
-                <a:ea typeface="PT Sans"/>
-                <a:cs typeface="PT Sans"/>
-                <a:sym typeface="PT Sans"/>
-              </a:endParaRPr>
-            </a:p>
-          </p:txBody>
-        </p:sp>
-      </p:grpSp>
-      <p:sp>
-        <p:nvSpPr>
-          <p:cNvPr id="19" name="Объект 2">
-            <a:extLst>
-              <a:ext uri="{FF2B5EF4-FFF2-40B4-BE49-F238E27FC236}">
-                <a16:creationId xmlns:a16="http://schemas.microsoft.com/office/drawing/2014/main" id="{30C61546-9215-4D0C-81CB-5EE3A5637E25}"/>
-              </a:ext>
-            </a:extLst>
-          </p:cNvPr>
-          <p:cNvSpPr>
-            <a:spLocks noGrp="1"/>
-          </p:cNvSpPr>
-          <p:nvPr>
-            <p:ph idx="1"/>
-          </p:nvPr>
-        </p:nvSpPr>
-        <p:spPr>
-          <a:xfrm>
-            <a:off x="183023" y="1223234"/>
-            <a:ext cx="11423283" cy="5677647"/>
-          </a:xfrm>
-        </p:spPr>
-        <p:txBody>
-          <a:bodyPr>
-            <a:normAutofit/>
-          </a:bodyPr>
-          <a:lstStyle/>
-          <a:p>
-            <a:pPr marL="0" indent="0" algn="just">
-              <a:buNone/>
-            </a:pPr>
-            <a:r>
-              <a:rPr lang="en-US" sz="2000" i="1" dirty="0" err="1">
-                <a:latin typeface="Cambria Math" panose="02040503050406030204" pitchFamily="18" charset="0"/>
-                <a:ea typeface="Cambria Math" panose="02040503050406030204" pitchFamily="18" charset="0"/>
-              </a:rPr>
-              <a:t>set.seed</a:t>
-            </a:r>
-            <a:r>
-              <a:rPr lang="en-US" sz="2000" i="1" dirty="0">
-                <a:latin typeface="Cambria Math" panose="02040503050406030204" pitchFamily="18" charset="0"/>
-                <a:ea typeface="Cambria Math" panose="02040503050406030204" pitchFamily="18" charset="0"/>
-              </a:rPr>
-              <a:t>(123)</a:t>
-            </a:r>
-          </a:p>
-          <a:p>
-            <a:pPr marL="0" indent="0" algn="just">
-              <a:buNone/>
-            </a:pPr>
-            <a:r>
-              <a:rPr lang="en-US" sz="2000" i="1" dirty="0">
-                <a:latin typeface="Cambria Math" panose="02040503050406030204" pitchFamily="18" charset="0"/>
-                <a:ea typeface="Cambria Math" panose="02040503050406030204" pitchFamily="18" charset="0"/>
-              </a:rPr>
-              <a:t>n &lt;- </a:t>
-            </a:r>
-            <a:r>
-              <a:rPr lang="en-US" sz="2000" i="1" dirty="0" err="1">
-                <a:latin typeface="Cambria Math" panose="02040503050406030204" pitchFamily="18" charset="0"/>
-                <a:ea typeface="Cambria Math" panose="02040503050406030204" pitchFamily="18" charset="0"/>
-              </a:rPr>
-              <a:t>nrow</a:t>
-            </a:r>
-            <a:r>
-              <a:rPr lang="en-US" sz="2000" i="1" dirty="0">
-                <a:latin typeface="Cambria Math" panose="02040503050406030204" pitchFamily="18" charset="0"/>
-                <a:ea typeface="Cambria Math" panose="02040503050406030204" pitchFamily="18" charset="0"/>
-              </a:rPr>
-              <a:t>(</a:t>
-            </a:r>
-            <a:r>
-              <a:rPr lang="en-US" sz="2000" i="1" dirty="0" err="1">
-                <a:latin typeface="Cambria Math" panose="02040503050406030204" pitchFamily="18" charset="0"/>
-                <a:ea typeface="Cambria Math" panose="02040503050406030204" pitchFamily="18" charset="0"/>
-              </a:rPr>
-              <a:t>pid_clean</a:t>
-            </a:r>
-            <a:r>
-              <a:rPr lang="en-US" sz="2000" i="1" dirty="0">
-                <a:latin typeface="Cambria Math" panose="02040503050406030204" pitchFamily="18" charset="0"/>
-                <a:ea typeface="Cambria Math" panose="02040503050406030204" pitchFamily="18" charset="0"/>
-              </a:rPr>
-              <a:t>)</a:t>
-            </a:r>
-          </a:p>
-          <a:p>
-            <a:pPr marL="0" indent="0" algn="just">
-              <a:buNone/>
-            </a:pPr>
-            <a:r>
-              <a:rPr lang="en-US" sz="2000" i="1" dirty="0" err="1">
-                <a:latin typeface="Cambria Math" panose="02040503050406030204" pitchFamily="18" charset="0"/>
-                <a:ea typeface="Cambria Math" panose="02040503050406030204" pitchFamily="18" charset="0"/>
-              </a:rPr>
-              <a:t>train_idx</a:t>
-            </a:r>
-            <a:r>
-              <a:rPr lang="en-US" sz="2000" i="1" dirty="0">
-                <a:latin typeface="Cambria Math" panose="02040503050406030204" pitchFamily="18" charset="0"/>
-                <a:ea typeface="Cambria Math" panose="02040503050406030204" pitchFamily="18" charset="0"/>
-              </a:rPr>
-              <a:t> &lt;- sample(</a:t>
-            </a:r>
-            <a:r>
-              <a:rPr lang="en-US" sz="2000" i="1" dirty="0" err="1">
-                <a:latin typeface="Cambria Math" panose="02040503050406030204" pitchFamily="18" charset="0"/>
-                <a:ea typeface="Cambria Math" panose="02040503050406030204" pitchFamily="18" charset="0"/>
-              </a:rPr>
-              <a:t>seq_len</a:t>
-            </a:r>
-            <a:r>
-              <a:rPr lang="en-US" sz="2000" i="1" dirty="0">
-                <a:latin typeface="Cambria Math" panose="02040503050406030204" pitchFamily="18" charset="0"/>
-                <a:ea typeface="Cambria Math" panose="02040503050406030204" pitchFamily="18" charset="0"/>
-              </a:rPr>
-              <a:t>(n), size = floor(0.7 * n))</a:t>
-            </a:r>
-          </a:p>
-          <a:p>
-            <a:pPr marL="0" indent="0" algn="just">
-              <a:buNone/>
-            </a:pPr>
-            <a:endParaRPr lang="en-US" sz="2000" i="1" dirty="0">
-              <a:latin typeface="Cambria Math" panose="02040503050406030204" pitchFamily="18" charset="0"/>
-              <a:ea typeface="Cambria Math" panose="02040503050406030204" pitchFamily="18" charset="0"/>
-            </a:endParaRPr>
-          </a:p>
-          <a:p>
-            <a:pPr marL="0" indent="0" algn="just">
-              <a:buNone/>
-            </a:pPr>
-            <a:r>
-              <a:rPr lang="en-US" sz="2000" i="1" dirty="0">
-                <a:latin typeface="Cambria Math" panose="02040503050406030204" pitchFamily="18" charset="0"/>
-                <a:ea typeface="Cambria Math" panose="02040503050406030204" pitchFamily="18" charset="0"/>
-              </a:rPr>
-              <a:t>train &lt;- </a:t>
-            </a:r>
-            <a:r>
-              <a:rPr lang="en-US" sz="2000" i="1" dirty="0" err="1">
-                <a:latin typeface="Cambria Math" panose="02040503050406030204" pitchFamily="18" charset="0"/>
-                <a:ea typeface="Cambria Math" panose="02040503050406030204" pitchFamily="18" charset="0"/>
-              </a:rPr>
-              <a:t>pid_clean</a:t>
-            </a:r>
-            <a:r>
-              <a:rPr lang="en-US" sz="2000" i="1" dirty="0">
-                <a:latin typeface="Cambria Math" panose="02040503050406030204" pitchFamily="18" charset="0"/>
-                <a:ea typeface="Cambria Math" panose="02040503050406030204" pitchFamily="18" charset="0"/>
-              </a:rPr>
-              <a:t>[</a:t>
-            </a:r>
-            <a:r>
-              <a:rPr lang="en-US" sz="2000" i="1" dirty="0" err="1">
-                <a:latin typeface="Cambria Math" panose="02040503050406030204" pitchFamily="18" charset="0"/>
-                <a:ea typeface="Cambria Math" panose="02040503050406030204" pitchFamily="18" charset="0"/>
-              </a:rPr>
-              <a:t>train_idx</a:t>
-            </a:r>
-            <a:r>
-              <a:rPr lang="en-US" sz="2000" i="1" dirty="0">
-                <a:latin typeface="Cambria Math" panose="02040503050406030204" pitchFamily="18" charset="0"/>
-                <a:ea typeface="Cambria Math" panose="02040503050406030204" pitchFamily="18" charset="0"/>
-              </a:rPr>
-              <a:t>, ]</a:t>
-            </a:r>
-          </a:p>
-          <a:p>
-            <a:pPr marL="0" indent="0" algn="just">
-              <a:buNone/>
-            </a:pPr>
-            <a:r>
-              <a:rPr lang="en-US" sz="2000" i="1" dirty="0">
-                <a:latin typeface="Cambria Math" panose="02040503050406030204" pitchFamily="18" charset="0"/>
-                <a:ea typeface="Cambria Math" panose="02040503050406030204" pitchFamily="18" charset="0"/>
-              </a:rPr>
-              <a:t>test  &lt;- </a:t>
-            </a:r>
-            <a:r>
-              <a:rPr lang="en-US" sz="2000" i="1" dirty="0" err="1">
-                <a:latin typeface="Cambria Math" panose="02040503050406030204" pitchFamily="18" charset="0"/>
-                <a:ea typeface="Cambria Math" panose="02040503050406030204" pitchFamily="18" charset="0"/>
-              </a:rPr>
-              <a:t>pid_clean</a:t>
-            </a:r>
-            <a:r>
-              <a:rPr lang="en-US" sz="2000" i="1" dirty="0">
-                <a:latin typeface="Cambria Math" panose="02040503050406030204" pitchFamily="18" charset="0"/>
-                <a:ea typeface="Cambria Math" panose="02040503050406030204" pitchFamily="18" charset="0"/>
-              </a:rPr>
-              <a:t>[-</a:t>
-            </a:r>
-            <a:r>
-              <a:rPr lang="en-US" sz="2000" i="1" dirty="0" err="1">
-                <a:latin typeface="Cambria Math" panose="02040503050406030204" pitchFamily="18" charset="0"/>
-                <a:ea typeface="Cambria Math" panose="02040503050406030204" pitchFamily="18" charset="0"/>
-              </a:rPr>
-              <a:t>train_idx</a:t>
-            </a:r>
-            <a:r>
-              <a:rPr lang="en-US" sz="2000" i="1" dirty="0">
-                <a:latin typeface="Cambria Math" panose="02040503050406030204" pitchFamily="18" charset="0"/>
-                <a:ea typeface="Cambria Math" panose="02040503050406030204" pitchFamily="18" charset="0"/>
-              </a:rPr>
-              <a:t>, ]</a:t>
-            </a:r>
-          </a:p>
-          <a:p>
-            <a:pPr marL="0" indent="0" algn="just">
-              <a:buNone/>
-            </a:pPr>
-            <a:endParaRPr lang="en-US" sz="2000" i="1" dirty="0">
-              <a:latin typeface="Cambria Math" panose="02040503050406030204" pitchFamily="18" charset="0"/>
-              <a:ea typeface="Cambria Math" panose="02040503050406030204" pitchFamily="18" charset="0"/>
-            </a:endParaRPr>
-          </a:p>
-          <a:p>
-            <a:pPr marL="0" indent="0" algn="just">
-              <a:buNone/>
-            </a:pPr>
-            <a:r>
-              <a:rPr lang="en-US" sz="2000" i="1" dirty="0">
-                <a:latin typeface="Cambria Math" panose="02040503050406030204" pitchFamily="18" charset="0"/>
-                <a:ea typeface="Cambria Math" panose="02040503050406030204" pitchFamily="18" charset="0"/>
-              </a:rPr>
-              <a:t>table(</a:t>
-            </a:r>
-            <a:r>
-              <a:rPr lang="en-US" sz="2000" i="1" dirty="0" err="1">
-                <a:latin typeface="Cambria Math" panose="02040503050406030204" pitchFamily="18" charset="0"/>
-                <a:ea typeface="Cambria Math" panose="02040503050406030204" pitchFamily="18" charset="0"/>
-              </a:rPr>
-              <a:t>train$diabetes</a:t>
-            </a:r>
-            <a:r>
-              <a:rPr lang="en-US" sz="2000" i="1" dirty="0">
-                <a:latin typeface="Cambria Math" panose="02040503050406030204" pitchFamily="18" charset="0"/>
-                <a:ea typeface="Cambria Math" panose="02040503050406030204" pitchFamily="18" charset="0"/>
-              </a:rPr>
-              <a:t>)</a:t>
-            </a:r>
-          </a:p>
-          <a:p>
-            <a:pPr marL="0" indent="0" algn="just">
-              <a:buNone/>
-            </a:pPr>
-            <a:r>
-              <a:rPr lang="en-US" sz="2000" i="1" dirty="0">
-                <a:latin typeface="Cambria Math" panose="02040503050406030204" pitchFamily="18" charset="0"/>
-                <a:ea typeface="Cambria Math" panose="02040503050406030204" pitchFamily="18" charset="0"/>
-              </a:rPr>
-              <a:t>table(</a:t>
-            </a:r>
-            <a:r>
-              <a:rPr lang="en-US" sz="2000" i="1" dirty="0" err="1">
-                <a:latin typeface="Cambria Math" panose="02040503050406030204" pitchFamily="18" charset="0"/>
-                <a:ea typeface="Cambria Math" panose="02040503050406030204" pitchFamily="18" charset="0"/>
-              </a:rPr>
-              <a:t>test$diabetes</a:t>
-            </a:r>
-            <a:r>
-              <a:rPr lang="en-US" sz="2000" i="1" dirty="0">
-                <a:latin typeface="Cambria Math" panose="02040503050406030204" pitchFamily="18" charset="0"/>
-                <a:ea typeface="Cambria Math" panose="02040503050406030204" pitchFamily="18" charset="0"/>
-              </a:rPr>
-              <a:t>)</a:t>
-            </a:r>
-          </a:p>
-        </p:txBody>
-      </p:sp>
-    </p:spTree>
-    <p:extLst>
-      <p:ext uri="{BB962C8B-B14F-4D97-AF65-F5344CB8AC3E}">
-        <p14:creationId xmlns:p14="http://schemas.microsoft.com/office/powerpoint/2010/main" val="1136017155"/>
-      </p:ext>
-    </p:extLst>
-  </p:cSld>
-  <p:clrMapOvr>
-    <a:masterClrMapping/>
-  </p:clrMapOvr>
-</p:sld>
-</file>
-
-<file path=ppt/slides/slide8.xml><?xml version="1.0" encoding="utf-8"?>
-<p:sld xmlns:a="http://schemas.openxmlformats.org/drawingml/2006/main" xmlns:r="http://schemas.openxmlformats.org/officeDocument/2006/relationships" xmlns:p="http://schemas.openxmlformats.org/presentationml/2006/main">
-  <p:cSld>
-    <p:spTree>
-      <p:nvGrpSpPr>
-        <p:cNvPr id="1" name=""/>
-        <p:cNvGrpSpPr/>
-        <p:nvPr/>
-      </p:nvGrpSpPr>
-      <p:grpSpPr>
-        <a:xfrm>
-          <a:off x="0" y="0"/>
-          <a:ext cx="0" cy="0"/>
-          <a:chOff x="0" y="0"/>
-          <a:chExt cx="0" cy="0"/>
-        </a:xfrm>
-      </p:grpSpPr>
-      <p:sp>
-        <p:nvSpPr>
-          <p:cNvPr id="13" name="Номер слайда 12"/>
-          <p:cNvSpPr>
-            <a:spLocks noGrp="1"/>
-          </p:cNvSpPr>
-          <p:nvPr>
-            <p:ph type="sldNum" sz="quarter" idx="12"/>
-          </p:nvPr>
-        </p:nvSpPr>
-        <p:spPr>
-          <a:xfrm>
-            <a:off x="9274478" y="6356350"/>
-            <a:ext cx="2743200" cy="365125"/>
-          </a:xfrm>
-        </p:spPr>
-        <p:txBody>
-          <a:bodyPr/>
-          <a:lstStyle/>
-          <a:p>
-            <a:fld id="{B19B0651-EE4F-4900-A07F-96A6BFA9D0F0}" type="slidenum">
-              <a:rPr lang="ru-RU" smtClean="0">
-                <a:latin typeface="PT Sans" panose="020B0503020203020204" pitchFamily="34" charset="0"/>
-              </a:rPr>
-              <a:pPr/>
-              <a:t>8</a:t>
-            </a:fld>
-            <a:endParaRPr lang="ru-RU" dirty="0">
-              <a:latin typeface="PT Sans" panose="020B0503020203020204" pitchFamily="34" charset="0"/>
-            </a:endParaRPr>
-          </a:p>
-        </p:txBody>
-      </p:sp>
-      <p:grpSp>
-        <p:nvGrpSpPr>
-          <p:cNvPr id="9" name="Группа 8">
-            <a:extLst>
-              <a:ext uri="{FF2B5EF4-FFF2-40B4-BE49-F238E27FC236}">
-                <a16:creationId xmlns:a16="http://schemas.microsoft.com/office/drawing/2014/main" id="{D7342440-FCEE-2E4F-950F-6FE7857B3EB5}"/>
-              </a:ext>
-            </a:extLst>
-          </p:cNvPr>
-          <p:cNvGrpSpPr/>
-          <p:nvPr/>
-        </p:nvGrpSpPr>
-        <p:grpSpPr>
-          <a:xfrm>
-            <a:off x="0" y="-4966"/>
-            <a:ext cx="12192000" cy="1035565"/>
-            <a:chOff x="0" y="1924"/>
-            <a:chExt cx="9144000" cy="832664"/>
-          </a:xfrm>
-        </p:grpSpPr>
-        <p:sp>
-          <p:nvSpPr>
-            <p:cNvPr id="10" name="Google Shape;133;p5">
-              <a:extLst>
-                <a:ext uri="{FF2B5EF4-FFF2-40B4-BE49-F238E27FC236}">
-                  <a16:creationId xmlns:a16="http://schemas.microsoft.com/office/drawing/2014/main" id="{E1FF157E-1AAE-A345-AC22-C4FE991023F3}"/>
-                </a:ext>
-              </a:extLst>
-            </p:cNvPr>
-            <p:cNvSpPr/>
-            <p:nvPr/>
-          </p:nvSpPr>
-          <p:spPr>
-            <a:xfrm>
-              <a:off x="0" y="1924"/>
-              <a:ext cx="9144000" cy="832664"/>
-            </a:xfrm>
-            <a:prstGeom prst="rect">
-              <a:avLst/>
-            </a:prstGeom>
-            <a:gradFill>
-              <a:gsLst>
-                <a:gs pos="0">
-                  <a:srgbClr val="003061"/>
-                </a:gs>
-                <a:gs pos="50000">
-                  <a:srgbClr val="00468D"/>
-                </a:gs>
-                <a:gs pos="100000">
-                  <a:srgbClr val="0054AA"/>
-                </a:gs>
-              </a:gsLst>
-              <a:lin ang="5400000" scaled="0"/>
-            </a:gradFill>
-            <a:ln>
-              <a:noFill/>
-            </a:ln>
-          </p:spPr>
-          <p:txBody>
-            <a:bodyPr spcFirstLastPara="1" wrap="square" lIns="91425" tIns="45700" rIns="91425" bIns="45700" anchor="ctr" anchorCtr="0">
-              <a:noAutofit/>
-            </a:bodyPr>
-            <a:lstStyle/>
-            <a:p>
-              <a:pPr marL="0" marR="0" lvl="0" indent="0" algn="ctr" rtl="0">
-                <a:spcBef>
-                  <a:spcPts val="0"/>
-                </a:spcBef>
-                <a:spcAft>
-                  <a:spcPts val="0"/>
-                </a:spcAft>
-                <a:buNone/>
-              </a:pPr>
-              <a:endParaRPr sz="1800" dirty="0">
-                <a:solidFill>
-                  <a:schemeClr val="lt1"/>
-                </a:solidFill>
-                <a:latin typeface="PT Sans" panose="020B0503020203020204" pitchFamily="34" charset="0"/>
-                <a:ea typeface="Calibri"/>
-                <a:cs typeface="Calibri"/>
-                <a:sym typeface="Calibri"/>
-              </a:endParaRPr>
-            </a:p>
-          </p:txBody>
-        </p:sp>
-        <p:pic>
-          <p:nvPicPr>
-            <p:cNvPr id="11" name="Google Shape;134;p5" descr="C:\Users\MSShafigullin\Desktop\2020\Презентация КФУ\kfu_logo_circle_rus.png">
-              <a:extLst>
-                <a:ext uri="{FF2B5EF4-FFF2-40B4-BE49-F238E27FC236}">
-                  <a16:creationId xmlns:a16="http://schemas.microsoft.com/office/drawing/2014/main" id="{25CDED6D-DB62-6B41-9BFC-DFBDD55047A7}"/>
-                </a:ext>
-              </a:extLst>
-            </p:cNvPr>
-            <p:cNvPicPr preferRelativeResize="0"/>
-            <p:nvPr/>
-          </p:nvPicPr>
-          <p:blipFill rotWithShape="1">
-            <a:blip r:embed="rId3">
-              <a:alphaModFix/>
-            </a:blip>
-            <a:srcRect/>
-            <a:stretch/>
-          </p:blipFill>
-          <p:spPr>
-            <a:xfrm>
-              <a:off x="137267" y="148256"/>
-              <a:ext cx="553050" cy="540000"/>
-            </a:xfrm>
-            <a:prstGeom prst="rect">
-              <a:avLst/>
-            </a:prstGeom>
-            <a:noFill/>
-            <a:ln>
-              <a:noFill/>
-            </a:ln>
-          </p:spPr>
-        </p:pic>
-        <p:sp>
-          <p:nvSpPr>
-            <p:cNvPr id="12" name="Google Shape;135;p5">
-              <a:extLst>
-                <a:ext uri="{FF2B5EF4-FFF2-40B4-BE49-F238E27FC236}">
-                  <a16:creationId xmlns:a16="http://schemas.microsoft.com/office/drawing/2014/main" id="{B90A0E07-9A35-E74D-859C-8109875E2889}"/>
-                </a:ext>
-              </a:extLst>
-            </p:cNvPr>
-            <p:cNvSpPr txBox="1"/>
-            <p:nvPr/>
-          </p:nvSpPr>
-          <p:spPr>
-            <a:xfrm>
-              <a:off x="835887" y="240719"/>
-              <a:ext cx="7344900" cy="321682"/>
-            </a:xfrm>
-            <a:prstGeom prst="rect">
-              <a:avLst/>
-            </a:prstGeom>
-            <a:noFill/>
-            <a:ln>
-              <a:noFill/>
-            </a:ln>
-          </p:spPr>
-          <p:txBody>
-            <a:bodyPr spcFirstLastPara="1" wrap="square" lIns="91425" tIns="45700" rIns="91425" bIns="45700" anchor="t" anchorCtr="0">
-              <a:spAutoFit/>
-            </a:bodyPr>
-            <a:lstStyle/>
-            <a:p>
-              <a:pPr lvl="0"/>
-              <a:r>
-                <a:rPr lang="ru-RU" sz="2000" dirty="0">
-                  <a:solidFill>
-                    <a:schemeClr val="lt1"/>
-                  </a:solidFill>
-                  <a:latin typeface="PT Sans" panose="020B0503020203020204" pitchFamily="34" charset="0"/>
-                  <a:ea typeface="PT Sans"/>
-                  <a:cs typeface="PT Sans"/>
-                  <a:sym typeface="PT Sans"/>
-                </a:rPr>
-                <a:t>Базовый </a:t>
-              </a:r>
-              <a:r>
-                <a:rPr lang="en-US" sz="2000" dirty="0">
-                  <a:solidFill>
-                    <a:schemeClr val="lt1"/>
-                  </a:solidFill>
-                  <a:latin typeface="PT Sans" panose="020B0503020203020204" pitchFamily="34" charset="0"/>
-                  <a:ea typeface="PT Sans"/>
-                  <a:cs typeface="PT Sans"/>
-                  <a:sym typeface="PT Sans"/>
-                </a:rPr>
-                <a:t>Random Forest</a:t>
-              </a:r>
-              <a:endParaRPr lang="ru-RU" sz="2000" dirty="0">
-                <a:solidFill>
-                  <a:schemeClr val="lt1"/>
-                </a:solidFill>
-                <a:latin typeface="PT Sans" panose="020B0503020203020204" pitchFamily="34" charset="0"/>
-                <a:ea typeface="PT Sans"/>
-                <a:cs typeface="PT Sans"/>
-                <a:sym typeface="PT Sans"/>
-              </a:endParaRPr>
-            </a:p>
-          </p:txBody>
-        </p:sp>
-        <p:pic>
-          <p:nvPicPr>
-            <p:cNvPr id="14" name="Google Shape;136;p5" descr="C:\Users\MSShafigullin\Desktop\Проекты\Презентация по ДК\qs.jpg">
-              <a:extLst>
-                <a:ext uri="{FF2B5EF4-FFF2-40B4-BE49-F238E27FC236}">
-                  <a16:creationId xmlns:a16="http://schemas.microsoft.com/office/drawing/2014/main" id="{9F8DFA2B-AC78-464C-BC1D-62929B6D8A97}"/>
-                </a:ext>
-              </a:extLst>
-            </p:cNvPr>
-            <p:cNvPicPr preferRelativeResize="0"/>
-            <p:nvPr/>
-          </p:nvPicPr>
-          <p:blipFill rotWithShape="1">
-            <a:blip r:embed="rId4">
-              <a:alphaModFix/>
-            </a:blip>
-            <a:srcRect/>
-            <a:stretch/>
-          </p:blipFill>
-          <p:spPr>
-            <a:xfrm>
-              <a:off x="7878094" y="367563"/>
-              <a:ext cx="353386" cy="353386"/>
-            </a:xfrm>
-            <a:prstGeom prst="rect">
-              <a:avLst/>
-            </a:prstGeom>
-            <a:noFill/>
-            <a:ln>
-              <a:noFill/>
-            </a:ln>
-          </p:spPr>
-        </p:pic>
-        <p:pic>
-          <p:nvPicPr>
-            <p:cNvPr id="15" name="Google Shape;137;p5" descr="C:\Users\MSShafigullin\Desktop\2020\Презентация КФУ\THE.png">
-              <a:extLst>
-                <a:ext uri="{FF2B5EF4-FFF2-40B4-BE49-F238E27FC236}">
-                  <a16:creationId xmlns:a16="http://schemas.microsoft.com/office/drawing/2014/main" id="{835D2624-2EF8-2144-9816-A09872F47777}"/>
-                </a:ext>
-              </a:extLst>
-            </p:cNvPr>
-            <p:cNvPicPr preferRelativeResize="0"/>
-            <p:nvPr/>
-          </p:nvPicPr>
-          <p:blipFill rotWithShape="1">
-            <a:blip r:embed="rId5">
-              <a:alphaModFix/>
-            </a:blip>
-            <a:srcRect/>
-            <a:stretch/>
-          </p:blipFill>
-          <p:spPr>
-            <a:xfrm>
-              <a:off x="7928787" y="114719"/>
-              <a:ext cx="252000" cy="252000"/>
-            </a:xfrm>
-            <a:prstGeom prst="rect">
-              <a:avLst/>
-            </a:prstGeom>
-            <a:noFill/>
-            <a:ln>
-              <a:noFill/>
-            </a:ln>
-          </p:spPr>
-        </p:pic>
-        <p:sp>
-          <p:nvSpPr>
-            <p:cNvPr id="16" name="Google Shape;138;p5">
-              <a:extLst>
-                <a:ext uri="{FF2B5EF4-FFF2-40B4-BE49-F238E27FC236}">
-                  <a16:creationId xmlns:a16="http://schemas.microsoft.com/office/drawing/2014/main" id="{841F1A31-5CCC-E941-956A-F47E7E67D768}"/>
-                </a:ext>
-              </a:extLst>
-            </p:cNvPr>
-            <p:cNvSpPr txBox="1"/>
-            <p:nvPr/>
-          </p:nvSpPr>
-          <p:spPr>
-            <a:xfrm>
-              <a:off x="8279432" y="374979"/>
-              <a:ext cx="659482" cy="272188"/>
-            </a:xfrm>
-            <a:prstGeom prst="rect">
-              <a:avLst/>
-            </a:prstGeom>
-            <a:noFill/>
-            <a:ln>
-              <a:noFill/>
-            </a:ln>
-          </p:spPr>
-          <p:txBody>
-            <a:bodyPr spcFirstLastPara="1" wrap="square" lIns="91425" tIns="45700" rIns="91425" bIns="45700" anchor="t" anchorCtr="0">
-              <a:spAutoFit/>
-            </a:bodyPr>
-            <a:lstStyle/>
-            <a:p>
-              <a:pPr marL="0" marR="0" lvl="0" indent="0" algn="l" rtl="0">
-                <a:lnSpc>
-                  <a:spcPct val="100000"/>
-                </a:lnSpc>
-                <a:spcBef>
-                  <a:spcPts val="0"/>
-                </a:spcBef>
-                <a:spcAft>
-                  <a:spcPts val="0"/>
-                </a:spcAft>
-                <a:buClr>
-                  <a:schemeClr val="lt1"/>
-                </a:buClr>
-                <a:buSzPts val="800"/>
-                <a:buFont typeface="PT Sans"/>
-                <a:buNone/>
-              </a:pPr>
-              <a:r>
-                <a:rPr lang="ru-RU" sz="800" b="0">
-                  <a:solidFill>
-                    <a:schemeClr val="lt1"/>
-                  </a:solidFill>
-                  <a:latin typeface="PT Sans" panose="020B0503020203020204" pitchFamily="34" charset="0"/>
-                  <a:ea typeface="PT Sans"/>
-                  <a:cs typeface="PT Sans"/>
-                  <a:sym typeface="PT Sans"/>
-                </a:rPr>
-                <a:t>370</a:t>
-              </a:r>
-              <a:endParaRPr>
-                <a:latin typeface="PT Sans" panose="020B0503020203020204" pitchFamily="34" charset="0"/>
-              </a:endParaRPr>
-            </a:p>
-            <a:p>
-              <a:pPr marL="0" marR="0" lvl="0" indent="0" algn="l" rtl="0">
-                <a:lnSpc>
-                  <a:spcPct val="100000"/>
-                </a:lnSpc>
-                <a:spcBef>
-                  <a:spcPts val="0"/>
-                </a:spcBef>
-                <a:spcAft>
-                  <a:spcPts val="0"/>
-                </a:spcAft>
-                <a:buClr>
-                  <a:schemeClr val="lt1"/>
-                </a:buClr>
-                <a:buSzPts val="800"/>
-                <a:buFont typeface="PT Sans"/>
-                <a:buNone/>
-              </a:pPr>
-              <a:r>
-                <a:rPr lang="ru-RU" sz="800" b="0" u="none" strike="noStrike" cap="none">
-                  <a:solidFill>
-                    <a:schemeClr val="lt1"/>
-                  </a:solidFill>
-                  <a:latin typeface="PT Sans" panose="020B0503020203020204" pitchFamily="34" charset="0"/>
-                  <a:ea typeface="PT Sans"/>
-                  <a:cs typeface="PT Sans"/>
-                  <a:sym typeface="PT Sans"/>
-                </a:rPr>
-                <a:t>13</a:t>
-              </a:r>
-              <a:endParaRPr sz="800" b="0" u="none" strike="noStrike" cap="none">
-                <a:solidFill>
-                  <a:schemeClr val="lt1"/>
-                </a:solidFill>
-                <a:latin typeface="PT Sans" panose="020B0503020203020204" pitchFamily="34" charset="0"/>
-                <a:ea typeface="PT Sans"/>
-                <a:cs typeface="PT Sans"/>
-                <a:sym typeface="PT Sans"/>
-              </a:endParaRPr>
-            </a:p>
-          </p:txBody>
-        </p:sp>
-        <p:sp>
-          <p:nvSpPr>
-            <p:cNvPr id="17" name="Google Shape;139;p5">
-              <a:extLst>
-                <a:ext uri="{FF2B5EF4-FFF2-40B4-BE49-F238E27FC236}">
-                  <a16:creationId xmlns:a16="http://schemas.microsoft.com/office/drawing/2014/main" id="{A28DBFF6-9F47-6244-B20A-895959377BC2}"/>
-                </a:ext>
-              </a:extLst>
-            </p:cNvPr>
-            <p:cNvSpPr txBox="1"/>
-            <p:nvPr/>
-          </p:nvSpPr>
-          <p:spPr>
-            <a:xfrm>
-              <a:off x="8279432" y="71442"/>
-              <a:ext cx="659482" cy="272188"/>
-            </a:xfrm>
-            <a:prstGeom prst="rect">
-              <a:avLst/>
-            </a:prstGeom>
-            <a:noFill/>
-            <a:ln>
-              <a:noFill/>
-            </a:ln>
-          </p:spPr>
-          <p:txBody>
-            <a:bodyPr spcFirstLastPara="1" wrap="square" lIns="91425" tIns="45700" rIns="91425" bIns="45700" anchor="t" anchorCtr="0">
-              <a:spAutoFit/>
-            </a:bodyPr>
-            <a:lstStyle/>
-            <a:p>
-              <a:pPr marL="0" marR="0" lvl="0" indent="0" algn="l" rtl="0">
-                <a:lnSpc>
-                  <a:spcPct val="100000"/>
-                </a:lnSpc>
-                <a:spcBef>
-                  <a:spcPts val="0"/>
-                </a:spcBef>
-                <a:spcAft>
-                  <a:spcPts val="0"/>
-                </a:spcAft>
-                <a:buClr>
-                  <a:schemeClr val="lt1"/>
-                </a:buClr>
-                <a:buSzPts val="800"/>
-                <a:buFont typeface="PT Sans"/>
-                <a:buNone/>
-              </a:pPr>
-              <a:r>
-                <a:rPr lang="ru-RU" sz="800" b="0">
-                  <a:solidFill>
-                    <a:schemeClr val="lt1"/>
-                  </a:solidFill>
-                  <a:latin typeface="PT Sans" panose="020B0503020203020204" pitchFamily="34" charset="0"/>
-                  <a:ea typeface="PT Sans"/>
-                  <a:cs typeface="PT Sans"/>
-                  <a:sym typeface="PT Sans"/>
-                </a:rPr>
-                <a:t>601-800</a:t>
-              </a:r>
-              <a:endParaRPr>
-                <a:latin typeface="PT Sans" panose="020B0503020203020204" pitchFamily="34" charset="0"/>
-              </a:endParaRPr>
-            </a:p>
-            <a:p>
-              <a:pPr marL="0" marR="0" lvl="0" indent="0" algn="l" rtl="0">
-                <a:lnSpc>
-                  <a:spcPct val="100000"/>
-                </a:lnSpc>
-                <a:spcBef>
-                  <a:spcPts val="0"/>
-                </a:spcBef>
-                <a:spcAft>
-                  <a:spcPts val="0"/>
-                </a:spcAft>
-                <a:buClr>
-                  <a:schemeClr val="lt1"/>
-                </a:buClr>
-                <a:buSzPts val="800"/>
-                <a:buFont typeface="PT Sans"/>
-                <a:buNone/>
-              </a:pPr>
-              <a:r>
-                <a:rPr lang="ru-RU" sz="800" b="0" u="none" strike="noStrike" cap="none">
-                  <a:solidFill>
-                    <a:schemeClr val="lt1"/>
-                  </a:solidFill>
-                  <a:latin typeface="PT Sans" panose="020B0503020203020204" pitchFamily="34" charset="0"/>
-                  <a:ea typeface="PT Sans"/>
-                  <a:cs typeface="PT Sans"/>
-                  <a:sym typeface="PT Sans"/>
-                </a:rPr>
-                <a:t>9</a:t>
-              </a:r>
-              <a:endParaRPr sz="800" b="0" u="none" strike="noStrike" cap="none">
-                <a:solidFill>
-                  <a:schemeClr val="lt1"/>
-                </a:solidFill>
-                <a:latin typeface="PT Sans" panose="020B0503020203020204" pitchFamily="34" charset="0"/>
-                <a:ea typeface="PT Sans"/>
-                <a:cs typeface="PT Sans"/>
-                <a:sym typeface="PT Sans"/>
-              </a:endParaRPr>
-            </a:p>
-          </p:txBody>
-        </p:sp>
-      </p:grpSp>
-      <p:sp>
-        <p:nvSpPr>
-          <p:cNvPr id="19" name="Объект 2">
-            <a:extLst>
-              <a:ext uri="{FF2B5EF4-FFF2-40B4-BE49-F238E27FC236}">
-                <a16:creationId xmlns:a16="http://schemas.microsoft.com/office/drawing/2014/main" id="{30C61546-9215-4D0C-81CB-5EE3A5637E25}"/>
-              </a:ext>
-            </a:extLst>
-          </p:cNvPr>
-          <p:cNvSpPr>
-            <a:spLocks noGrp="1"/>
-          </p:cNvSpPr>
-          <p:nvPr>
-            <p:ph idx="1"/>
-          </p:nvPr>
-        </p:nvSpPr>
-        <p:spPr>
-          <a:xfrm>
-            <a:off x="183023" y="1223234"/>
-            <a:ext cx="11423283" cy="5677647"/>
-          </a:xfrm>
-        </p:spPr>
-        <p:txBody>
-          <a:bodyPr>
-            <a:normAutofit/>
-          </a:bodyPr>
-          <a:lstStyle/>
-          <a:p>
-            <a:pPr marL="0" indent="0" algn="l">
-              <a:buNone/>
-            </a:pPr>
-            <a:r>
-              <a:rPr lang="en-US" i="1" dirty="0">
-                <a:effectLst/>
-                <a:latin typeface="Cambria Math" panose="02040503050406030204" pitchFamily="18" charset="0"/>
-                <a:ea typeface="Cambria Math" panose="02040503050406030204" pitchFamily="18" charset="0"/>
-              </a:rPr>
-              <a:t>library(</a:t>
-            </a:r>
-            <a:r>
-              <a:rPr lang="en-US" i="1" dirty="0" err="1">
-                <a:effectLst/>
-                <a:latin typeface="Cambria Math" panose="02040503050406030204" pitchFamily="18" charset="0"/>
-                <a:ea typeface="Cambria Math" panose="02040503050406030204" pitchFamily="18" charset="0"/>
-              </a:rPr>
-              <a:t>randomForest</a:t>
-            </a:r>
-            <a:r>
-              <a:rPr lang="en-US" i="1" dirty="0">
-                <a:effectLst/>
-                <a:latin typeface="Cambria Math" panose="02040503050406030204" pitchFamily="18" charset="0"/>
-                <a:ea typeface="Cambria Math" panose="02040503050406030204" pitchFamily="18" charset="0"/>
-              </a:rPr>
-              <a:t>)</a:t>
-            </a:r>
-          </a:p>
-          <a:p>
-            <a:pPr marL="0" indent="0" algn="l">
-              <a:buNone/>
-            </a:pPr>
-            <a:endParaRPr lang="en-US" i="1" dirty="0">
-              <a:effectLst/>
-              <a:latin typeface="Cambria Math" panose="02040503050406030204" pitchFamily="18" charset="0"/>
-              <a:ea typeface="Cambria Math" panose="02040503050406030204" pitchFamily="18" charset="0"/>
-            </a:endParaRPr>
-          </a:p>
-          <a:p>
-            <a:pPr marL="0" indent="0" algn="l">
-              <a:buNone/>
-            </a:pPr>
-            <a:r>
-              <a:rPr lang="en-US" i="1" dirty="0" err="1">
-                <a:effectLst/>
-                <a:latin typeface="Cambria Math" panose="02040503050406030204" pitchFamily="18" charset="0"/>
-                <a:ea typeface="Cambria Math" panose="02040503050406030204" pitchFamily="18" charset="0"/>
-              </a:rPr>
-              <a:t>rf_full</a:t>
-            </a:r>
-            <a:r>
-              <a:rPr lang="en-US" i="1" dirty="0">
-                <a:effectLst/>
-                <a:latin typeface="Cambria Math" panose="02040503050406030204" pitchFamily="18" charset="0"/>
-                <a:ea typeface="Cambria Math" panose="02040503050406030204" pitchFamily="18" charset="0"/>
-              </a:rPr>
-              <a:t> &lt;- </a:t>
-            </a:r>
-            <a:r>
-              <a:rPr lang="en-US" i="1" dirty="0" err="1">
-                <a:effectLst/>
-                <a:latin typeface="Cambria Math" panose="02040503050406030204" pitchFamily="18" charset="0"/>
-                <a:ea typeface="Cambria Math" panose="02040503050406030204" pitchFamily="18" charset="0"/>
-              </a:rPr>
-              <a:t>randomForest</a:t>
-            </a:r>
-            <a:r>
-              <a:rPr lang="en-US" i="1" dirty="0">
-                <a:effectLst/>
-                <a:latin typeface="Cambria Math" panose="02040503050406030204" pitchFamily="18" charset="0"/>
-                <a:ea typeface="Cambria Math" panose="02040503050406030204" pitchFamily="18" charset="0"/>
-              </a:rPr>
-              <a:t>(</a:t>
-            </a:r>
-          </a:p>
-          <a:p>
-            <a:pPr marL="0" indent="0" algn="l">
-              <a:buNone/>
-            </a:pPr>
-            <a:r>
-              <a:rPr lang="en-US" i="1" dirty="0">
-                <a:effectLst/>
-                <a:latin typeface="Cambria Math" panose="02040503050406030204" pitchFamily="18" charset="0"/>
-                <a:ea typeface="Cambria Math" panose="02040503050406030204" pitchFamily="18" charset="0"/>
-              </a:rPr>
-              <a:t>  factor(diabetes) ~ .,</a:t>
-            </a:r>
-          </a:p>
-          <a:p>
-            <a:pPr marL="0" indent="0" algn="l">
-              <a:buNone/>
-            </a:pPr>
-            <a:r>
-              <a:rPr lang="en-US" i="1" dirty="0">
-                <a:effectLst/>
-                <a:latin typeface="Cambria Math" panose="02040503050406030204" pitchFamily="18" charset="0"/>
-                <a:ea typeface="Cambria Math" panose="02040503050406030204" pitchFamily="18" charset="0"/>
-              </a:rPr>
-              <a:t>  data  = train,</a:t>
-            </a:r>
-          </a:p>
-          <a:p>
-            <a:pPr marL="0" indent="0" algn="l">
-              <a:buNone/>
-            </a:pPr>
-            <a:r>
-              <a:rPr lang="en-US" i="1" dirty="0">
-                <a:effectLst/>
-                <a:latin typeface="Cambria Math" panose="02040503050406030204" pitchFamily="18" charset="0"/>
-                <a:ea typeface="Cambria Math" panose="02040503050406030204" pitchFamily="18" charset="0"/>
-              </a:rPr>
-              <a:t>  </a:t>
-            </a:r>
-            <a:r>
-              <a:rPr lang="en-US" i="1" dirty="0" err="1">
-                <a:effectLst/>
-                <a:latin typeface="Cambria Math" panose="02040503050406030204" pitchFamily="18" charset="0"/>
-                <a:ea typeface="Cambria Math" panose="02040503050406030204" pitchFamily="18" charset="0"/>
-              </a:rPr>
-              <a:t>ntree</a:t>
-            </a:r>
-            <a:r>
-              <a:rPr lang="en-US" i="1" dirty="0">
-                <a:effectLst/>
-                <a:latin typeface="Cambria Math" panose="02040503050406030204" pitchFamily="18" charset="0"/>
-                <a:ea typeface="Cambria Math" panose="02040503050406030204" pitchFamily="18" charset="0"/>
-              </a:rPr>
-              <a:t> = 500,</a:t>
-            </a:r>
-          </a:p>
-          <a:p>
-            <a:pPr marL="0" indent="0" algn="l">
-              <a:buNone/>
-            </a:pPr>
-            <a:r>
-              <a:rPr lang="en-US" i="1" dirty="0">
-                <a:effectLst/>
-                <a:latin typeface="Cambria Math" panose="02040503050406030204" pitchFamily="18" charset="0"/>
-                <a:ea typeface="Cambria Math" panose="02040503050406030204" pitchFamily="18" charset="0"/>
-              </a:rPr>
-              <a:t>  </a:t>
-            </a:r>
-            <a:r>
-              <a:rPr lang="en-US" i="1" dirty="0" err="1">
-                <a:effectLst/>
-                <a:latin typeface="Cambria Math" panose="02040503050406030204" pitchFamily="18" charset="0"/>
-                <a:ea typeface="Cambria Math" panose="02040503050406030204" pitchFamily="18" charset="0"/>
-              </a:rPr>
-              <a:t>mtry</a:t>
-            </a:r>
-            <a:r>
-              <a:rPr lang="en-US" i="1" dirty="0">
-                <a:effectLst/>
-                <a:latin typeface="Cambria Math" panose="02040503050406030204" pitchFamily="18" charset="0"/>
-                <a:ea typeface="Cambria Math" panose="02040503050406030204" pitchFamily="18" charset="0"/>
-              </a:rPr>
-              <a:t>  = floor(sqrt(</a:t>
-            </a:r>
-            <a:r>
-              <a:rPr lang="en-US" i="1" dirty="0" err="1">
-                <a:effectLst/>
-                <a:latin typeface="Cambria Math" panose="02040503050406030204" pitchFamily="18" charset="0"/>
-                <a:ea typeface="Cambria Math" panose="02040503050406030204" pitchFamily="18" charset="0"/>
-              </a:rPr>
-              <a:t>ncol</a:t>
-            </a:r>
-            <a:r>
-              <a:rPr lang="en-US" i="1" dirty="0">
-                <a:effectLst/>
-                <a:latin typeface="Cambria Math" panose="02040503050406030204" pitchFamily="18" charset="0"/>
-                <a:ea typeface="Cambria Math" panose="02040503050406030204" pitchFamily="18" charset="0"/>
-              </a:rPr>
-              <a:t>(train) - 1)),</a:t>
-            </a:r>
-          </a:p>
-          <a:p>
-            <a:pPr marL="0" indent="0" algn="l">
-              <a:buNone/>
-            </a:pPr>
-            <a:r>
-              <a:rPr lang="en-US" i="1" dirty="0">
-                <a:effectLst/>
-                <a:latin typeface="Cambria Math" panose="02040503050406030204" pitchFamily="18" charset="0"/>
-                <a:ea typeface="Cambria Math" panose="02040503050406030204" pitchFamily="18" charset="0"/>
-              </a:rPr>
-              <a:t>  importance = TRUE</a:t>
-            </a:r>
-          </a:p>
-          <a:p>
-            <a:pPr marL="0" indent="0" algn="l">
-              <a:buNone/>
-            </a:pPr>
-            <a:r>
-              <a:rPr lang="en-US" i="1" dirty="0">
-                <a:effectLst/>
-                <a:latin typeface="Cambria Math" panose="02040503050406030204" pitchFamily="18" charset="0"/>
-                <a:ea typeface="Cambria Math" panose="02040503050406030204" pitchFamily="18" charset="0"/>
-              </a:rPr>
-              <a:t>)</a:t>
-            </a:r>
-          </a:p>
-          <a:p>
-            <a:pPr marL="0" indent="0" algn="l">
-              <a:buNone/>
-            </a:pPr>
-            <a:endParaRPr lang="en-US" i="1" dirty="0">
-              <a:effectLst/>
-              <a:latin typeface="Cambria Math" panose="02040503050406030204" pitchFamily="18" charset="0"/>
-              <a:ea typeface="Cambria Math" panose="02040503050406030204" pitchFamily="18" charset="0"/>
-            </a:endParaRPr>
-          </a:p>
-          <a:p>
-            <a:pPr marL="0" indent="0" algn="l">
-              <a:buNone/>
-            </a:pPr>
-            <a:r>
-              <a:rPr lang="en-US" i="1" dirty="0" err="1">
-                <a:effectLst/>
-                <a:latin typeface="Cambria Math" panose="02040503050406030204" pitchFamily="18" charset="0"/>
-                <a:ea typeface="Cambria Math" panose="02040503050406030204" pitchFamily="18" charset="0"/>
-              </a:rPr>
-              <a:t>rf_full</a:t>
-            </a:r>
-            <a:endParaRPr lang="en-US" i="1" dirty="0">
-              <a:effectLst/>
-              <a:latin typeface="Cambria Math" panose="02040503050406030204" pitchFamily="18" charset="0"/>
-              <a:ea typeface="Cambria Math" panose="02040503050406030204" pitchFamily="18" charset="0"/>
-            </a:endParaRPr>
-          </a:p>
-        </p:txBody>
-      </p:sp>
-    </p:spTree>
-    <p:extLst>
-      <p:ext uri="{BB962C8B-B14F-4D97-AF65-F5344CB8AC3E}">
-        <p14:creationId xmlns:p14="http://schemas.microsoft.com/office/powerpoint/2010/main" val="3747039563"/>
-      </p:ext>
-    </p:extLst>
-  </p:cSld>
-  <p:clrMapOvr>
-    <a:masterClrMapping/>
-  </p:clrMapOvr>
-</p:sld>
-</file>
-
-<file path=ppt/slides/slide9.xml><?xml version="1.0" encoding="utf-8"?>
-<p:sld xmlns:a="http://schemas.openxmlformats.org/drawingml/2006/main" xmlns:r="http://schemas.openxmlformats.org/officeDocument/2006/relationships" xmlns:p="http://schemas.openxmlformats.org/presentationml/2006/main">
-  <p:cSld>
-    <p:spTree>
-      <p:nvGrpSpPr>
-        <p:cNvPr id="1" name=""/>
-        <p:cNvGrpSpPr/>
-        <p:nvPr/>
-      </p:nvGrpSpPr>
-      <p:grpSpPr>
-        <a:xfrm>
-          <a:off x="0" y="0"/>
-          <a:ext cx="0" cy="0"/>
-          <a:chOff x="0" y="0"/>
-          <a:chExt cx="0" cy="0"/>
-        </a:xfrm>
-      </p:grpSpPr>
-      <p:sp>
-        <p:nvSpPr>
-          <p:cNvPr id="13" name="Номер слайда 12"/>
-          <p:cNvSpPr>
-            <a:spLocks noGrp="1"/>
-          </p:cNvSpPr>
-          <p:nvPr>
-            <p:ph type="sldNum" sz="quarter" idx="12"/>
-          </p:nvPr>
-        </p:nvSpPr>
-        <p:spPr>
-          <a:xfrm>
-            <a:off x="9274478" y="6356350"/>
-            <a:ext cx="2743200" cy="365125"/>
-          </a:xfrm>
-        </p:spPr>
-        <p:txBody>
-          <a:bodyPr/>
-          <a:lstStyle/>
-          <a:p>
-            <a:fld id="{B19B0651-EE4F-4900-A07F-96A6BFA9D0F0}" type="slidenum">
-              <a:rPr lang="ru-RU" smtClean="0">
-                <a:latin typeface="PT Sans" panose="020B0503020203020204" pitchFamily="34" charset="0"/>
-              </a:rPr>
-              <a:pPr/>
-              <a:t>9</a:t>
-            </a:fld>
-            <a:endParaRPr lang="ru-RU" dirty="0">
-              <a:latin typeface="PT Sans" panose="020B0503020203020204" pitchFamily="34" charset="0"/>
-            </a:endParaRPr>
-          </a:p>
-        </p:txBody>
-      </p:sp>
-      <p:grpSp>
-        <p:nvGrpSpPr>
-          <p:cNvPr id="9" name="Группа 8">
-            <a:extLst>
-              <a:ext uri="{FF2B5EF4-FFF2-40B4-BE49-F238E27FC236}">
-                <a16:creationId xmlns:a16="http://schemas.microsoft.com/office/drawing/2014/main" id="{D7342440-FCEE-2E4F-950F-6FE7857B3EB5}"/>
-              </a:ext>
-            </a:extLst>
-          </p:cNvPr>
-          <p:cNvGrpSpPr/>
-          <p:nvPr/>
-        </p:nvGrpSpPr>
-        <p:grpSpPr>
-          <a:xfrm>
-            <a:off x="0" y="-4966"/>
-            <a:ext cx="12192000" cy="1035565"/>
-            <a:chOff x="0" y="1924"/>
-            <a:chExt cx="9144000" cy="832664"/>
-          </a:xfrm>
-        </p:grpSpPr>
-        <p:sp>
-          <p:nvSpPr>
-            <p:cNvPr id="10" name="Google Shape;133;p5">
-              <a:extLst>
-                <a:ext uri="{FF2B5EF4-FFF2-40B4-BE49-F238E27FC236}">
-                  <a16:creationId xmlns:a16="http://schemas.microsoft.com/office/drawing/2014/main" id="{E1FF157E-1AAE-A345-AC22-C4FE991023F3}"/>
-                </a:ext>
-              </a:extLst>
-            </p:cNvPr>
-            <p:cNvSpPr/>
-            <p:nvPr/>
-          </p:nvSpPr>
-          <p:spPr>
-            <a:xfrm>
-              <a:off x="0" y="1924"/>
-              <a:ext cx="9144000" cy="832664"/>
-            </a:xfrm>
-            <a:prstGeom prst="rect">
-              <a:avLst/>
-            </a:prstGeom>
-            <a:gradFill>
-              <a:gsLst>
-                <a:gs pos="0">
-                  <a:srgbClr val="003061"/>
-                </a:gs>
-                <a:gs pos="50000">
-                  <a:srgbClr val="00468D"/>
-                </a:gs>
-                <a:gs pos="100000">
-                  <a:srgbClr val="0054AA"/>
-                </a:gs>
-              </a:gsLst>
-              <a:lin ang="5400000" scaled="0"/>
-            </a:gradFill>
-            <a:ln>
-              <a:noFill/>
-            </a:ln>
-          </p:spPr>
-          <p:txBody>
-            <a:bodyPr spcFirstLastPara="1" wrap="square" lIns="91425" tIns="45700" rIns="91425" bIns="45700" anchor="ctr" anchorCtr="0">
-              <a:noAutofit/>
-            </a:bodyPr>
-            <a:lstStyle/>
-            <a:p>
-              <a:pPr marL="0" marR="0" lvl="0" indent="0" algn="ctr" rtl="0">
-                <a:spcBef>
-                  <a:spcPts val="0"/>
-                </a:spcBef>
-                <a:spcAft>
-                  <a:spcPts val="0"/>
-                </a:spcAft>
-                <a:buNone/>
-              </a:pPr>
-              <a:endParaRPr sz="1800" dirty="0">
-                <a:solidFill>
-                  <a:schemeClr val="lt1"/>
-                </a:solidFill>
-                <a:latin typeface="PT Sans" panose="020B0503020203020204" pitchFamily="34" charset="0"/>
-                <a:ea typeface="Calibri"/>
-                <a:cs typeface="Calibri"/>
-                <a:sym typeface="Calibri"/>
-              </a:endParaRPr>
-            </a:p>
-          </p:txBody>
-        </p:sp>
-        <p:pic>
-          <p:nvPicPr>
-            <p:cNvPr id="11" name="Google Shape;134;p5" descr="C:\Users\MSShafigullin\Desktop\2020\Презентация КФУ\kfu_logo_circle_rus.png">
-              <a:extLst>
-                <a:ext uri="{FF2B5EF4-FFF2-40B4-BE49-F238E27FC236}">
-                  <a16:creationId xmlns:a16="http://schemas.microsoft.com/office/drawing/2014/main" id="{25CDED6D-DB62-6B41-9BFC-DFBDD55047A7}"/>
-                </a:ext>
-              </a:extLst>
-            </p:cNvPr>
-            <p:cNvPicPr preferRelativeResize="0"/>
-            <p:nvPr/>
-          </p:nvPicPr>
-          <p:blipFill rotWithShape="1">
-            <a:blip r:embed="rId3">
-              <a:alphaModFix/>
-            </a:blip>
-            <a:srcRect/>
-            <a:stretch/>
-          </p:blipFill>
-          <p:spPr>
-            <a:xfrm>
-              <a:off x="137267" y="148256"/>
-              <a:ext cx="553050" cy="540000"/>
-            </a:xfrm>
-            <a:prstGeom prst="rect">
-              <a:avLst/>
-            </a:prstGeom>
-            <a:noFill/>
-            <a:ln>
-              <a:noFill/>
-            </a:ln>
-          </p:spPr>
-        </p:pic>
-        <p:sp>
-          <p:nvSpPr>
-            <p:cNvPr id="12" name="Google Shape;135;p5">
-              <a:extLst>
-                <a:ext uri="{FF2B5EF4-FFF2-40B4-BE49-F238E27FC236}">
-                  <a16:creationId xmlns:a16="http://schemas.microsoft.com/office/drawing/2014/main" id="{B90A0E07-9A35-E74D-859C-8109875E2889}"/>
-                </a:ext>
-              </a:extLst>
-            </p:cNvPr>
-            <p:cNvSpPr txBox="1"/>
-            <p:nvPr/>
-          </p:nvSpPr>
-          <p:spPr>
-            <a:xfrm>
-              <a:off x="835887" y="240719"/>
-              <a:ext cx="7344900" cy="321682"/>
-            </a:xfrm>
-            <a:prstGeom prst="rect">
-              <a:avLst/>
-            </a:prstGeom>
-            <a:noFill/>
-            <a:ln>
-              <a:noFill/>
-            </a:ln>
-          </p:spPr>
-          <p:txBody>
-            <a:bodyPr spcFirstLastPara="1" wrap="square" lIns="91425" tIns="45700" rIns="91425" bIns="45700" anchor="t" anchorCtr="0">
-              <a:spAutoFit/>
-            </a:bodyPr>
-            <a:lstStyle/>
-            <a:p>
-              <a:pPr lvl="0"/>
-              <a:r>
-                <a:rPr lang="ru-RU" sz="2000" dirty="0">
-                  <a:solidFill>
-                    <a:schemeClr val="lt1"/>
-                  </a:solidFill>
-                  <a:latin typeface="PT Sans" panose="020B0503020203020204" pitchFamily="34" charset="0"/>
-                  <a:ea typeface="PT Sans"/>
-                  <a:cs typeface="PT Sans"/>
-                  <a:sym typeface="PT Sans"/>
-                </a:rPr>
-                <a:t>Качество модели на тесте</a:t>
-              </a:r>
-            </a:p>
-          </p:txBody>
-        </p:sp>
-        <p:pic>
-          <p:nvPicPr>
-            <p:cNvPr id="14" name="Google Shape;136;p5" descr="C:\Users\MSShafigullin\Desktop\Проекты\Презентация по ДК\qs.jpg">
-              <a:extLst>
-                <a:ext uri="{FF2B5EF4-FFF2-40B4-BE49-F238E27FC236}">
-                  <a16:creationId xmlns:a16="http://schemas.microsoft.com/office/drawing/2014/main" id="{9F8DFA2B-AC78-464C-BC1D-62929B6D8A97}"/>
-                </a:ext>
-              </a:extLst>
-            </p:cNvPr>
-            <p:cNvPicPr preferRelativeResize="0"/>
-            <p:nvPr/>
-          </p:nvPicPr>
-          <p:blipFill rotWithShape="1">
-            <a:blip r:embed="rId4">
-              <a:alphaModFix/>
-            </a:blip>
-            <a:srcRect/>
-            <a:stretch/>
-          </p:blipFill>
-          <p:spPr>
-            <a:xfrm>
-              <a:off x="7878094" y="367563"/>
-              <a:ext cx="353386" cy="353386"/>
-            </a:xfrm>
-            <a:prstGeom prst="rect">
-              <a:avLst/>
-            </a:prstGeom>
-            <a:noFill/>
-            <a:ln>
-              <a:noFill/>
-            </a:ln>
-          </p:spPr>
-        </p:pic>
-        <p:pic>
-          <p:nvPicPr>
-            <p:cNvPr id="15" name="Google Shape;137;p5" descr="C:\Users\MSShafigullin\Desktop\2020\Презентация КФУ\THE.png">
-              <a:extLst>
-                <a:ext uri="{FF2B5EF4-FFF2-40B4-BE49-F238E27FC236}">
-                  <a16:creationId xmlns:a16="http://schemas.microsoft.com/office/drawing/2014/main" id="{835D2624-2EF8-2144-9816-A09872F47777}"/>
-                </a:ext>
-              </a:extLst>
-            </p:cNvPr>
-            <p:cNvPicPr preferRelativeResize="0"/>
-            <p:nvPr/>
-          </p:nvPicPr>
-          <p:blipFill rotWithShape="1">
-            <a:blip r:embed="rId5">
-              <a:alphaModFix/>
-            </a:blip>
-            <a:srcRect/>
-            <a:stretch/>
-          </p:blipFill>
-          <p:spPr>
-            <a:xfrm>
-              <a:off x="7928787" y="114719"/>
-              <a:ext cx="252000" cy="252000"/>
-            </a:xfrm>
-            <a:prstGeom prst="rect">
-              <a:avLst/>
-            </a:prstGeom>
-            <a:noFill/>
-            <a:ln>
-              <a:noFill/>
-            </a:ln>
-          </p:spPr>
-        </p:pic>
-        <p:sp>
-          <p:nvSpPr>
-            <p:cNvPr id="16" name="Google Shape;138;p5">
-              <a:extLst>
-                <a:ext uri="{FF2B5EF4-FFF2-40B4-BE49-F238E27FC236}">
-                  <a16:creationId xmlns:a16="http://schemas.microsoft.com/office/drawing/2014/main" id="{841F1A31-5CCC-E941-956A-F47E7E67D768}"/>
-                </a:ext>
-              </a:extLst>
-            </p:cNvPr>
-            <p:cNvSpPr txBox="1"/>
-            <p:nvPr/>
-          </p:nvSpPr>
-          <p:spPr>
-            <a:xfrm>
-              <a:off x="8279432" y="374979"/>
-              <a:ext cx="659482" cy="272188"/>
-            </a:xfrm>
-            <a:prstGeom prst="rect">
-              <a:avLst/>
-            </a:prstGeom>
-            <a:noFill/>
-            <a:ln>
-              <a:noFill/>
-            </a:ln>
-          </p:spPr>
-          <p:txBody>
-            <a:bodyPr spcFirstLastPara="1" wrap="square" lIns="91425" tIns="45700" rIns="91425" bIns="45700" anchor="t" anchorCtr="0">
-              <a:spAutoFit/>
-            </a:bodyPr>
-            <a:lstStyle/>
-            <a:p>
-              <a:pPr marL="0" marR="0" lvl="0" indent="0" algn="l" rtl="0">
-                <a:lnSpc>
-                  <a:spcPct val="100000"/>
-                </a:lnSpc>
-                <a:spcBef>
-                  <a:spcPts val="0"/>
-                </a:spcBef>
-                <a:spcAft>
-                  <a:spcPts val="0"/>
-                </a:spcAft>
-                <a:buClr>
-                  <a:schemeClr val="lt1"/>
-                </a:buClr>
-                <a:buSzPts val="800"/>
-                <a:buFont typeface="PT Sans"/>
-                <a:buNone/>
-              </a:pPr>
-              <a:r>
-                <a:rPr lang="ru-RU" sz="800" b="0">
-                  <a:solidFill>
-                    <a:schemeClr val="lt1"/>
-                  </a:solidFill>
-                  <a:latin typeface="PT Sans" panose="020B0503020203020204" pitchFamily="34" charset="0"/>
-                  <a:ea typeface="PT Sans"/>
-                  <a:cs typeface="PT Sans"/>
-                  <a:sym typeface="PT Sans"/>
-                </a:rPr>
-                <a:t>370</a:t>
-              </a:r>
-              <a:endParaRPr>
-                <a:latin typeface="PT Sans" panose="020B0503020203020204" pitchFamily="34" charset="0"/>
-              </a:endParaRPr>
-            </a:p>
-            <a:p>
-              <a:pPr marL="0" marR="0" lvl="0" indent="0" algn="l" rtl="0">
-                <a:lnSpc>
-                  <a:spcPct val="100000"/>
-                </a:lnSpc>
-                <a:spcBef>
-                  <a:spcPts val="0"/>
-                </a:spcBef>
-                <a:spcAft>
-                  <a:spcPts val="0"/>
-                </a:spcAft>
-                <a:buClr>
-                  <a:schemeClr val="lt1"/>
-                </a:buClr>
-                <a:buSzPts val="800"/>
-                <a:buFont typeface="PT Sans"/>
-                <a:buNone/>
-              </a:pPr>
-              <a:r>
-                <a:rPr lang="ru-RU" sz="800" b="0" u="none" strike="noStrike" cap="none">
-                  <a:solidFill>
-                    <a:schemeClr val="lt1"/>
-                  </a:solidFill>
-                  <a:latin typeface="PT Sans" panose="020B0503020203020204" pitchFamily="34" charset="0"/>
-                  <a:ea typeface="PT Sans"/>
-                  <a:cs typeface="PT Sans"/>
-                  <a:sym typeface="PT Sans"/>
-                </a:rPr>
-                <a:t>13</a:t>
-              </a:r>
-              <a:endParaRPr sz="800" b="0" u="none" strike="noStrike" cap="none">
-                <a:solidFill>
-                  <a:schemeClr val="lt1"/>
-                </a:solidFill>
-                <a:latin typeface="PT Sans" panose="020B0503020203020204" pitchFamily="34" charset="0"/>
-                <a:ea typeface="PT Sans"/>
-                <a:cs typeface="PT Sans"/>
-                <a:sym typeface="PT Sans"/>
-              </a:endParaRPr>
-            </a:p>
-          </p:txBody>
-        </p:sp>
-        <p:sp>
-          <p:nvSpPr>
-            <p:cNvPr id="17" name="Google Shape;139;p5">
-              <a:extLst>
-                <a:ext uri="{FF2B5EF4-FFF2-40B4-BE49-F238E27FC236}">
-                  <a16:creationId xmlns:a16="http://schemas.microsoft.com/office/drawing/2014/main" id="{A28DBFF6-9F47-6244-B20A-895959377BC2}"/>
-                </a:ext>
-              </a:extLst>
-            </p:cNvPr>
-            <p:cNvSpPr txBox="1"/>
-            <p:nvPr/>
-          </p:nvSpPr>
-          <p:spPr>
-            <a:xfrm>
-              <a:off x="8279432" y="71442"/>
-              <a:ext cx="659482" cy="272188"/>
-            </a:xfrm>
-            <a:prstGeom prst="rect">
-              <a:avLst/>
-            </a:prstGeom>
-            <a:noFill/>
-            <a:ln>
-              <a:noFill/>
-            </a:ln>
-          </p:spPr>
-          <p:txBody>
-            <a:bodyPr spcFirstLastPara="1" wrap="square" lIns="91425" tIns="45700" rIns="91425" bIns="45700" anchor="t" anchorCtr="0">
-              <a:spAutoFit/>
-            </a:bodyPr>
-            <a:lstStyle/>
-            <a:p>
-              <a:pPr marL="0" marR="0" lvl="0" indent="0" algn="l" rtl="0">
-                <a:lnSpc>
-                  <a:spcPct val="100000"/>
-                </a:lnSpc>
-                <a:spcBef>
-                  <a:spcPts val="0"/>
-                </a:spcBef>
-                <a:spcAft>
-                  <a:spcPts val="0"/>
-                </a:spcAft>
-                <a:buClr>
-                  <a:schemeClr val="lt1"/>
-                </a:buClr>
-                <a:buSzPts val="800"/>
-                <a:buFont typeface="PT Sans"/>
-                <a:buNone/>
-              </a:pPr>
-              <a:r>
-                <a:rPr lang="ru-RU" sz="800" b="0">
-                  <a:solidFill>
-                    <a:schemeClr val="lt1"/>
-                  </a:solidFill>
-                  <a:latin typeface="PT Sans" panose="020B0503020203020204" pitchFamily="34" charset="0"/>
-                  <a:ea typeface="PT Sans"/>
-                  <a:cs typeface="PT Sans"/>
-                  <a:sym typeface="PT Sans"/>
-                </a:rPr>
-                <a:t>601-800</a:t>
-              </a:r>
-              <a:endParaRPr>
-                <a:latin typeface="PT Sans" panose="020B0503020203020204" pitchFamily="34" charset="0"/>
-              </a:endParaRPr>
-            </a:p>
-            <a:p>
-              <a:pPr marL="0" marR="0" lvl="0" indent="0" algn="l" rtl="0">
-                <a:lnSpc>
-                  <a:spcPct val="100000"/>
-                </a:lnSpc>
-                <a:spcBef>
-                  <a:spcPts val="0"/>
-                </a:spcBef>
-                <a:spcAft>
-                  <a:spcPts val="0"/>
-                </a:spcAft>
-                <a:buClr>
-                  <a:schemeClr val="lt1"/>
-                </a:buClr>
-                <a:buSzPts val="800"/>
-                <a:buFont typeface="PT Sans"/>
-                <a:buNone/>
-              </a:pPr>
-              <a:r>
-                <a:rPr lang="ru-RU" sz="800" b="0" u="none" strike="noStrike" cap="none">
-                  <a:solidFill>
-                    <a:schemeClr val="lt1"/>
-                  </a:solidFill>
-                  <a:latin typeface="PT Sans" panose="020B0503020203020204" pitchFamily="34" charset="0"/>
-                  <a:ea typeface="PT Sans"/>
-                  <a:cs typeface="PT Sans"/>
-                  <a:sym typeface="PT Sans"/>
-                </a:rPr>
-                <a:t>9</a:t>
-              </a:r>
-              <a:endParaRPr sz="800" b="0" u="none" strike="noStrike" cap="none">
-                <a:solidFill>
-                  <a:schemeClr val="lt1"/>
-                </a:solidFill>
-                <a:latin typeface="PT Sans" panose="020B0503020203020204" pitchFamily="34" charset="0"/>
-                <a:ea typeface="PT Sans"/>
-                <a:cs typeface="PT Sans"/>
-                <a:sym typeface="PT Sans"/>
-              </a:endParaRPr>
-            </a:p>
-          </p:txBody>
-        </p:sp>
-      </p:grpSp>
-      <p:sp>
-        <p:nvSpPr>
-          <p:cNvPr id="19" name="Объект 2">
-            <a:extLst>
-              <a:ext uri="{FF2B5EF4-FFF2-40B4-BE49-F238E27FC236}">
-                <a16:creationId xmlns:a16="http://schemas.microsoft.com/office/drawing/2014/main" id="{30C61546-9215-4D0C-81CB-5EE3A5637E25}"/>
-              </a:ext>
-            </a:extLst>
-          </p:cNvPr>
-          <p:cNvSpPr>
-            <a:spLocks noGrp="1"/>
-          </p:cNvSpPr>
-          <p:nvPr>
-            <p:ph idx="1"/>
-          </p:nvPr>
-        </p:nvSpPr>
-        <p:spPr>
-          <a:xfrm>
-            <a:off x="183023" y="1223234"/>
-            <a:ext cx="11423283" cy="5677647"/>
-          </a:xfrm>
-        </p:spPr>
-        <p:txBody>
-          <a:bodyPr numCol="1">
-            <a:normAutofit/>
-          </a:bodyPr>
-          <a:lstStyle/>
-          <a:p>
-            <a:pPr marL="0" indent="0" algn="just">
-              <a:buNone/>
-            </a:pPr>
-            <a:r>
-              <a:rPr lang="en-US" sz="2000" i="1" dirty="0">
-                <a:latin typeface="Cambria Math" panose="02040503050406030204" pitchFamily="18" charset="0"/>
-                <a:ea typeface="Cambria Math" panose="02040503050406030204" pitchFamily="18" charset="0"/>
-              </a:rPr>
-              <a:t>library(</a:t>
-            </a:r>
-            <a:r>
-              <a:rPr lang="en-US" sz="2000" i="1" dirty="0" err="1">
-                <a:latin typeface="Cambria Math" panose="02040503050406030204" pitchFamily="18" charset="0"/>
-                <a:ea typeface="Cambria Math" panose="02040503050406030204" pitchFamily="18" charset="0"/>
-              </a:rPr>
-              <a:t>pROC</a:t>
-            </a:r>
-            <a:r>
-              <a:rPr lang="en-US" sz="2000" i="1" dirty="0">
-                <a:latin typeface="Cambria Math" panose="02040503050406030204" pitchFamily="18" charset="0"/>
-                <a:ea typeface="Cambria Math" panose="02040503050406030204" pitchFamily="18" charset="0"/>
-              </a:rPr>
-              <a:t>)</a:t>
-            </a:r>
-          </a:p>
-          <a:p>
-            <a:pPr marL="0" indent="0" algn="just">
-              <a:buNone/>
-            </a:pPr>
-            <a:endParaRPr lang="en-US" sz="2000" i="1" dirty="0">
-              <a:latin typeface="Cambria Math" panose="02040503050406030204" pitchFamily="18" charset="0"/>
-              <a:ea typeface="Cambria Math" panose="02040503050406030204" pitchFamily="18" charset="0"/>
-            </a:endParaRPr>
-          </a:p>
-          <a:p>
-            <a:pPr marL="0" indent="0" algn="just">
-              <a:buNone/>
-            </a:pPr>
-            <a:r>
-              <a:rPr lang="en-US" sz="2000" i="1" dirty="0" err="1">
-                <a:latin typeface="Cambria Math" panose="02040503050406030204" pitchFamily="18" charset="0"/>
-                <a:ea typeface="Cambria Math" panose="02040503050406030204" pitchFamily="18" charset="0"/>
-              </a:rPr>
-              <a:t>test_prob</a:t>
-            </a:r>
-            <a:r>
-              <a:rPr lang="en-US" sz="2000" i="1" dirty="0">
-                <a:latin typeface="Cambria Math" panose="02040503050406030204" pitchFamily="18" charset="0"/>
-                <a:ea typeface="Cambria Math" panose="02040503050406030204" pitchFamily="18" charset="0"/>
-              </a:rPr>
-              <a:t> &lt;- predict(</a:t>
-            </a:r>
-            <a:r>
-              <a:rPr lang="en-US" sz="2000" i="1" dirty="0" err="1">
-                <a:latin typeface="Cambria Math" panose="02040503050406030204" pitchFamily="18" charset="0"/>
-                <a:ea typeface="Cambria Math" panose="02040503050406030204" pitchFamily="18" charset="0"/>
-              </a:rPr>
-              <a:t>rf_full</a:t>
-            </a:r>
-            <a:r>
-              <a:rPr lang="en-US" sz="2000" i="1" dirty="0">
-                <a:latin typeface="Cambria Math" panose="02040503050406030204" pitchFamily="18" charset="0"/>
-                <a:ea typeface="Cambria Math" panose="02040503050406030204" pitchFamily="18" charset="0"/>
-              </a:rPr>
-              <a:t>, </a:t>
-            </a:r>
-            <a:r>
-              <a:rPr lang="en-US" sz="2000" i="1" dirty="0" err="1">
-                <a:latin typeface="Cambria Math" panose="02040503050406030204" pitchFamily="18" charset="0"/>
-                <a:ea typeface="Cambria Math" panose="02040503050406030204" pitchFamily="18" charset="0"/>
-              </a:rPr>
-              <a:t>newdata</a:t>
-            </a:r>
-            <a:r>
-              <a:rPr lang="en-US" sz="2000" i="1" dirty="0">
-                <a:latin typeface="Cambria Math" panose="02040503050406030204" pitchFamily="18" charset="0"/>
-                <a:ea typeface="Cambria Math" panose="02040503050406030204" pitchFamily="18" charset="0"/>
-              </a:rPr>
-              <a:t> = test, type = "prob")[, "1"]</a:t>
-            </a:r>
-          </a:p>
-          <a:p>
-            <a:pPr marL="0" indent="0" algn="just">
-              <a:buNone/>
-            </a:pPr>
-            <a:r>
-              <a:rPr lang="en-US" sz="2000" i="1" dirty="0" err="1">
-                <a:latin typeface="Cambria Math" panose="02040503050406030204" pitchFamily="18" charset="0"/>
-                <a:ea typeface="Cambria Math" panose="02040503050406030204" pitchFamily="18" charset="0"/>
-              </a:rPr>
-              <a:t>test_pred</a:t>
-            </a:r>
-            <a:r>
-              <a:rPr lang="en-US" sz="2000" i="1" dirty="0">
-                <a:latin typeface="Cambria Math" panose="02040503050406030204" pitchFamily="18" charset="0"/>
-                <a:ea typeface="Cambria Math" panose="02040503050406030204" pitchFamily="18" charset="0"/>
-              </a:rPr>
-              <a:t> &lt;- </a:t>
-            </a:r>
-            <a:r>
-              <a:rPr lang="en-US" sz="2000" i="1" dirty="0" err="1">
-                <a:latin typeface="Cambria Math" panose="02040503050406030204" pitchFamily="18" charset="0"/>
-                <a:ea typeface="Cambria Math" panose="02040503050406030204" pitchFamily="18" charset="0"/>
-              </a:rPr>
-              <a:t>ifelse</a:t>
-            </a:r>
-            <a:r>
-              <a:rPr lang="en-US" sz="2000" i="1" dirty="0">
-                <a:latin typeface="Cambria Math" panose="02040503050406030204" pitchFamily="18" charset="0"/>
-                <a:ea typeface="Cambria Math" panose="02040503050406030204" pitchFamily="18" charset="0"/>
-              </a:rPr>
-              <a:t>(</a:t>
-            </a:r>
-            <a:r>
-              <a:rPr lang="en-US" sz="2000" i="1" dirty="0" err="1">
-                <a:latin typeface="Cambria Math" panose="02040503050406030204" pitchFamily="18" charset="0"/>
-                <a:ea typeface="Cambria Math" panose="02040503050406030204" pitchFamily="18" charset="0"/>
-              </a:rPr>
-              <a:t>test_prob</a:t>
-            </a:r>
-            <a:r>
-              <a:rPr lang="en-US" sz="2000" i="1" dirty="0">
-                <a:latin typeface="Cambria Math" panose="02040503050406030204" pitchFamily="18" charset="0"/>
-                <a:ea typeface="Cambria Math" panose="02040503050406030204" pitchFamily="18" charset="0"/>
-              </a:rPr>
-              <a:t> &gt; 0.5, 1, 0)</a:t>
-            </a:r>
-          </a:p>
-          <a:p>
-            <a:pPr marL="0" indent="0" algn="just">
-              <a:buNone/>
-            </a:pPr>
-            <a:endParaRPr lang="en-US" sz="2000" i="1" dirty="0">
-              <a:latin typeface="Cambria Math" panose="02040503050406030204" pitchFamily="18" charset="0"/>
-              <a:ea typeface="Cambria Math" panose="02040503050406030204" pitchFamily="18" charset="0"/>
-            </a:endParaRPr>
-          </a:p>
-          <a:p>
-            <a:pPr marL="0" indent="0" algn="just">
-              <a:buNone/>
-            </a:pPr>
-            <a:r>
-              <a:rPr lang="en-US" sz="2000" i="1" dirty="0">
-                <a:latin typeface="Cambria Math" panose="02040503050406030204" pitchFamily="18" charset="0"/>
-                <a:ea typeface="Cambria Math" panose="02040503050406030204" pitchFamily="18" charset="0"/>
-              </a:rPr>
-              <a:t>cm &lt;- table(pred = </a:t>
-            </a:r>
-            <a:r>
-              <a:rPr lang="en-US" sz="2000" i="1" dirty="0" err="1">
-                <a:latin typeface="Cambria Math" panose="02040503050406030204" pitchFamily="18" charset="0"/>
-                <a:ea typeface="Cambria Math" panose="02040503050406030204" pitchFamily="18" charset="0"/>
-              </a:rPr>
-              <a:t>test_pred</a:t>
-            </a:r>
-            <a:r>
-              <a:rPr lang="en-US" sz="2000" i="1" dirty="0">
-                <a:latin typeface="Cambria Math" panose="02040503050406030204" pitchFamily="18" charset="0"/>
-                <a:ea typeface="Cambria Math" panose="02040503050406030204" pitchFamily="18" charset="0"/>
-              </a:rPr>
-              <a:t>, true = </a:t>
-            </a:r>
-            <a:r>
-              <a:rPr lang="en-US" sz="2000" i="1" dirty="0" err="1">
-                <a:latin typeface="Cambria Math" panose="02040503050406030204" pitchFamily="18" charset="0"/>
-                <a:ea typeface="Cambria Math" panose="02040503050406030204" pitchFamily="18" charset="0"/>
-              </a:rPr>
-              <a:t>test$diabetes</a:t>
-            </a:r>
-            <a:r>
-              <a:rPr lang="en-US" sz="2000" i="1" dirty="0">
-                <a:latin typeface="Cambria Math" panose="02040503050406030204" pitchFamily="18" charset="0"/>
-                <a:ea typeface="Cambria Math" panose="02040503050406030204" pitchFamily="18" charset="0"/>
-              </a:rPr>
-              <a:t>)</a:t>
-            </a:r>
-          </a:p>
-          <a:p>
-            <a:pPr marL="0" indent="0" algn="just">
-              <a:buNone/>
-            </a:pPr>
-            <a:endParaRPr lang="en-US" sz="2000" i="1" dirty="0">
-              <a:latin typeface="Cambria Math" panose="02040503050406030204" pitchFamily="18" charset="0"/>
-              <a:ea typeface="Cambria Math" panose="02040503050406030204" pitchFamily="18" charset="0"/>
-            </a:endParaRPr>
-          </a:p>
-          <a:p>
-            <a:pPr marL="0" indent="0" algn="just">
-              <a:buNone/>
-            </a:pPr>
-            <a:r>
-              <a:rPr lang="en-US" sz="2000" i="1" dirty="0">
-                <a:latin typeface="Cambria Math" panose="02040503050406030204" pitchFamily="18" charset="0"/>
-                <a:ea typeface="Cambria Math" panose="02040503050406030204" pitchFamily="18" charset="0"/>
-              </a:rPr>
-              <a:t>accuracy &lt;- sum(</a:t>
-            </a:r>
-            <a:r>
-              <a:rPr lang="en-US" sz="2000" i="1" dirty="0" err="1">
-                <a:latin typeface="Cambria Math" panose="02040503050406030204" pitchFamily="18" charset="0"/>
-                <a:ea typeface="Cambria Math" panose="02040503050406030204" pitchFamily="18" charset="0"/>
-              </a:rPr>
-              <a:t>diag</a:t>
-            </a:r>
-            <a:r>
-              <a:rPr lang="en-US" sz="2000" i="1" dirty="0">
-                <a:latin typeface="Cambria Math" panose="02040503050406030204" pitchFamily="18" charset="0"/>
-                <a:ea typeface="Cambria Math" panose="02040503050406030204" pitchFamily="18" charset="0"/>
-              </a:rPr>
-              <a:t>(cm)) / sum(cm)</a:t>
-            </a:r>
-          </a:p>
-          <a:p>
-            <a:pPr marL="0" indent="0" algn="just">
-              <a:buNone/>
-            </a:pPr>
-            <a:endParaRPr lang="en-US" sz="2000" i="1" dirty="0">
-              <a:latin typeface="Cambria Math" panose="02040503050406030204" pitchFamily="18" charset="0"/>
-              <a:ea typeface="Cambria Math" panose="02040503050406030204" pitchFamily="18" charset="0"/>
-            </a:endParaRPr>
-          </a:p>
-          <a:p>
-            <a:pPr marL="0" indent="0" algn="just">
-              <a:buNone/>
-            </a:pPr>
-            <a:r>
-              <a:rPr lang="en-US" sz="2000" i="1" dirty="0" err="1">
-                <a:latin typeface="Cambria Math" panose="02040503050406030204" pitchFamily="18" charset="0"/>
-                <a:ea typeface="Cambria Math" panose="02040503050406030204" pitchFamily="18" charset="0"/>
-              </a:rPr>
-              <a:t>roc_obj</a:t>
-            </a:r>
-            <a:r>
-              <a:rPr lang="en-US" sz="2000" i="1" dirty="0">
-                <a:latin typeface="Cambria Math" panose="02040503050406030204" pitchFamily="18" charset="0"/>
-                <a:ea typeface="Cambria Math" panose="02040503050406030204" pitchFamily="18" charset="0"/>
-              </a:rPr>
-              <a:t> &lt;- roc(</a:t>
-            </a:r>
-            <a:r>
-              <a:rPr lang="en-US" sz="2000" i="1" dirty="0" err="1">
-                <a:latin typeface="Cambria Math" panose="02040503050406030204" pitchFamily="18" charset="0"/>
-                <a:ea typeface="Cambria Math" panose="02040503050406030204" pitchFamily="18" charset="0"/>
-              </a:rPr>
-              <a:t>test$diabetes</a:t>
-            </a:r>
-            <a:r>
-              <a:rPr lang="en-US" sz="2000" i="1" dirty="0">
-                <a:latin typeface="Cambria Math" panose="02040503050406030204" pitchFamily="18" charset="0"/>
-                <a:ea typeface="Cambria Math" panose="02040503050406030204" pitchFamily="18" charset="0"/>
-              </a:rPr>
-              <a:t>, </a:t>
-            </a:r>
-            <a:r>
-              <a:rPr lang="en-US" sz="2000" i="1" dirty="0" err="1">
-                <a:latin typeface="Cambria Math" panose="02040503050406030204" pitchFamily="18" charset="0"/>
-                <a:ea typeface="Cambria Math" panose="02040503050406030204" pitchFamily="18" charset="0"/>
-              </a:rPr>
-              <a:t>test_prob</a:t>
-            </a:r>
-            <a:r>
-              <a:rPr lang="en-US" sz="2000" i="1" dirty="0">
-                <a:latin typeface="Cambria Math" panose="02040503050406030204" pitchFamily="18" charset="0"/>
-                <a:ea typeface="Cambria Math" panose="02040503050406030204" pitchFamily="18" charset="0"/>
-              </a:rPr>
-              <a:t>)</a:t>
-            </a:r>
-          </a:p>
-          <a:p>
-            <a:pPr marL="0" indent="0" algn="just">
-              <a:buNone/>
-            </a:pPr>
-            <a:r>
-              <a:rPr lang="en-US" sz="2000" i="1" dirty="0" err="1">
-                <a:latin typeface="Cambria Math" panose="02040503050406030204" pitchFamily="18" charset="0"/>
-                <a:ea typeface="Cambria Math" panose="02040503050406030204" pitchFamily="18" charset="0"/>
-              </a:rPr>
-              <a:t>auc_val</a:t>
-            </a:r>
-            <a:r>
-              <a:rPr lang="en-US" sz="2000" i="1" dirty="0">
-                <a:latin typeface="Cambria Math" panose="02040503050406030204" pitchFamily="18" charset="0"/>
-                <a:ea typeface="Cambria Math" panose="02040503050406030204" pitchFamily="18" charset="0"/>
-              </a:rPr>
-              <a:t> &lt;- </a:t>
-            </a:r>
-            <a:r>
-              <a:rPr lang="en-US" sz="2000" i="1" dirty="0" err="1">
-                <a:latin typeface="Cambria Math" panose="02040503050406030204" pitchFamily="18" charset="0"/>
-                <a:ea typeface="Cambria Math" panose="02040503050406030204" pitchFamily="18" charset="0"/>
-              </a:rPr>
-              <a:t>auc</a:t>
-            </a:r>
-            <a:r>
-              <a:rPr lang="en-US" sz="2000" i="1" dirty="0">
-                <a:latin typeface="Cambria Math" panose="02040503050406030204" pitchFamily="18" charset="0"/>
-                <a:ea typeface="Cambria Math" panose="02040503050406030204" pitchFamily="18" charset="0"/>
-              </a:rPr>
-              <a:t>(</a:t>
-            </a:r>
-            <a:r>
-              <a:rPr lang="en-US" sz="2000" i="1" dirty="0" err="1">
-                <a:latin typeface="Cambria Math" panose="02040503050406030204" pitchFamily="18" charset="0"/>
-                <a:ea typeface="Cambria Math" panose="02040503050406030204" pitchFamily="18" charset="0"/>
-              </a:rPr>
-              <a:t>roc_obj</a:t>
-            </a:r>
-            <a:r>
-              <a:rPr lang="en-US" sz="2000" i="1" dirty="0">
-                <a:latin typeface="Cambria Math" panose="02040503050406030204" pitchFamily="18" charset="0"/>
-                <a:ea typeface="Cambria Math" panose="02040503050406030204" pitchFamily="18" charset="0"/>
-              </a:rPr>
-              <a:t>)</a:t>
-            </a:r>
-          </a:p>
-        </p:txBody>
-      </p:sp>
-    </p:spTree>
-    <p:extLst>
-      <p:ext uri="{BB962C8B-B14F-4D97-AF65-F5344CB8AC3E}">
-        <p14:creationId xmlns:p14="http://schemas.microsoft.com/office/powerpoint/2010/main" val="1517142456"/>
       </p:ext>
     </p:extLst>
   </p:cSld>
